--- a/UAV协同任务分配方法-进展汇报/UAV协同任务分配方法-进展汇报.pptx
+++ b/UAV协同任务分配方法-进展汇报/UAV协同任务分配方法-进展汇报.pptx
@@ -1,28 +1,28 @@
 
 <file path=ppt/presentation.xml><?xml version="1.0" encoding="utf-8"?>
-<p:presentation xmlns:p="http://schemas.openxmlformats.org/presentationml/2006/main" xmlns:a="http://schemas.openxmlformats.org/drawingml/2006/main" xmlns:r="http://schemas.openxmlformats.org/officeDocument/2006/relationships" firstSlideNum="1">
+<p:presentation xmlns:a="http://schemas.openxmlformats.org/drawingml/2006/main" xmlns:r="http://schemas.openxmlformats.org/officeDocument/2006/relationships" xmlns:p="http://schemas.openxmlformats.org/presentationml/2006/main">
   <p:sldMasterIdLst>
-    <p:sldMasterId id="2147483648" r:id="rId0"/>
+    <p:sldMasterId id="2147483648" r:id="rId1"/>
   </p:sldMasterIdLst>
   <p:notesMasterIdLst>
-    <p:notesMasterId r:id="rId16"/>
+    <p:notesMasterId r:id="rId17"/>
   </p:notesMasterIdLst>
   <p:sldIdLst>
-    <p:sldId id="256" r:id="rId1"/>
-    <p:sldId id="257" r:id="rId2"/>
-    <p:sldId id="258" r:id="rId3"/>
-    <p:sldId id="259" r:id="rId4"/>
-    <p:sldId id="260" r:id="rId5"/>
-    <p:sldId id="261" r:id="rId6"/>
-    <p:sldId id="262" r:id="rId7"/>
-    <p:sldId id="263" r:id="rId8"/>
-    <p:sldId id="264" r:id="rId9"/>
-    <p:sldId id="265" r:id="rId10"/>
-    <p:sldId id="266" r:id="rId11"/>
-    <p:sldId id="267" r:id="rId12"/>
-    <p:sldId id="268" r:id="rId13"/>
-    <p:sldId id="269" r:id="rId14"/>
-    <p:sldId id="270" r:id="rId15"/>
+    <p:sldId id="256" r:id="rId2"/>
+    <p:sldId id="257" r:id="rId3"/>
+    <p:sldId id="258" r:id="rId4"/>
+    <p:sldId id="259" r:id="rId5"/>
+    <p:sldId id="260" r:id="rId6"/>
+    <p:sldId id="261" r:id="rId7"/>
+    <p:sldId id="262" r:id="rId8"/>
+    <p:sldId id="263" r:id="rId9"/>
+    <p:sldId id="264" r:id="rId10"/>
+    <p:sldId id="265" r:id="rId11"/>
+    <p:sldId id="266" r:id="rId12"/>
+    <p:sldId id="267" r:id="rId13"/>
+    <p:sldId id="268" r:id="rId14"/>
+    <p:sldId id="269" r:id="rId15"/>
+    <p:sldId id="270" r:id="rId16"/>
   </p:sldIdLst>
   <p:sldSz cx="12192000" cy="6858000"/>
   <p:notesSz cx="6858000" cy="12192000"/>
@@ -118,11 +118,16 @@
       </a:defRPr>
     </a:lvl9pPr>
   </p:defaultTextStyle>
+  <p:extLst>
+    <p:ext uri="{EFAFB233-063F-42B5-8137-9DF3F51BA10A}">
+      <p15:sldGuideLst xmlns:p15="http://schemas.microsoft.com/office/powerpoint/2012/main"/>
+    </p:ext>
+  </p:extLst>
 </p:presentation>
 </file>
 
 <file path=ppt/notesMasters/notesMaster1.xml><?xml version="1.0" encoding="utf-8"?>
-<p:notesMaster xmlns:p="http://schemas.openxmlformats.org/presentationml/2006/main" xmlns:a="http://schemas.openxmlformats.org/drawingml/2006/main">
+<p:notesMaster xmlns:a="http://schemas.openxmlformats.org/drawingml/2006/main" xmlns:r="http://schemas.openxmlformats.org/officeDocument/2006/relationships" xmlns:p="http://schemas.openxmlformats.org/presentationml/2006/main">
   <p:cSld>
     <p:bg>
       <p:bgRef idx="1001">
@@ -242,7 +247,7 @@
 </file>
 
 <file path=ppt/notesSlides/notesSlide1.xml><?xml version="1.0" encoding="utf-8"?>
-<p:notes xmlns:p="http://schemas.openxmlformats.org/presentationml/2006/main" xmlns:a="http://schemas.openxmlformats.org/drawingml/2006/main">
+<p:notes xmlns:a="http://schemas.openxmlformats.org/drawingml/2006/main" xmlns:r="http://schemas.openxmlformats.org/officeDocument/2006/relationships" xmlns:p="http://schemas.openxmlformats.org/presentationml/2006/main">
   <p:cSld>
     <p:spTree>
       <p:nvGrpSpPr>
@@ -285,8 +290,8 @@
         </p:spPr>
         <p:txBody>
           <a:bodyPr/>
-          <a:p>
-            <a:pPr/>
+          <a:lstStyle/>
+          <a:p>
             <a:endParaRPr/>
           </a:p>
         </p:txBody>
@@ -314,7 +319,6 @@
           <a:bodyPr/>
           <a:lstStyle/>
           <a:p>
-            <a:pPr/>
             <a:endParaRPr lang="zh-CN" altLang="en-US" dirty="0"/>
           </a:p>
         </p:txBody>
@@ -328,7 +332,7 @@
 </file>
 
 <file path=ppt/slideLayouts/slideLayout1.xml><?xml version="1.0" encoding="utf-8"?>
-<p:sldLayout xmlns:p="http://schemas.openxmlformats.org/presentationml/2006/main" xmlns:a="http://schemas.openxmlformats.org/drawingml/2006/main">
+<p:sldLayout xmlns:a="http://schemas.openxmlformats.org/drawingml/2006/main" xmlns:r="http://schemas.openxmlformats.org/officeDocument/2006/relationships" xmlns:p="http://schemas.openxmlformats.org/presentationml/2006/main">
   <p:cSld name="DEFAULT">
     <p:bg>
       <p:bgRef idx="1001">
@@ -358,7 +362,7 @@
 </file>
 
 <file path=ppt/slideMasters/slideMaster1.xml><?xml version="1.0" encoding="utf-8"?>
-<p:sldMaster xmlns:p="http://schemas.openxmlformats.org/presentationml/2006/main" xmlns:a="http://schemas.openxmlformats.org/drawingml/2006/main" xmlns:r="http://schemas.openxmlformats.org/officeDocument/2006/relationships">
+<p:sldMaster xmlns:a="http://schemas.openxmlformats.org/drawingml/2006/main" xmlns:r="http://schemas.openxmlformats.org/officeDocument/2006/relationships" xmlns:p="http://schemas.openxmlformats.org/presentationml/2006/main">
   <p:cSld>
     <p:bg>
       <p:bgRef idx="1001">
@@ -383,7 +387,7 @@
   </p:cSld>
   <p:clrMap bg1="lt1" tx1="dk1" bg2="lt2" tx2="dk2" accent1="accent1" accent2="accent2" accent3="accent3" accent4="accent4" accent5="accent5" accent6="accent6" hlink="hlink" folHlink="folHlink"/>
   <p:sldLayoutIdLst>
-    <p:sldLayoutId id="2147483649" r:id="rId0"/>
+    <p:sldLayoutId id="2147483649" r:id="rId1"/>
   </p:sldLayoutIdLst>
   <p:hf sldNum="0" hdr="0" ftr="0" dt="0"/>
   <p:txStyles>
@@ -640,7 +644,7 @@
 </file>
 
 <file path=ppt/slides/slide1.xml><?xml version="1.0" encoding="utf-8"?>
-<p:sld xmlns:p="http://schemas.openxmlformats.org/presentationml/2006/main" xmlns:a="http://schemas.openxmlformats.org/drawingml/2006/main" xmlns:asvg="http://schemas.microsoft.com/office/drawing/2016/SVG/main" xmlns:r="http://schemas.openxmlformats.org/officeDocument/2006/relationships" xmlns:mc="http://schemas.openxmlformats.org/markup-compatibility/2006" mc:Ignorable="asvg">
+<p:sld xmlns:a="http://schemas.openxmlformats.org/drawingml/2006/main" xmlns:r="http://schemas.openxmlformats.org/officeDocument/2006/relationships" xmlns:p="http://schemas.openxmlformats.org/presentationml/2006/main">
   <p:cSld>
     <p:spTree>
       <p:nvGrpSpPr>
@@ -679,7 +683,6 @@
           <a:bodyPr/>
           <a:lstStyle/>
           <a:p>
-            <a:pPr/>
             <a:endParaRPr/>
           </a:p>
         </p:txBody>
@@ -707,7 +710,6 @@
           <a:bodyPr/>
           <a:lstStyle/>
           <a:p>
-            <a:pPr/>
             <a:endParaRPr/>
           </a:p>
         </p:txBody>
@@ -735,7 +737,6 @@
           <a:bodyPr/>
           <a:lstStyle/>
           <a:p>
-            <a:pPr/>
             <a:endParaRPr/>
           </a:p>
         </p:txBody>
@@ -782,7 +783,7 @@
                 <a:latin typeface="Source Han Sans CN"/>
                 <a:ea typeface="Source Han Sans CN"/>
               </a:rPr>
-              <a:t xml:space="preserve"> · </a:t>
+              <a:t> · </a:t>
             </a:r>
             <a:r>
               <a:rPr lang="zh-CN" sz="1500" spc="600">
@@ -917,7 +918,6 @@
           <a:bodyPr/>
           <a:lstStyle/>
           <a:p>
-            <a:pPr/>
             <a:endParaRPr/>
           </a:p>
         </p:txBody>
@@ -985,7 +985,6 @@
           <a:bodyPr/>
           <a:lstStyle/>
           <a:p>
-            <a:pPr/>
             <a:endParaRPr/>
           </a:p>
         </p:txBody>
@@ -1032,7 +1031,7 @@
                 <a:latin typeface="Source Han Sans CN"/>
                 <a:ea typeface="Source Han Sans CN"/>
               </a:rPr>
-              <a:t xml:space="preserve"> · </a:t>
+              <a:t> · </a:t>
             </a:r>
             <a:r>
               <a:rPr lang="zh-CN" sz="1275">
@@ -1052,7 +1051,7 @@
                 <a:latin typeface="Source Han Sans CN"/>
                 <a:ea typeface="Source Han Sans CN"/>
               </a:rPr>
-              <a:t xml:space="preserve"> · </a:t>
+              <a:t> · </a:t>
             </a:r>
             <a:r>
               <a:rPr lang="zh-CN" sz="1275">
@@ -1077,10 +1076,10 @@
           <p:nvPr/>
         </p:nvPicPr>
         <p:blipFill>
-          <a:blip>
+          <a:blip r:embed="rId2">
             <a:extLst>
               <a:ext uri="{96DAC541-7B7A-43D3-8B79-37D633B846F1}">
-                <asvg:svgBlip r:embed="rId1"/>
+                <asvg:svgBlip xmlns:asvg="http://schemas.microsoft.com/office/drawing/2016/SVG/main" r:embed="rId3"/>
               </a:ext>
             </a:extLst>
           </a:blip>
@@ -1129,7 +1128,6 @@
           <a:bodyPr/>
           <a:lstStyle/>
           <a:p>
-            <a:pPr/>
             <a:endParaRPr/>
           </a:p>
         </p:txBody>
@@ -1176,7 +1174,7 @@
                 <a:latin typeface="Source Han Sans CN"/>
                 <a:ea typeface="Source Han Sans CN"/>
               </a:rPr>
-              <a:t xml:space="preserve"> </a:t>
+              <a:t> </a:t>
             </a:r>
             <a:r>
               <a:rPr lang="zh-CN" sz="975">
@@ -1196,7 +1194,7 @@
                 <a:latin typeface="Source Han Sans CN"/>
                 <a:ea typeface="Source Han Sans CN"/>
               </a:rPr>
-              <a:t xml:space="preserve">Poisson </a:t>
+              <a:t>Poisson </a:t>
             </a:r>
             <a:r>
               <a:rPr lang="zh-CN" sz="975">
@@ -1292,7 +1290,7 @@
                 <a:latin typeface="Source Han Sans CN"/>
                 <a:ea typeface="Source Han Sans CN"/>
               </a:rPr>
-              <a:t xml:space="preserve">UAV </a:t>
+              <a:t>UAV </a:t>
             </a:r>
             <a:r>
               <a:rPr lang="zh-CN" sz="975">
@@ -1312,7 +1310,7 @@
                 <a:latin typeface="Source Han Sans CN"/>
                 <a:ea typeface="Source Han Sans CN"/>
               </a:rPr>
-              <a:t xml:space="preserve"> · </a:t>
+              <a:t> · </a:t>
             </a:r>
             <a:r>
               <a:rPr lang="zh-CN" sz="975">
@@ -1534,7 +1532,7 @@
                 <a:latin typeface="Source Han Sans CN"/>
                 <a:ea typeface="Source Han Sans CN"/>
               </a:rPr>
-              <a:t xml:space="preserve">2026 </a:t>
+              <a:t>2026 </a:t>
             </a:r>
             <a:r>
               <a:rPr lang="zh-CN" sz="1200">
@@ -1554,7 +1552,7 @@
                 <a:latin typeface="Source Han Sans CN"/>
                 <a:ea typeface="Source Han Sans CN"/>
               </a:rPr>
-              <a:t xml:space="preserve"> 10 </a:t>
+              <a:t> 10 </a:t>
             </a:r>
             <a:r>
               <a:rPr lang="zh-CN" sz="1200">
@@ -1579,11 +1577,11 @@
 </file>
 
 <file path=ppt/slides/slide10.xml><?xml version="1.0" encoding="utf-8"?>
-<p:sld xmlns:p="http://schemas.openxmlformats.org/presentationml/2006/main" xmlns:a="http://schemas.openxmlformats.org/drawingml/2006/main">
+<p:sld xmlns:a="http://schemas.openxmlformats.org/drawingml/2006/main" xmlns:r="http://schemas.openxmlformats.org/officeDocument/2006/relationships" xmlns:p="http://schemas.openxmlformats.org/presentationml/2006/main">
   <p:cSld>
     <p:spTree>
       <p:nvGrpSpPr>
-        <p:cNvPr id="21" name=""/>
+        <p:cNvPr id="1" name=""/>
         <p:cNvGrpSpPr/>
         <p:nvPr/>
       </p:nvGrpSpPr>
@@ -1618,7 +1616,6 @@
           <a:bodyPr/>
           <a:lstStyle/>
           <a:p>
-            <a:pPr/>
             <a:endParaRPr/>
           </a:p>
         </p:txBody>
@@ -1646,7 +1643,6 @@
           <a:bodyPr/>
           <a:lstStyle/>
           <a:p>
-            <a:pPr/>
             <a:endParaRPr/>
           </a:p>
         </p:txBody>
@@ -1712,7 +1708,6 @@
           <a:bodyPr/>
           <a:lstStyle/>
           <a:p>
-            <a:pPr/>
             <a:endParaRPr/>
           </a:p>
         </p:txBody>
@@ -1818,7 +1813,6 @@
           <a:bodyPr/>
           <a:lstStyle/>
           <a:p>
-            <a:pPr/>
             <a:endParaRPr/>
           </a:p>
         </p:txBody>
@@ -1855,7 +1849,7 @@
                 <a:latin typeface="Source Han Sans CN"/>
                 <a:ea typeface="Source Han Sans CN"/>
               </a:rPr>
-              <a:t xml:space="preserve">exp01 </a:t>
+              <a:t>exp01 </a:t>
             </a:r>
             <a:r>
               <a:rPr lang="zh-CN" sz="1425">
@@ -1875,7 +1869,7 @@
                 <a:latin typeface="Source Han Sans CN"/>
                 <a:ea typeface="Source Han Sans CN"/>
               </a:rPr>
-              <a:t xml:space="preserve"> seed </a:t>
+              <a:t> seed </a:t>
             </a:r>
             <a:r>
               <a:rPr lang="zh-CN" sz="1425">
@@ -1895,7 +1889,7 @@
                 <a:latin typeface="Source Han Sans CN"/>
                 <a:ea typeface="Source Han Sans CN"/>
               </a:rPr>
-              <a:t xml:space="preserve"> </a:t>
+              <a:t> </a:t>
             </a:r>
             <a:r>
               <a:rPr lang="en-US" sz="1425" b="1">
@@ -1905,7 +1899,7 @@
                 <a:latin typeface="Source Han Sans CN"/>
                 <a:ea typeface="Source Han Sans CN"/>
               </a:rPr>
-              <a:t xml:space="preserve">3/3 seed </a:t>
+              <a:t>3/3 seed </a:t>
             </a:r>
             <a:r>
               <a:rPr lang="zh-CN" sz="1425" b="1">
@@ -1935,7 +1929,7 @@
                 <a:latin typeface="Source Han Sans CN"/>
                 <a:ea typeface="Source Han Sans CN"/>
               </a:rPr>
-              <a:t xml:space="preserve"> seed-dependent</a:t>
+              <a:t> seed-dependent</a:t>
             </a:r>
             <a:endParaRPr/>
           </a:p>
@@ -1966,7 +1960,6 @@
           <a:bodyPr/>
           <a:lstStyle/>
           <a:p>
-            <a:pPr/>
             <a:endParaRPr/>
           </a:p>
         </p:txBody>
@@ -2003,7 +1996,7 @@
                 <a:latin typeface="Source Han Sans CN"/>
                 <a:ea typeface="Source Han Sans CN"/>
               </a:rPr>
-              <a:t xml:space="preserve">exp02 </a:t>
+              <a:t>exp02 </a:t>
             </a:r>
             <a:r>
               <a:rPr lang="zh-CN" sz="1425">
@@ -2033,7 +2026,7 @@
                 <a:latin typeface="Source Han Sans CN"/>
                 <a:ea typeface="Source Han Sans CN"/>
               </a:rPr>
-              <a:t xml:space="preserve"> N </a:t>
+              <a:t> N </a:t>
             </a:r>
             <a:r>
               <a:rPr lang="zh-CN" sz="1425" b="1">
@@ -2103,7 +2096,7 @@
                 <a:latin typeface="Source Han Sans CN"/>
                 <a:ea typeface="Source Han Sans CN"/>
               </a:rPr>
-              <a:t xml:space="preserve"> 24 </a:t>
+              <a:t> 24 </a:t>
             </a:r>
             <a:r>
               <a:rPr lang="zh-CN" sz="1200">
@@ -2123,7 +2116,7 @@
                 <a:latin typeface="Source Han Sans CN"/>
                 <a:ea typeface="Source Han Sans CN"/>
               </a:rPr>
-              <a:t xml:space="preserve">Poisson λ=5 </a:t>
+              <a:t>Poisson λ=5 </a:t>
             </a:r>
             <a:r>
               <a:rPr lang="zh-CN" sz="1200">
@@ -2143,7 +2136,7 @@
                 <a:latin typeface="Source Han Sans CN"/>
                 <a:ea typeface="Source Han Sans CN"/>
               </a:rPr>
-              <a:t xml:space="preserve"> metrics </a:t>
+              <a:t> metrics </a:t>
             </a:r>
             <a:r>
               <a:rPr lang="zh-CN" sz="1200">
@@ -2184,7 +2177,6 @@
           <a:bodyPr/>
           <a:lstStyle/>
           <a:p>
-            <a:pPr/>
             <a:endParaRPr/>
           </a:p>
         </p:txBody>
@@ -2252,7 +2244,6 @@
           <a:bodyPr/>
           <a:lstStyle/>
           <a:p>
-            <a:pPr/>
             <a:endParaRPr/>
           </a:p>
         </p:txBody>
@@ -2320,7 +2311,6 @@
           <a:bodyPr/>
           <a:lstStyle/>
           <a:p>
-            <a:pPr/>
             <a:endParaRPr/>
           </a:p>
         </p:txBody>
@@ -2357,7 +2347,7 @@
                 <a:latin typeface="Source Han Sans CN"/>
                 <a:ea typeface="Source Han Sans CN"/>
               </a:rPr>
-              <a:t xml:space="preserve">P14 · </a:t>
+              <a:t>P14 · </a:t>
             </a:r>
             <a:r>
               <a:rPr lang="zh-CN" sz="1050" b="1">
@@ -2398,7 +2388,6 @@
           <a:bodyPr/>
           <a:lstStyle/>
           <a:p>
-            <a:pPr/>
             <a:endParaRPr/>
           </a:p>
         </p:txBody>
@@ -2435,7 +2424,7 @@
                 <a:latin typeface="Source Han Sans CN"/>
                 <a:ea typeface="Source Han Sans CN"/>
               </a:rPr>
-              <a:t xml:space="preserve">P15 · </a:t>
+              <a:t>P15 · </a:t>
             </a:r>
             <a:r>
               <a:rPr lang="zh-CN" sz="1050" b="1">
@@ -2481,7 +2470,6 @@
           <a:bodyPr/>
           <a:lstStyle/>
           <a:p>
-            <a:pPr/>
             <a:endParaRPr/>
           </a:p>
         </p:txBody>
@@ -2528,7 +2516,7 @@
                 <a:latin typeface="Source Han Sans CN"/>
                 <a:ea typeface="Source Han Sans CN"/>
               </a:rPr>
-              <a:t xml:space="preserve"> 93.3% ± 3.6</a:t>
+              <a:t> 93.3% ± 3.6</a:t>
             </a:r>
             <a:endParaRPr/>
           </a:p>
@@ -2564,7 +2552,6 @@
           <a:bodyPr/>
           <a:lstStyle/>
           <a:p>
-            <a:pPr/>
             <a:endParaRPr/>
           </a:p>
         </p:txBody>
@@ -2611,7 +2598,7 @@
                 <a:latin typeface="Source Han Sans CN"/>
                 <a:ea typeface="Source Han Sans CN"/>
               </a:rPr>
-              <a:t xml:space="preserve"> 60/60 · </a:t>
+              <a:t> 60/60 · </a:t>
             </a:r>
             <a:r>
               <a:rPr lang="zh-CN" sz="1125" b="1">
@@ -2631,7 +2618,7 @@
                 <a:latin typeface="Source Han Sans CN"/>
                 <a:ea typeface="Source Han Sans CN"/>
               </a:rPr>
-              <a:t xml:space="preserve"> 0</a:t>
+              <a:t> 0</a:t>
             </a:r>
             <a:endParaRPr/>
           </a:p>
@@ -2667,7 +2654,6 @@
           <a:bodyPr/>
           <a:lstStyle/>
           <a:p>
-            <a:pPr/>
             <a:endParaRPr/>
           </a:p>
         </p:txBody>
@@ -2714,7 +2700,7 @@
                 <a:latin typeface="Source Han Sans CN"/>
                 <a:ea typeface="Source Han Sans CN"/>
               </a:rPr>
-              <a:t xml:space="preserve"> N </a:t>
+              <a:t> N </a:t>
             </a:r>
             <a:r>
               <a:rPr lang="zh-CN" sz="1125" b="1">
@@ -2755,7 +2741,6 @@
           <a:bodyPr/>
           <a:lstStyle/>
           <a:p>
-            <a:pPr/>
             <a:endParaRPr/>
           </a:p>
         </p:txBody>
@@ -2823,7 +2808,6 @@
           <a:bodyPr/>
           <a:lstStyle/>
           <a:p>
-            <a:pPr/>
             <a:endParaRPr/>
           </a:p>
         </p:txBody>
@@ -2891,7 +2875,6 @@
           <a:bodyPr/>
           <a:lstStyle/>
           <a:p>
-            <a:pPr/>
             <a:endParaRPr/>
           </a:p>
         </p:txBody>
@@ -2959,7 +2942,6 @@
           <a:bodyPr/>
           <a:lstStyle/>
           <a:p>
-            <a:pPr/>
             <a:endParaRPr/>
           </a:p>
         </p:txBody>
@@ -3044,7 +3026,7 @@
                 <a:latin typeface="Source Han Sans CN"/>
                 <a:ea typeface="Source Han Sans CN"/>
               </a:rPr>
-              <a:t xml:space="preserve"> · </a:t>
+              <a:t> · </a:t>
             </a:r>
             <a:r>
               <a:rPr lang="zh-CN" sz="1050">
@@ -3064,7 +3046,7 @@
                 <a:latin typeface="Source Han Sans CN"/>
                 <a:ea typeface="Source Han Sans CN"/>
               </a:rPr>
-              <a:t xml:space="preserve"> · </a:t>
+              <a:t> · </a:t>
             </a:r>
             <a:r>
               <a:rPr lang="zh-CN" sz="1050">
@@ -3103,7 +3085,6 @@
           <a:bodyPr/>
           <a:lstStyle/>
           <a:p>
-            <a:pPr/>
             <a:endParaRPr/>
           </a:p>
         </p:txBody>
@@ -3152,7 +3133,6 @@
           <a:bodyPr/>
           <a:lstStyle/>
           <a:p>
-            <a:pPr/>
             <a:endParaRPr/>
           </a:p>
         </p:txBody>
@@ -3199,7 +3179,7 @@
                 <a:latin typeface="Source Han Sans CN"/>
                 <a:ea typeface="Source Han Sans CN"/>
               </a:rPr>
-              <a:t xml:space="preserve"> · </a:t>
+              <a:t> · </a:t>
             </a:r>
             <a:r>
               <a:rPr lang="zh-CN" sz="975">
@@ -3262,11 +3242,11 @@
 </file>
 
 <file path=ppt/slides/slide11.xml><?xml version="1.0" encoding="utf-8"?>
-<p:sld xmlns:p="http://schemas.openxmlformats.org/presentationml/2006/main" xmlns:a="http://schemas.openxmlformats.org/drawingml/2006/main" xmlns:a16="http://schemas.microsoft.com/office/drawing/2014/main" xmlns:mc="http://schemas.openxmlformats.org/markup-compatibility/2006" mc:Ignorable="a16">
+<p:sld xmlns:a="http://schemas.openxmlformats.org/drawingml/2006/main" xmlns:r="http://schemas.openxmlformats.org/officeDocument/2006/relationships" xmlns:p="http://schemas.openxmlformats.org/presentationml/2006/main">
   <p:cSld>
     <p:spTree>
       <p:nvGrpSpPr>
-        <p:cNvPr id="60" name=""/>
+        <p:cNvPr id="1" name=""/>
         <p:cNvGrpSpPr/>
         <p:nvPr/>
       </p:nvGrpSpPr>
@@ -3301,7 +3281,6 @@
           <a:bodyPr/>
           <a:lstStyle/>
           <a:p>
-            <a:pPr/>
             <a:endParaRPr/>
           </a:p>
         </p:txBody>
@@ -3329,7 +3308,6 @@
           <a:bodyPr/>
           <a:lstStyle/>
           <a:p>
-            <a:pPr/>
             <a:endParaRPr/>
           </a:p>
         </p:txBody>
@@ -3357,7 +3335,6 @@
           <a:bodyPr/>
           <a:lstStyle/>
           <a:p>
-            <a:pPr/>
             <a:endParaRPr/>
           </a:p>
         </p:txBody>
@@ -3414,7 +3391,7 @@
                 <a:latin typeface="Source Han Sans CN"/>
                 <a:ea typeface="Source Han Sans CN"/>
               </a:rPr>
-              <a:t xml:space="preserve"> seed </a:t>
+              <a:t> seed </a:t>
             </a:r>
             <a:r>
               <a:rPr lang="zh-CN" sz="2400" b="1">
@@ -3472,7 +3449,7 @@
                 <a:latin typeface="Source Han Sans CN"/>
                 <a:ea typeface="Source Han Sans CN"/>
               </a:rPr>
-              <a:t xml:space="preserve"> 24 </a:t>
+              <a:t> 24 </a:t>
             </a:r>
             <a:r>
               <a:rPr lang="zh-CN" sz="1125">
@@ -3492,7 +3469,7 @@
                 <a:latin typeface="Source Han Sans CN"/>
                 <a:ea typeface="Source Han Sans CN"/>
               </a:rPr>
-              <a:t xml:space="preserve"> · Poisson λ=5 · 3 seed </a:t>
+              <a:t> · Poisson λ=5 · 3 seed </a:t>
             </a:r>
             <a:r>
               <a:rPr lang="zh-CN" sz="1125">
@@ -3533,7 +3510,6 @@
           <a:bodyPr/>
           <a:lstStyle/>
           <a:p>
-            <a:pPr/>
             <a:endParaRPr/>
           </a:p>
         </p:txBody>
@@ -3580,7 +3556,7 @@
                 <a:latin typeface="Source Han Sans CN"/>
                 <a:ea typeface="Source Han Sans CN"/>
               </a:rPr>
-              <a:t xml:space="preserve">memetic </a:t>
+              <a:t>memetic </a:t>
             </a:r>
             <a:r>
               <a:rPr lang="zh-CN" sz="1125" spc="150">
@@ -3755,7 +3731,6 @@
           <a:bodyPr/>
           <a:lstStyle/>
           <a:p>
-            <a:pPr/>
             <a:endParaRPr/>
           </a:p>
         </p:txBody>
@@ -3878,7 +3853,7 @@
                 <a:latin typeface="Source Han Sans CN"/>
                 <a:ea typeface="Source Han Sans CN"/>
               </a:rPr>
-              <a:t xml:space="preserve"> · </a:t>
+              <a:t> · </a:t>
             </a:r>
             <a:r>
               <a:rPr lang="zh-CN" sz="1050">
@@ -3898,7 +3873,7 @@
                 <a:latin typeface="Source Han Sans CN"/>
                 <a:ea typeface="Source Han Sans CN"/>
               </a:rPr>
-              <a:t xml:space="preserve"> · </a:t>
+              <a:t> · </a:t>
             </a:r>
             <a:r>
               <a:rPr lang="zh-CN" sz="1050">
@@ -3956,7 +3931,7 @@
                 <a:latin typeface="Source Han Sans CN"/>
                 <a:ea typeface="Source Han Sans CN"/>
               </a:rPr>
-              <a:t xml:space="preserve"> 0</a:t>
+              <a:t> 0</a:t>
             </a:r>
             <a:endParaRPr/>
           </a:p>
@@ -4004,7 +3979,7 @@
                 <a:latin typeface="Source Han Sans CN"/>
                 <a:ea typeface="Source Han Sans CN"/>
               </a:rPr>
-              <a:t xml:space="preserve">22423 </a:t>
+              <a:t>22423 </a:t>
             </a:r>
             <a:r>
               <a:rPr lang="zh-CN" sz="1050">
@@ -4052,7 +4027,7 @@
                 <a:latin typeface="Source Han Sans CN"/>
                 <a:ea typeface="Source Han Sans CN"/>
               </a:rPr>
-              <a:t xml:space="preserve">0 </a:t>
+              <a:t>0 </a:t>
             </a:r>
             <a:r>
               <a:rPr lang="zh-CN" sz="1275" b="1">
@@ -4218,7 +4193,7 @@
                 <a:latin typeface="Source Han Sans CN"/>
                 <a:ea typeface="Source Han Sans CN"/>
               </a:rPr>
-              <a:t xml:space="preserve"> 9 </a:t>
+              <a:t> 9 </a:t>
             </a:r>
             <a:r>
               <a:rPr lang="zh-CN" sz="1050">
@@ -4252,42 +4227,42 @@
                 <a:gridCol w="2501520">
                   <a:extLst>
                     <a:ext uri="{9D8B030D-6E8A-4147-A177-3AD203B41FA5}">
-                      <a16:colId val="1"/>
+                      <a16:colId xmlns:a16="http://schemas.microsoft.com/office/drawing/2014/main" val="1"/>
                     </a:ext>
                   </a:extLst>
                 </a:gridCol>
                 <a:gridCol w="1141419">
                   <a:extLst>
                     <a:ext uri="{9D8B030D-6E8A-4147-A177-3AD203B41FA5}">
-                      <a16:colId val="2"/>
+                      <a16:colId xmlns:a16="http://schemas.microsoft.com/office/drawing/2014/main" val="2"/>
                     </a:ext>
                   </a:extLst>
                 </a:gridCol>
                 <a:gridCol w="1008075">
                   <a:extLst>
                     <a:ext uri="{9D8B030D-6E8A-4147-A177-3AD203B41FA5}">
-                      <a16:colId val="3"/>
+                      <a16:colId xmlns:a16="http://schemas.microsoft.com/office/drawing/2014/main" val="3"/>
                     </a:ext>
                   </a:extLst>
                 </a:gridCol>
                 <a:gridCol w="1088081">
                   <a:extLst>
                     <a:ext uri="{9D8B030D-6E8A-4147-A177-3AD203B41FA5}">
-                      <a16:colId val="4"/>
+                      <a16:colId xmlns:a16="http://schemas.microsoft.com/office/drawing/2014/main" val="4"/>
                     </a:ext>
                   </a:extLst>
                 </a:gridCol>
                 <a:gridCol w="728054">
                   <a:extLst>
                     <a:ext uri="{9D8B030D-6E8A-4147-A177-3AD203B41FA5}">
-                      <a16:colId val="5"/>
+                      <a16:colId xmlns:a16="http://schemas.microsoft.com/office/drawing/2014/main" val="5"/>
                     </a:ext>
                   </a:extLst>
                 </a:gridCol>
                 <a:gridCol w="1114750">
                   <a:extLst>
                     <a:ext uri="{9D8B030D-6E8A-4147-A177-3AD203B41FA5}">
-                      <a16:colId val="6"/>
+                      <a16:colId xmlns:a16="http://schemas.microsoft.com/office/drawing/2014/main" val="6"/>
                     </a:ext>
                   </a:extLst>
                 </a:gridCol>
@@ -4541,7 +4516,7 @@
                 </a:tc>
                 <a:extLst>
                   <a:ext uri="{0D108BD9-81ED-4DB2-BD59-A6C34878D82A}">
-                    <a16:rowId val="1"/>
+                    <a16:rowId xmlns:a16="http://schemas.microsoft.com/office/drawing/2014/main" val="1"/>
                   </a:ext>
                 </a:extLst>
               </a:tr>
@@ -4776,7 +4751,7 @@
                 </a:tc>
                 <a:extLst>
                   <a:ext uri="{0D108BD9-81ED-4DB2-BD59-A6C34878D82A}">
-                    <a16:rowId val="2"/>
+                    <a16:rowId xmlns:a16="http://schemas.microsoft.com/office/drawing/2014/main" val="2"/>
                   </a:ext>
                 </a:extLst>
               </a:tr>
@@ -5011,7 +4986,7 @@
                 </a:tc>
                 <a:extLst>
                   <a:ext uri="{0D108BD9-81ED-4DB2-BD59-A6C34878D82A}">
-                    <a16:rowId val="3"/>
+                    <a16:rowId xmlns:a16="http://schemas.microsoft.com/office/drawing/2014/main" val="3"/>
                   </a:ext>
                 </a:extLst>
               </a:tr>
@@ -5264,7 +5239,7 @@
                 </a:tc>
                 <a:extLst>
                   <a:ext uri="{0D108BD9-81ED-4DB2-BD59-A6C34878D82A}">
-                    <a16:rowId val="4"/>
+                    <a16:rowId xmlns:a16="http://schemas.microsoft.com/office/drawing/2014/main" val="4"/>
                   </a:ext>
                 </a:extLst>
               </a:tr>
@@ -5499,7 +5474,7 @@
                 </a:tc>
                 <a:extLst>
                   <a:ext uri="{0D108BD9-81ED-4DB2-BD59-A6C34878D82A}">
-                    <a16:rowId val="5"/>
+                    <a16:rowId xmlns:a16="http://schemas.microsoft.com/office/drawing/2014/main" val="5"/>
                   </a:ext>
                 </a:extLst>
               </a:tr>
@@ -5752,7 +5727,7 @@
                 </a:tc>
                 <a:extLst>
                   <a:ext uri="{0D108BD9-81ED-4DB2-BD59-A6C34878D82A}">
-                    <a16:rowId val="6"/>
+                    <a16:rowId xmlns:a16="http://schemas.microsoft.com/office/drawing/2014/main" val="6"/>
                   </a:ext>
                 </a:extLst>
               </a:tr>
@@ -5790,7 +5765,6 @@
           <a:bodyPr/>
           <a:lstStyle/>
           <a:p>
-            <a:pPr/>
             <a:endParaRPr/>
           </a:p>
         </p:txBody>
@@ -5837,7 +5811,7 @@
                 <a:latin typeface="Source Han Sans CN"/>
                 <a:ea typeface="Source Han Sans CN"/>
               </a:rPr>
-              <a:t xml:space="preserve"> seed </a:t>
+              <a:t> seed </a:t>
             </a:r>
             <a:r>
               <a:rPr lang="zh-CN" sz="1200" b="1">
@@ -5857,7 +5831,7 @@
                 <a:latin typeface="Source Han Sans CN"/>
                 <a:ea typeface="Source Han Sans CN"/>
               </a:rPr>
-              <a:t xml:space="preserve"> 3/3 </a:t>
+              <a:t> 3/3 </a:t>
             </a:r>
             <a:r>
               <a:rPr lang="zh-CN" sz="1200" b="1">
@@ -5877,7 +5851,7 @@
                 <a:latin typeface="Source Han Sans CN"/>
                 <a:ea typeface="Source Han Sans CN"/>
               </a:rPr>
-              <a:t xml:space="preserve"> 4 </a:t>
+              <a:t> 4 </a:t>
             </a:r>
             <a:r>
               <a:rPr lang="zh-CN" sz="1200" b="1">
@@ -5945,7 +5919,7 @@
                 <a:latin typeface="Source Han Sans CN"/>
                 <a:ea typeface="Source Han Sans CN"/>
               </a:rPr>
-              <a:t xml:space="preserve">polish </a:t>
+              <a:t>polish </a:t>
             </a:r>
             <a:r>
               <a:rPr lang="en-US" sz="1050" b="1">
@@ -6135,7 +6109,7 @@
                 <a:latin typeface="Source Han Sans CN"/>
                 <a:ea typeface="Source Han Sans CN"/>
               </a:rPr>
-              <a:t xml:space="preserve">s44 </a:t>
+              <a:t>s44 </a:t>
             </a:r>
             <a:r>
               <a:rPr lang="zh-CN" sz="1050">
@@ -6155,7 +6129,7 @@
                 <a:latin typeface="Source Han Sans CN"/>
                 <a:ea typeface="Source Han Sans CN"/>
               </a:rPr>
-              <a:t xml:space="preserve"> seed-dependent </a:t>
+              <a:t> seed-dependent </a:t>
             </a:r>
             <a:r>
               <a:rPr lang="zh-CN" sz="1050">
@@ -6195,7 +6169,7 @@
                 <a:latin typeface="Source Han Sans CN"/>
                 <a:ea typeface="Source Han Sans CN"/>
               </a:rPr>
-              <a:t xml:space="preserve"> +1.7pp</a:t>
+              <a:t> +1.7pp</a:t>
             </a:r>
             <a:r>
               <a:rPr lang="zh-CN" sz="1050">
@@ -6236,7 +6210,6 @@
           <a:bodyPr/>
           <a:lstStyle/>
           <a:p>
-            <a:pPr/>
             <a:endParaRPr/>
           </a:p>
         </p:txBody>
@@ -6302,7 +6275,6 @@
           <a:bodyPr/>
           <a:lstStyle/>
           <a:p>
-            <a:pPr/>
             <a:endParaRPr/>
           </a:p>
         </p:txBody>
@@ -6351,7 +6323,7 @@
                 <a:latin typeface="Source Han Sans CN"/>
                 <a:ea typeface="Source Han Sans CN"/>
               </a:rPr>
-              <a:t xml:space="preserve"> memetic </a:t>
+              <a:t> memetic </a:t>
             </a:r>
             <a:r>
               <a:rPr lang="zh-CN" sz="1125" b="1">
@@ -6371,7 +6343,7 @@
                 <a:latin typeface="Source Han Sans CN"/>
                 <a:ea typeface="Source Han Sans CN"/>
               </a:rPr>
-              <a:t xml:space="preserve"> seed </a:t>
+              <a:t> seed </a:t>
             </a:r>
             <a:r>
               <a:rPr lang="zh-CN" sz="1125" b="1">
@@ -6391,7 +6363,7 @@
                 <a:latin typeface="Source Han Sans CN"/>
                 <a:ea typeface="Source Han Sans CN"/>
               </a:rPr>
-              <a:t xml:space="preserve"> seed</a:t>
+              <a:t> seed</a:t>
             </a:r>
             <a:r>
               <a:rPr lang="zh-CN" sz="1125" b="1">
@@ -6411,7 +6383,7 @@
                 <a:latin typeface="Source Han Sans CN"/>
                 <a:ea typeface="Source Han Sans CN"/>
               </a:rPr>
-              <a:t xml:space="preserve"> DMDE </a:t>
+              <a:t> DMDE </a:t>
             </a:r>
             <a:r>
               <a:rPr lang="zh-CN" sz="1125" b="1">
@@ -6450,7 +6422,6 @@
           <a:bodyPr/>
           <a:lstStyle/>
           <a:p>
-            <a:pPr/>
             <a:endParaRPr/>
           </a:p>
         </p:txBody>
@@ -6499,7 +6470,6 @@
           <a:bodyPr/>
           <a:lstStyle/>
           <a:p>
-            <a:pPr/>
             <a:endParaRPr/>
           </a:p>
         </p:txBody>
@@ -6546,7 +6516,7 @@
                 <a:latin typeface="Source Han Sans CN"/>
                 <a:ea typeface="Source Han Sans CN"/>
               </a:rPr>
-              <a:t xml:space="preserve"> · </a:t>
+              <a:t> · </a:t>
             </a:r>
             <a:r>
               <a:rPr lang="zh-CN" sz="975">
@@ -6609,11 +6579,11 @@
 </file>
 
 <file path=ppt/slides/slide12.xml><?xml version="1.0" encoding="utf-8"?>
-<p:sld xmlns:p="http://schemas.openxmlformats.org/presentationml/2006/main" xmlns:a="http://schemas.openxmlformats.org/drawingml/2006/main" xmlns:r="http://schemas.openxmlformats.org/officeDocument/2006/relationships">
+<p:sld xmlns:a="http://schemas.openxmlformats.org/drawingml/2006/main" xmlns:r="http://schemas.openxmlformats.org/officeDocument/2006/relationships" xmlns:p="http://schemas.openxmlformats.org/presentationml/2006/main">
   <p:cSld>
     <p:spTree>
       <p:nvGrpSpPr>
-        <p:cNvPr id="92" name=""/>
+        <p:cNvPr id="1" name=""/>
         <p:cNvGrpSpPr/>
         <p:nvPr/>
       </p:nvGrpSpPr>
@@ -6648,7 +6618,6 @@
           <a:bodyPr/>
           <a:lstStyle/>
           <a:p>
-            <a:pPr/>
             <a:endParaRPr/>
           </a:p>
         </p:txBody>
@@ -6676,7 +6645,6 @@
           <a:bodyPr/>
           <a:lstStyle/>
           <a:p>
-            <a:pPr/>
             <a:endParaRPr/>
           </a:p>
         </p:txBody>
@@ -6704,7 +6672,6 @@
           <a:bodyPr/>
           <a:lstStyle/>
           <a:p>
-            <a:pPr/>
             <a:endParaRPr/>
           </a:p>
         </p:txBody>
@@ -6761,7 +6728,7 @@
                 <a:latin typeface="Source Han Sans CN"/>
                 <a:ea typeface="Source Han Sans CN"/>
               </a:rPr>
-              <a:t xml:space="preserve"> N </a:t>
+              <a:t> N </a:t>
             </a:r>
             <a:r>
               <a:rPr lang="zh-CN" sz="2400" b="1">
@@ -6809,7 +6776,7 @@
                 <a:latin typeface="Source Han Sans CN"/>
                 <a:ea typeface="Source Han Sans CN"/>
               </a:rPr>
-              <a:t xml:space="preserve">17 </a:t>
+              <a:t>17 </a:t>
             </a:r>
             <a:r>
               <a:rPr lang="zh-CN" sz="1125">
@@ -6829,7 +6796,7 @@
                 <a:latin typeface="Source Han Sans CN"/>
                 <a:ea typeface="Source Han Sans CN"/>
               </a:rPr>
-              <a:t xml:space="preserve">N = 50 / 100 / 200 × </a:t>
+              <a:t>N = 50 / 100 / 200 × </a:t>
             </a:r>
             <a:r>
               <a:rPr lang="zh-CN" sz="1125">
@@ -6875,7 +6842,6 @@
           <a:bodyPr/>
           <a:lstStyle/>
           <a:p>
-            <a:pPr/>
             <a:endParaRPr/>
           </a:p>
         </p:txBody>
@@ -6889,7 +6855,7 @@
           <p:nvPr/>
         </p:nvPicPr>
         <p:blipFill>
-          <a:blip r:embed="rId1"/>
+          <a:blip r:embed="rId2"/>
           <a:srcRect l="4" r="4"/>
           <a:stretch>
             <a:fillRect/>
@@ -6933,7 +6899,6 @@
           <a:bodyPr/>
           <a:lstStyle/>
           <a:p>
-            <a:pPr/>
             <a:endParaRPr/>
           </a:p>
         </p:txBody>
@@ -6980,7 +6945,7 @@
                 <a:latin typeface="Source Han Sans CN"/>
                 <a:ea typeface="Source Han Sans CN"/>
               </a:rPr>
-              <a:t xml:space="preserve"> cap(t)</a:t>
+              <a:t> cap(t)</a:t>
             </a:r>
             <a:r>
               <a:rPr lang="zh-CN" sz="1425" b="1">
@@ -7000,7 +6965,7 @@
                 <a:latin typeface="Source Han Sans CN"/>
                 <a:ea typeface="Source Han Sans CN"/>
               </a:rPr>
-              <a:t xml:space="preserve"> N </a:t>
+              <a:t> N </a:t>
             </a:r>
             <a:r>
               <a:rPr lang="zh-CN" sz="1425" b="1">
@@ -7041,7 +7006,6 @@
           <a:bodyPr/>
           <a:lstStyle/>
           <a:p>
-            <a:pPr/>
             <a:endParaRPr/>
           </a:p>
         </p:txBody>
@@ -7088,7 +7052,7 @@
                 <a:latin typeface="Source Han Sans CN"/>
                 <a:ea typeface="Source Han Sans CN"/>
               </a:rPr>
-              <a:t xml:space="preserve"> k </a:t>
+              <a:t> k </a:t>
             </a:r>
             <a:r>
               <a:rPr lang="zh-CN" sz="1013" b="1">
@@ -7108,7 +7072,7 @@
                 <a:latin typeface="Source Han Sans CN"/>
                 <a:ea typeface="Source Han Sans CN"/>
               </a:rPr>
-              <a:t xml:space="preserve"> N </a:t>
+              <a:t> N </a:t>
             </a:r>
             <a:r>
               <a:rPr lang="zh-CN" sz="1013" b="1">
@@ -7149,7 +7113,6 @@
           <a:bodyPr/>
           <a:lstStyle/>
           <a:p>
-            <a:pPr/>
             <a:endParaRPr/>
           </a:p>
         </p:txBody>
@@ -7186,7 +7149,7 @@
                 <a:latin typeface="Source Han Sans CN"/>
                 <a:ea typeface="Source Han Sans CN"/>
               </a:rPr>
-              <a:t xml:space="preserve">k=16 </a:t>
+              <a:t>k=16 </a:t>
             </a:r>
             <a:r>
               <a:rPr lang="zh-CN" sz="1013" b="1">
@@ -7206,7 +7169,7 @@
                 <a:latin typeface="Source Han Sans CN"/>
                 <a:ea typeface="Source Han Sans CN"/>
               </a:rPr>
-              <a:t xml:space="preserve"> 25.0~25.3s</a:t>
+              <a:t> 25.0~25.3s</a:t>
             </a:r>
             <a:endParaRPr/>
           </a:p>
@@ -7237,7 +7200,6 @@
           <a:bodyPr/>
           <a:lstStyle/>
           <a:p>
-            <a:pPr/>
             <a:endParaRPr/>
           </a:p>
         </p:txBody>
@@ -7274,7 +7236,7 @@
                 <a:latin typeface="Source Han Sans CN"/>
                 <a:ea typeface="Source Han Sans CN"/>
               </a:rPr>
-              <a:t xml:space="preserve">F1 </a:t>
+              <a:t>F1 </a:t>
             </a:r>
             <a:r>
               <a:rPr lang="zh-CN" sz="1013" b="1">
@@ -7294,7 +7256,7 @@
                 <a:latin typeface="Source Han Sans CN"/>
                 <a:ea typeface="Source Han Sans CN"/>
               </a:rPr>
-              <a:t xml:space="preserve"> 93.5% / 83.4%</a:t>
+              <a:t> 93.5% / 83.4%</a:t>
             </a:r>
             <a:endParaRPr/>
           </a:p>
@@ -7323,7 +7285,6 @@
           <a:bodyPr/>
           <a:lstStyle/>
           <a:p>
-            <a:pPr/>
             <a:endParaRPr/>
           </a:p>
         </p:txBody>
@@ -7372,7 +7333,6 @@
           <a:bodyPr/>
           <a:lstStyle/>
           <a:p>
-            <a:pPr/>
             <a:endParaRPr/>
           </a:p>
         </p:txBody>
@@ -7419,7 +7379,7 @@
                 <a:latin typeface="Source Han Sans CN"/>
                 <a:ea typeface="Source Han Sans CN"/>
               </a:rPr>
-              <a:t xml:space="preserve"> · </a:t>
+              <a:t> · </a:t>
             </a:r>
             <a:r>
               <a:rPr lang="zh-CN" sz="975">
@@ -7482,11 +7442,11 @@
 </file>
 
 <file path=ppt/slides/slide13.xml><?xml version="1.0" encoding="utf-8"?>
-<p:sld xmlns:p="http://schemas.openxmlformats.org/presentationml/2006/main" xmlns:a="http://schemas.openxmlformats.org/drawingml/2006/main" xmlns:r="http://schemas.openxmlformats.org/officeDocument/2006/relationships">
+<p:sld xmlns:a="http://schemas.openxmlformats.org/drawingml/2006/main" xmlns:r="http://schemas.openxmlformats.org/officeDocument/2006/relationships" xmlns:p="http://schemas.openxmlformats.org/presentationml/2006/main">
   <p:cSld>
     <p:spTree>
       <p:nvGrpSpPr>
-        <p:cNvPr id="112" name=""/>
+        <p:cNvPr id="1" name=""/>
         <p:cNvGrpSpPr/>
         <p:nvPr/>
       </p:nvGrpSpPr>
@@ -7521,7 +7481,6 @@
           <a:bodyPr/>
           <a:lstStyle/>
           <a:p>
-            <a:pPr/>
             <a:endParaRPr/>
           </a:p>
         </p:txBody>
@@ -7549,7 +7508,6 @@
           <a:bodyPr/>
           <a:lstStyle/>
           <a:p>
-            <a:pPr/>
             <a:endParaRPr/>
           </a:p>
         </p:txBody>
@@ -7577,7 +7535,6 @@
           <a:bodyPr/>
           <a:lstStyle/>
           <a:p>
-            <a:pPr/>
             <a:endParaRPr/>
           </a:p>
         </p:txBody>
@@ -7662,7 +7619,7 @@
                 <a:latin typeface="Source Han Sans CN"/>
                 <a:ea typeface="Source Han Sans CN"/>
               </a:rPr>
-              <a:t xml:space="preserve"> O(n²) </a:t>
+              <a:t> O(n²) </a:t>
             </a:r>
             <a:r>
               <a:rPr lang="zh-CN" sz="1125">
@@ -7708,7 +7665,6 @@
           <a:bodyPr/>
           <a:lstStyle/>
           <a:p>
-            <a:pPr/>
             <a:endParaRPr/>
           </a:p>
         </p:txBody>
@@ -7745,7 +7701,7 @@
                 <a:latin typeface="Source Han Sans CN"/>
                 <a:ea typeface="Source Han Sans CN"/>
               </a:rPr>
-              <a:t xml:space="preserve">O(n²) </a:t>
+              <a:t>O(n²) </a:t>
             </a:r>
             <a:r>
               <a:rPr lang="zh-CN" sz="1125">
@@ -7940,7 +7896,6 @@
           <a:bodyPr/>
           <a:lstStyle/>
           <a:p>
-            <a:pPr/>
             <a:endParaRPr/>
           </a:p>
         </p:txBody>
@@ -7970,7 +7925,6 @@
           <a:bodyPr/>
           <a:lstStyle/>
           <a:p>
-            <a:pPr/>
             <a:endParaRPr/>
           </a:p>
         </p:txBody>
@@ -8019,7 +7973,7 @@
                 <a:latin typeface="Source Han Sans CN"/>
                 <a:ea typeface="Source Han Sans CN"/>
               </a:rPr>
-              <a:t xml:space="preserve"> 2 164 / 43 264</a:t>
+              <a:t> 2 164 / 43 264</a:t>
             </a:r>
             <a:r>
               <a:rPr lang="zh-CN" sz="1050">
@@ -8059,7 +8013,7 @@
                 <a:latin typeface="Source Han Sans CN"/>
                 <a:ea typeface="Source Han Sans CN"/>
               </a:rPr>
-              <a:t xml:space="preserve"> 66ms</a:t>
+              <a:t> 66ms</a:t>
             </a:r>
             <a:r>
               <a:rPr lang="zh-CN" sz="1050">
@@ -8079,7 +8033,7 @@
                 <a:latin typeface="Source Han Sans CN"/>
                 <a:ea typeface="Source Han Sans CN"/>
               </a:rPr>
-              <a:t xml:space="preserve"> 16.8s</a:t>
+              <a:t> 16.8s</a:t>
             </a:r>
             <a:endParaRPr/>
           </a:p>
@@ -8115,7 +8069,6 @@
           <a:bodyPr/>
           <a:lstStyle/>
           <a:p>
-            <a:pPr/>
             <a:endParaRPr/>
           </a:p>
         </p:txBody>
@@ -8162,7 +8115,7 @@
                 <a:latin typeface="Source Han Sans CN"/>
                 <a:ea typeface="Source Han Sans CN"/>
               </a:rPr>
-              <a:t xml:space="preserve"> LazyPairwiseCost</a:t>
+              <a:t> LazyPairwiseCost</a:t>
             </a:r>
             <a:endParaRPr/>
           </a:p>
@@ -8212,7 +8165,7 @@
                 <a:latin typeface="Source Han Sans CN"/>
                 <a:ea typeface="Source Han Sans CN"/>
               </a:rPr>
-              <a:t xml:space="preserve"> + </a:t>
+              <a:t> + </a:t>
             </a:r>
             <a:r>
               <a:rPr lang="zh-CN" sz="1050">
@@ -8232,7 +8185,7 @@
                 <a:latin typeface="Source Han Sans CN"/>
                 <a:ea typeface="Source Han Sans CN"/>
               </a:rPr>
-              <a:t xml:space="preserve"> + </a:t>
+              <a:t> + </a:t>
             </a:r>
             <a:r>
               <a:rPr lang="zh-CN" sz="1050">
@@ -8252,7 +8205,7 @@
                 <a:latin typeface="Source Han Sans CN"/>
                 <a:ea typeface="Source Han Sans CN"/>
               </a:rPr>
-              <a:t xml:space="preserve"> O(n·K + k²) </a:t>
+              <a:t> O(n·K + k²) </a:t>
             </a:r>
             <a:r>
               <a:rPr lang="zh-CN" sz="1050">
@@ -8272,7 +8225,7 @@
                 <a:latin typeface="Source Han Sans CN"/>
                 <a:ea typeface="Source Han Sans CN"/>
               </a:rPr>
-              <a:t xml:space="preserve"> 4 </a:t>
+              <a:t> 4 </a:t>
             </a:r>
             <a:r>
               <a:rPr lang="zh-CN" sz="1050">
@@ -8333,7 +8286,6 @@
           <a:bodyPr/>
           <a:lstStyle/>
           <a:p>
-            <a:pPr/>
             <a:endParaRPr/>
           </a:p>
         </p:txBody>
@@ -8382,7 +8334,7 @@
                 <a:latin typeface="Source Han Sans CN"/>
                 <a:ea typeface="Source Han Sans CN"/>
               </a:rPr>
-              <a:t xml:space="preserve">7 </a:t>
+              <a:t>7 </a:t>
             </a:r>
             <a:r>
               <a:rPr lang="zh-CN" sz="1125" b="1">
@@ -8448,7 +8400,6 @@
           <a:bodyPr/>
           <a:lstStyle/>
           <a:p>
-            <a:pPr/>
             <a:endParaRPr/>
           </a:p>
         </p:txBody>
@@ -8462,7 +8413,7 @@
           <p:nvPr/>
         </p:nvPicPr>
         <p:blipFill>
-          <a:blip r:embed="rId1"/>
+          <a:blip r:embed="rId2"/>
           <a:srcRect t="26" b="26"/>
           <a:stretch>
             <a:fillRect/>
@@ -8564,7 +8515,6 @@
           <a:bodyPr/>
           <a:lstStyle/>
           <a:p>
-            <a:pPr/>
             <a:endParaRPr/>
           </a:p>
         </p:txBody>
@@ -8630,7 +8580,6 @@
           <a:bodyPr/>
           <a:lstStyle/>
           <a:p>
-            <a:pPr/>
             <a:endParaRPr/>
           </a:p>
         </p:txBody>
@@ -8717,7 +8666,7 @@
                 <a:latin typeface="Source Han Sans CN"/>
                 <a:ea typeface="Source Han Sans CN"/>
               </a:rPr>
-              <a:t xml:space="preserve"> k² </a:t>
+              <a:t> k² </a:t>
             </a:r>
             <a:r>
               <a:rPr lang="zh-CN" sz="1088">
@@ -8737,7 +8686,7 @@
                 <a:latin typeface="Source Han Sans CN"/>
                 <a:ea typeface="Source Han Sans CN"/>
               </a:rPr>
-              <a:t xml:space="preserve">k ≈ cap(t) </a:t>
+              <a:t>k ≈ cap(t) </a:t>
             </a:r>
             <a:r>
               <a:rPr lang="zh-CN" sz="1088">
@@ -8757,7 +8706,7 @@
                 <a:latin typeface="Source Han Sans CN"/>
                 <a:ea typeface="Source Han Sans CN"/>
               </a:rPr>
-              <a:t xml:space="preserve"> exp02 </a:t>
+              <a:t> exp02 </a:t>
             </a:r>
             <a:r>
               <a:rPr lang="zh-CN" sz="1088">
@@ -8777,7 +8726,7 @@
                 <a:latin typeface="Source Han Sans CN"/>
                 <a:ea typeface="Source Han Sans CN"/>
               </a:rPr>
-              <a:t xml:space="preserve"> k=40→41 </a:t>
+              <a:t> k=40→41 </a:t>
             </a:r>
             <a:r>
               <a:rPr lang="zh-CN" sz="1088">
@@ -8816,7 +8765,6 @@
           <a:bodyPr/>
           <a:lstStyle/>
           <a:p>
-            <a:pPr/>
             <a:endParaRPr/>
           </a:p>
         </p:txBody>
@@ -8865,7 +8813,6 @@
           <a:bodyPr/>
           <a:lstStyle/>
           <a:p>
-            <a:pPr/>
             <a:endParaRPr/>
           </a:p>
         </p:txBody>
@@ -8912,7 +8859,7 @@
                 <a:latin typeface="Source Han Sans CN"/>
                 <a:ea typeface="Source Han Sans CN"/>
               </a:rPr>
-              <a:t xml:space="preserve"> · </a:t>
+              <a:t> · </a:t>
             </a:r>
             <a:r>
               <a:rPr lang="zh-CN" sz="975">
@@ -8975,11 +8922,11 @@
 </file>
 
 <file path=ppt/slides/slide14.xml><?xml version="1.0" encoding="utf-8"?>
-<p:sld xmlns:p="http://schemas.openxmlformats.org/presentationml/2006/main" xmlns:a="http://schemas.openxmlformats.org/drawingml/2006/main">
+<p:sld xmlns:a="http://schemas.openxmlformats.org/drawingml/2006/main" xmlns:r="http://schemas.openxmlformats.org/officeDocument/2006/relationships" xmlns:p="http://schemas.openxmlformats.org/presentationml/2006/main">
   <p:cSld>
     <p:spTree>
       <p:nvGrpSpPr>
-        <p:cNvPr id="142" name=""/>
+        <p:cNvPr id="1" name=""/>
         <p:cNvGrpSpPr/>
         <p:nvPr/>
       </p:nvGrpSpPr>
@@ -9014,7 +8961,6 @@
           <a:bodyPr/>
           <a:lstStyle/>
           <a:p>
-            <a:pPr/>
             <a:endParaRPr/>
           </a:p>
         </p:txBody>
@@ -9042,7 +8988,6 @@
           <a:bodyPr/>
           <a:lstStyle/>
           <a:p>
-            <a:pPr/>
             <a:endParaRPr/>
           </a:p>
         </p:txBody>
@@ -9070,7 +9015,6 @@
           <a:bodyPr/>
           <a:lstStyle/>
           <a:p>
-            <a:pPr/>
             <a:endParaRPr/>
           </a:p>
         </p:txBody>
@@ -9176,7 +9120,6 @@
           <a:bodyPr/>
           <a:lstStyle/>
           <a:p>
-            <a:pPr/>
             <a:endParaRPr/>
           </a:p>
         </p:txBody>
@@ -9242,7 +9185,6 @@
           <a:bodyPr/>
           <a:lstStyle/>
           <a:p>
-            <a:pPr/>
             <a:endParaRPr/>
           </a:p>
         </p:txBody>
@@ -9319,7 +9261,7 @@
                 <a:latin typeface="Source Han Sans CN"/>
                 <a:ea typeface="Source Han Sans CN"/>
               </a:rPr>
-              <a:t xml:space="preserve">baselines </a:t>
+              <a:t>baselines </a:t>
             </a:r>
             <a:r>
               <a:rPr lang="zh-CN" sz="1050">
@@ -9339,7 +9281,7 @@
                 <a:latin typeface="Source Han Sans CN"/>
                 <a:ea typeface="Source Han Sans CN"/>
               </a:rPr>
-              <a:t xml:space="preserve">full MUAS </a:t>
+              <a:t>full MUAS </a:t>
             </a:r>
             <a:r>
               <a:rPr lang="zh-CN" sz="1050">
@@ -9380,7 +9322,6 @@
           <a:bodyPr/>
           <a:lstStyle/>
           <a:p>
-            <a:pPr/>
             <a:endParaRPr/>
           </a:p>
         </p:txBody>
@@ -9446,7 +9387,6 @@
           <a:bodyPr/>
           <a:lstStyle/>
           <a:p>
-            <a:pPr/>
             <a:endParaRPr/>
           </a:p>
         </p:txBody>
@@ -9523,7 +9463,7 @@
                 <a:latin typeface="Source Han Sans CN"/>
                 <a:ea typeface="Source Han Sans CN"/>
               </a:rPr>
-              <a:t xml:space="preserve">exp01 </a:t>
+              <a:t>exp01 </a:t>
             </a:r>
             <a:r>
               <a:rPr lang="zh-CN" sz="1050">
@@ -9543,7 +9483,7 @@
                 <a:latin typeface="Source Han Sans CN"/>
                 <a:ea typeface="Source Han Sans CN"/>
               </a:rPr>
-              <a:t xml:space="preserve">exp02 </a:t>
+              <a:t>exp02 </a:t>
             </a:r>
             <a:r>
               <a:rPr lang="zh-CN" sz="1050">
@@ -9563,7 +9503,7 @@
                 <a:latin typeface="Source Han Sans CN"/>
                 <a:ea typeface="Source Han Sans CN"/>
               </a:rPr>
-              <a:t xml:space="preserve"> × </a:t>
+              <a:t> × </a:t>
             </a:r>
             <a:r>
               <a:rPr lang="zh-CN" sz="1050">
@@ -9583,7 +9523,7 @@
                 <a:latin typeface="Source Han Sans CN"/>
                 <a:ea typeface="Source Han Sans CN"/>
               </a:rPr>
-              <a:t xml:space="preserve"> × Poisson </a:t>
+              <a:t> × Poisson </a:t>
             </a:r>
             <a:r>
               <a:rPr lang="zh-CN" sz="1050">
@@ -9603,7 +9543,7 @@
                 <a:latin typeface="Source Han Sans CN"/>
                 <a:ea typeface="Source Han Sans CN"/>
               </a:rPr>
-              <a:t xml:space="preserve"> cap(t) </a:t>
+              <a:t> cap(t) </a:t>
             </a:r>
             <a:r>
               <a:rPr lang="zh-CN" sz="1050">
@@ -9623,7 +9563,7 @@
                 <a:latin typeface="Source Han Sans CN"/>
                 <a:ea typeface="Source Han Sans CN"/>
               </a:rPr>
-              <a:t xml:space="preserve">exp06 </a:t>
+              <a:t>exp06 </a:t>
             </a:r>
             <a:r>
               <a:rPr lang="zh-CN" sz="1050">
@@ -9664,7 +9604,6 @@
           <a:bodyPr/>
           <a:lstStyle/>
           <a:p>
-            <a:pPr/>
             <a:endParaRPr/>
           </a:p>
         </p:txBody>
@@ -9730,7 +9669,6 @@
           <a:bodyPr/>
           <a:lstStyle/>
           <a:p>
-            <a:pPr/>
             <a:endParaRPr/>
           </a:p>
         </p:txBody>
@@ -9807,7 +9745,7 @@
                 <a:latin typeface="Source Han Sans CN"/>
                 <a:ea typeface="Source Han Sans CN"/>
               </a:rPr>
-              <a:t xml:space="preserve">exp02 </a:t>
+              <a:t>exp02 </a:t>
             </a:r>
             <a:r>
               <a:rPr lang="zh-CN" sz="1050">
@@ -9827,7 +9765,7 @@
                 <a:latin typeface="Source Han Sans CN"/>
                 <a:ea typeface="Source Han Sans CN"/>
               </a:rPr>
-              <a:t xml:space="preserve"> seed</a:t>
+              <a:t> seed</a:t>
             </a:r>
             <a:r>
               <a:rPr lang="zh-CN" sz="1050">
@@ -9847,7 +9785,7 @@
                 <a:latin typeface="Source Han Sans CN"/>
                 <a:ea typeface="Source Han Sans CN"/>
               </a:rPr>
-              <a:t xml:space="preserve">40 </a:t>
+              <a:t>40 </a:t>
             </a:r>
             <a:r>
               <a:rPr lang="zh-CN" sz="1050">
@@ -9907,7 +9845,7 @@
                 <a:latin typeface="Source Han Sans CN"/>
                 <a:ea typeface="Source Han Sans CN"/>
               </a:rPr>
-              <a:t xml:space="preserve"> cap(t)</a:t>
+              <a:t> cap(t)</a:t>
             </a:r>
             <a:r>
               <a:rPr lang="zh-CN" sz="1050">
@@ -9927,7 +9865,7 @@
                 <a:latin typeface="Source Han Sans CN"/>
                 <a:ea typeface="Source Han Sans CN"/>
               </a:rPr>
-              <a:t xml:space="preserve"> exp04 </a:t>
+              <a:t> exp04 </a:t>
             </a:r>
             <a:r>
               <a:rPr lang="zh-CN" sz="1050">
@@ -9968,7 +9906,6 @@
           <a:bodyPr/>
           <a:lstStyle/>
           <a:p>
-            <a:pPr/>
             <a:endParaRPr/>
           </a:p>
         </p:txBody>
@@ -10034,7 +9971,6 @@
           <a:bodyPr/>
           <a:lstStyle/>
           <a:p>
-            <a:pPr/>
             <a:endParaRPr/>
           </a:p>
         </p:txBody>
@@ -10083,7 +10019,7 @@
                 <a:latin typeface="Source Han Sans CN"/>
                 <a:ea typeface="Source Han Sans CN"/>
               </a:rPr>
-              <a:t xml:space="preserve"> VRPTW</a:t>
+              <a:t> VRPTW</a:t>
             </a:r>
             <a:r>
               <a:rPr lang="zh-CN" sz="1163" b="1">
@@ -10103,7 +10039,7 @@
                 <a:latin typeface="Source Han Sans CN"/>
                 <a:ea typeface="Source Han Sans CN"/>
               </a:rPr>
-              <a:t xml:space="preserve"> 0</a:t>
+              <a:t> 0</a:t>
             </a:r>
             <a:r>
               <a:rPr lang="zh-CN" sz="1163" b="1">
@@ -10123,7 +10059,7 @@
                 <a:latin typeface="Source Han Sans CN"/>
                 <a:ea typeface="Source Han Sans CN"/>
               </a:rPr>
-              <a:t xml:space="preserve"> 99.98%</a:t>
+              <a:t> 99.98%</a:t>
             </a:r>
             <a:r>
               <a:rPr lang="zh-CN" sz="1163" b="1">
@@ -10143,7 +10079,7 @@
                 <a:latin typeface="Source Han Sans CN"/>
                 <a:ea typeface="Source Han Sans CN"/>
               </a:rPr>
-              <a:t xml:space="preserve"> VRPTW </a:t>
+              <a:t> VRPTW </a:t>
             </a:r>
             <a:r>
               <a:rPr lang="zh-CN" sz="1163" b="1">
@@ -10183,7 +10119,7 @@
                 <a:latin typeface="Source Han Sans CN"/>
                 <a:ea typeface="Source Han Sans CN"/>
               </a:rPr>
-              <a:t xml:space="preserve">, </a:t>
+              <a:t>, </a:t>
             </a:r>
             <a:r>
               <a:rPr lang="zh-CN" sz="1163" b="1">
@@ -10203,7 +10139,7 @@
                 <a:latin typeface="Source Han Sans CN"/>
                 <a:ea typeface="Source Han Sans CN"/>
               </a:rPr>
-              <a:t xml:space="preserve">) Pareto </a:t>
+              <a:t>) Pareto </a:t>
             </a:r>
             <a:r>
               <a:rPr lang="zh-CN" sz="1163" b="1">
@@ -10249,7 +10185,6 @@
           <a:bodyPr/>
           <a:lstStyle/>
           <a:p>
-            <a:pPr/>
             <a:endParaRPr/>
           </a:p>
         </p:txBody>
@@ -10317,7 +10252,6 @@
           <a:bodyPr/>
           <a:lstStyle/>
           <a:p>
-            <a:pPr/>
             <a:endParaRPr/>
           </a:p>
         </p:txBody>
@@ -10402,7 +10336,7 @@
                 <a:latin typeface="Source Han Sans CN"/>
                 <a:ea typeface="Source Han Sans CN"/>
               </a:rPr>
-              <a:t xml:space="preserve"> + </a:t>
+              <a:t> + </a:t>
             </a:r>
             <a:r>
               <a:rPr lang="zh-CN" sz="1275" b="1">
@@ -10500,7 +10434,7 @@
                 <a:latin typeface="Source Han Sans CN"/>
                 <a:ea typeface="Source Han Sans CN"/>
               </a:rPr>
-              <a:t xml:space="preserve"> + </a:t>
+              <a:t> + </a:t>
             </a:r>
             <a:r>
               <a:rPr lang="zh-CN" sz="1013">
@@ -10520,7 +10454,7 @@
                 <a:latin typeface="Source Han Sans CN"/>
                 <a:ea typeface="Source Han Sans CN"/>
               </a:rPr>
-              <a:t xml:space="preserve"> VRPTW </a:t>
+              <a:t> VRPTW </a:t>
             </a:r>
             <a:r>
               <a:rPr lang="zh-CN" sz="1013">
@@ -10540,7 +10474,7 @@
                 <a:latin typeface="Source Han Sans CN"/>
                 <a:ea typeface="Source Han Sans CN"/>
               </a:rPr>
-              <a:t xml:space="preserve">exp06 </a:t>
+              <a:t>exp06 </a:t>
             </a:r>
             <a:r>
               <a:rPr lang="zh-CN" sz="1013">
@@ -10560,7 +10494,7 @@
                 <a:latin typeface="Source Han Sans CN"/>
                 <a:ea typeface="Source Han Sans CN"/>
               </a:rPr>
-              <a:t xml:space="preserve"> 40 </a:t>
+              <a:t> 40 </a:t>
             </a:r>
             <a:r>
               <a:rPr lang="zh-CN" sz="1013">
@@ -10580,7 +10514,7 @@
                 <a:latin typeface="Source Han Sans CN"/>
                 <a:ea typeface="Source Han Sans CN"/>
               </a:rPr>
-              <a:t xml:space="preserve"> vs cap(t) </a:t>
+              <a:t> vs cap(t) </a:t>
             </a:r>
             <a:r>
               <a:rPr lang="zh-CN" sz="1013">
@@ -10621,7 +10555,6 @@
           <a:bodyPr/>
           <a:lstStyle/>
           <a:p>
-            <a:pPr/>
             <a:endParaRPr/>
           </a:p>
         </p:txBody>
@@ -10706,7 +10639,7 @@
                 <a:latin typeface="Source Han Sans CN"/>
                 <a:ea typeface="Source Han Sans CN"/>
               </a:rPr>
-              <a:t xml:space="preserve"> → </a:t>
+              <a:t> → </a:t>
             </a:r>
             <a:r>
               <a:rPr lang="zh-CN" sz="1275" b="1">
@@ -10794,7 +10727,7 @@
                 <a:latin typeface="Source Han Sans CN"/>
                 <a:ea typeface="Source Han Sans CN"/>
               </a:rPr>
-              <a:t xml:space="preserve">polish </a:t>
+              <a:t>polish </a:t>
             </a:r>
             <a:r>
               <a:rPr lang="zh-CN" sz="1013">
@@ -10814,7 +10747,7 @@
                 <a:latin typeface="Source Han Sans CN"/>
                 <a:ea typeface="Source Han Sans CN"/>
               </a:rPr>
-              <a:t xml:space="preserve">2-opt / </a:t>
+              <a:t>2-opt / </a:t>
             </a:r>
             <a:r>
               <a:rPr lang="zh-CN" sz="1013">
@@ -10834,7 +10767,7 @@
                 <a:latin typeface="Source Han Sans CN"/>
                 <a:ea typeface="Source Han Sans CN"/>
               </a:rPr>
-              <a:t xml:space="preserve"> relocate</a:t>
+              <a:t> relocate</a:t>
             </a:r>
             <a:r>
               <a:rPr lang="zh-CN" sz="1013">
@@ -10854,7 +10787,7 @@
                 <a:latin typeface="Source Han Sans CN"/>
                 <a:ea typeface="Source Han Sans CN"/>
               </a:rPr>
-              <a:t xml:space="preserve"> </a:t>
+              <a:t> </a:t>
             </a:r>
             <a:r>
               <a:rPr lang="zh-CN" sz="1013">
@@ -10874,7 +10807,7 @@
                 <a:latin typeface="Source Han Sans CN"/>
                 <a:ea typeface="Source Han Sans CN"/>
               </a:rPr>
-              <a:t xml:space="preserve"> </a:t>
+              <a:t> </a:t>
             </a:r>
             <a:r>
               <a:rPr lang="zh-CN" sz="1013">
@@ -10894,7 +10827,7 @@
                 <a:latin typeface="Source Han Sans CN"/>
                 <a:ea typeface="Source Han Sans CN"/>
               </a:rPr>
-              <a:t xml:space="preserve"> + </a:t>
+              <a:t> + </a:t>
             </a:r>
             <a:r>
               <a:rPr lang="zh-CN" sz="1013">
@@ -10914,7 +10847,7 @@
                 <a:latin typeface="Source Han Sans CN"/>
                 <a:ea typeface="Source Han Sans CN"/>
               </a:rPr>
-              <a:t xml:space="preserve"> init</a:t>
+              <a:t> init</a:t>
             </a:r>
             <a:endParaRPr/>
           </a:p>
@@ -10945,7 +10878,6 @@
           <a:bodyPr/>
           <a:lstStyle/>
           <a:p>
-            <a:pPr/>
             <a:endParaRPr/>
           </a:p>
         </p:txBody>
@@ -11098,7 +11030,7 @@
                 <a:latin typeface="Source Han Sans CN"/>
                 <a:ea typeface="Source Han Sans CN"/>
               </a:rPr>
-              <a:t xml:space="preserve">mode=primary </a:t>
+              <a:t>mode=primary </a:t>
             </a:r>
             <a:r>
               <a:rPr lang="zh-CN" sz="1013">
@@ -11118,7 +11050,7 @@
                 <a:latin typeface="Source Han Sans CN"/>
                 <a:ea typeface="Source Han Sans CN"/>
               </a:rPr>
-              <a:t xml:space="preserve"> exp04 </a:t>
+              <a:t> exp04 </a:t>
             </a:r>
             <a:r>
               <a:rPr lang="zh-CN" sz="1013">
@@ -11138,7 +11070,7 @@
                 <a:latin typeface="Source Han Sans CN"/>
                 <a:ea typeface="Source Han Sans CN"/>
               </a:rPr>
-              <a:t xml:space="preserve">max_ratio </a:t>
+              <a:t>max_ratio </a:t>
             </a:r>
             <a:r>
               <a:rPr lang="zh-CN" sz="1013">
@@ -11158,7 +11090,7 @@
                 <a:latin typeface="Source Han Sans CN"/>
                 <a:ea typeface="Source Han Sans CN"/>
               </a:rPr>
-              <a:t xml:space="preserve"> capability </a:t>
+              <a:t> capability </a:t>
             </a:r>
             <a:r>
               <a:rPr lang="zh-CN" sz="1013">
@@ -11178,7 +11110,7 @@
                 <a:latin typeface="Source Han Sans CN"/>
                 <a:ea typeface="Source Han Sans CN"/>
               </a:rPr>
-              <a:t xml:space="preserve"> (</a:t>
+              <a:t> (</a:t>
             </a:r>
             <a:r>
               <a:rPr lang="zh-CN" sz="1013">
@@ -11198,7 +11130,7 @@
                 <a:latin typeface="Source Han Sans CN"/>
                 <a:ea typeface="Source Han Sans CN"/>
               </a:rPr>
-              <a:t xml:space="preserve">, </a:t>
+              <a:t>, </a:t>
             </a:r>
             <a:r>
               <a:rPr lang="zh-CN" sz="1013">
@@ -11218,7 +11150,7 @@
                 <a:latin typeface="Source Han Sans CN"/>
                 <a:ea typeface="Source Han Sans CN"/>
               </a:rPr>
-              <a:t xml:space="preserve">) Pareto </a:t>
+              <a:t>) Pareto </a:t>
             </a:r>
             <a:r>
               <a:rPr lang="zh-CN" sz="1013">
@@ -11259,7 +11191,6 @@
           <a:bodyPr/>
           <a:lstStyle/>
           <a:p>
-            <a:pPr/>
             <a:endParaRPr/>
           </a:p>
         </p:txBody>
@@ -11327,7 +11258,6 @@
           <a:bodyPr/>
           <a:lstStyle/>
           <a:p>
-            <a:pPr/>
             <a:endParaRPr/>
           </a:p>
         </p:txBody>
@@ -11376,7 +11306,6 @@
           <a:bodyPr/>
           <a:lstStyle/>
           <a:p>
-            <a:pPr/>
             <a:endParaRPr/>
           </a:p>
         </p:txBody>
@@ -11423,7 +11352,7 @@
                 <a:latin typeface="Source Han Sans CN"/>
                 <a:ea typeface="Source Han Sans CN"/>
               </a:rPr>
-              <a:t xml:space="preserve"> · </a:t>
+              <a:t> · </a:t>
             </a:r>
             <a:r>
               <a:rPr lang="zh-CN" sz="975">
@@ -11486,11 +11415,11 @@
 </file>
 
 <file path=ppt/slides/slide15.xml><?xml version="1.0" encoding="utf-8"?>
-<p:sld xmlns:p="http://schemas.openxmlformats.org/presentationml/2006/main" xmlns:a="http://schemas.openxmlformats.org/drawingml/2006/main">
+<p:sld xmlns:a="http://schemas.openxmlformats.org/drawingml/2006/main" xmlns:r="http://schemas.openxmlformats.org/officeDocument/2006/relationships" xmlns:p="http://schemas.openxmlformats.org/presentationml/2006/main">
   <p:cSld>
     <p:spTree>
       <p:nvGrpSpPr>
-        <p:cNvPr id="186" name=""/>
+        <p:cNvPr id="1" name=""/>
         <p:cNvGrpSpPr/>
         <p:nvPr/>
       </p:nvGrpSpPr>
@@ -11525,7 +11454,6 @@
           <a:bodyPr/>
           <a:lstStyle/>
           <a:p>
-            <a:pPr/>
             <a:endParaRPr/>
           </a:p>
         </p:txBody>
@@ -11553,7 +11481,6 @@
           <a:bodyPr/>
           <a:lstStyle/>
           <a:p>
-            <a:pPr/>
             <a:endParaRPr/>
           </a:p>
         </p:txBody>
@@ -11581,7 +11508,6 @@
           <a:bodyPr/>
           <a:lstStyle/>
           <a:p>
-            <a:pPr/>
             <a:endParaRPr/>
           </a:p>
         </p:txBody>
@@ -11620,7 +11546,6 @@
           <a:bodyPr/>
           <a:lstStyle/>
           <a:p>
-            <a:pPr/>
             <a:endParaRPr/>
           </a:p>
         </p:txBody>
@@ -11657,7 +11582,7 @@
                 <a:latin typeface="Source Han Sans CN"/>
                 <a:ea typeface="Source Han Sans CN"/>
               </a:rPr>
-              <a:t xml:space="preserve">01 </a:t>
+              <a:t>01 </a:t>
             </a:r>
             <a:r>
               <a:rPr lang="zh-CN" sz="1125" b="1">
@@ -11743,7 +11668,7 @@
                 <a:latin typeface="Source Han Sans CN"/>
                 <a:ea typeface="Source Han Sans CN"/>
               </a:rPr>
-              <a:t xml:space="preserve">02 </a:t>
+              <a:t>02 </a:t>
             </a:r>
             <a:r>
               <a:rPr lang="zh-CN" sz="1125" b="1">
@@ -11829,7 +11754,7 @@
                 <a:latin typeface="Source Han Sans CN"/>
                 <a:ea typeface="Source Han Sans CN"/>
               </a:rPr>
-              <a:t xml:space="preserve">03 MUAS </a:t>
+              <a:t>03 MUAS </a:t>
             </a:r>
             <a:r>
               <a:rPr lang="zh-CN" sz="1125" b="1">
@@ -11849,7 +11774,7 @@
                 <a:latin typeface="Source Han Sans CN"/>
                 <a:ea typeface="Source Han Sans CN"/>
               </a:rPr>
-              <a:t xml:space="preserve"> DMDE</a:t>
+              <a:t> DMDE</a:t>
             </a:r>
             <a:endParaRPr/>
           </a:p>
@@ -11925,7 +11850,7 @@
                 <a:latin typeface="Source Han Sans CN"/>
                 <a:ea typeface="Source Han Sans CN"/>
               </a:rPr>
-              <a:t xml:space="preserve">04 </a:t>
+              <a:t>04 </a:t>
             </a:r>
             <a:r>
               <a:rPr lang="zh-CN" sz="1125" b="1">
@@ -11983,7 +11908,7 @@
                 <a:latin typeface="Source Han Sans CN"/>
                 <a:ea typeface="Source Han Sans CN"/>
               </a:rPr>
-              <a:t xml:space="preserve"> </a:t>
+              <a:t> </a:t>
             </a:r>
             <a:r>
               <a:rPr lang="zh-CN" sz="1200" spc="600">
@@ -12078,7 +12003,6 @@
           <a:bodyPr/>
           <a:lstStyle/>
           <a:p>
-            <a:pPr/>
             <a:endParaRPr/>
           </a:p>
         </p:txBody>
@@ -12125,7 +12049,7 @@
                 <a:latin typeface="Source Han Sans CN"/>
                 <a:ea typeface="Source Han Sans CN"/>
               </a:rPr>
-              <a:t xml:space="preserve"> · </a:t>
+              <a:t> · </a:t>
             </a:r>
             <a:r>
               <a:rPr lang="zh-CN" sz="1350">
@@ -12145,7 +12069,7 @@
                 <a:latin typeface="Source Han Sans CN"/>
                 <a:ea typeface="Source Han Sans CN"/>
               </a:rPr>
-              <a:t xml:space="preserve"> MUAS </a:t>
+              <a:t> MUAS </a:t>
             </a:r>
             <a:r>
               <a:rPr lang="zh-CN" sz="1350">
@@ -12165,7 +12089,7 @@
                 <a:latin typeface="Source Han Sans CN"/>
                 <a:ea typeface="Source Han Sans CN"/>
               </a:rPr>
-              <a:t xml:space="preserve"> · </a:t>
+              <a:t> · </a:t>
             </a:r>
             <a:r>
               <a:rPr lang="zh-CN" sz="1350">
@@ -12203,7 +12127,7 @@
                 <a:latin typeface="Source Han Sans CN"/>
                 <a:ea typeface="Source Han Sans CN"/>
               </a:rPr>
-              <a:t xml:space="preserve"> seed </a:t>
+              <a:t> seed </a:t>
             </a:r>
             <a:r>
               <a:rPr lang="zh-CN" sz="1350">
@@ -12223,7 +12147,7 @@
                 <a:latin typeface="Source Han Sans CN"/>
                 <a:ea typeface="Source Han Sans CN"/>
               </a:rPr>
-              <a:t xml:space="preserve"> · </a:t>
+              <a:t> · </a:t>
             </a:r>
             <a:r>
               <a:rPr lang="zh-CN" sz="1350">
@@ -12243,7 +12167,7 @@
                 <a:latin typeface="Source Han Sans CN"/>
                 <a:ea typeface="Source Han Sans CN"/>
               </a:rPr>
-              <a:t xml:space="preserve"> · </a:t>
+              <a:t> · </a:t>
             </a:r>
             <a:r>
               <a:rPr lang="zh-CN" sz="1350">
@@ -12379,7 +12303,7 @@
                 <a:latin typeface="Source Han Sans CN"/>
                 <a:ea typeface="Source Han Sans CN"/>
               </a:rPr>
-              <a:t xml:space="preserve">2026 </a:t>
+              <a:t>2026 </a:t>
             </a:r>
             <a:r>
               <a:rPr lang="zh-CN" sz="1125">
@@ -12399,7 +12323,7 @@
                 <a:latin typeface="Source Han Sans CN"/>
                 <a:ea typeface="Source Han Sans CN"/>
               </a:rPr>
-              <a:t xml:space="preserve"> 10 </a:t>
+              <a:t> 10 </a:t>
             </a:r>
             <a:r>
               <a:rPr lang="zh-CN" sz="1125">
@@ -12424,11 +12348,11 @@
 </file>
 
 <file path=ppt/slides/slide2.xml><?xml version="1.0" encoding="utf-8"?>
-<p:sld xmlns:p="http://schemas.openxmlformats.org/presentationml/2006/main" xmlns:a="http://schemas.openxmlformats.org/drawingml/2006/main">
+<p:sld xmlns:a="http://schemas.openxmlformats.org/drawingml/2006/main" xmlns:r="http://schemas.openxmlformats.org/officeDocument/2006/relationships" xmlns:p="http://schemas.openxmlformats.org/presentationml/2006/main">
   <p:cSld>
     <p:spTree>
       <p:nvGrpSpPr>
-        <p:cNvPr id="204" name=""/>
+        <p:cNvPr id="1" name=""/>
         <p:cNvGrpSpPr/>
         <p:nvPr/>
       </p:nvGrpSpPr>
@@ -12463,7 +12387,6 @@
           <a:bodyPr/>
           <a:lstStyle/>
           <a:p>
-            <a:pPr/>
             <a:endParaRPr/>
           </a:p>
         </p:txBody>
@@ -12491,7 +12414,6 @@
           <a:bodyPr/>
           <a:lstStyle/>
           <a:p>
-            <a:pPr/>
             <a:endParaRPr/>
           </a:p>
         </p:txBody>
@@ -12521,7 +12443,6 @@
           <a:bodyPr/>
           <a:lstStyle/>
           <a:p>
-            <a:pPr/>
             <a:endParaRPr/>
           </a:p>
         </p:txBody>
@@ -12625,7 +12546,6 @@
           <a:bodyPr/>
           <a:lstStyle/>
           <a:p>
-            <a:pPr/>
             <a:endParaRPr/>
           </a:p>
         </p:txBody>
@@ -12674,7 +12594,7 @@
                 <a:latin typeface="Source Han Sans CN"/>
                 <a:ea typeface="Source Han Sans CN"/>
               </a:rPr>
-              <a:t xml:space="preserve"> × </a:t>
+              <a:t> × </a:t>
             </a:r>
             <a:r>
               <a:rPr lang="zh-CN" sz="1275">
@@ -12694,7 +12614,7 @@
                 <a:latin typeface="Source Han Sans CN"/>
                 <a:ea typeface="Source Han Sans CN"/>
               </a:rPr>
-              <a:t xml:space="preserve"> × </a:t>
+              <a:t> × </a:t>
             </a:r>
             <a:r>
               <a:rPr lang="zh-CN" sz="1275">
@@ -12754,7 +12674,7 @@
                 <a:latin typeface="Source Han Sans CN"/>
                 <a:ea typeface="Source Han Sans CN"/>
               </a:rPr>
-              <a:t xml:space="preserve"> 15 </a:t>
+              <a:t> 15 </a:t>
             </a:r>
             <a:r>
               <a:rPr lang="zh-CN" sz="1050">
@@ -12774,7 +12694,7 @@
                 <a:latin typeface="Source Han Sans CN"/>
                 <a:ea typeface="Source Han Sans CN"/>
               </a:rPr>
-              <a:t xml:space="preserve"> 3 </a:t>
+              <a:t> 3 </a:t>
             </a:r>
             <a:r>
               <a:rPr lang="zh-CN" sz="1050">
@@ -12815,7 +12735,6 @@
           <a:bodyPr/>
           <a:lstStyle/>
           <a:p>
-            <a:pPr/>
             <a:endParaRPr/>
           </a:p>
         </p:txBody>
@@ -12881,7 +12800,6 @@
           <a:bodyPr/>
           <a:lstStyle/>
           <a:p>
-            <a:pPr/>
             <a:endParaRPr/>
           </a:p>
         </p:txBody>
@@ -12911,7 +12829,6 @@
           <a:bodyPr/>
           <a:lstStyle/>
           <a:p>
-            <a:pPr/>
             <a:endParaRPr/>
           </a:p>
         </p:txBody>
@@ -13077,7 +12994,6 @@
           <a:bodyPr/>
           <a:lstStyle/>
           <a:p>
-            <a:pPr/>
             <a:endParaRPr/>
           </a:p>
         </p:txBody>
@@ -13143,7 +13059,6 @@
           <a:bodyPr/>
           <a:lstStyle/>
           <a:p>
-            <a:pPr/>
             <a:endParaRPr/>
           </a:p>
         </p:txBody>
@@ -13173,7 +13088,6 @@
           <a:bodyPr/>
           <a:lstStyle/>
           <a:p>
-            <a:pPr/>
             <a:endParaRPr/>
           </a:p>
         </p:txBody>
@@ -13316,7 +13230,7 @@
                 <a:latin typeface="Source Han Sans CN"/>
                 <a:ea typeface="Source Han Sans CN"/>
               </a:rPr>
-              <a:t xml:space="preserve"> + </a:t>
+              <a:t> + </a:t>
             </a:r>
             <a:r>
               <a:rPr lang="zh-CN" sz="1125">
@@ -13336,7 +13250,7 @@
                 <a:latin typeface="Source Han Sans CN"/>
                 <a:ea typeface="Source Han Sans CN"/>
               </a:rPr>
-              <a:t xml:space="preserve"> + </a:t>
+              <a:t> + </a:t>
             </a:r>
             <a:r>
               <a:rPr lang="zh-CN" sz="1125">
@@ -13377,7 +13291,6 @@
           <a:bodyPr/>
           <a:lstStyle/>
           <a:p>
-            <a:pPr/>
             <a:endParaRPr/>
           </a:p>
         </p:txBody>
@@ -13443,7 +13356,6 @@
           <a:bodyPr/>
           <a:lstStyle/>
           <a:p>
-            <a:pPr/>
             <a:endParaRPr/>
           </a:p>
         </p:txBody>
@@ -13473,7 +13385,6 @@
           <a:bodyPr/>
           <a:lstStyle/>
           <a:p>
-            <a:pPr/>
             <a:endParaRPr/>
           </a:p>
         </p:txBody>
@@ -13558,7 +13469,7 @@
                 <a:latin typeface="Source Han Sans CN"/>
                 <a:ea typeface="Source Han Sans CN"/>
               </a:rPr>
-              <a:t xml:space="preserve"> MUAS </a:t>
+              <a:t> MUAS </a:t>
             </a:r>
             <a:r>
               <a:rPr lang="zh-CN" sz="1575" b="1">
@@ -13578,7 +13489,7 @@
                 <a:latin typeface="Source Han Sans CN"/>
                 <a:ea typeface="Source Han Sans CN"/>
               </a:rPr>
-              <a:t xml:space="preserve"> DMDE</a:t>
+              <a:t> DMDE</a:t>
             </a:r>
             <a:r>
               <a:rPr lang="zh-CN" sz="1125">
@@ -13667,7 +13578,6 @@
           <a:bodyPr/>
           <a:lstStyle/>
           <a:p>
-            <a:pPr/>
             <a:endParaRPr/>
           </a:p>
         </p:txBody>
@@ -13733,7 +13643,6 @@
           <a:bodyPr/>
           <a:lstStyle/>
           <a:p>
-            <a:pPr/>
             <a:endParaRPr/>
           </a:p>
         </p:txBody>
@@ -13763,7 +13672,6 @@
           <a:bodyPr/>
           <a:lstStyle/>
           <a:p>
-            <a:pPr/>
             <a:endParaRPr/>
           </a:p>
         </p:txBody>
@@ -13898,7 +13806,7 @@
                 <a:latin typeface="Source Han Sans CN"/>
                 <a:ea typeface="Source Han Sans CN"/>
               </a:rPr>
-              <a:t xml:space="preserve">exp01 </a:t>
+              <a:t>exp01 </a:t>
             </a:r>
             <a:r>
               <a:rPr lang="zh-CN" sz="1125">
@@ -13918,7 +13826,7 @@
                 <a:latin typeface="Source Han Sans CN"/>
                 <a:ea typeface="Source Han Sans CN"/>
               </a:rPr>
-              <a:t xml:space="preserve"> seed </a:t>
+              <a:t> seed </a:t>
             </a:r>
             <a:r>
               <a:rPr lang="zh-CN" sz="1125">
@@ -13938,7 +13846,7 @@
                 <a:latin typeface="Source Han Sans CN"/>
                 <a:ea typeface="Source Han Sans CN"/>
               </a:rPr>
-              <a:t xml:space="preserve">exp02 </a:t>
+              <a:t>exp02 </a:t>
             </a:r>
             <a:r>
               <a:rPr lang="zh-CN" sz="1125">
@@ -13958,7 +13866,7 @@
                 <a:latin typeface="Source Han Sans CN"/>
                 <a:ea typeface="Source Han Sans CN"/>
               </a:rPr>
-              <a:t xml:space="preserve"> N </a:t>
+              <a:t> N </a:t>
             </a:r>
             <a:r>
               <a:rPr lang="zh-CN" sz="1125">
@@ -13997,7 +13905,6 @@
           <a:bodyPr/>
           <a:lstStyle/>
           <a:p>
-            <a:pPr/>
             <a:endParaRPr/>
           </a:p>
         </p:txBody>
@@ -14046,7 +13953,6 @@
           <a:bodyPr/>
           <a:lstStyle/>
           <a:p>
-            <a:pPr/>
             <a:endParaRPr/>
           </a:p>
         </p:txBody>
@@ -14093,7 +13999,7 @@
                 <a:latin typeface="Source Han Sans CN"/>
                 <a:ea typeface="Source Han Sans CN"/>
               </a:rPr>
-              <a:t xml:space="preserve"> · </a:t>
+              <a:t> · </a:t>
             </a:r>
             <a:r>
               <a:rPr lang="zh-CN" sz="975">
@@ -14156,11 +14062,11 @@
 </file>
 
 <file path=ppt/slides/slide3.xml><?xml version="1.0" encoding="utf-8"?>
-<p:sld xmlns:p="http://schemas.openxmlformats.org/presentationml/2006/main" xmlns:a="http://schemas.openxmlformats.org/drawingml/2006/main">
+<p:sld xmlns:a="http://schemas.openxmlformats.org/drawingml/2006/main" xmlns:r="http://schemas.openxmlformats.org/officeDocument/2006/relationships" xmlns:p="http://schemas.openxmlformats.org/presentationml/2006/main">
   <p:cSld>
     <p:spTree>
       <p:nvGrpSpPr>
-        <p:cNvPr id="241" name=""/>
+        <p:cNvPr id="1" name=""/>
         <p:cNvGrpSpPr/>
         <p:nvPr/>
       </p:nvGrpSpPr>
@@ -14195,7 +14101,6 @@
           <a:bodyPr/>
           <a:lstStyle/>
           <a:p>
-            <a:pPr/>
             <a:endParaRPr/>
           </a:p>
         </p:txBody>
@@ -14223,7 +14128,6 @@
           <a:bodyPr/>
           <a:lstStyle/>
           <a:p>
-            <a:pPr/>
             <a:endParaRPr/>
           </a:p>
         </p:txBody>
@@ -14296,7 +14200,6 @@
           <a:bodyPr/>
           <a:lstStyle/>
           <a:p>
-            <a:pPr/>
             <a:endParaRPr/>
           </a:p>
         </p:txBody>
@@ -14369,7 +14272,6 @@
           <a:bodyPr/>
           <a:lstStyle/>
           <a:p>
-            <a:pPr/>
             <a:endParaRPr/>
           </a:p>
         </p:txBody>
@@ -14442,7 +14344,6 @@
           <a:bodyPr/>
           <a:lstStyle/>
           <a:p>
-            <a:pPr/>
             <a:endParaRPr/>
           </a:p>
         </p:txBody>
@@ -14508,7 +14409,6 @@
           <a:bodyPr/>
           <a:lstStyle/>
           <a:p>
-            <a:pPr/>
             <a:endParaRPr/>
           </a:p>
         </p:txBody>
@@ -14614,7 +14514,6 @@
           <a:bodyPr/>
           <a:lstStyle/>
           <a:p>
-            <a:pPr/>
             <a:endParaRPr/>
           </a:p>
         </p:txBody>
@@ -14722,7 +14621,6 @@
           <a:bodyPr/>
           <a:lstStyle/>
           <a:p>
-            <a:pPr/>
             <a:endParaRPr/>
           </a:p>
         </p:txBody>
@@ -14829,7 +14727,7 @@
                 <a:latin typeface="Source Han Sans CN"/>
                 <a:ea typeface="Source Han Sans CN"/>
               </a:rPr>
-              <a:t xml:space="preserve"> + </a:t>
+              <a:t> + </a:t>
             </a:r>
             <a:r>
               <a:rPr lang="zh-CN" sz="1200">
@@ -14849,7 +14747,7 @@
                 <a:latin typeface="Source Han Sans CN"/>
                 <a:ea typeface="Source Han Sans CN"/>
               </a:rPr>
-              <a:t xml:space="preserve"> MUAS </a:t>
+              <a:t> MUAS </a:t>
             </a:r>
             <a:r>
               <a:rPr lang="zh-CN" sz="1200">
@@ -14890,7 +14788,6 @@
           <a:bodyPr/>
           <a:lstStyle/>
           <a:p>
-            <a:pPr/>
             <a:endParaRPr/>
           </a:p>
         </p:txBody>
@@ -14927,7 +14824,7 @@
                 <a:latin typeface="Source Han Sans CN"/>
                 <a:ea typeface="Source Han Sans CN"/>
               </a:rPr>
-              <a:t xml:space="preserve">P4 · </a:t>
+              <a:t>P4 · </a:t>
             </a:r>
             <a:r>
               <a:rPr lang="zh-CN" sz="1050" b="1">
@@ -14968,7 +14865,6 @@
           <a:bodyPr/>
           <a:lstStyle/>
           <a:p>
-            <a:pPr/>
             <a:endParaRPr/>
           </a:p>
         </p:txBody>
@@ -15005,7 +14901,7 @@
                 <a:latin typeface="Source Han Sans CN"/>
                 <a:ea typeface="Source Han Sans CN"/>
               </a:rPr>
-              <a:t xml:space="preserve">P5 · </a:t>
+              <a:t>P5 · </a:t>
             </a:r>
             <a:r>
               <a:rPr lang="zh-CN" sz="1050" b="1">
@@ -15046,7 +14942,6 @@
           <a:bodyPr/>
           <a:lstStyle/>
           <a:p>
-            <a:pPr/>
             <a:endParaRPr/>
           </a:p>
         </p:txBody>
@@ -15114,7 +15009,6 @@
           <a:bodyPr/>
           <a:lstStyle/>
           <a:p>
-            <a:pPr/>
             <a:endParaRPr/>
           </a:p>
         </p:txBody>
@@ -15182,7 +15076,6 @@
           <a:bodyPr/>
           <a:lstStyle/>
           <a:p>
-            <a:pPr/>
             <a:endParaRPr/>
           </a:p>
         </p:txBody>
@@ -15250,7 +15143,6 @@
           <a:bodyPr/>
           <a:lstStyle/>
           <a:p>
-            <a:pPr/>
             <a:endParaRPr/>
           </a:p>
         </p:txBody>
@@ -15335,7 +15227,7 @@
                 <a:latin typeface="Source Han Sans CN"/>
                 <a:ea typeface="Source Han Sans CN"/>
               </a:rPr>
-              <a:t xml:space="preserve"> · </a:t>
+              <a:t> · </a:t>
             </a:r>
             <a:r>
               <a:rPr lang="zh-CN" sz="1050">
@@ -15355,7 +15247,7 @@
                 <a:latin typeface="Source Han Sans CN"/>
                 <a:ea typeface="Source Han Sans CN"/>
               </a:rPr>
-              <a:t xml:space="preserve"> · </a:t>
+              <a:t> · </a:t>
             </a:r>
             <a:r>
               <a:rPr lang="zh-CN" sz="1050">
@@ -15394,7 +15286,6 @@
           <a:bodyPr/>
           <a:lstStyle/>
           <a:p>
-            <a:pPr/>
             <a:endParaRPr/>
           </a:p>
         </p:txBody>
@@ -15443,7 +15334,6 @@
           <a:bodyPr/>
           <a:lstStyle/>
           <a:p>
-            <a:pPr/>
             <a:endParaRPr/>
           </a:p>
         </p:txBody>
@@ -15490,7 +15380,7 @@
                 <a:latin typeface="Source Han Sans CN"/>
                 <a:ea typeface="Source Han Sans CN"/>
               </a:rPr>
-              <a:t xml:space="preserve"> · </a:t>
+              <a:t> · </a:t>
             </a:r>
             <a:r>
               <a:rPr lang="zh-CN" sz="975">
@@ -15553,11 +15443,11 @@
 </file>
 
 <file path=ppt/slides/slide4.xml><?xml version="1.0" encoding="utf-8"?>
-<p:sld xmlns:p="http://schemas.openxmlformats.org/presentationml/2006/main" xmlns:a="http://schemas.openxmlformats.org/drawingml/2006/main" xmlns:r="http://schemas.openxmlformats.org/officeDocument/2006/relationships">
+<p:sld xmlns:a="http://schemas.openxmlformats.org/drawingml/2006/main" xmlns:r="http://schemas.openxmlformats.org/officeDocument/2006/relationships" xmlns:p="http://schemas.openxmlformats.org/presentationml/2006/main">
   <p:cSld>
     <p:spTree>
       <p:nvGrpSpPr>
-        <p:cNvPr id="276" name=""/>
+        <p:cNvPr id="1" name=""/>
         <p:cNvGrpSpPr/>
         <p:nvPr/>
       </p:nvGrpSpPr>
@@ -15592,7 +15482,6 @@
           <a:bodyPr/>
           <a:lstStyle/>
           <a:p>
-            <a:pPr/>
             <a:endParaRPr/>
           </a:p>
         </p:txBody>
@@ -15620,7 +15509,6 @@
           <a:bodyPr/>
           <a:lstStyle/>
           <a:p>
-            <a:pPr/>
             <a:endParaRPr/>
           </a:p>
         </p:txBody>
@@ -15648,7 +15536,6 @@
           <a:bodyPr/>
           <a:lstStyle/>
           <a:p>
-            <a:pPr/>
             <a:endParaRPr/>
           </a:p>
         </p:txBody>
@@ -15759,7 +15646,6 @@
           <a:bodyPr/>
           <a:lstStyle/>
           <a:p>
-            <a:pPr/>
             <a:endParaRPr/>
           </a:p>
         </p:txBody>
@@ -15773,7 +15659,7 @@
           <p:nvPr/>
         </p:nvPicPr>
         <p:blipFill>
-          <a:blip r:embed="rId1"/>
+          <a:blip r:embed="rId2"/>
           <a:srcRect t="7396" b="7396"/>
           <a:stretch>
             <a:fillRect/>
@@ -15856,7 +15742,7 @@
                 <a:latin typeface="Source Han Sans CN"/>
                 <a:ea typeface="Source Han Sans CN"/>
               </a:rPr>
-              <a:t xml:space="preserve"> × </a:t>
+              <a:t> × </a:t>
             </a:r>
             <a:r>
               <a:rPr lang="zh-CN" sz="1050">
@@ -15876,7 +15762,7 @@
                 <a:latin typeface="Source Han Sans CN"/>
                 <a:ea typeface="Source Han Sans CN"/>
               </a:rPr>
-              <a:t xml:space="preserve"> </a:t>
+              <a:t> </a:t>
             </a:r>
             <a:r>
               <a:rPr lang="zh-CN" sz="1050">
@@ -15896,7 +15782,7 @@
                 <a:latin typeface="Source Han Sans CN"/>
                 <a:ea typeface="Source Han Sans CN"/>
               </a:rPr>
-              <a:t xml:space="preserve"> </a:t>
+              <a:t> </a:t>
             </a:r>
             <a:r>
               <a:rPr lang="zh-CN" sz="1050">
@@ -15937,7 +15823,6 @@
           <a:bodyPr/>
           <a:lstStyle/>
           <a:p>
-            <a:pPr/>
             <a:endParaRPr/>
           </a:p>
         </p:txBody>
@@ -16003,7 +15888,6 @@
           <a:bodyPr/>
           <a:lstStyle/>
           <a:p>
-            <a:pPr/>
             <a:endParaRPr/>
           </a:p>
         </p:txBody>
@@ -16033,7 +15917,6 @@
           <a:bodyPr/>
           <a:lstStyle/>
           <a:p>
-            <a:pPr/>
             <a:endParaRPr/>
           </a:p>
         </p:txBody>
@@ -16158,7 +16041,7 @@
                 <a:latin typeface="Source Han Sans CN"/>
                 <a:ea typeface="Source Han Sans CN"/>
               </a:rPr>
-              <a:t xml:space="preserve"> T(t+1)=remain∪new∪release</a:t>
+              <a:t> T(t+1)=remain∪new∪release</a:t>
             </a:r>
             <a:r>
               <a:rPr lang="zh-CN" sz="1050">
@@ -16199,7 +16082,6 @@
           <a:bodyPr/>
           <a:lstStyle/>
           <a:p>
-            <a:pPr/>
             <a:endParaRPr/>
           </a:p>
         </p:txBody>
@@ -16265,7 +16147,6 @@
           <a:bodyPr/>
           <a:lstStyle/>
           <a:p>
-            <a:pPr/>
             <a:endParaRPr/>
           </a:p>
         </p:txBody>
@@ -16295,7 +16176,6 @@
           <a:bodyPr/>
           <a:lstStyle/>
           <a:p>
-            <a:pPr/>
             <a:endParaRPr/>
           </a:p>
         </p:txBody>
@@ -16441,7 +16321,6 @@
           <a:bodyPr/>
           <a:lstStyle/>
           <a:p>
-            <a:pPr/>
             <a:endParaRPr/>
           </a:p>
         </p:txBody>
@@ -16507,7 +16386,6 @@
           <a:bodyPr/>
           <a:lstStyle/>
           <a:p>
-            <a:pPr/>
             <a:endParaRPr/>
           </a:p>
         </p:txBody>
@@ -16537,7 +16415,6 @@
           <a:bodyPr/>
           <a:lstStyle/>
           <a:p>
-            <a:pPr/>
             <a:endParaRPr/>
           </a:p>
         </p:txBody>
@@ -16683,7 +16560,6 @@
           <a:bodyPr/>
           <a:lstStyle/>
           <a:p>
-            <a:pPr/>
             <a:endParaRPr/>
           </a:p>
         </p:txBody>
@@ -16749,7 +16625,6 @@
           <a:bodyPr/>
           <a:lstStyle/>
           <a:p>
-            <a:pPr/>
             <a:endParaRPr/>
           </a:p>
         </p:txBody>
@@ -16779,7 +16654,6 @@
           <a:bodyPr/>
           <a:lstStyle/>
           <a:p>
-            <a:pPr/>
             <a:endParaRPr/>
           </a:p>
         </p:txBody>
@@ -16925,7 +16799,6 @@
           <a:bodyPr/>
           <a:lstStyle/>
           <a:p>
-            <a:pPr/>
             <a:endParaRPr/>
           </a:p>
         </p:txBody>
@@ -16991,7 +16864,6 @@
           <a:bodyPr/>
           <a:lstStyle/>
           <a:p>
-            <a:pPr/>
             <a:endParaRPr/>
           </a:p>
         </p:txBody>
@@ -17021,7 +16893,6 @@
           <a:bodyPr/>
           <a:lstStyle/>
           <a:p>
-            <a:pPr/>
             <a:endParaRPr/>
           </a:p>
         </p:txBody>
@@ -17163,7 +17034,6 @@
           <a:bodyPr/>
           <a:lstStyle/>
           <a:p>
-            <a:pPr/>
             <a:endParaRPr/>
           </a:p>
         </p:txBody>
@@ -17212,7 +17082,6 @@
           <a:bodyPr/>
           <a:lstStyle/>
           <a:p>
-            <a:pPr/>
             <a:endParaRPr/>
           </a:p>
         </p:txBody>
@@ -17259,7 +17128,7 @@
                 <a:latin typeface="Source Han Sans CN"/>
                 <a:ea typeface="Source Han Sans CN"/>
               </a:rPr>
-              <a:t xml:space="preserve"> · </a:t>
+              <a:t> · </a:t>
             </a:r>
             <a:r>
               <a:rPr lang="zh-CN" sz="975">
@@ -17322,11 +17191,11 @@
 </file>
 
 <file path=ppt/slides/slide5.xml><?xml version="1.0" encoding="utf-8"?>
-<p:sld xmlns:p="http://schemas.openxmlformats.org/presentationml/2006/main" xmlns:a="http://schemas.openxmlformats.org/drawingml/2006/main" xmlns:asvg="http://schemas.microsoft.com/office/drawing/2016/SVG/main" xmlns:r="http://schemas.openxmlformats.org/officeDocument/2006/relationships" xmlns:mc="http://schemas.openxmlformats.org/markup-compatibility/2006" mc:Ignorable="asvg">
+<p:sld xmlns:a="http://schemas.openxmlformats.org/drawingml/2006/main" xmlns:r="http://schemas.openxmlformats.org/officeDocument/2006/relationships" xmlns:p="http://schemas.openxmlformats.org/presentationml/2006/main">
   <p:cSld>
     <p:spTree>
       <p:nvGrpSpPr>
-        <p:cNvPr id="319" name="" descr="&lt;Slide style={{ width: 1280, height: 720, background: '#FFFFFF', position: 'relative', fontFamily: 'Source Han Sans CN, Microsoft YaHei, sans-serif' }}&gt;&#10;  &lt;Box style={{ position: 'absolute', top: 0, left: 0, width: 1280, height: 12, background: '#1E4FA8' }} /&gt;&#10;  &lt;Box style={{ position: 'absolute', top: 28, left: 40, flexDirection: 'row', alignItems: 'center', gap: 14 }}&gt;&#10;    &lt;Box style={{ width: 6, height: 34, background: '#1E4FA8' }} /&gt;&#10;    &lt;Text style={{ fontSize: 32, fontWeight: 'bold', color: '#0E3F8C' }}&gt;总体求解框架：分层滚动闭环&lt;/Text&gt;&#10;  &lt;/Box&gt;&#10;  &lt;Box style={{ position: 'absolute', top: 74, left: 60, padding: '6px 18px', background: '#0E3F8C', borderRadius: 6 }}&gt;&#10;    &lt;Text style={{ fontSize: 16, fontWeight: 'bold', color: '#FFFFFF' }}&gt;核心主张：快速任务选择缩空间 + 精细 MUAS 组合优化&lt;/Text&gt;&#10;  &lt;/Box&gt;&#10;&#10;  &lt;Box style={{ position: 'absolute', top: 112, left: 60 }}&gt;&#10;    &lt;svg width={1160} height={296} viewBox='0 0 1160 296'&gt;&#10;      &lt;rect x='18' y='102' width='142' height='92' rx='10' fill='#F0F5FC' stroke='#1E4FA8' strokeWidth='1.2' /&gt;&#10;      &lt;text x='89' y='140' font-size='16' font-weight='bold' fill='#0E3F8C' text-anchor='middle'&gt;动态任务池&lt;/text&gt;&#10;      &lt;text x='89' y='166' font-size='13' fill='#4A5568' text-anchor='middle'&gt;滚动到达 · 滞留留池&lt;/text&gt;&#10;      &lt;line x1='160' y1='148' x2='216' y2='148' stroke='#1E4FA8' strokeWidth='1.8' markerEnd='url(#ah1)' /&gt;&#10;      &lt;rect x='220' y='30' width='332' height='236' rx='12' fill='#FFFFFF' stroke='#1E4FA8' strokeWidth='1.2' /&gt;&#10;      &lt;rect x='220' y='30' width='332' height='44' rx='12' fill='#1E4FA8' /&gt;&#10;      &lt;rect x='220' y='58' width='332' height='16' fill='#1E4FA8' /&gt;&#10;      &lt;text x='386' y='58' font-size='16' font-weight='bold' fill='#FFFFFF' text-anchor='middle'&gt;第一阶段 · 动态任务选择&lt;/text&gt;&#10;      &lt;rect x='240' y='86' width='292' height='38' rx='7' fill='#F0F5FC' stroke='#3D7BD9' strokeWidth='0.8' /&gt;&#10;      &lt;text x='386' y='110' font-size='13.5' fill='#1A2230' text-anchor='middle'&gt;① 优先级排序 P_i（五因素）&lt;/text&gt;&#10;      &lt;rect x='240' y='130' width='292' height='38' rx='7' fill='#F0F5FC' stroke='#3D7BD9' strokeWidth='0.8' /&gt;&#10;      &lt;text x='386' y='154' font-size='13.5' fill='#1A2230' text-anchor='middle'&gt;② 规模：n_cand富 / n_sel卡cap&lt;/text&gt;&#10;      &lt;rect x='240' y='174' width='292' height='38' rx='7' fill='#F0F5FC' stroke='#3D7BD9' strokeWidth='0.8' /&gt;&#10;      &lt;text x='386' y='198' font-size='13.5' fill='#1A2230' text-anchor='middle'&gt;③ 边际增益 Δ = ΔB / ΔC&lt;/text&gt;&#10;      &lt;rect x='240' y='218' width='292' height='38' rx='7' fill='#F0F5FC' stroke='#3D7BD9' strokeWidth='0.8' /&gt;&#10;      &lt;text x='386' y='242' font-size='13.5' fill='#1A2230' text-anchor='middle'&gt;两道闸门 prefilter / postcheck&lt;/text&gt;&#10;      &lt;line x1='552' y1='237' x2='606' y2='237' stroke='#1E4FA8' strokeWidth='1.8' markerEnd='url(#ah1)' /&gt;&#10;      &lt;text x='579' y='225' font-size='13' font-weight='bold' fill='#1E4FA8' text-anchor='middle'&gt;选择集&lt;/text&gt;&#10;      &lt;rect x='610' y='30' width='332' height='236' rx='12' fill='#FFFFFF' stroke='#1E4FA8' strokeWidth='1.2' /&gt;&#10;      &lt;rect x='610' y='30' width='332' height='44' rx='12' fill='#0E3F8C' /&gt;&#10;      &lt;rect x='610' y='58' width='332' height='16' fill='#0E3F8C' /&gt;&#10;      &lt;text x='776' y='58' font-size='16' font-weight='bold' fill='#FFFFFF' text-anchor='middle'&gt;第二阶段 · 选择性 MUAS&lt;/text&gt;&#10;      &lt;rect x='630' y='90' width='292' height='44' rx='7' fill='#F0F5FC' stroke='#3D7BD9' strokeWidth='0.8' /&gt;&#10;      &lt;text x='776' y='118' font-size='14' fill='#1A2230' text-anchor='middle'&gt;统一编码 + DMDE 进化搜索&lt;/text&gt;&#10;      &lt;line x1='776' y1='134' x2='776' y2='148' stroke='#3D7BD9' strokeWidth='1.2' markerEnd='url(#ah2)' /&gt;&#10;      &lt;rect x='630' y='148' width='292' height='44' rx='7' fill='#F0F5FC' stroke='#3D7BD9' strokeWidth='0.8' /&gt;&#10;      &lt;text x='776' y='176' font-size='14' fill='#1A2230' text-anchor='middle'&gt;解码 + 可行性修复（Lamarckian 回写）&lt;/text&gt;&#10;      &lt;line x1='776' y1='192' x2='776' y2='206' stroke='#3D7BD9' strokeWidth='1.2' markerEnd='url(#ah2)' /&gt;&#10;      &lt;rect x='630' y='206' width='292' height='44' rx='7' fill='#F0F5FC' stroke='#3D7BD9' strokeWidth='0.8' /&gt;&#10;      &lt;text x='776' y='234' font-size='14' fill='#1A2230' text-anchor='middle'&gt;终点机巢：最小费用流精确求解&lt;/text&gt;&#10;      &lt;line x1='942' y1='148' x2='996' y2='148' stroke='#1E4FA8' strokeWidth='1.8' markerEnd='url(#ah1)' /&gt;&#10;      &lt;rect x='1000' y='102' width='142' height='92' rx='10' fill='#E8EFF8' stroke='#1E4FA8' strokeWidth='1.2' /&gt;&#10;      &lt;text x='1071' y='140' font-size='16' font-weight='bold' fill='#0E3F8C' text-anchor='middle'&gt;执行与反馈&lt;/text&gt;&#10;      &lt;text x='1071' y='166' font-size='13' fill='#4A5568' text-anchor='middle'&gt;状态更新 · 事件重规划&lt;/text&gt;&#10;      &lt;path d='M 1071,194 L 1071,266 L 89,266 L 89,198' fill='none' stroke='#3D7BD9' strokeWidth='1.6' strokeDasharray='7 5' markerEnd='url(#ah1)' /&gt;&#10;      &lt;text x='580' y='286' font-size='14' fill='#3D7BD9' text-anchor='middle'&gt;周期 t+1：任务池更新 T(t+1) = remain ∪ new ∪ release，UAV 状态同步更新&lt;/text&gt;&#10;      &lt;defs&gt;&#10;        &lt;marker id='ah1' viewBox='0 0 10 10' refX='8' refY='5' markerWidth='7' markerHeight='7' orient='auto-start-reverse'&gt;&#10;          &lt;path d='M2 1L8 5L2 9' fill='none' stroke='#1E4FA8' strokeWidth='1.6' strokeLinecap='round' strokeLinejoin='round' /&gt;&#10;        &lt;/marker&gt;&#10;        &lt;marker id='ah2' viewBox='0 0 10 10' refX='8' refY='5' markerWidth='6' markerHeight='6' orient='auto-start-reverse'&gt;&#10;          &lt;path d='M2 1L8 5L2 9' fill='none' stroke='#3D7BD9' strokeWidth='1.4' strokeLinecap='round' strokeLinejoin='round' /&gt;&#10;        &lt;/marker&gt;&#10;      &lt;/defs&gt;&#10;    &lt;/svg&gt;&#10;  &lt;/Box&gt;&#10;&#10;  &lt;Box style={{ position: 'absolute', top: 442, left: 60, width: 1160, flexDirection: 'row', gap: 20 }}&gt;&#10;    {[&#10;      { t: '第一阶段：轻量不构造成组合问题', d: '只为「值得考虑的任务」快速排序与筛选，落选任务留池下周期再评——避免对整个动态任务池做昂贵组合搜索，同时保住与执行代价的联系。', tag: '缩空间' },&#10;      { t: '第二阶段：四类决策联合优化', d: '任务是否执行 y × 归属 x × 访问顺序 π × 终点机巢 z 联合确定；起点固定、终点可选、允许部分空闲——这是多机巢动态滚动的 MTSP 变体。', tag: '精优化' },&#10;      { t: '滚动闭环：能力范围内做更多', d: '完成出池、未选留池、故障释放、新任务到达；迟到不等于废飞，完成口径只认物理约束——保证长程运行下的任务不丢失。', tag: '闭环运行' },&#10;    ].map((c) =&gt; (&#10;      &lt;Box key={c.tag} style={{ flex: 1, background: '#F7F9FC', border: '1px solid #D6DCE5', borderTop: '4px solid #1E4FA8', borderRadius: 10, padding: '14px 18px', flexDirection: 'column' }}&gt;&#10;        &lt;Box style={{ flexDirection: 'row', justifyContent: 'space-between', alignItems: 'center' }}&gt;&#10;          &lt;Text style={{ fontSize: 17, fontWeight: 'bold', color: '#0E3F8C' }}&gt;{c.t}&lt;/Text&gt;&#10;          &lt;Text style={{ fontSize: 13, fontWeight: 'bold', color: '#FFFFFF', background: '#3D7BD9', padding: '3px 10px', borderRadius: 10 }}&gt;{c.tag}&lt;/Text&gt;&#10;        &lt;/Box&gt;&#10;        &lt;Text style={{ fontSize: 14, color: '#4A5568', lineHeight: 1.6, marginTop: 8 }}&gt;{c.d}&lt;/Text&gt;&#10;      &lt;/Box&gt;&#10;    ))}&#10;  &lt;/Box&gt;&#10;&#10;  &lt;Box style={{ position: 'absolute', bottom: 0, left: 0, width: 1280, height: 44, background: '#F7F9FC', flexDirection: 'row', justifyContent: 'space-between', alignItems: 'center', padding: '0 40px', borderTop: '1px solid #E5E7EB' }}&gt;&#10;    &lt;Text style={{ fontSize: 13, color: '#8B97A8' }}&gt;动态滚动的多机巢多无人机协同任务分配 · 进展汇报&lt;/Text&gt;&#10;    &lt;Text style={{ fontSize: 15, color: '#1E4FA8', fontWeight: 'bold' }}&gt;05 / 16&lt;/Text&gt;&#10;  &lt;/Box&gt;&#10;&lt;/Slide&gt;&#10;"/>
+        <p:cNvPr id="1" name="" descr="&lt;Slide style={{ width: 1280, height: 720, background: '#FFFFFF', position: 'relative', fontFamily: 'Source Han Sans CN, Microsoft YaHei, sans-serif' }}&gt;&#10;  &lt;Box style={{ position: 'absolute', top: 0, left: 0, width: 1280, height: 12, background: '#1E4FA8' }} /&gt;&#10;  &lt;Box style={{ position: 'absolute', top: 28, left: 40, flexDirection: 'row', alignItems: 'center', gap: 14 }}&gt;&#10;    &lt;Box style={{ width: 6, height: 34, background: '#1E4FA8' }} /&gt;&#10;    &lt;Text style={{ fontSize: 32, fontWeight: 'bold', color: '#0E3F8C' }}&gt;总体求解框架：分层滚动闭环&lt;/Text&gt;&#10;  &lt;/Box&gt;&#10;  &lt;Box style={{ position: 'absolute', top: 74, left: 60, padding: '6px 18px', background: '#0E3F8C', borderRadius: 6 }}&gt;&#10;    &lt;Text style={{ fontSize: 16, fontWeight: 'bold', color: '#FFFFFF' }}&gt;核心主张：快速任务选择缩空间 + 精细 MUAS 组合优化&lt;/Text&gt;&#10;  &lt;/Box&gt;&#10;&#10;  &lt;Box style={{ position: 'absolute', top: 112, left: 60 }}&gt;&#10;    &lt;svg width={1160} height={296} viewBox='0 0 1160 296'&gt;&#10;      &lt;rect x='18' y='102' width='142' height='92' rx='10' fill='#F0F5FC' stroke='#1E4FA8' strokeWidth='1.2' /&gt;&#10;      &lt;text x='89' y='140' font-size='16' font-weight='bold' fill='#0E3F8C' text-anchor='middle'&gt;动态任务池&lt;/text&gt;&#10;      &lt;text x='89' y='166' font-size='13' fill='#4A5568' text-anchor='middle'&gt;滚动到达 · 滞留留池&lt;/text&gt;&#10;      &lt;line x1='160' y1='148' x2='216' y2='148' stroke='#1E4FA8' strokeWidth='1.8' markerEnd='url(#ah1)' /&gt;&#10;      &lt;rect x='220' y='30' width='332' height='236' rx='12' fill='#FFFFFF' stroke='#1E4FA8' strokeWidth='1.2' /&gt;&#10;      &lt;rect x='220' y='30' width='332' height='44' rx='12' fill='#1E4FA8' /&gt;&#10;      &lt;rect x='220' y='58' width='332' height='16' fill='#1E4FA8' /&gt;&#10;      &lt;text x='386' y='58' font-size='16' font-weight='bold' fill='#FFFFFF' text-anchor='middle'&gt;第一阶段 · 动态任务选择&lt;/text&gt;&#10;      &lt;rect x='240' y='86' width='292' height='38' rx='7' fill='#F0F5FC' stroke='#3D7BD9' strokeWidth='0.8' /&gt;&#10;      &lt;text x='386' y='110' font-size='13.5' fill='#1A2230' text-anchor='middle'&gt;① 优先级排序 P_i（五因素）&lt;/text&gt;&#10;      &lt;rect x='240' y='130' width='292' height='38' rx='7' fill='#F0F5FC' stroke='#3D7BD9' strokeWidth='0.8' /&gt;&#10;      &lt;text x='386' y='154' font-size='13.5' fill='#1A2230' text-anchor='middle'&gt;② 规模：n_cand富 / n_sel卡cap&lt;/text&gt;&#10;      &lt;rect x='240' y='174' width='292' height='38' rx='7' fill='#F0F5FC' stroke='#3D7BD9' strokeWidth='0.8' /&gt;&#10;      &lt;text x='386' y='198' font-size='13.5' fill='#1A2230' text-anchor='middle'&gt;③ 边际增益 Δ = ΔB / ΔC&lt;/text&gt;&#10;      &lt;rect x='240' y='218' width='292' height='38' rx='7' fill='#F0F5FC' stroke='#3D7BD9' strokeWidth='0.8' /&gt;&#10;      &lt;text x='386' y='242' font-size='13.5' fill='#1A2230' text-anchor='middle'&gt;两道闸门 prefilter / postcheck&lt;/text&gt;&#10;      &lt;line x1='552' y1='237' x2='606' y2='237' stroke='#1E4FA8' strokeWidth='1.8' markerEnd='url(#ah1)' /&gt;&#10;      &lt;text x='579' y='225' font-size='13' font-weight='bold' fill='#1E4FA8' text-anchor='middle'&gt;选择集&lt;/text&gt;&#10;      &lt;rect x='610' y='30' width='332' height='236' rx='12' fill='#FFFFFF' stroke='#1E4FA8' strokeWidth='1.2' /&gt;&#10;      &lt;rect x='610' y='30' width='332' height='44' rx='12' fill='#0E3F8C' /&gt;&#10;      &lt;rect x='610' y='58' width='332' height='16' fill='#0E3F8C' /&gt;&#10;      &lt;text x='776' y='58' font-size='16' font-weight='bold' fill='#FFFFFF' text-anchor='middle'&gt;第二阶段 · 选择性 MUAS&lt;/text&gt;&#10;      &lt;rect x='630' y='90' width='292' height='44' rx='7' fill='#F0F5FC' stroke='#3D7BD9' strokeWidth='0.8' /&gt;&#10;      &lt;text x='776' y='118' font-size='14' fill='#1A2230' text-anchor='middle'&gt;统一编码 + DMDE 进化搜索&lt;/text&gt;&#10;      &lt;line x1='776' y1='134' x2='776' y2='148' stroke='#3D7BD9' strokeWidth='1.2' markerEnd='url(#ah2)' /&gt;&#10;      &lt;rect x='630' y='148' width='292' height='44' rx='7' fill='#F0F5FC' stroke='#3D7BD9' strokeWidth='0.8' /&gt;&#10;      &lt;text x='776' y='176' font-size='14' fill='#1A2230' text-anchor='middle'&gt;解码 + 可行性修复（Lamarckian 回写）&lt;/text&gt;&#10;      &lt;line x1='776' y1='192' x2='776' y2='206' stroke='#3D7BD9' strokeWidth='1.2' markerEnd='url(#ah2)' /&gt;&#10;      &lt;rect x='630' y='206' width='292' height='44' rx='7' fill='#F0F5FC' stroke='#3D7BD9' strokeWidth='0.8' /&gt;&#10;      &lt;text x='776' y='234' font-size='14' fill='#1A2230' text-anchor='middle'&gt;终点机巢：最小费用流精确求解&lt;/text&gt;&#10;      &lt;line x1='942' y1='148' x2='996' y2='148' stroke='#1E4FA8' strokeWidth='1.8' markerEnd='url(#ah1)' /&gt;&#10;      &lt;rect x='1000' y='102' width='142' height='92' rx='10' fill='#E8EFF8' stroke='#1E4FA8' strokeWidth='1.2' /&gt;&#10;      &lt;text x='1071' y='140' font-size='16' font-weight='bold' fill='#0E3F8C' text-anchor='middle'&gt;执行与反馈&lt;/text&gt;&#10;      &lt;text x='1071' y='166' font-size='13' fill='#4A5568' text-anchor='middle'&gt;状态更新 · 事件重规划&lt;/text&gt;&#10;      &lt;path d='M 1071,194 L 1071,266 L 89,266 L 89,198' fill='none' stroke='#3D7BD9' strokeWidth='1.6' strokeDasharray='7 5' markerEnd='url(#ah1)' /&gt;&#10;      &lt;text x='580' y='286' font-size='14' fill='#3D7BD9' text-anchor='middle'&gt;周期 t+1：任务池更新 T(t+1) = remain ∪ new ∪ release，UAV 状态同步更新&lt;/text&gt;&#10;      &lt;defs&gt;&#10;        &lt;marker id='ah1' viewBox='0 0 10 10' refX='8' refY='5' markerWidth='7' markerHeight='7' orient='auto-start-reverse'&gt;&#10;          &lt;path d='M2 1L8 5L2 9' fill='none' stroke='#1E4FA8' strokeWidth='1.6' strokeLinecap='round' strokeLinejoin='round' /&gt;&#10;        &lt;/marker&gt;&#10;        &lt;marker id='ah2' viewBox='0 0 10 10' refX='8' refY='5' markerWidth='6' markerHeight='6' orient='auto-start-reverse'&gt;&#10;          &lt;path d='M2 1L8 5L2 9' fill='none' stroke='#3D7BD9' strokeWidth='1.4' strokeLinecap='round' strokeLinejoin='round' /&gt;&#10;        &lt;/marker&gt;&#10;      &lt;/defs&gt;&#10;    &lt;/svg&gt;&#10;  &lt;/Box&gt;&#10;&#10;  &lt;Box style={{ position: 'absolute', top: 442, left: 60, width: 1160, flexDirection: 'row', gap: 20 }}&gt;&#10;    {[&#10;      { t: '第一阶段：轻量不构造成组合问题', d: '只为「值得考虑的任务」快速排序与筛选，落选任务留池下周期再评——避免对整个动态任务池做昂贵组合搜索，同时保住与执行代价的联系。', tag: '缩空间' },&#10;      { t: '第二阶段：四类决策联合优化', d: '任务是否执行 y × 归属 x × 访问顺序 π × 终点机巢 z 联合确定；起点固定、终点可选、允许部分空闲——这是多机巢动态滚动的 MTSP 变体。', tag: '精优化' },&#10;      { t: '滚动闭环：能力范围内做更多', d: '完成出池、未选留池、故障释放、新任务到达；迟到不等于废飞，完成口径只认物理约束——保证长程运行下的任务不丢失。', tag: '闭环运行' },&#10;    ].map((c) =&gt; (&#10;      &lt;Box key={c.tag} style={{ flex: 1, background: '#F7F9FC', border: '1px solid #D6DCE5', borderTop: '4px solid #1E4FA8', borderRadius: 10, padding: '14px 18px', flexDirection: 'column' }}&gt;&#10;        &lt;Box style={{ flexDirection: 'row', justifyContent: 'space-between', alignItems: 'center' }}&gt;&#10;          &lt;Text style={{ fontSize: 17, fontWeight: 'bold', color: '#0E3F8C' }}&gt;{c.t}&lt;/Text&gt;&#10;          &lt;Text style={{ fontSize: 13, fontWeight: 'bold', color: '#FFFFFF', background: '#3D7BD9', padding: '3px 10px', borderRadius: 10 }}&gt;{c.tag}&lt;/Text&gt;&#10;        &lt;/Box&gt;&#10;        &lt;Text style={{ fontSize: 14, color: '#4A5568', lineHeight: 1.6, marginTop: 8 }}&gt;{c.d}&lt;/Text&gt;&#10;      &lt;/Box&gt;&#10;    ))}&#10;  &lt;/Box&gt;&#10;&#10;  &lt;Box style={{ position: 'absolute', bottom: 0, left: 0, width: 1280, height: 44, background: '#F7F9FC', flexDirection: 'row', justifyContent: 'space-between', alignItems: 'center', padding: '0 40px', borderTop: '1px solid #E5E7EB' }}&gt;&#10;    &lt;Text style={{ fontSize: 13, color: '#8B97A8' }}&gt;动态滚动的多机巢多无人机协同任务分配 · 进展汇报&lt;/Text&gt;&#10;    &lt;Text style={{ fontSize: 15, color: '#1E4FA8', fontWeight: 'bold' }}&gt;05 / 16&lt;/Text&gt;&#10;  &lt;/Box&gt;&#10;&lt;/Slide&gt;&#10;"/>
         <p:cNvGrpSpPr/>
         <p:nvPr/>
       </p:nvGrpSpPr>
@@ -17340,12 +17209,12 @@
       </p:grpSpPr>
       <p:sp>
         <p:nvSpPr>
-          <p:cNvPr id="320" name=""/>
+          <p:cNvPr id="320" name="矩形 319"/>
           <p:cNvSpPr/>
           <p:nvPr/>
         </p:nvSpPr>
         <p:spPr>
-          <a:xfrm rot="0" flipH="0" flipV="0">
+          <a:xfrm>
             <a:off x="0" y="0"/>
             <a:ext cx="12192000" cy="6858000"/>
           </a:xfrm>
@@ -17359,17 +17228,20 @@
         </p:spPr>
         <p:txBody>
           <a:bodyPr/>
-          <a:p/>
-        </p:txBody>
-      </p:sp>
-      <p:sp>
-        <p:nvSpPr>
-          <p:cNvPr id="321" name=""/>
+          <a:lstStyle/>
+          <a:p>
+            <a:endParaRPr/>
+          </a:p>
+        </p:txBody>
+      </p:sp>
+      <p:sp>
+        <p:nvSpPr>
+          <p:cNvPr id="321" name="矩形 320"/>
           <p:cNvSpPr/>
           <p:nvPr/>
         </p:nvSpPr>
         <p:spPr>
-          <a:xfrm rot="0" flipH="0" flipV="0">
+          <a:xfrm>
             <a:off x="0" y="0"/>
             <a:ext cx="12192000" cy="114300"/>
           </a:xfrm>
@@ -17383,17 +17255,20 @@
         </p:spPr>
         <p:txBody>
           <a:bodyPr/>
-          <a:p/>
-        </p:txBody>
-      </p:sp>
-      <p:sp>
-        <p:nvSpPr>
-          <p:cNvPr id="322" name=""/>
+          <a:lstStyle/>
+          <a:p>
+            <a:endParaRPr/>
+          </a:p>
+        </p:txBody>
+      </p:sp>
+      <p:sp>
+        <p:nvSpPr>
+          <p:cNvPr id="322" name="矩形 321"/>
           <p:cNvSpPr/>
           <p:nvPr/>
         </p:nvSpPr>
         <p:spPr>
-          <a:xfrm rot="0" flipH="0" flipV="0">
+          <a:xfrm>
             <a:off x="381000" y="295275"/>
             <a:ext cx="57150" cy="323850"/>
           </a:xfrm>
@@ -17407,24 +17282,30 @@
         </p:spPr>
         <p:txBody>
           <a:bodyPr/>
-          <a:p/>
-        </p:txBody>
-      </p:sp>
-      <p:sp>
-        <p:nvSpPr>
-          <p:cNvPr id="323" name="" descr="{&quot;isTemplate&quot;:true,&quot;type&quot;:&quot;text&quot;}"/>
+          <a:lstStyle/>
+          <a:p>
+            <a:endParaRPr/>
+          </a:p>
+        </p:txBody>
+      </p:sp>
+      <p:sp>
+        <p:nvSpPr>
+          <p:cNvPr id="323" name="文本框 322" descr="{&quot;isTemplate&quot;:true,&quot;type&quot;:&quot;text&quot;}"/>
           <p:cNvSpPr txBox="1"/>
           <p:nvPr/>
         </p:nvSpPr>
         <p:spPr>
-          <a:xfrm rot="0" flipH="0" flipV="0">
+          <a:xfrm>
             <a:off x="571500" y="266700"/>
             <a:ext cx="3962400" cy="371475"/>
           </a:xfrm>
-          <a:prstGeom prst="rect"/>
+          <a:prstGeom prst="rect">
+            <a:avLst/>
+          </a:prstGeom>
         </p:spPr>
         <p:txBody>
           <a:bodyPr wrap="none" lIns="0" tIns="0" rIns="0" bIns="0"/>
+          <a:lstStyle/>
           <a:p>
             <a:pPr>
               <a:lnSpc>
@@ -17447,12 +17328,12 @@
       </p:sp>
       <p:sp>
         <p:nvSpPr>
-          <p:cNvPr id="324" name=""/>
+          <p:cNvPr id="324" name="矩形: 圆角 323"/>
           <p:cNvSpPr/>
           <p:nvPr/>
         </p:nvSpPr>
         <p:spPr>
-          <a:xfrm rot="0" flipH="0" flipV="0">
+          <a:xfrm>
             <a:off x="571500" y="704850"/>
             <a:ext cx="4171950" cy="304800"/>
           </a:xfrm>
@@ -17468,24 +17349,30 @@
         </p:spPr>
         <p:txBody>
           <a:bodyPr/>
-          <a:p/>
-        </p:txBody>
-      </p:sp>
-      <p:sp>
-        <p:nvSpPr>
-          <p:cNvPr id="325" name="" descr="{&quot;isTemplate&quot;:true,&quot;type&quot;:&quot;text&quot;}"/>
+          <a:lstStyle/>
+          <a:p>
+            <a:endParaRPr/>
+          </a:p>
+        </p:txBody>
+      </p:sp>
+      <p:sp>
+        <p:nvSpPr>
+          <p:cNvPr id="325" name="文本框 324" descr="{&quot;isTemplate&quot;:true,&quot;type&quot;:&quot;text&quot;}"/>
           <p:cNvSpPr txBox="1"/>
           <p:nvPr/>
         </p:nvSpPr>
         <p:spPr>
-          <a:xfrm rot="0" flipH="0" flipV="0">
+          <a:xfrm>
             <a:off x="742950" y="762000"/>
             <a:ext cx="3829050" cy="190500"/>
           </a:xfrm>
-          <a:prstGeom prst="rect"/>
+          <a:prstGeom prst="rect">
+            <a:avLst/>
+          </a:prstGeom>
         </p:spPr>
         <p:txBody>
           <a:bodyPr wrap="none" lIns="0" tIns="0" rIns="0" bIns="0"/>
+          <a:lstStyle/>
           <a:p>
             <a:pPr>
               <a:lnSpc>
@@ -17510,7 +17397,7 @@
                 <a:latin typeface="Source Han Sans CN"/>
                 <a:ea typeface="Source Han Sans CN"/>
               </a:rPr>
-              <a:t xml:space="preserve"> + </a:t>
+              <a:t> + </a:t>
             </a:r>
             <a:r>
               <a:rPr lang="zh-CN" sz="1200" b="1">
@@ -17530,7 +17417,7 @@
                 <a:latin typeface="Source Han Sans CN"/>
                 <a:ea typeface="Source Han Sans CN"/>
               </a:rPr>
-              <a:t xml:space="preserve"> MUAS </a:t>
+              <a:t> MUAS </a:t>
             </a:r>
             <a:r>
               <a:rPr lang="zh-CN" sz="1200" b="1">
@@ -17548,17 +17435,17 @@
       </p:sp>
       <p:pic>
         <p:nvPicPr>
-          <p:cNvPr id="326" name=""/>
+          <p:cNvPr id="326" name="图形 325"/>
           <p:cNvPicPr>
             <a:picLocks noChangeAspect="1"/>
           </p:cNvPicPr>
           <p:nvPr/>
         </p:nvPicPr>
         <p:blipFill>
-          <a:blip>
+          <a:blip r:embed="rId2">
             <a:extLst>
               <a:ext uri="{96DAC541-7B7A-43D3-8B79-37D633B846F1}">
-                <asvg:svgBlip r:embed="rId1"/>
+                <asvg:svgBlip xmlns:asvg="http://schemas.microsoft.com/office/drawing/2016/SVG/main" r:embed="rId3"/>
               </a:ext>
             </a:extLst>
           </a:blip>
@@ -17567,7 +17454,7 @@
           </a:stretch>
         </p:blipFill>
         <p:spPr>
-          <a:xfrm rot="0" flipH="0" flipV="0">
+          <a:xfrm>
             <a:off x="571500" y="1066800"/>
             <a:ext cx="11049000" cy="2819400"/>
           </a:xfrm>
@@ -17579,12 +17466,12 @@
       </p:pic>
       <p:sp>
         <p:nvSpPr>
-          <p:cNvPr id="327" name=""/>
+          <p:cNvPr id="327" name="矩形: 圆角 326"/>
           <p:cNvSpPr/>
           <p:nvPr/>
         </p:nvSpPr>
         <p:spPr>
-          <a:xfrm rot="0" flipH="0" flipV="0">
+          <a:xfrm>
             <a:off x="571500" y="4248150"/>
             <a:ext cx="3552825" cy="1362075"/>
           </a:xfrm>
@@ -17600,21 +17487,29 @@
         </p:spPr>
         <p:txBody>
           <a:bodyPr/>
-          <a:p/>
-        </p:txBody>
-      </p:sp>
-      <p:sp>
-        <p:nvSpPr>
-          <p:cNvPr id="328" name=""/>
+          <a:lstStyle/>
+          <a:p>
+            <a:endParaRPr/>
+          </a:p>
+        </p:txBody>
+      </p:sp>
+      <p:sp>
+        <p:nvSpPr>
+          <p:cNvPr id="328" name="任意多边形: 形状 327"/>
           <p:cNvSpPr/>
           <p:nvPr/>
         </p:nvSpPr>
         <p:spPr>
-          <a:xfrm rot="0" flipH="0" flipV="0">
+          <a:xfrm>
             <a:off x="571500" y="4248150"/>
             <a:ext cx="3552825" cy="1362075"/>
           </a:xfrm>
           <a:custGeom>
+            <a:avLst/>
+            <a:gdLst/>
+            <a:ahLst/>
+            <a:cxnLst/>
+            <a:rect l="0" t="0" r="0" b="0"/>
             <a:pathLst>
               <a:path w="373" h="143">
                 <a:moveTo>
@@ -17657,24 +17552,30 @@
         </p:spPr>
         <p:txBody>
           <a:bodyPr/>
-          <a:p/>
-        </p:txBody>
-      </p:sp>
-      <p:sp>
-        <p:nvSpPr>
-          <p:cNvPr id="329" name="" descr="{&quot;isTemplate&quot;:true,&quot;type&quot;:&quot;text&quot;}"/>
+          <a:lstStyle/>
+          <a:p>
+            <a:endParaRPr/>
+          </a:p>
+        </p:txBody>
+      </p:sp>
+      <p:sp>
+        <p:nvSpPr>
+          <p:cNvPr id="329" name="文本框 328" descr="{&quot;isTemplate&quot;:true,&quot;type&quot;:&quot;text&quot;}"/>
           <p:cNvSpPr txBox="1"/>
           <p:nvPr/>
         </p:nvSpPr>
         <p:spPr>
-          <a:xfrm rot="0" flipH="0" flipV="0">
+          <a:xfrm>
             <a:off x="742950" y="4391025"/>
             <a:ext cx="2428875" cy="200025"/>
           </a:xfrm>
-          <a:prstGeom prst="rect"/>
+          <a:prstGeom prst="rect">
+            <a:avLst/>
+          </a:prstGeom>
         </p:spPr>
         <p:txBody>
           <a:bodyPr wrap="none" lIns="0" tIns="0" rIns="0" bIns="0"/>
+          <a:lstStyle/>
           <a:p>
             <a:pPr>
               <a:lnSpc>
@@ -17697,12 +17598,12 @@
       </p:sp>
       <p:sp>
         <p:nvSpPr>
-          <p:cNvPr id="330" name=""/>
+          <p:cNvPr id="330" name="矩形: 圆角 329"/>
           <p:cNvSpPr/>
           <p:nvPr/>
         </p:nvSpPr>
         <p:spPr>
-          <a:xfrm rot="0" flipH="0" flipV="0">
+          <a:xfrm>
             <a:off x="3390900" y="4381500"/>
             <a:ext cx="561975" cy="209550"/>
           </a:xfrm>
@@ -17718,24 +17619,30 @@
         </p:spPr>
         <p:txBody>
           <a:bodyPr/>
-          <a:p/>
-        </p:txBody>
-      </p:sp>
-      <p:sp>
-        <p:nvSpPr>
-          <p:cNvPr id="331" name="" descr="{&quot;isTemplate&quot;:true,&quot;type&quot;:&quot;text&quot;}"/>
+          <a:lstStyle/>
+          <a:p>
+            <a:endParaRPr/>
+          </a:p>
+        </p:txBody>
+      </p:sp>
+      <p:sp>
+        <p:nvSpPr>
+          <p:cNvPr id="331" name="文本框 330" descr="{&quot;isTemplate&quot;:true,&quot;type&quot;:&quot;text&quot;}"/>
           <p:cNvSpPr txBox="1"/>
           <p:nvPr/>
         </p:nvSpPr>
         <p:spPr>
-          <a:xfrm rot="0" flipH="0" flipV="0">
+          <a:xfrm>
             <a:off x="3390900" y="4381500"/>
             <a:ext cx="561975" cy="209550"/>
           </a:xfrm>
-          <a:prstGeom prst="rect"/>
+          <a:prstGeom prst="rect">
+            <a:avLst/>
+          </a:prstGeom>
         </p:spPr>
         <p:txBody>
           <a:bodyPr wrap="none" lIns="71438" tIns="21431" rIns="71438" bIns="21431"/>
+          <a:lstStyle/>
           <a:p>
             <a:pPr>
               <a:lnSpc>
@@ -17761,21 +17668,24 @@
       </p:sp>
       <p:sp>
         <p:nvSpPr>
-          <p:cNvPr id="332" name="" descr="{&quot;isTemplate&quot;:true,&quot;type&quot;:&quot;text&quot;}"/>
+          <p:cNvPr id="332" name="文本框 331" descr="{&quot;isTemplate&quot;:true,&quot;type&quot;:&quot;text&quot;}"/>
           <p:cNvSpPr txBox="1"/>
           <p:nvPr/>
         </p:nvSpPr>
         <p:spPr>
-          <a:xfrm rot="0" flipH="0" flipV="0">
+          <a:xfrm>
             <a:off x="742950" y="4667250"/>
             <a:ext cx="3209925" cy="771525"/>
           </a:xfrm>
-          <a:prstGeom prst="rect"/>
+          <a:prstGeom prst="rect">
+            <a:avLst/>
+          </a:prstGeom>
         </p:spPr>
         <p:txBody>
           <a:bodyPr wrap="square" lIns="0" tIns="0" rIns="0" bIns="0">
             <a:normAutofit/>
           </a:bodyPr>
+          <a:lstStyle/>
           <a:p>
             <a:pPr>
               <a:lnSpc>
@@ -17798,12 +17708,12 @@
       </p:sp>
       <p:sp>
         <p:nvSpPr>
-          <p:cNvPr id="333" name=""/>
+          <p:cNvPr id="333" name="矩形: 圆角 332"/>
           <p:cNvSpPr/>
           <p:nvPr/>
         </p:nvSpPr>
         <p:spPr>
-          <a:xfrm rot="0" flipH="0" flipV="0">
+          <a:xfrm>
             <a:off x="4314825" y="4248150"/>
             <a:ext cx="3562350" cy="1362075"/>
           </a:xfrm>
@@ -17819,21 +17729,29 @@
         </p:spPr>
         <p:txBody>
           <a:bodyPr/>
-          <a:p/>
-        </p:txBody>
-      </p:sp>
-      <p:sp>
-        <p:nvSpPr>
-          <p:cNvPr id="334" name=""/>
+          <a:lstStyle/>
+          <a:p>
+            <a:endParaRPr/>
+          </a:p>
+        </p:txBody>
+      </p:sp>
+      <p:sp>
+        <p:nvSpPr>
+          <p:cNvPr id="334" name="任意多边形: 形状 333"/>
           <p:cNvSpPr/>
           <p:nvPr/>
         </p:nvSpPr>
         <p:spPr>
-          <a:xfrm rot="0" flipH="0" flipV="0">
+          <a:xfrm>
             <a:off x="4314825" y="4248150"/>
             <a:ext cx="3562350" cy="1362075"/>
           </a:xfrm>
           <a:custGeom>
+            <a:avLst/>
+            <a:gdLst/>
+            <a:ahLst/>
+            <a:cxnLst/>
+            <a:rect l="0" t="0" r="0" b="0"/>
             <a:pathLst>
               <a:path w="374" h="143">
                 <a:moveTo>
@@ -17876,24 +17794,30 @@
         </p:spPr>
         <p:txBody>
           <a:bodyPr/>
-          <a:p/>
-        </p:txBody>
-      </p:sp>
-      <p:sp>
-        <p:nvSpPr>
-          <p:cNvPr id="335" name="" descr="{&quot;isTemplate&quot;:true,&quot;type&quot;:&quot;text&quot;}"/>
+          <a:lstStyle/>
+          <a:p>
+            <a:endParaRPr/>
+          </a:p>
+        </p:txBody>
+      </p:sp>
+      <p:sp>
+        <p:nvSpPr>
+          <p:cNvPr id="335" name="文本框 334" descr="{&quot;isTemplate&quot;:true,&quot;type&quot;:&quot;text&quot;}"/>
           <p:cNvSpPr txBox="1"/>
           <p:nvPr/>
         </p:nvSpPr>
         <p:spPr>
-          <a:xfrm rot="0" flipH="0" flipV="0">
+          <a:xfrm>
             <a:off x="4486275" y="4391025"/>
             <a:ext cx="2105025" cy="200025"/>
           </a:xfrm>
-          <a:prstGeom prst="rect"/>
+          <a:prstGeom prst="rect">
+            <a:avLst/>
+          </a:prstGeom>
         </p:spPr>
         <p:txBody>
           <a:bodyPr wrap="none" lIns="0" tIns="0" rIns="0" bIns="0"/>
+          <a:lstStyle/>
           <a:p>
             <a:pPr>
               <a:lnSpc>
@@ -17916,12 +17840,12 @@
       </p:sp>
       <p:sp>
         <p:nvSpPr>
-          <p:cNvPr id="336" name=""/>
+          <p:cNvPr id="336" name="矩形: 圆角 335"/>
           <p:cNvSpPr/>
           <p:nvPr/>
         </p:nvSpPr>
         <p:spPr>
-          <a:xfrm rot="0" flipH="0" flipV="0">
+          <a:xfrm>
             <a:off x="7143750" y="4381500"/>
             <a:ext cx="561975" cy="209550"/>
           </a:xfrm>
@@ -17937,24 +17861,30 @@
         </p:spPr>
         <p:txBody>
           <a:bodyPr/>
-          <a:p/>
-        </p:txBody>
-      </p:sp>
-      <p:sp>
-        <p:nvSpPr>
-          <p:cNvPr id="337" name="" descr="{&quot;isTemplate&quot;:true,&quot;type&quot;:&quot;text&quot;}"/>
+          <a:lstStyle/>
+          <a:p>
+            <a:endParaRPr/>
+          </a:p>
+        </p:txBody>
+      </p:sp>
+      <p:sp>
+        <p:nvSpPr>
+          <p:cNvPr id="337" name="文本框 336" descr="{&quot;isTemplate&quot;:true,&quot;type&quot;:&quot;text&quot;}"/>
           <p:cNvSpPr txBox="1"/>
           <p:nvPr/>
         </p:nvSpPr>
         <p:spPr>
-          <a:xfrm rot="0" flipH="0" flipV="0">
+          <a:xfrm>
             <a:off x="7143750" y="4381500"/>
             <a:ext cx="561975" cy="209550"/>
           </a:xfrm>
-          <a:prstGeom prst="rect"/>
+          <a:prstGeom prst="rect">
+            <a:avLst/>
+          </a:prstGeom>
         </p:spPr>
         <p:txBody>
           <a:bodyPr wrap="none" lIns="71438" tIns="21431" rIns="71438" bIns="21431"/>
+          <a:lstStyle/>
           <a:p>
             <a:pPr>
               <a:lnSpc>
@@ -17980,21 +17910,24 @@
       </p:sp>
       <p:sp>
         <p:nvSpPr>
-          <p:cNvPr id="338" name="" descr="{&quot;isTemplate&quot;:true,&quot;type&quot;:&quot;text&quot;}"/>
+          <p:cNvPr id="338" name="文本框 337" descr="{&quot;isTemplate&quot;:true,&quot;type&quot;:&quot;text&quot;}"/>
           <p:cNvSpPr txBox="1"/>
           <p:nvPr/>
         </p:nvSpPr>
         <p:spPr>
-          <a:xfrm rot="0" flipH="0" flipV="0">
+          <a:xfrm>
             <a:off x="4486275" y="4667250"/>
             <a:ext cx="3219450" cy="771525"/>
           </a:xfrm>
-          <a:prstGeom prst="rect"/>
+          <a:prstGeom prst="rect">
+            <a:avLst/>
+          </a:prstGeom>
         </p:spPr>
         <p:txBody>
           <a:bodyPr wrap="square" lIns="0" tIns="0" rIns="0" bIns="0">
             <a:normAutofit/>
           </a:bodyPr>
+          <a:lstStyle/>
           <a:p>
             <a:pPr>
               <a:lnSpc>
@@ -18019,7 +17952,7 @@
                 <a:latin typeface="Source Han Sans CN"/>
                 <a:ea typeface="Source Han Sans CN"/>
               </a:rPr>
-              <a:t xml:space="preserve"> y × </a:t>
+              <a:t> y × </a:t>
             </a:r>
             <a:r>
               <a:rPr lang="zh-CN" sz="1050">
@@ -18039,7 +17972,7 @@
                 <a:latin typeface="Source Han Sans CN"/>
                 <a:ea typeface="Source Han Sans CN"/>
               </a:rPr>
-              <a:t xml:space="preserve"> x × </a:t>
+              <a:t> x × </a:t>
             </a:r>
             <a:r>
               <a:rPr lang="zh-CN" sz="1050">
@@ -18059,7 +17992,7 @@
                 <a:latin typeface="Source Han Sans CN"/>
                 <a:ea typeface="Source Han Sans CN"/>
               </a:rPr>
-              <a:t xml:space="preserve"> π × </a:t>
+              <a:t> π × </a:t>
             </a:r>
             <a:r>
               <a:rPr lang="zh-CN" sz="1050">
@@ -18079,7 +18012,7 @@
                 <a:latin typeface="Source Han Sans CN"/>
                 <a:ea typeface="Source Han Sans CN"/>
               </a:rPr>
-              <a:t xml:space="preserve"> z </a:t>
+              <a:t> z </a:t>
             </a:r>
             <a:r>
               <a:rPr lang="zh-CN" sz="1050">
@@ -18099,7 +18032,7 @@
                 <a:latin typeface="Source Han Sans CN"/>
                 <a:ea typeface="Source Han Sans CN"/>
               </a:rPr>
-              <a:t xml:space="preserve"> MTSP </a:t>
+              <a:t> MTSP </a:t>
             </a:r>
             <a:r>
               <a:rPr lang="zh-CN" sz="1050">
@@ -18117,12 +18050,12 @@
       </p:sp>
       <p:sp>
         <p:nvSpPr>
-          <p:cNvPr id="339" name=""/>
+          <p:cNvPr id="339" name="矩形: 圆角 338"/>
           <p:cNvSpPr/>
           <p:nvPr/>
         </p:nvSpPr>
         <p:spPr>
-          <a:xfrm rot="0" flipH="0" flipV="0">
+          <a:xfrm>
             <a:off x="8067675" y="4248150"/>
             <a:ext cx="3552825" cy="1362075"/>
           </a:xfrm>
@@ -18138,21 +18071,29 @@
         </p:spPr>
         <p:txBody>
           <a:bodyPr/>
-          <a:p/>
-        </p:txBody>
-      </p:sp>
-      <p:sp>
-        <p:nvSpPr>
-          <p:cNvPr id="340" name=""/>
+          <a:lstStyle/>
+          <a:p>
+            <a:endParaRPr/>
+          </a:p>
+        </p:txBody>
+      </p:sp>
+      <p:sp>
+        <p:nvSpPr>
+          <p:cNvPr id="340" name="任意多边形: 形状 339"/>
           <p:cNvSpPr/>
           <p:nvPr/>
         </p:nvSpPr>
         <p:spPr>
-          <a:xfrm rot="0" flipH="0" flipV="0">
+          <a:xfrm>
             <a:off x="8067675" y="4248150"/>
             <a:ext cx="3552825" cy="1362075"/>
           </a:xfrm>
           <a:custGeom>
+            <a:avLst/>
+            <a:gdLst/>
+            <a:ahLst/>
+            <a:cxnLst/>
+            <a:rect l="0" t="0" r="0" b="0"/>
             <a:pathLst>
               <a:path w="373" h="143">
                 <a:moveTo>
@@ -18195,24 +18136,30 @@
         </p:spPr>
         <p:txBody>
           <a:bodyPr/>
-          <a:p/>
-        </p:txBody>
-      </p:sp>
-      <p:sp>
-        <p:nvSpPr>
-          <p:cNvPr id="341" name="" descr="{&quot;isTemplate&quot;:true,&quot;type&quot;:&quot;text&quot;}"/>
+          <a:lstStyle/>
+          <a:p>
+            <a:endParaRPr/>
+          </a:p>
+        </p:txBody>
+      </p:sp>
+      <p:sp>
+        <p:nvSpPr>
+          <p:cNvPr id="341" name="文本框 340" descr="{&quot;isTemplate&quot;:true,&quot;type&quot;:&quot;text&quot;}"/>
           <p:cNvSpPr txBox="1"/>
           <p:nvPr/>
         </p:nvSpPr>
         <p:spPr>
-          <a:xfrm rot="0" flipH="0" flipV="0">
+          <a:xfrm>
             <a:off x="8239125" y="4391025"/>
             <a:ext cx="2105025" cy="200025"/>
           </a:xfrm>
-          <a:prstGeom prst="rect"/>
+          <a:prstGeom prst="rect">
+            <a:avLst/>
+          </a:prstGeom>
         </p:spPr>
         <p:txBody>
           <a:bodyPr wrap="none" lIns="0" tIns="0" rIns="0" bIns="0"/>
+          <a:lstStyle/>
           <a:p>
             <a:pPr>
               <a:lnSpc>
@@ -18235,12 +18182,12 @@
       </p:sp>
       <p:sp>
         <p:nvSpPr>
-          <p:cNvPr id="342" name=""/>
+          <p:cNvPr id="342" name="矩形: 圆角 341"/>
           <p:cNvSpPr/>
           <p:nvPr/>
         </p:nvSpPr>
         <p:spPr>
-          <a:xfrm rot="0" flipH="0" flipV="0">
+          <a:xfrm>
             <a:off x="10763250" y="4381500"/>
             <a:ext cx="685800" cy="209550"/>
           </a:xfrm>
@@ -18256,24 +18203,30 @@
         </p:spPr>
         <p:txBody>
           <a:bodyPr/>
-          <a:p/>
-        </p:txBody>
-      </p:sp>
-      <p:sp>
-        <p:nvSpPr>
-          <p:cNvPr id="343" name="" descr="{&quot;isTemplate&quot;:true,&quot;type&quot;:&quot;text&quot;}"/>
+          <a:lstStyle/>
+          <a:p>
+            <a:endParaRPr/>
+          </a:p>
+        </p:txBody>
+      </p:sp>
+      <p:sp>
+        <p:nvSpPr>
+          <p:cNvPr id="343" name="文本框 342" descr="{&quot;isTemplate&quot;:true,&quot;type&quot;:&quot;text&quot;}"/>
           <p:cNvSpPr txBox="1"/>
           <p:nvPr/>
         </p:nvSpPr>
         <p:spPr>
-          <a:xfrm rot="0" flipH="0" flipV="0">
+          <a:xfrm>
             <a:off x="10763250" y="4381500"/>
             <a:ext cx="685800" cy="209550"/>
           </a:xfrm>
-          <a:prstGeom prst="rect"/>
+          <a:prstGeom prst="rect">
+            <a:avLst/>
+          </a:prstGeom>
         </p:spPr>
         <p:txBody>
           <a:bodyPr wrap="none" lIns="71438" tIns="21431" rIns="71438" bIns="21431"/>
+          <a:lstStyle/>
           <a:p>
             <a:pPr>
               <a:lnSpc>
@@ -18299,21 +18252,24 @@
       </p:sp>
       <p:sp>
         <p:nvSpPr>
-          <p:cNvPr id="344" name="" descr="{&quot;isTemplate&quot;:true,&quot;type&quot;:&quot;text&quot;}"/>
+          <p:cNvPr id="344" name="文本框 343" descr="{&quot;isTemplate&quot;:true,&quot;type&quot;:&quot;text&quot;}"/>
           <p:cNvSpPr txBox="1"/>
           <p:nvPr/>
         </p:nvSpPr>
         <p:spPr>
-          <a:xfrm rot="0" flipH="0" flipV="0">
+          <a:xfrm>
             <a:off x="8239125" y="4667250"/>
             <a:ext cx="3209925" cy="771525"/>
           </a:xfrm>
-          <a:prstGeom prst="rect"/>
+          <a:prstGeom prst="rect">
+            <a:avLst/>
+          </a:prstGeom>
         </p:spPr>
         <p:txBody>
           <a:bodyPr wrap="square" lIns="0" tIns="0" rIns="0" bIns="0">
             <a:normAutofit/>
           </a:bodyPr>
+          <a:lstStyle/>
           <a:p>
             <a:pPr>
               <a:lnSpc>
@@ -18336,12 +18292,12 @@
       </p:sp>
       <p:sp>
         <p:nvSpPr>
-          <p:cNvPr id="345" name=""/>
+          <p:cNvPr id="345" name="矩形 344"/>
           <p:cNvSpPr/>
           <p:nvPr/>
         </p:nvSpPr>
         <p:spPr>
-          <a:xfrm rot="0" flipH="0" flipV="0">
+          <a:xfrm>
             <a:off x="0" y="6448425"/>
             <a:ext cx="12192000" cy="409575"/>
           </a:xfrm>
@@ -18355,21 +18311,29 @@
         </p:spPr>
         <p:txBody>
           <a:bodyPr/>
-          <a:p/>
-        </p:txBody>
-      </p:sp>
-      <p:sp>
-        <p:nvSpPr>
-          <p:cNvPr id="346" name=""/>
+          <a:lstStyle/>
+          <a:p>
+            <a:endParaRPr/>
+          </a:p>
+        </p:txBody>
+      </p:sp>
+      <p:sp>
+        <p:nvSpPr>
+          <p:cNvPr id="346" name="任意多边形: 形状 345"/>
           <p:cNvSpPr/>
           <p:nvPr/>
         </p:nvSpPr>
         <p:spPr>
-          <a:xfrm rot="0" flipH="0" flipV="0">
+          <a:xfrm>
             <a:off x="0" y="6438900"/>
             <a:ext cx="12192000" cy="419100"/>
           </a:xfrm>
           <a:custGeom>
+            <a:avLst/>
+            <a:gdLst/>
+            <a:ahLst/>
+            <a:cxnLst/>
+            <a:rect l="0" t="0" r="0" b="0"/>
             <a:pathLst>
               <a:path w="1280" h="44">
                 <a:moveTo>
@@ -18395,24 +18359,30 @@
         </p:spPr>
         <p:txBody>
           <a:bodyPr/>
-          <a:p/>
-        </p:txBody>
-      </p:sp>
-      <p:sp>
-        <p:nvSpPr>
-          <p:cNvPr id="347" name="" descr="{&quot;isTemplate&quot;:true,&quot;type&quot;:&quot;text&quot;}"/>
+          <a:lstStyle/>
+          <a:p>
+            <a:endParaRPr/>
+          </a:p>
+        </p:txBody>
+      </p:sp>
+      <p:sp>
+        <p:nvSpPr>
+          <p:cNvPr id="347" name="文本框 346" descr="{&quot;isTemplate&quot;:true,&quot;type&quot;:&quot;text&quot;}"/>
           <p:cNvSpPr txBox="1"/>
           <p:nvPr/>
         </p:nvSpPr>
         <p:spPr>
-          <a:xfrm rot="0" flipH="0" flipV="0">
+          <a:xfrm>
             <a:off x="381000" y="6581775"/>
             <a:ext cx="2828925" cy="152400"/>
           </a:xfrm>
-          <a:prstGeom prst="rect"/>
+          <a:prstGeom prst="rect">
+            <a:avLst/>
+          </a:prstGeom>
         </p:spPr>
         <p:txBody>
           <a:bodyPr wrap="none" lIns="0" tIns="0" rIns="0" bIns="0"/>
+          <a:lstStyle/>
           <a:p>
             <a:pPr>
               <a:lnSpc>
@@ -18437,7 +18407,7 @@
                 <a:latin typeface="Source Han Sans CN"/>
                 <a:ea typeface="Source Han Sans CN"/>
               </a:rPr>
-              <a:t xml:space="preserve"> · </a:t>
+              <a:t> · </a:t>
             </a:r>
             <a:r>
               <a:rPr lang="zh-CN" sz="975">
@@ -18455,19 +18425,22 @@
       </p:sp>
       <p:sp>
         <p:nvSpPr>
-          <p:cNvPr id="348" name="" descr="{&quot;isTemplate&quot;:true,&quot;type&quot;:&quot;text&quot;}"/>
+          <p:cNvPr id="348" name="文本框 347" descr="{&quot;isTemplate&quot;:true,&quot;type&quot;:&quot;text&quot;}"/>
           <p:cNvSpPr txBox="1"/>
           <p:nvPr/>
         </p:nvSpPr>
         <p:spPr>
-          <a:xfrm rot="0" flipH="0" flipV="0">
+          <a:xfrm>
             <a:off x="11296650" y="6572250"/>
             <a:ext cx="514350" cy="171450"/>
           </a:xfrm>
-          <a:prstGeom prst="rect"/>
+          <a:prstGeom prst="rect">
+            <a:avLst/>
+          </a:prstGeom>
         </p:spPr>
         <p:txBody>
           <a:bodyPr wrap="none" lIns="0" tIns="0" rIns="0" bIns="0"/>
+          <a:lstStyle/>
           <a:p>
             <a:pPr>
               <a:lnSpc>
@@ -18490,15 +18463,18 @@
       </p:sp>
     </p:spTree>
   </p:cSld>
+  <p:clrMapOvr>
+    <a:masterClrMapping/>
+  </p:clrMapOvr>
 </p:sld>
 </file>
 
 <file path=ppt/slides/slide6.xml><?xml version="1.0" encoding="utf-8"?>
-<p:sld xmlns:p="http://schemas.openxmlformats.org/presentationml/2006/main" xmlns:a="http://schemas.openxmlformats.org/drawingml/2006/main">
+<p:sld xmlns:a="http://schemas.openxmlformats.org/drawingml/2006/main" xmlns:r="http://schemas.openxmlformats.org/officeDocument/2006/relationships" xmlns:p="http://schemas.openxmlformats.org/presentationml/2006/main">
   <p:cSld>
     <p:spTree>
       <p:nvGrpSpPr>
-        <p:cNvPr id="349" name=""/>
+        <p:cNvPr id="1" name=""/>
         <p:cNvGrpSpPr/>
         <p:nvPr/>
       </p:nvGrpSpPr>
@@ -18512,12 +18488,12 @@
       </p:grpSpPr>
       <p:sp>
         <p:nvSpPr>
-          <p:cNvPr id="350" name=""/>
+          <p:cNvPr id="350" name="矩形 349"/>
           <p:cNvSpPr/>
           <p:nvPr/>
         </p:nvSpPr>
         <p:spPr>
-          <a:xfrm rot="0" flipH="0" flipV="0">
+          <a:xfrm>
             <a:off x="0" y="0"/>
             <a:ext cx="12192000" cy="6858000"/>
           </a:xfrm>
@@ -18531,20 +18507,20 @@
         </p:spPr>
         <p:txBody>
           <a:bodyPr/>
-          <a:p>
-            <a:pPr/>
-            <a:endParaRPr/>
-          </a:p>
-        </p:txBody>
-      </p:sp>
-      <p:sp>
-        <p:nvSpPr>
-          <p:cNvPr id="351" name=""/>
+          <a:lstStyle/>
+          <a:p>
+            <a:endParaRPr/>
+          </a:p>
+        </p:txBody>
+      </p:sp>
+      <p:sp>
+        <p:nvSpPr>
+          <p:cNvPr id="351" name="矩形 350"/>
           <p:cNvSpPr/>
           <p:nvPr/>
         </p:nvSpPr>
         <p:spPr>
-          <a:xfrm rot="0" flipH="0" flipV="0">
+          <a:xfrm>
             <a:off x="0" y="0"/>
             <a:ext cx="12192000" cy="114300"/>
           </a:xfrm>
@@ -18558,27 +18534,30 @@
         </p:spPr>
         <p:txBody>
           <a:bodyPr/>
-          <a:p>
-            <a:pPr/>
-            <a:endParaRPr/>
-          </a:p>
-        </p:txBody>
-      </p:sp>
-      <p:sp>
-        <p:nvSpPr>
-          <p:cNvPr id="352" name="" descr="{&quot;isTemplate&quot;:true,&quot;type&quot;:&quot;text&quot;}"/>
+          <a:lstStyle/>
+          <a:p>
+            <a:endParaRPr/>
+          </a:p>
+        </p:txBody>
+      </p:sp>
+      <p:sp>
+        <p:nvSpPr>
+          <p:cNvPr id="352" name="文本框 351" descr="{&quot;isTemplate&quot;:true,&quot;type&quot;:&quot;text&quot;}"/>
           <p:cNvSpPr txBox="1"/>
           <p:nvPr/>
         </p:nvSpPr>
         <p:spPr>
-          <a:xfrm rot="0" flipH="0" flipV="0">
+          <a:xfrm>
             <a:off x="7734300" y="1238250"/>
             <a:ext cx="3886200" cy="3771900"/>
           </a:xfrm>
-          <a:prstGeom prst="rect"/>
+          <a:prstGeom prst="rect">
+            <a:avLst/>
+          </a:prstGeom>
         </p:spPr>
         <p:txBody>
           <a:bodyPr wrap="none" lIns="0" tIns="0" rIns="0" bIns="0"/>
+          <a:lstStyle/>
           <a:p>
             <a:pPr>
               <a:lnSpc>
@@ -18601,12 +18580,12 @@
       </p:sp>
       <p:sp>
         <p:nvSpPr>
-          <p:cNvPr id="353" name=""/>
+          <p:cNvPr id="353" name="矩形 352"/>
           <p:cNvSpPr/>
           <p:nvPr/>
         </p:nvSpPr>
         <p:spPr>
-          <a:xfrm rot="0" flipH="0" flipV="0">
+          <a:xfrm>
             <a:off x="762000" y="1990725"/>
             <a:ext cx="381000" cy="38100"/>
           </a:xfrm>
@@ -18620,27 +18599,30 @@
         </p:spPr>
         <p:txBody>
           <a:bodyPr/>
-          <a:p>
-            <a:pPr/>
-            <a:endParaRPr/>
-          </a:p>
-        </p:txBody>
-      </p:sp>
-      <p:sp>
-        <p:nvSpPr>
-          <p:cNvPr id="354" name="" descr="{&quot;isTemplate&quot;:true,&quot;type&quot;:&quot;text&quot;}"/>
+          <a:lstStyle/>
+          <a:p>
+            <a:endParaRPr/>
+          </a:p>
+        </p:txBody>
+      </p:sp>
+      <p:sp>
+        <p:nvSpPr>
+          <p:cNvPr id="354" name="文本框 353" descr="{&quot;isTemplate&quot;:true,&quot;type&quot;:&quot;text&quot;}"/>
           <p:cNvSpPr txBox="1"/>
           <p:nvPr/>
         </p:nvSpPr>
         <p:spPr>
-          <a:xfrm rot="0" flipH="0" flipV="0">
+          <a:xfrm>
             <a:off x="1276350" y="1905000"/>
             <a:ext cx="1457325" cy="200025"/>
           </a:xfrm>
-          <a:prstGeom prst="rect"/>
+          <a:prstGeom prst="rect">
+            <a:avLst/>
+          </a:prstGeom>
         </p:spPr>
         <p:txBody>
           <a:bodyPr wrap="none" lIns="0" tIns="0" rIns="0" bIns="0"/>
+          <a:lstStyle/>
           <a:p>
             <a:pPr>
               <a:lnSpc>
@@ -18663,19 +18645,22 @@
       </p:sp>
       <p:sp>
         <p:nvSpPr>
-          <p:cNvPr id="355" name="" descr="{&quot;isTemplate&quot;:true,&quot;type&quot;:&quot;text&quot;}"/>
+          <p:cNvPr id="355" name="文本框 354" descr="{&quot;isTemplate&quot;:true,&quot;type&quot;:&quot;text&quot;}"/>
           <p:cNvSpPr txBox="1"/>
           <p:nvPr/>
         </p:nvSpPr>
         <p:spPr>
-          <a:xfrm rot="0" flipH="0" flipV="0">
+          <a:xfrm>
             <a:off x="762000" y="2276475"/>
             <a:ext cx="7239000" cy="504825"/>
           </a:xfrm>
-          <a:prstGeom prst="rect"/>
+          <a:prstGeom prst="rect">
+            <a:avLst/>
+          </a:prstGeom>
         </p:spPr>
         <p:txBody>
           <a:bodyPr wrap="none" lIns="0" tIns="0" rIns="0" bIns="0"/>
+          <a:lstStyle/>
           <a:p>
             <a:pPr>
               <a:lnSpc>
@@ -18698,12 +18683,12 @@
       </p:sp>
       <p:sp>
         <p:nvSpPr>
-          <p:cNvPr id="356" name=""/>
+          <p:cNvPr id="356" name="矩形: 圆角 355"/>
           <p:cNvSpPr/>
           <p:nvPr/>
         </p:nvSpPr>
         <p:spPr>
-          <a:xfrm rot="0" flipH="0" flipV="0">
+          <a:xfrm>
             <a:off x="762000" y="3209925"/>
             <a:ext cx="76200" cy="76200"/>
           </a:xfrm>
@@ -18719,29 +18704,32 @@
         </p:spPr>
         <p:txBody>
           <a:bodyPr/>
-          <a:p>
-            <a:pPr/>
-            <a:endParaRPr/>
-          </a:p>
-        </p:txBody>
-      </p:sp>
-      <p:sp>
-        <p:nvSpPr>
-          <p:cNvPr id="357" name="" descr="{&quot;isTemplate&quot;:true,&quot;type&quot;:&quot;text&quot;}"/>
+          <a:lstStyle/>
+          <a:p>
+            <a:endParaRPr/>
+          </a:p>
+        </p:txBody>
+      </p:sp>
+      <p:sp>
+        <p:nvSpPr>
+          <p:cNvPr id="357" name="文本框 356" descr="{&quot;isTemplate&quot;:true,&quot;type&quot;:&quot;text&quot;}"/>
           <p:cNvSpPr txBox="1"/>
           <p:nvPr/>
         </p:nvSpPr>
         <p:spPr>
-          <a:xfrm rot="0" flipH="0" flipV="0">
+          <a:xfrm>
             <a:off x="952500" y="3105150"/>
             <a:ext cx="7048500" cy="742950"/>
           </a:xfrm>
-          <a:prstGeom prst="rect"/>
+          <a:prstGeom prst="rect">
+            <a:avLst/>
+          </a:prstGeom>
         </p:spPr>
         <p:txBody>
           <a:bodyPr wrap="square" lIns="0" tIns="0" rIns="0" bIns="0">
             <a:normAutofit/>
           </a:bodyPr>
+          <a:lstStyle/>
           <a:p>
             <a:pPr>
               <a:lnSpc>
@@ -18776,7 +18764,7 @@
                 <a:latin typeface="Source Han Sans CN"/>
                 <a:ea typeface="Source Han Sans CN"/>
               </a:rPr>
-              <a:t xml:space="preserve"> + </a:t>
+              <a:t> + </a:t>
             </a:r>
             <a:r>
               <a:rPr lang="zh-CN" sz="1425">
@@ -18796,7 +18784,7 @@
                 <a:latin typeface="Source Han Sans CN"/>
                 <a:ea typeface="Source Han Sans CN"/>
               </a:rPr>
-              <a:t xml:space="preserve"> + </a:t>
+              <a:t> + </a:t>
             </a:r>
             <a:r>
               <a:rPr lang="zh-CN" sz="1425">
@@ -18814,12 +18802,12 @@
       </p:sp>
       <p:sp>
         <p:nvSpPr>
-          <p:cNvPr id="358" name=""/>
+          <p:cNvPr id="358" name="矩形: 圆角 357"/>
           <p:cNvSpPr/>
           <p:nvPr/>
         </p:nvSpPr>
         <p:spPr>
-          <a:xfrm rot="0" flipH="0" flipV="0">
+          <a:xfrm>
             <a:off x="762000" y="4124325"/>
             <a:ext cx="76200" cy="76200"/>
           </a:xfrm>
@@ -18835,29 +18823,32 @@
         </p:spPr>
         <p:txBody>
           <a:bodyPr/>
-          <a:p>
-            <a:pPr/>
-            <a:endParaRPr/>
-          </a:p>
-        </p:txBody>
-      </p:sp>
-      <p:sp>
-        <p:nvSpPr>
-          <p:cNvPr id="359" name="" descr="{&quot;isTemplate&quot;:true,&quot;type&quot;:&quot;text&quot;}"/>
+          <a:lstStyle/>
+          <a:p>
+            <a:endParaRPr/>
+          </a:p>
+        </p:txBody>
+      </p:sp>
+      <p:sp>
+        <p:nvSpPr>
+          <p:cNvPr id="359" name="文本框 358" descr="{&quot;isTemplate&quot;:true,&quot;type&quot;:&quot;text&quot;}"/>
           <p:cNvSpPr txBox="1"/>
           <p:nvPr/>
         </p:nvSpPr>
         <p:spPr>
-          <a:xfrm rot="0" flipH="0" flipV="0">
+          <a:xfrm>
             <a:off x="952500" y="4019550"/>
             <a:ext cx="7048500" cy="742950"/>
           </a:xfrm>
-          <a:prstGeom prst="rect"/>
+          <a:prstGeom prst="rect">
+            <a:avLst/>
+          </a:prstGeom>
         </p:spPr>
         <p:txBody>
           <a:bodyPr wrap="square" lIns="0" tIns="0" rIns="0" bIns="0">
             <a:normAutofit/>
           </a:bodyPr>
+          <a:lstStyle/>
           <a:p>
             <a:pPr>
               <a:lnSpc>
@@ -18922,7 +18913,7 @@
                 <a:latin typeface="Source Han Sans CN"/>
                 <a:ea typeface="Source Han Sans CN"/>
               </a:rPr>
-              <a:t xml:space="preserve"> </a:t>
+              <a:t> </a:t>
             </a:r>
             <a:r>
               <a:rPr lang="en-US" sz="1425" b="1">
@@ -18942,7 +18933,7 @@
                 <a:latin typeface="Source Han Sans CN"/>
                 <a:ea typeface="Source Han Sans CN"/>
               </a:rPr>
-              <a:t xml:space="preserve"> </a:t>
+              <a:t> </a:t>
             </a:r>
             <a:r>
               <a:rPr lang="zh-CN" sz="1425">
@@ -18980,21 +18971,24 @@
       </p:sp>
       <p:sp>
         <p:nvSpPr>
-          <p:cNvPr id="360" name="" descr="{&quot;isTemplate&quot;:true,&quot;type&quot;:&quot;text&quot;}"/>
+          <p:cNvPr id="360" name="文本框 359" descr="{&quot;isTemplate&quot;:true,&quot;type&quot;:&quot;text&quot;}"/>
           <p:cNvSpPr txBox="1"/>
           <p:nvPr/>
         </p:nvSpPr>
         <p:spPr>
-          <a:xfrm rot="0" flipH="0" flipV="0">
+          <a:xfrm>
             <a:off x="762000" y="5048250"/>
             <a:ext cx="7239000" cy="666750"/>
           </a:xfrm>
-          <a:prstGeom prst="rect"/>
+          <a:prstGeom prst="rect">
+            <a:avLst/>
+          </a:prstGeom>
         </p:spPr>
         <p:txBody>
           <a:bodyPr wrap="square" lIns="0" tIns="0" rIns="0" bIns="0">
             <a:normAutofit/>
           </a:bodyPr>
+          <a:lstStyle/>
           <a:p>
             <a:pPr>
               <a:lnSpc>
@@ -19019,7 +19013,7 @@
                 <a:latin typeface="Source Han Sans CN"/>
                 <a:ea typeface="Source Han Sans CN"/>
               </a:rPr>
-              <a:t xml:space="preserve"> MUAS </a:t>
+              <a:t> MUAS </a:t>
             </a:r>
             <a:r>
               <a:rPr lang="zh-CN" sz="1200">
@@ -19037,12 +19031,12 @@
       </p:sp>
       <p:sp>
         <p:nvSpPr>
-          <p:cNvPr id="361" name=""/>
+          <p:cNvPr id="361" name="矩形: 圆角 360"/>
           <p:cNvSpPr/>
           <p:nvPr/>
         </p:nvSpPr>
         <p:spPr>
-          <a:xfrm rot="0" flipH="0" flipV="0">
+          <a:xfrm>
             <a:off x="762000" y="5943600"/>
             <a:ext cx="2352675" cy="295275"/>
           </a:xfrm>
@@ -19058,27 +19052,30 @@
         </p:spPr>
         <p:txBody>
           <a:bodyPr/>
-          <a:p>
-            <a:pPr/>
-            <a:endParaRPr/>
-          </a:p>
-        </p:txBody>
-      </p:sp>
-      <p:sp>
-        <p:nvSpPr>
-          <p:cNvPr id="362" name="" descr="{&quot;isTemplate&quot;:true,&quot;type&quot;:&quot;text&quot;}"/>
+          <a:lstStyle/>
+          <a:p>
+            <a:endParaRPr/>
+          </a:p>
+        </p:txBody>
+      </p:sp>
+      <p:sp>
+        <p:nvSpPr>
+          <p:cNvPr id="362" name="文本框 361" descr="{&quot;isTemplate&quot;:true,&quot;type&quot;:&quot;text&quot;}"/>
           <p:cNvSpPr txBox="1"/>
           <p:nvPr/>
         </p:nvSpPr>
         <p:spPr>
-          <a:xfrm rot="0" flipH="0" flipV="0">
+          <a:xfrm>
             <a:off x="914400" y="6010275"/>
             <a:ext cx="2047875" cy="161925"/>
           </a:xfrm>
-          <a:prstGeom prst="rect"/>
+          <a:prstGeom prst="rect">
+            <a:avLst/>
+          </a:prstGeom>
         </p:spPr>
         <p:txBody>
           <a:bodyPr wrap="none" lIns="0" tIns="0" rIns="0" bIns="0"/>
+          <a:lstStyle/>
           <a:p>
             <a:pPr>
               <a:lnSpc>
@@ -19093,7 +19090,7 @@
                 <a:latin typeface="Source Han Sans CN"/>
                 <a:ea typeface="Source Han Sans CN"/>
               </a:rPr>
-              <a:t xml:space="preserve">P7 · </a:t>
+              <a:t>P7 · </a:t>
             </a:r>
             <a:r>
               <a:rPr lang="zh-CN" sz="1050" b="1">
@@ -19111,12 +19108,12 @@
       </p:sp>
       <p:sp>
         <p:nvSpPr>
-          <p:cNvPr id="363" name=""/>
+          <p:cNvPr id="363" name="矩形: 圆角 362"/>
           <p:cNvSpPr/>
           <p:nvPr/>
         </p:nvSpPr>
         <p:spPr>
-          <a:xfrm rot="0" flipH="0" flipV="0">
+          <a:xfrm>
             <a:off x="10086975" y="4572000"/>
             <a:ext cx="1343025" cy="323850"/>
           </a:xfrm>
@@ -19137,27 +19134,30 @@
         </p:spPr>
         <p:txBody>
           <a:bodyPr/>
-          <a:p>
-            <a:pPr/>
-            <a:endParaRPr/>
-          </a:p>
-        </p:txBody>
-      </p:sp>
-      <p:sp>
-        <p:nvSpPr>
-          <p:cNvPr id="364" name="" descr="{&quot;isTemplate&quot;:true,&quot;type&quot;:&quot;text&quot;}"/>
+          <a:lstStyle/>
+          <a:p>
+            <a:endParaRPr/>
+          </a:p>
+        </p:txBody>
+      </p:sp>
+      <p:sp>
+        <p:nvSpPr>
+          <p:cNvPr id="364" name="文本框 363" descr="{&quot;isTemplate&quot;:true,&quot;type&quot;:&quot;text&quot;}"/>
           <p:cNvSpPr txBox="1"/>
           <p:nvPr/>
         </p:nvSpPr>
         <p:spPr>
-          <a:xfrm rot="0" flipH="0" flipV="0">
+          <a:xfrm>
             <a:off x="10258425" y="4648200"/>
             <a:ext cx="1000125" cy="171450"/>
           </a:xfrm>
-          <a:prstGeom prst="rect"/>
+          <a:prstGeom prst="rect">
+            <a:avLst/>
+          </a:prstGeom>
         </p:spPr>
         <p:txBody>
           <a:bodyPr wrap="none" lIns="0" tIns="0" rIns="0" bIns="0"/>
+          <a:lstStyle/>
           <a:p>
             <a:pPr>
               <a:lnSpc>
@@ -19180,12 +19180,12 @@
       </p:sp>
       <p:sp>
         <p:nvSpPr>
-          <p:cNvPr id="365" name=""/>
+          <p:cNvPr id="365" name="矩形: 圆角 364"/>
           <p:cNvSpPr/>
           <p:nvPr/>
         </p:nvSpPr>
         <p:spPr>
-          <a:xfrm rot="0" flipH="0" flipV="0">
+          <a:xfrm>
             <a:off x="10001250" y="5010150"/>
             <a:ext cx="1428750" cy="323850"/>
           </a:xfrm>
@@ -19206,27 +19206,30 @@
         </p:spPr>
         <p:txBody>
           <a:bodyPr/>
-          <a:p>
-            <a:pPr/>
-            <a:endParaRPr/>
-          </a:p>
-        </p:txBody>
-      </p:sp>
-      <p:sp>
-        <p:nvSpPr>
-          <p:cNvPr id="366" name="" descr="{&quot;isTemplate&quot;:true,&quot;type&quot;:&quot;text&quot;}"/>
+          <a:lstStyle/>
+          <a:p>
+            <a:endParaRPr/>
+          </a:p>
+        </p:txBody>
+      </p:sp>
+      <p:sp>
+        <p:nvSpPr>
+          <p:cNvPr id="366" name="文本框 365" descr="{&quot;isTemplate&quot;:true,&quot;type&quot;:&quot;text&quot;}"/>
           <p:cNvSpPr txBox="1"/>
           <p:nvPr/>
         </p:nvSpPr>
         <p:spPr>
-          <a:xfrm rot="0" flipH="0" flipV="0">
+          <a:xfrm>
             <a:off x="10172700" y="5086350"/>
             <a:ext cx="1085850" cy="171450"/>
           </a:xfrm>
-          <a:prstGeom prst="rect"/>
+          <a:prstGeom prst="rect">
+            <a:avLst/>
+          </a:prstGeom>
         </p:spPr>
         <p:txBody>
           <a:bodyPr wrap="none" lIns="0" tIns="0" rIns="0" bIns="0"/>
+          <a:lstStyle/>
           <a:p>
             <a:pPr>
               <a:lnSpc>
@@ -19259,12 +19262,12 @@
       </p:sp>
       <p:sp>
         <p:nvSpPr>
-          <p:cNvPr id="367" name=""/>
+          <p:cNvPr id="367" name="矩形: 圆角 366"/>
           <p:cNvSpPr/>
           <p:nvPr/>
         </p:nvSpPr>
         <p:spPr>
-          <a:xfrm rot="0" flipH="0" flipV="0">
+          <a:xfrm>
             <a:off x="10229850" y="5448300"/>
             <a:ext cx="1200150" cy="323850"/>
           </a:xfrm>
@@ -19285,27 +19288,30 @@
         </p:spPr>
         <p:txBody>
           <a:bodyPr/>
-          <a:p>
-            <a:pPr/>
-            <a:endParaRPr/>
-          </a:p>
-        </p:txBody>
-      </p:sp>
-      <p:sp>
-        <p:nvSpPr>
-          <p:cNvPr id="368" name="" descr="{&quot;isTemplate&quot;:true,&quot;type&quot;:&quot;text&quot;}"/>
+          <a:lstStyle/>
+          <a:p>
+            <a:endParaRPr/>
+          </a:p>
+        </p:txBody>
+      </p:sp>
+      <p:sp>
+        <p:nvSpPr>
+          <p:cNvPr id="368" name="文本框 367" descr="{&quot;isTemplate&quot;:true,&quot;type&quot;:&quot;text&quot;}"/>
           <p:cNvSpPr txBox="1"/>
           <p:nvPr/>
         </p:nvSpPr>
         <p:spPr>
-          <a:xfrm rot="0" flipH="0" flipV="0">
+          <a:xfrm>
             <a:off x="10401300" y="5524500"/>
             <a:ext cx="857250" cy="171450"/>
           </a:xfrm>
-          <a:prstGeom prst="rect"/>
+          <a:prstGeom prst="rect">
+            <a:avLst/>
+          </a:prstGeom>
         </p:spPr>
         <p:txBody>
           <a:bodyPr wrap="none" lIns="0" tIns="0" rIns="0" bIns="0"/>
+          <a:lstStyle/>
           <a:p>
             <a:pPr>
               <a:lnSpc>
@@ -19328,12 +19334,12 @@
       </p:sp>
       <p:sp>
         <p:nvSpPr>
-          <p:cNvPr id="369" name=""/>
+          <p:cNvPr id="369" name="矩形: 圆角 368"/>
           <p:cNvSpPr/>
           <p:nvPr/>
         </p:nvSpPr>
         <p:spPr>
-          <a:xfrm rot="0" flipH="0" flipV="0">
+          <a:xfrm>
             <a:off x="762000" y="5857875"/>
             <a:ext cx="476250" cy="276225"/>
           </a:xfrm>
@@ -19349,27 +19355,30 @@
         </p:spPr>
         <p:txBody>
           <a:bodyPr/>
-          <a:p>
-            <a:pPr/>
-            <a:endParaRPr/>
-          </a:p>
-        </p:txBody>
-      </p:sp>
-      <p:sp>
-        <p:nvSpPr>
-          <p:cNvPr id="370" name="" descr="{&quot;isTemplate&quot;:true,&quot;type&quot;:&quot;text&quot;}"/>
+          <a:lstStyle/>
+          <a:p>
+            <a:endParaRPr/>
+          </a:p>
+        </p:txBody>
+      </p:sp>
+      <p:sp>
+        <p:nvSpPr>
+          <p:cNvPr id="370" name="文本框 369" descr="{&quot;isTemplate&quot;:true,&quot;type&quot;:&quot;text&quot;}"/>
           <p:cNvSpPr txBox="1"/>
           <p:nvPr/>
         </p:nvSpPr>
         <p:spPr>
-          <a:xfrm rot="0" flipH="0" flipV="0">
+          <a:xfrm>
             <a:off x="914400" y="5915025"/>
             <a:ext cx="171450" cy="161925"/>
           </a:xfrm>
-          <a:prstGeom prst="rect"/>
+          <a:prstGeom prst="rect">
+            <a:avLst/>
+          </a:prstGeom>
         </p:spPr>
         <p:txBody>
           <a:bodyPr wrap="none" lIns="0" tIns="0" rIns="0" bIns="0"/>
+          <a:lstStyle/>
           <a:p>
             <a:pPr>
               <a:lnSpc>
@@ -19392,12 +19401,12 @@
       </p:sp>
       <p:sp>
         <p:nvSpPr>
-          <p:cNvPr id="371" name=""/>
+          <p:cNvPr id="371" name="矩形: 圆角 370"/>
           <p:cNvSpPr/>
           <p:nvPr/>
         </p:nvSpPr>
         <p:spPr>
-          <a:xfrm rot="0" flipH="0" flipV="0">
+          <a:xfrm>
             <a:off x="1352550" y="5857875"/>
             <a:ext cx="476250" cy="276225"/>
           </a:xfrm>
@@ -19413,27 +19422,30 @@
         </p:spPr>
         <p:txBody>
           <a:bodyPr/>
-          <a:p>
-            <a:pPr/>
-            <a:endParaRPr/>
-          </a:p>
-        </p:txBody>
-      </p:sp>
-      <p:sp>
-        <p:nvSpPr>
-          <p:cNvPr id="372" name="" descr="{&quot;isTemplate&quot;:true,&quot;type&quot;:&quot;text&quot;}"/>
+          <a:lstStyle/>
+          <a:p>
+            <a:endParaRPr/>
+          </a:p>
+        </p:txBody>
+      </p:sp>
+      <p:sp>
+        <p:nvSpPr>
+          <p:cNvPr id="372" name="文本框 371" descr="{&quot;isTemplate&quot;:true,&quot;type&quot;:&quot;text&quot;}"/>
           <p:cNvSpPr txBox="1"/>
           <p:nvPr/>
         </p:nvSpPr>
         <p:spPr>
-          <a:xfrm rot="0" flipH="0" flipV="0">
+          <a:xfrm>
             <a:off x="1504950" y="5915025"/>
             <a:ext cx="171450" cy="161925"/>
           </a:xfrm>
-          <a:prstGeom prst="rect"/>
+          <a:prstGeom prst="rect">
+            <a:avLst/>
+          </a:prstGeom>
         </p:spPr>
         <p:txBody>
           <a:bodyPr wrap="none" lIns="0" tIns="0" rIns="0" bIns="0"/>
+          <a:lstStyle/>
           <a:p>
             <a:pPr>
               <a:lnSpc>
@@ -19456,12 +19468,12 @@
       </p:sp>
       <p:sp>
         <p:nvSpPr>
-          <p:cNvPr id="373" name=""/>
+          <p:cNvPr id="373" name="矩形: 圆角 372"/>
           <p:cNvSpPr/>
           <p:nvPr/>
         </p:nvSpPr>
         <p:spPr>
-          <a:xfrm rot="0" flipH="0" flipV="0">
+          <a:xfrm>
             <a:off x="1943100" y="5857875"/>
             <a:ext cx="476250" cy="276225"/>
           </a:xfrm>
@@ -19477,27 +19489,30 @@
         </p:spPr>
         <p:txBody>
           <a:bodyPr/>
-          <a:p>
-            <a:pPr/>
-            <a:endParaRPr/>
-          </a:p>
-        </p:txBody>
-      </p:sp>
-      <p:sp>
-        <p:nvSpPr>
-          <p:cNvPr id="374" name="" descr="{&quot;isTemplate&quot;:true,&quot;type&quot;:&quot;text&quot;}"/>
+          <a:lstStyle/>
+          <a:p>
+            <a:endParaRPr/>
+          </a:p>
+        </p:txBody>
+      </p:sp>
+      <p:sp>
+        <p:nvSpPr>
+          <p:cNvPr id="374" name="文本框 373" descr="{&quot;isTemplate&quot;:true,&quot;type&quot;:&quot;text&quot;}"/>
           <p:cNvSpPr txBox="1"/>
           <p:nvPr/>
         </p:nvSpPr>
         <p:spPr>
-          <a:xfrm rot="0" flipH="0" flipV="0">
+          <a:xfrm>
             <a:off x="2095500" y="5915025"/>
             <a:ext cx="171450" cy="161925"/>
           </a:xfrm>
-          <a:prstGeom prst="rect"/>
+          <a:prstGeom prst="rect">
+            <a:avLst/>
+          </a:prstGeom>
         </p:spPr>
         <p:txBody>
           <a:bodyPr wrap="none" lIns="0" tIns="0" rIns="0" bIns="0"/>
+          <a:lstStyle/>
           <a:p>
             <a:pPr>
               <a:lnSpc>
@@ -19520,12 +19535,12 @@
       </p:sp>
       <p:sp>
         <p:nvSpPr>
-          <p:cNvPr id="375" name=""/>
+          <p:cNvPr id="375" name="矩形: 圆角 374"/>
           <p:cNvSpPr/>
           <p:nvPr/>
         </p:nvSpPr>
         <p:spPr>
-          <a:xfrm rot="0" flipH="0" flipV="0">
+          <a:xfrm>
             <a:off x="2533650" y="5857875"/>
             <a:ext cx="476250" cy="276225"/>
           </a:xfrm>
@@ -19541,27 +19556,30 @@
         </p:spPr>
         <p:txBody>
           <a:bodyPr/>
-          <a:p>
-            <a:pPr/>
-            <a:endParaRPr/>
-          </a:p>
-        </p:txBody>
-      </p:sp>
-      <p:sp>
-        <p:nvSpPr>
-          <p:cNvPr id="376" name="" descr="{&quot;isTemplate&quot;:true,&quot;type&quot;:&quot;text&quot;}"/>
+          <a:lstStyle/>
+          <a:p>
+            <a:endParaRPr/>
+          </a:p>
+        </p:txBody>
+      </p:sp>
+      <p:sp>
+        <p:nvSpPr>
+          <p:cNvPr id="376" name="文本框 375" descr="{&quot;isTemplate&quot;:true,&quot;type&quot;:&quot;text&quot;}"/>
           <p:cNvSpPr txBox="1"/>
           <p:nvPr/>
         </p:nvSpPr>
         <p:spPr>
-          <a:xfrm rot="0" flipH="0" flipV="0">
+          <a:xfrm>
             <a:off x="2686050" y="5915025"/>
             <a:ext cx="171450" cy="161925"/>
           </a:xfrm>
-          <a:prstGeom prst="rect"/>
+          <a:prstGeom prst="rect">
+            <a:avLst/>
+          </a:prstGeom>
         </p:spPr>
         <p:txBody>
           <a:bodyPr wrap="none" lIns="0" tIns="0" rIns="0" bIns="0"/>
+          <a:lstStyle/>
           <a:p>
             <a:pPr>
               <a:lnSpc>
@@ -19584,19 +19602,22 @@
       </p:sp>
       <p:sp>
         <p:nvSpPr>
-          <p:cNvPr id="377" name="" descr="{&quot;isTemplate&quot;:true,&quot;type&quot;:&quot;text&quot;}"/>
+          <p:cNvPr id="377" name="文本框 376" descr="{&quot;isTemplate&quot;:true,&quot;type&quot;:&quot;text&quot;}"/>
           <p:cNvSpPr txBox="1"/>
           <p:nvPr/>
         </p:nvSpPr>
         <p:spPr>
-          <a:xfrm rot="0" flipH="0" flipV="0">
+          <a:xfrm>
             <a:off x="3200400" y="5915025"/>
             <a:ext cx="1962150" cy="161925"/>
           </a:xfrm>
-          <a:prstGeom prst="rect"/>
+          <a:prstGeom prst="rect">
+            <a:avLst/>
+          </a:prstGeom>
         </p:spPr>
         <p:txBody>
           <a:bodyPr wrap="none" lIns="0" tIns="0" rIns="0" bIns="0"/>
+          <a:lstStyle/>
           <a:p>
             <a:pPr>
               <a:lnSpc>
@@ -19621,7 +19642,7 @@
                 <a:latin typeface="Source Han Sans CN"/>
                 <a:ea typeface="Source Han Sans CN"/>
               </a:rPr>
-              <a:t xml:space="preserve"> · </a:t>
+              <a:t> · </a:t>
             </a:r>
             <a:r>
               <a:rPr lang="zh-CN" sz="1050">
@@ -19641,7 +19662,7 @@
                 <a:latin typeface="Source Han Sans CN"/>
                 <a:ea typeface="Source Han Sans CN"/>
               </a:rPr>
-              <a:t xml:space="preserve"> · </a:t>
+              <a:t> · </a:t>
             </a:r>
             <a:r>
               <a:rPr lang="zh-CN" sz="1050">
@@ -19659,12 +19680,12 @@
       </p:sp>
       <p:sp>
         <p:nvSpPr>
-          <p:cNvPr id="378" name=""/>
+          <p:cNvPr id="378" name="矩形 377"/>
           <p:cNvSpPr/>
           <p:nvPr/>
         </p:nvSpPr>
         <p:spPr>
-          <a:xfrm rot="0" flipH="0" flipV="0">
+          <a:xfrm>
             <a:off x="0" y="6448425"/>
             <a:ext cx="12192000" cy="409575"/>
           </a:xfrm>
@@ -19678,24 +19699,29 @@
         </p:spPr>
         <p:txBody>
           <a:bodyPr/>
-          <a:p>
-            <a:pPr/>
-            <a:endParaRPr/>
-          </a:p>
-        </p:txBody>
-      </p:sp>
-      <p:sp>
-        <p:nvSpPr>
-          <p:cNvPr id="379" name=""/>
+          <a:lstStyle/>
+          <a:p>
+            <a:endParaRPr/>
+          </a:p>
+        </p:txBody>
+      </p:sp>
+      <p:sp>
+        <p:nvSpPr>
+          <p:cNvPr id="379" name="任意多边形: 形状 378"/>
           <p:cNvSpPr/>
           <p:nvPr/>
         </p:nvSpPr>
         <p:spPr>
-          <a:xfrm rot="0" flipH="0" flipV="0">
+          <a:xfrm>
             <a:off x="0" y="6438900"/>
             <a:ext cx="12192000" cy="419100"/>
           </a:xfrm>
           <a:custGeom>
+            <a:avLst/>
+            <a:gdLst/>
+            <a:ahLst/>
+            <a:cxnLst/>
+            <a:rect l="0" t="0" r="0" b="0"/>
             <a:pathLst>
               <a:path w="1280" h="44">
                 <a:moveTo>
@@ -19721,27 +19747,30 @@
         </p:spPr>
         <p:txBody>
           <a:bodyPr/>
-          <a:p>
-            <a:pPr/>
-            <a:endParaRPr/>
-          </a:p>
-        </p:txBody>
-      </p:sp>
-      <p:sp>
-        <p:nvSpPr>
-          <p:cNvPr id="380" name="" descr="{&quot;isTemplate&quot;:true,&quot;type&quot;:&quot;text&quot;}"/>
+          <a:lstStyle/>
+          <a:p>
+            <a:endParaRPr/>
+          </a:p>
+        </p:txBody>
+      </p:sp>
+      <p:sp>
+        <p:nvSpPr>
+          <p:cNvPr id="380" name="文本框 379" descr="{&quot;isTemplate&quot;:true,&quot;type&quot;:&quot;text&quot;}"/>
           <p:cNvSpPr txBox="1"/>
           <p:nvPr/>
         </p:nvSpPr>
         <p:spPr>
-          <a:xfrm rot="0" flipH="0" flipV="0">
+          <a:xfrm>
             <a:off x="381000" y="6581775"/>
             <a:ext cx="2828925" cy="152400"/>
           </a:xfrm>
-          <a:prstGeom prst="rect"/>
+          <a:prstGeom prst="rect">
+            <a:avLst/>
+          </a:prstGeom>
         </p:spPr>
         <p:txBody>
           <a:bodyPr wrap="none" lIns="0" tIns="0" rIns="0" bIns="0"/>
+          <a:lstStyle/>
           <a:p>
             <a:pPr>
               <a:lnSpc>
@@ -19766,7 +19795,7 @@
                 <a:latin typeface="Source Han Sans CN"/>
                 <a:ea typeface="Source Han Sans CN"/>
               </a:rPr>
-              <a:t xml:space="preserve"> · </a:t>
+              <a:t> · </a:t>
             </a:r>
             <a:r>
               <a:rPr lang="zh-CN" sz="975">
@@ -19784,19 +19813,22 @@
       </p:sp>
       <p:sp>
         <p:nvSpPr>
-          <p:cNvPr id="381" name="" descr="{&quot;isTemplate&quot;:true,&quot;type&quot;:&quot;text&quot;}"/>
+          <p:cNvPr id="381" name="文本框 380" descr="{&quot;isTemplate&quot;:true,&quot;type&quot;:&quot;text&quot;}"/>
           <p:cNvSpPr txBox="1"/>
           <p:nvPr/>
         </p:nvSpPr>
         <p:spPr>
-          <a:xfrm rot="0" flipH="0" flipV="0">
+          <a:xfrm>
             <a:off x="11296650" y="6572250"/>
             <a:ext cx="514350" cy="171450"/>
           </a:xfrm>
-          <a:prstGeom prst="rect"/>
+          <a:prstGeom prst="rect">
+            <a:avLst/>
+          </a:prstGeom>
         </p:spPr>
         <p:txBody>
           <a:bodyPr wrap="none" lIns="0" tIns="0" rIns="0" bIns="0"/>
+          <a:lstStyle/>
           <a:p>
             <a:pPr>
               <a:lnSpc>
@@ -19819,15 +19851,18 @@
       </p:sp>
     </p:spTree>
   </p:cSld>
+  <p:clrMapOvr>
+    <a:masterClrMapping/>
+  </p:clrMapOvr>
 </p:sld>
 </file>
 
 <file path=ppt/slides/slide7.xml><?xml version="1.0" encoding="utf-8"?>
-<p:sld xmlns:p="http://schemas.openxmlformats.org/presentationml/2006/main" xmlns:a="http://schemas.openxmlformats.org/drawingml/2006/main">
+<p:sld xmlns:a="http://schemas.openxmlformats.org/drawingml/2006/main" xmlns:r="http://schemas.openxmlformats.org/officeDocument/2006/relationships" xmlns:p="http://schemas.openxmlformats.org/presentationml/2006/main">
   <p:cSld>
     <p:spTree>
       <p:nvGrpSpPr>
-        <p:cNvPr id="382" name="" descr="&lt;Slide style={{ width: 1280, height: 720, background: '#FFFFFF', position: 'relative', fontFamily: 'Source Han Sans CN, Microsoft YaHei, sans-serif' }}&gt;&#10;  &lt;Box style={{ position: 'absolute', top: 0, left: 0, width: 1280, height: 12, background: '#1E4FA8' }} /&gt;&#10;  &lt;Box style={{ position: 'absolute', top: 30, left: 40, flexDirection: 'row', alignItems: 'center', gap: 14 }}&gt;&#10;    &lt;Box style={{ width: 6, height: 34, background: '#1E4FA8' }} /&gt;&#10;    &lt;Text style={{ fontSize: 32, fontWeight: 'bold', color: '#0E3F8C' }}&gt;基础优先级预筛选 + 边际收益增量选择&lt;/Text&gt;&#10;  &lt;/Box&gt;&#10;  &lt;Text style={{ position: 'absolute', top: 78, left: 60, fontSize: 15, color: '#8B97A8' }}&gt;五因素加权排序缩池，边际价值决定「加入当前组合后是否仍值得执行」&lt;/Text&gt;&#10;&#10;  &lt;Box style={{ position: 'absolute', top: 116, left: 40, width: 700, flexDirection: 'column', gap: 16 }}&gt;&#10;    &lt;Box style={{ background: '#F7F9FC', border: '1px solid #D6DCE5', borderRadius: 10, padding: '16px 20px', flexDirection: 'column' }}&gt;&#10;      &lt;Text style={{ fontSize: 19, fontWeight: 'bold', color: '#0E3F8C' }}&gt;① 基础任务优先级（五因素 min-max 归一化加权）&lt;/Text&gt;&#10;      &lt;Box style={{ marginTop: 12, background: '#E8EFF8', borderRadius: 8, padding: '14px 16px', alignItems: 'center' }}&gt;&#10;        &lt;Text style={{ fontSize: 23, fontWeight: 'bold', color: '#0E3F8C' }}&gt;&#10;          P&lt;span style={{ fontSize: 15 }}&gt;i&lt;/span&gt; = w&lt;span style={{ fontSize: 15 }}&gt;r&lt;/span&gt;·R&lt;span style={{ fontSize: 15 }}&gt;i&lt;/span&gt; + w&lt;span style={{ fontSize: 15 }}&gt;u&lt;/span&gt;·U&lt;span style={{ fontSize: 15 }}&gt;i&lt;/span&gt; + w&lt;span style={{ fontSize: 15 }}&gt;w&lt;/span&gt;·W&lt;span style={{ fontSize: 15 }}&gt;i&lt;/span&gt; + w&lt;span style={{ fontSize: 15 }}&gt;s&lt;/span&gt;·G&lt;span style={{ fontSize: 15 }}&gt;i&lt;/span&gt; − w&lt;span style={{ fontSize: 15 }}&gt;c&lt;/span&gt;·C&lt;span style={{ fontSize: 15 }}&gt;i&lt;/span&gt;&#10;        &lt;/Text&gt;&#10;      &lt;/Box&gt;&#10;      &lt;Text style={{ fontSize: 14, color: '#4A5568', lineHeight: 1.7, marginTop: 10 }}&gt;&#10;        五因素均先做 min-max 归一化：收益 R · 时间紧迫度 U · 等待补偿 W = 1−e&lt;sup&gt;−t/τ&lt;/sup&gt;（防长期滞留）· 空间协同增益 G（近邻任务可同机连续执行，聚集是&lt;span style={{ color: '#1E4FA8', fontWeight: 'bold' }}&gt;正因素&lt;/span&gt;）· 粗执行代价 C；权重和为 1，默认 0.30 / 0.25 / 0.15 / 0.15 / 0.15&#10;      &lt;/Text&gt;&#10;    &lt;/Box&gt;&#10;&#10;    &lt;Box style={{ background: '#F7F9FC', border: '1px solid #D6DCE5', borderRadius: 10, padding: '16px 20px', flexDirection: 'column' }}&gt;&#10;      &lt;Text style={{ fontSize: 19, fontWeight: 'bold', color: '#0E3F8C' }}&gt;② 候选池（能力无关）/ 选择数（卡 cap）：机数名额 × 能力上界解耦&lt;/Text&gt;&#10;      &lt;Box style={{ marginTop: 12, background: '#E8EFF8', borderRadius: 8, padding: '12px 16px', flexDirection: 'column', gap: 5, alignItems: 'center' }}&gt;&#10;        &lt;Text style={{ fontSize: 16.5, fontWeight: 'bold', color: '#0E3F8C' }}&gt;&#10;          n_cand = ceil(α·K)（能力无关）　　n_sel = min{&quot;{&quot;}ceil(max_ratio·K), cap(t){&quot;}&quot;}&#10;        &lt;/Text&gt;&#10;        &lt;Text style={{ fontSize: 13, color: '#4A5568' }}&gt;&#10;          cap(t) = floor(B(t) / c_med)；K = 可用无人机数，α = 2.5、max_ratio = 2.0 均为机数倍率&#10;        &lt;/Text&gt;&#10;      &lt;/Box&gt;&#10;      &lt;Text style={{ fontSize: 14, color: '#4A5568', lineHeight: 1.7, marginTop: 10 }}&gt;&#10;        机数名额保护搜索复杂度；能力承载数只计&lt;span style={{ fontWeight: 'bold' }}&gt;可起飞子集&lt;/span&gt;的剩余航程 B(t)——正在充电的机是幻影容量，不计入；紧急/释放任务可绕过名额强制纳入，但仍须过可行性检查&#10;      &lt;/Text&gt;&#10;    &lt;/Box&gt;&#10;&#10;    &lt;Box style={{ background: '#F0F5FC', border: '1px solid #D6DCE5', borderRadius: 10, padding: '12px 20px', flexDirection: 'row', alignItems: 'center', gap: 10 }}&gt;&#10;      &lt;Text style={{ fontSize: 15, fontWeight: 'bold', color: '#0E3F8C' }}&gt;机制串联：&lt;/Text&gt;&#10;      {['按 P_i 排序', 'n_cand 候选(富)', '闸门① prefilter', 'n_sel 边际纳入(紧)', '闸门② postcheck'].map((s, i) =&gt; (&#10;        &lt;Box key={s} style={{ flexDirection: 'row', alignItems: 'center', gap: 10 }}&gt;&#10;          {i &gt; 0 &amp;&amp; &lt;Text style={{ fontSize: 16, color: '#3D7BD9', fontWeight: 'bold' }}&gt;→&lt;/Text&gt;}&#10;          &lt;Box style={{ padding: '6px 12px', background: '#FFFFFF', borderRadius: 14, border: '1px solid #3D7BD9' }}&gt;&#10;            &lt;Text style={{ fontSize: 13, color: '#1E4FA8' }}&gt;{s}&lt;/Text&gt;&#10;          &lt;/Box&gt;&#10;        &lt;/Box&gt;&#10;      ))}&#10;    &lt;/Box&gt;&#10;  &lt;/Box&gt;&#10;&#10;  &lt;Box style={{ position: 'absolute', top: 116, left: 764, width: 476, flexDirection: 'column', gap: 14 }}&gt;&#10;    &lt;Box style={{ background: '#F0F5FC', border: '1px solid #D6DCE5', borderTop: '4px solid #1E4FA8', borderRadius: 10, padding: '14px 20px', flexDirection: 'column' }}&gt;&#10;      &lt;Text style={{ fontSize: 19, fontWeight: 'bold', color: '#0E3F8C' }}&gt;③ 边际收益增量选择&lt;/Text&gt;&#10;      &lt;Box style={{ marginTop: 10, background: '#FFFFFF', borderRadius: 8, padding: '12px 14px', alignItems: 'center' }}&gt;&#10;        &lt;Text style={{ fontSize: 20, fontWeight: 'bold', color: '#0E3F8C' }}&gt;&#10;          Δ&lt;span style={{ fontSize: 13 }}&gt;i&lt;/span&gt; = ΔB&lt;span style={{ fontSize: 13 }}&gt;i&lt;/span&gt; / (ΔC&lt;span style={{ fontSize: 13 }}&gt;i&lt;/span&gt; + ε)&#10;        &lt;/Text&gt;&#10;        &lt;Text style={{ fontSize: 16, color: '#1E4FA8', marginTop: 6 }}&gt;&#10;          ΔC&lt;span style={{ fontSize: 11 }}&gt;i&lt;/span&gt; = min&lt;span style={{ fontSize: 12 }}&gt;{&quot;{&quot;} C&lt;span style={{ fontSize: 10 }}&gt;ai&lt;/span&gt; + C&lt;span style={{ fontSize: 10 }}&gt;ib&lt;/span&gt; − C&lt;span style={{ fontSize: 10 }}&gt;ab&lt;/span&gt; {&quot;}&quot;}&#10;          &lt;/span&gt;（所有锚点对插入，统一 DEM 三维航程）&#10;        &lt;/Text&gt;&#10;      &lt;/Box&gt;&#10;      &lt;Text style={{ fontSize: 14, color: '#4A5568', lineHeight: 1.7, marginTop: 8 }}&gt;&#10;        插入式快速估计：对「已选集合 + 最近机巢」的&lt;span style={{ fontWeight: 'bold' }}&gt;所有锚点对&lt;/span&gt;试接入任务 i，取最小三维航程增量——不预设任何顺序、不求解完整 MUAS，与已选任务空间相近者因增量代价低而胜出&#10;      &lt;/Text&gt;&#10;    &lt;/Box&gt;&#10;&#10;    &lt;Box style={{ background: '#F7F9FC', border: '1px solid #D6DCE5', borderRadius: 10, padding: '13px 20px', flexDirection: 'column' }}&gt;&#10;      &lt;Text style={{ fontSize: 17, fontWeight: 'bold', color: '#0E3F8C' }}&gt;④ 两道可行性闸门（粗粒度，弹回不淘汰）&lt;/Text&gt;&#10;      &lt;Text style={{ fontSize: 14, color: '#4A5568', lineHeight: 1.7, marginTop: 6 }}&gt;&#10;        闸门① prefilter：是否有可用机 · 单任务往返可达 · 三维地形不可达；闸门② postcheck：机群剩余航程预算——仅物理不可行才不进候选，否则留池下周期再评；时间窗迟到由适应度折减、非参选资格&#10;      &lt;/Text&gt;&#10;    &lt;/Box&gt;&#10;&#10;    &lt;Box style={{ background: '#0E3F8C', borderRadius: 10, padding: '14px 20px', flexDirection: 'column' }}&gt;&#10;      &lt;Text style={{ fontSize: 16, fontWeight: 'bold', color: '#FFFFFF', lineHeight: 1.6 }}&gt;&#10;        判断：选择质量与实时性兼得——边际比只依赖代价矩阵查表与插入估计，单周期选择开销可忽略，却保住了「任务 × 组合」的匹配质量。&#10;      &lt;/Text&gt;&#10;    &lt;/Box&gt;&#10;  &lt;/Box&gt;&#10;&#10;  &lt;Box style={{ position: 'absolute', bottom: 0, left: 0, width: 1280, height: 44, background: '#F7F9FC', flexDirection: 'row', justifyContent: 'space-between', alignItems: 'center', padding: '0 40px', borderTop: '1px solid #E5E7EB' }}&gt;&#10;    &lt;Text style={{ fontSize: 13, color: '#8B97A8' }}&gt;动态滚动的多机巢多无人机协同任务分配 · 进展汇报&lt;/Text&gt;&#10;    &lt;Text style={{ fontSize: 15, color: '#1E4FA8', fontWeight: 'bold' }}&gt;07 / 16&lt;/Text&gt;&#10;  &lt;/Box&gt;&#10;&lt;/Slide&gt;&#10;"/>
+        <p:cNvPr id="1" name="" descr="&lt;Slide style={{ width: 1280, height: 720, background: '#FFFFFF', position: 'relative', fontFamily: 'Source Han Sans CN, Microsoft YaHei, sans-serif' }}&gt;&#10;  &lt;Box style={{ position: 'absolute', top: 0, left: 0, width: 1280, height: 12, background: '#1E4FA8' }} /&gt;&#10;  &lt;Box style={{ position: 'absolute', top: 30, left: 40, flexDirection: 'row', alignItems: 'center', gap: 14 }}&gt;&#10;    &lt;Box style={{ width: 6, height: 34, background: '#1E4FA8' }} /&gt;&#10;    &lt;Text style={{ fontSize: 32, fontWeight: 'bold', color: '#0E3F8C' }}&gt;基础优先级预筛选 + 边际收益增量选择&lt;/Text&gt;&#10;  &lt;/Box&gt;&#10;  &lt;Text style={{ position: 'absolute', top: 78, left: 60, fontSize: 15, color: '#8B97A8' }}&gt;五因素加权排序缩池，边际价值决定「加入当前组合后是否仍值得执行」&lt;/Text&gt;&#10;&#10;  &lt;Box style={{ position: 'absolute', top: 116, left: 40, width: 700, flexDirection: 'column', gap: 16 }}&gt;&#10;    &lt;Box style={{ background: '#F7F9FC', border: '1px solid #D6DCE5', borderRadius: 10, padding: '16px 20px', flexDirection: 'column' }}&gt;&#10;      &lt;Text style={{ fontSize: 19, fontWeight: 'bold', color: '#0E3F8C' }}&gt;① 基础任务优先级（五因素 min-max 归一化加权）&lt;/Text&gt;&#10;      &lt;Box style={{ marginTop: 12, background: '#E8EFF8', borderRadius: 8, padding: '14px 16px', alignItems: 'center' }}&gt;&#10;        &lt;Text style={{ fontSize: 23, fontWeight: 'bold', color: '#0E3F8C' }}&gt;&#10;          P&lt;span style={{ fontSize: 15 }}&gt;i&lt;/span&gt; = w&lt;span style={{ fontSize: 15 }}&gt;r&lt;/span&gt;·R&lt;span style={{ fontSize: 15 }}&gt;i&lt;/span&gt; + w&lt;span style={{ fontSize: 15 }}&gt;u&lt;/span&gt;·U&lt;span style={{ fontSize: 15 }}&gt;i&lt;/span&gt; + w&lt;span style={{ fontSize: 15 }}&gt;w&lt;/span&gt;·W&lt;span style={{ fontSize: 15 }}&gt;i&lt;/span&gt; + w&lt;span style={{ fontSize: 15 }}&gt;s&lt;/span&gt;·G&lt;span style={{ fontSize: 15 }}&gt;i&lt;/span&gt; − w&lt;span style={{ fontSize: 15 }}&gt;c&lt;/span&gt;·C&lt;span style={{ fontSize: 15 }}&gt;i&lt;/span&gt;&#10;        &lt;/Text&gt;&#10;      &lt;/Box&gt;&#10;      &lt;Text style={{ fontSize: 14, color: '#4A5568', lineHeight: 1.7, marginTop: 10 }}&gt;&#10;        五因素均先做 min-max 归一化：收益 R · 时间紧迫度 U · 等待补偿 W = 1−e&lt;sup&gt;−t/τ&lt;/sup&gt;（防长期滞留）· 空间协同增益 G（近邻任务可同机连续执行，聚集是&lt;span style={{ color: '#1E4FA8', fontWeight: 'bold' }}&gt;正因素&lt;/span&gt;）· 粗执行代价 C；权重和为 1，默认 0.30 / 0.25 / 0.15 / 0.15 / 0.15&#10;      &lt;/Text&gt;&#10;    &lt;/Box&gt;&#10;&#10;    &lt;Box style={{ background: '#F7F9FC', border: '1px solid #D6DCE5', borderRadius: 10, padding: '16px 20px', flexDirection: 'column' }}&gt;&#10;      &lt;Text style={{ fontSize: 19, fontWeight: 'bold', color: '#0E3F8C' }}&gt;② 候选池（能力无关）/ 选择数（卡 cap）：机数名额 × 能力上界解耦&lt;/Text&gt;&#10;      &lt;Box style={{ marginTop: 12, background: '#E8EFF8', borderRadius: 8, padding: '12px 16px', flexDirection: 'column', gap: 5, alignItems: 'center' }}&gt;&#10;        &lt;Text style={{ fontSize: 16.5, fontWeight: 'bold', color: '#0E3F8C' }}&gt;&#10;          n_cand = ceil(α·K)（能力无关）　　n_sel = min{&quot;{&quot;}ceil(max_ratio·K), cap(t){&quot;}&quot;}&#10;        &lt;/Text&gt;&#10;        &lt;Text style={{ fontSize: 13, color: '#4A5568' }}&gt;&#10;          cap(t) = floor(B(t) / c_med)；K = 可用无人机数，α = 2.5、max_ratio = 2.0 均为机数倍率&#10;        &lt;/Text&gt;&#10;      &lt;/Box&gt;&#10;      &lt;Text style={{ fontSize: 14, color: '#4A5568', lineHeight: 1.7, marginTop: 10 }}&gt;&#10;        机数名额保护搜索复杂度；能力承载数只计&lt;span style={{ fontWeight: 'bold' }}&gt;可起飞子集&lt;/span&gt;的剩余航程 B(t)——正在充电的机是幻影容量，不计入；紧急/释放任务可绕过名额强制纳入，但仍须过可行性检查&#10;      &lt;/Text&gt;&#10;    &lt;/Box&gt;&#10;&#10;    &lt;Box style={{ background: '#F0F5FC', border: '1px solid #D6DCE5', borderRadius: 10, padding: '12px 20px', flexDirection: 'row', alignItems: 'center', gap: 10 }}&gt;&#10;      &lt;Text style={{ fontSize: 15, fontWeight: 'bold', color: '#0E3F8C' }}&gt;机制串联：&lt;/Text&gt;&#10;      {['按 P_i 排序', 'n_cand 候选(富)', '闸门① prefilter', 'n_sel 边际纳入(紧)', '闸门② postcheck'].map((s, i) =&gt; (&#10;        &lt;Box key={s} style={{ flexDirection: 'row', alignItems: 'center', gap: 10 }}&gt;&#10;          {i &gt; 0 &amp;&amp; &lt;Text style={{ fontSize: 16, color: '#3D7BD9', fontWeight: 'bold' }}&gt;→&lt;/Text&gt;}&#10;          &lt;Box style={{ padding: '6px 12px', background: '#FFFFFF', borderRadius: 14, border: '1px solid #3D7BD9' }}&gt;&#10;            &lt;Text style={{ fontSize: 13, color: '#1E4FA8' }}&gt;{s}&lt;/Text&gt;&#10;          &lt;/Box&gt;&#10;        &lt;/Box&gt;&#10;      ))}&#10;    &lt;/Box&gt;&#10;  &lt;/Box&gt;&#10;&#10;  &lt;Box style={{ position: 'absolute', top: 116, left: 764, width: 476, flexDirection: 'column', gap: 14 }}&gt;&#10;    &lt;Box style={{ background: '#F0F5FC', border: '1px solid #D6DCE5', borderTop: '4px solid #1E4FA8', borderRadius: 10, padding: '14px 20px', flexDirection: 'column' }}&gt;&#10;      &lt;Text style={{ fontSize: 19, fontWeight: 'bold', color: '#0E3F8C' }}&gt;③ 边际收益增量选择&lt;/Text&gt;&#10;      &lt;Box style={{ marginTop: 10, background: '#FFFFFF', borderRadius: 8, padding: '12px 14px', alignItems: 'center' }}&gt;&#10;        &lt;Text style={{ fontSize: 20, fontWeight: 'bold', color: '#0E3F8C' }}&gt;&#10;          Δ&lt;span style={{ fontSize: 13 }}&gt;i&lt;/span&gt; = ΔB&lt;span style={{ fontSize: 13 }}&gt;i&lt;/span&gt; / (ΔC&lt;span style={{ fontSize: 13 }}&gt;i&lt;/span&gt; + ε)&#10;        &lt;/Text&gt;&#10;        &lt;Text style={{ fontSize: 16, color: '#1E4FA8', marginTop: 6 }}&gt;&#10;          ΔC&lt;span style={{ fontSize: 11 }}&gt;i&lt;/span&gt; = min&lt;span style={{ fontSize: 12 }}&gt;{&quot;{&quot;} C&lt;span style={{ fontSize: 10 }}&gt;ai&lt;/span&gt; + C&lt;span style={{ fontSize: 10 }}&gt;ib&lt;/span&gt; − C&lt;span style={{ fontSize: 10 }}&gt;ab&lt;/span&gt; {&quot;}&quot;}&#10;          &lt;/span&gt;（所有锚点对插入，统一 DEM 三维航程）&#10;        &lt;/Text&gt;&#10;      &lt;/Box&gt;&#10;      &lt;Text style={{ fontSize: 14, color: '#4A5568', lineHeight: 1.7, marginTop: 8 }}&gt;&#10;        插入式快速估计：对「已选集合 + 最近机巢」的&lt;span style={{ fontWeight: 'bold' }}&gt;所有锚点对&lt;/span&gt;试接入任务 i，取最小三维航程增量——不预设任何顺序、不求解完整 MUAS，与已选任务空间相近者因增量代价低而胜出&#10;      &lt;/Text&gt;&#10;    &lt;/Box&gt;&#10;&#10;    &lt;Box style={{ background: '#F7F9FC', border: '1px solid #D6DCE5', borderRadius: 10, padding: '13px 20px', flexDirection: 'column' }}&gt;&#10;      &lt;Text style={{ fontSize: 17, fontWeight: 'bold', color: '#0E3F8C' }}&gt;④ 两道可行性闸门（粗粒度，弹回不淘汰）&lt;/Text&gt;&#10;      &lt;Text style={{ fontSize: 14, color: '#4A5568', lineHeight: 1.7, marginTop: 6 }}&gt;&#10;        闸门① prefilter：是否有可用机 · 单任务往返可达 · 三维地形不可达；闸门② postcheck：机群剩余航程预算——仅物理不可行才不进候选，否则留池下周期再评；时间窗迟到由适应度折减、非参选资格&#10;      &lt;/Text&gt;&#10;    &lt;/Box&gt;&#10;&#10;    &lt;Box style={{ background: '#0E3F8C', borderRadius: 10, padding: '14px 20px', flexDirection: 'column' }}&gt;&#10;      &lt;Text style={{ fontSize: 16, fontWeight: 'bold', color: '#FFFFFF', lineHeight: 1.6 }}&gt;&#10;        判断：选择质量与实时性兼得——边际比只依赖代价矩阵查表与插入估计，单周期选择开销可忽略，却保住了「任务 × 组合」的匹配质量。&#10;      &lt;/Text&gt;&#10;    &lt;/Box&gt;&#10;  &lt;/Box&gt;&#10;&#10;  &lt;Box style={{ position: 'absolute', bottom: 0, left: 0, width: 1280, height: 44, background: '#F7F9FC', flexDirection: 'row', justifyContent: 'space-between', alignItems: 'center', padding: '0 40px', borderTop: '1px solid #E5E7EB' }}&gt;&#10;    &lt;Text style={{ fontSize: 13, color: '#8B97A8' }}&gt;动态滚动的多机巢多无人机协同任务分配 · 进展汇报&lt;/Text&gt;&#10;    &lt;Text style={{ fontSize: 15, color: '#1E4FA8', fontWeight: 'bold' }}&gt;07 / 16&lt;/Text&gt;&#10;  &lt;/Box&gt;&#10;&lt;/Slide&gt;&#10;"/>
         <p:cNvGrpSpPr/>
         <p:nvPr/>
       </p:nvGrpSpPr>
@@ -19841,12 +19876,12 @@
       </p:grpSpPr>
       <p:sp>
         <p:nvSpPr>
-          <p:cNvPr id="383" name=""/>
+          <p:cNvPr id="383" name="矩形 382"/>
           <p:cNvSpPr/>
           <p:nvPr/>
         </p:nvSpPr>
         <p:spPr>
-          <a:xfrm rot="0" flipH="0" flipV="0">
+          <a:xfrm>
             <a:off x="0" y="0"/>
             <a:ext cx="12192000" cy="6858000"/>
           </a:xfrm>
@@ -19860,17 +19895,20 @@
         </p:spPr>
         <p:txBody>
           <a:bodyPr/>
-          <a:p/>
-        </p:txBody>
-      </p:sp>
-      <p:sp>
-        <p:nvSpPr>
-          <p:cNvPr id="384" name=""/>
+          <a:lstStyle/>
+          <a:p>
+            <a:endParaRPr/>
+          </a:p>
+        </p:txBody>
+      </p:sp>
+      <p:sp>
+        <p:nvSpPr>
+          <p:cNvPr id="384" name="矩形 383"/>
           <p:cNvSpPr/>
           <p:nvPr/>
         </p:nvSpPr>
         <p:spPr>
-          <a:xfrm rot="0" flipH="0" flipV="0">
+          <a:xfrm>
             <a:off x="0" y="0"/>
             <a:ext cx="12192000" cy="114300"/>
           </a:xfrm>
@@ -19884,17 +19922,20 @@
         </p:spPr>
         <p:txBody>
           <a:bodyPr/>
-          <a:p/>
-        </p:txBody>
-      </p:sp>
-      <p:sp>
-        <p:nvSpPr>
-          <p:cNvPr id="385" name=""/>
+          <a:lstStyle/>
+          <a:p>
+            <a:endParaRPr/>
+          </a:p>
+        </p:txBody>
+      </p:sp>
+      <p:sp>
+        <p:nvSpPr>
+          <p:cNvPr id="385" name="矩形 384"/>
           <p:cNvSpPr/>
           <p:nvPr/>
         </p:nvSpPr>
         <p:spPr>
-          <a:xfrm rot="0" flipH="0" flipV="0">
+          <a:xfrm>
             <a:off x="381000" y="314325"/>
             <a:ext cx="57150" cy="323850"/>
           </a:xfrm>
@@ -19908,24 +19949,30 @@
         </p:spPr>
         <p:txBody>
           <a:bodyPr/>
-          <a:p/>
-        </p:txBody>
-      </p:sp>
-      <p:sp>
-        <p:nvSpPr>
-          <p:cNvPr id="386" name="" descr="{&quot;isTemplate&quot;:true,&quot;type&quot;:&quot;text&quot;}"/>
+          <a:lstStyle/>
+          <a:p>
+            <a:endParaRPr/>
+          </a:p>
+        </p:txBody>
+      </p:sp>
+      <p:sp>
+        <p:nvSpPr>
+          <p:cNvPr id="386" name="文本框 385" descr="{&quot;isTemplate&quot;:true,&quot;type&quot;:&quot;text&quot;}"/>
           <p:cNvSpPr txBox="1"/>
           <p:nvPr/>
         </p:nvSpPr>
         <p:spPr>
-          <a:xfrm rot="0" flipH="0" flipV="0">
+          <a:xfrm>
             <a:off x="571500" y="285750"/>
             <a:ext cx="5295900" cy="371475"/>
           </a:xfrm>
-          <a:prstGeom prst="rect"/>
+          <a:prstGeom prst="rect">
+            <a:avLst/>
+          </a:prstGeom>
         </p:spPr>
         <p:txBody>
           <a:bodyPr wrap="none" lIns="0" tIns="0" rIns="0" bIns="0"/>
+          <a:lstStyle/>
           <a:p>
             <a:pPr>
               <a:lnSpc>
@@ -19950,7 +19997,7 @@
                 <a:latin typeface="Source Han Sans CN"/>
                 <a:ea typeface="Source Han Sans CN"/>
               </a:rPr>
-              <a:t xml:space="preserve"> + </a:t>
+              <a:t> + </a:t>
             </a:r>
             <a:r>
               <a:rPr lang="zh-CN" sz="2400" b="1">
@@ -19968,19 +20015,22 @@
       </p:sp>
       <p:sp>
         <p:nvSpPr>
-          <p:cNvPr id="387" name="" descr="{&quot;isTemplate&quot;:true,&quot;type&quot;:&quot;text&quot;}"/>
+          <p:cNvPr id="387" name="文本框 386" descr="{&quot;isTemplate&quot;:true,&quot;type&quot;:&quot;text&quot;}"/>
           <p:cNvSpPr txBox="1"/>
           <p:nvPr/>
         </p:nvSpPr>
         <p:spPr>
-          <a:xfrm rot="0" flipH="0" flipV="0">
+          <a:xfrm>
             <a:off x="571500" y="742950"/>
             <a:ext cx="4572000" cy="171450"/>
           </a:xfrm>
-          <a:prstGeom prst="rect"/>
+          <a:prstGeom prst="rect">
+            <a:avLst/>
+          </a:prstGeom>
         </p:spPr>
         <p:txBody>
           <a:bodyPr wrap="none" lIns="0" tIns="0" rIns="0" bIns="0"/>
+          <a:lstStyle/>
           <a:p>
             <a:pPr>
               <a:lnSpc>
@@ -20003,12 +20053,12 @@
       </p:sp>
       <p:sp>
         <p:nvSpPr>
-          <p:cNvPr id="388" name=""/>
+          <p:cNvPr id="388" name="矩形: 圆角 387"/>
           <p:cNvSpPr/>
           <p:nvPr/>
         </p:nvSpPr>
         <p:spPr>
-          <a:xfrm rot="0" flipH="0" flipV="0">
+          <a:xfrm>
             <a:off x="381000" y="1104900"/>
             <a:ext cx="6667500" cy="2085975"/>
           </a:xfrm>
@@ -20029,24 +20079,30 @@
         </p:spPr>
         <p:txBody>
           <a:bodyPr/>
-          <a:p/>
-        </p:txBody>
-      </p:sp>
-      <p:sp>
-        <p:nvSpPr>
-          <p:cNvPr id="389" name="" descr="{&quot;isTemplate&quot;:true,&quot;type&quot;:&quot;text&quot;}"/>
+          <a:lstStyle/>
+          <a:p>
+            <a:endParaRPr/>
+          </a:p>
+        </p:txBody>
+      </p:sp>
+      <p:sp>
+        <p:nvSpPr>
+          <p:cNvPr id="389" name="文本框 388" descr="{&quot;isTemplate&quot;:true,&quot;type&quot;:&quot;text&quot;}"/>
           <p:cNvSpPr txBox="1"/>
           <p:nvPr/>
         </p:nvSpPr>
         <p:spPr>
-          <a:xfrm rot="0" flipH="0" flipV="0">
+          <a:xfrm>
             <a:off x="571500" y="1257300"/>
             <a:ext cx="6286500" cy="219075"/>
           </a:xfrm>
-          <a:prstGeom prst="rect"/>
+          <a:prstGeom prst="rect">
+            <a:avLst/>
+          </a:prstGeom>
         </p:spPr>
         <p:txBody>
           <a:bodyPr wrap="none" lIns="0" tIns="0" rIns="0" bIns="0"/>
+          <a:lstStyle/>
           <a:p>
             <a:pPr>
               <a:lnSpc>
@@ -20061,7 +20117,7 @@
                 <a:latin typeface="Source Han Sans CN"/>
                 <a:ea typeface="Source Han Sans CN"/>
               </a:rPr>
-              <a:t xml:space="preserve">① </a:t>
+              <a:t>① </a:t>
             </a:r>
             <a:r>
               <a:rPr lang="zh-CN" sz="1425" b="1">
@@ -20081,7 +20137,7 @@
                 <a:latin typeface="Source Han Sans CN"/>
                 <a:ea typeface="Source Han Sans CN"/>
               </a:rPr>
-              <a:t xml:space="preserve"> min-max </a:t>
+              <a:t> min-max </a:t>
             </a:r>
             <a:r>
               <a:rPr lang="zh-CN" sz="1425" b="1">
@@ -20099,12 +20155,12 @@
       </p:sp>
       <p:sp>
         <p:nvSpPr>
-          <p:cNvPr id="390" name=""/>
+          <p:cNvPr id="390" name="矩形: 圆角 389"/>
           <p:cNvSpPr/>
           <p:nvPr/>
         </p:nvSpPr>
         <p:spPr>
-          <a:xfrm rot="0" flipH="0" flipV="0">
+          <a:xfrm>
             <a:off x="571500" y="1590675"/>
             <a:ext cx="6286500" cy="533400"/>
           </a:xfrm>
@@ -20120,24 +20176,30 @@
         </p:spPr>
         <p:txBody>
           <a:bodyPr/>
-          <a:p/>
-        </p:txBody>
-      </p:sp>
-      <p:sp>
-        <p:nvSpPr>
-          <p:cNvPr id="391" name="" descr="{&quot;isTemplate&quot;:true,&quot;type&quot;:&quot;text&quot;}"/>
+          <a:lstStyle/>
+          <a:p>
+            <a:endParaRPr/>
+          </a:p>
+        </p:txBody>
+      </p:sp>
+      <p:sp>
+        <p:nvSpPr>
+          <p:cNvPr id="391" name="文本框 390" descr="{&quot;isTemplate&quot;:true,&quot;type&quot;:&quot;text&quot;}"/>
           <p:cNvSpPr txBox="1"/>
           <p:nvPr/>
         </p:nvSpPr>
         <p:spPr>
-          <a:xfrm rot="0" flipH="0" flipV="0">
+          <a:xfrm>
             <a:off x="1419225" y="1724025"/>
             <a:ext cx="4600575" cy="266700"/>
           </a:xfrm>
-          <a:prstGeom prst="rect"/>
+          <a:prstGeom prst="rect">
+            <a:avLst/>
+          </a:prstGeom>
         </p:spPr>
         <p:txBody>
           <a:bodyPr wrap="none" lIns="0" tIns="0" rIns="0" bIns="0"/>
+          <a:lstStyle/>
           <a:p>
             <a:pPr>
               <a:lnSpc>
@@ -20172,7 +20234,7 @@
                 <a:latin typeface="Source Han Sans CN"/>
                 <a:ea typeface="Source Han Sans CN"/>
               </a:rPr>
-              <a:t xml:space="preserve"> = w</a:t>
+              <a:t> = w</a:t>
             </a:r>
             <a:r>
               <a:rPr lang="en-US" sz="1125" b="1">
@@ -20212,7 +20274,7 @@
                 <a:latin typeface="Source Han Sans CN"/>
                 <a:ea typeface="Source Han Sans CN"/>
               </a:rPr>
-              <a:t xml:space="preserve"> + w</a:t>
+              <a:t> + w</a:t>
             </a:r>
             <a:r>
               <a:rPr lang="en-US" sz="1125" b="1">
@@ -20252,7 +20314,7 @@
                 <a:latin typeface="Source Han Sans CN"/>
                 <a:ea typeface="Source Han Sans CN"/>
               </a:rPr>
-              <a:t xml:space="preserve"> + w</a:t>
+              <a:t> + w</a:t>
             </a:r>
             <a:r>
               <a:rPr lang="en-US" sz="1125" b="1">
@@ -20292,7 +20354,7 @@
                 <a:latin typeface="Source Han Sans CN"/>
                 <a:ea typeface="Source Han Sans CN"/>
               </a:rPr>
-              <a:t xml:space="preserve"> + w</a:t>
+              <a:t> + w</a:t>
             </a:r>
             <a:r>
               <a:rPr lang="en-US" sz="1125" b="1">
@@ -20332,7 +20394,7 @@
                 <a:latin typeface="Source Han Sans CN"/>
                 <a:ea typeface="Source Han Sans CN"/>
               </a:rPr>
-              <a:t xml:space="preserve"> − w</a:t>
+              <a:t> − w</a:t>
             </a:r>
             <a:r>
               <a:rPr lang="en-US" sz="1125" b="1">
@@ -20370,21 +20432,24 @@
       </p:sp>
       <p:sp>
         <p:nvSpPr>
-          <p:cNvPr id="392" name="" descr="{&quot;isTemplate&quot;:true,&quot;type&quot;:&quot;text&quot;}"/>
+          <p:cNvPr id="392" name="文本框 391" descr="{&quot;isTemplate&quot;:true,&quot;type&quot;:&quot;text&quot;}"/>
           <p:cNvSpPr txBox="1"/>
           <p:nvPr/>
         </p:nvSpPr>
         <p:spPr>
-          <a:xfrm rot="0" flipH="0" flipV="0">
+          <a:xfrm>
             <a:off x="571500" y="2219325"/>
             <a:ext cx="6286500" cy="819150"/>
           </a:xfrm>
-          <a:prstGeom prst="rect"/>
+          <a:prstGeom prst="rect">
+            <a:avLst/>
+          </a:prstGeom>
         </p:spPr>
         <p:txBody>
           <a:bodyPr wrap="square" lIns="0" tIns="0" rIns="0" bIns="0">
             <a:normAutofit/>
           </a:bodyPr>
+          <a:lstStyle/>
           <a:p>
             <a:pPr>
               <a:lnSpc>
@@ -20409,7 +20474,7 @@
                 <a:latin typeface="Source Han Sans CN"/>
                 <a:ea typeface="Source Han Sans CN"/>
               </a:rPr>
-              <a:t xml:space="preserve"> min-max </a:t>
+              <a:t> min-max </a:t>
             </a:r>
             <a:r>
               <a:rPr lang="zh-CN" sz="1050">
@@ -20429,7 +20494,7 @@
                 <a:latin typeface="Source Han Sans CN"/>
                 <a:ea typeface="Source Han Sans CN"/>
               </a:rPr>
-              <a:t xml:space="preserve"> R · </a:t>
+              <a:t> R · </a:t>
             </a:r>
             <a:r>
               <a:rPr lang="zh-CN" sz="1050">
@@ -20449,7 +20514,7 @@
                 <a:latin typeface="Source Han Sans CN"/>
                 <a:ea typeface="Source Han Sans CN"/>
               </a:rPr>
-              <a:t xml:space="preserve"> U · </a:t>
+              <a:t> U · </a:t>
             </a:r>
             <a:r>
               <a:rPr lang="zh-CN" sz="1050">
@@ -20469,7 +20534,17 @@
                 <a:latin typeface="Source Han Sans CN"/>
                 <a:ea typeface="Source Han Sans CN"/>
               </a:rPr>
-              <a:t xml:space="preserve"> W = 1−e</a:t>
+              <a:t> W = 1−e−t/τ</a:t>
+            </a:r>
+            <a:r>
+              <a:rPr lang="zh-CN" sz="1050">
+                <a:solidFill>
+                  <a:srgbClr val="4A5568"/>
+                </a:solidFill>
+                <a:latin typeface="Source Han Sans CN"/>
+                <a:ea typeface="Source Han Sans CN"/>
+              </a:rPr>
+              <a:t>（防长期滞留）·</a:t>
             </a:r>
             <a:r>
               <a:rPr lang="en-US" sz="1050">
@@ -20479,7 +20554,7 @@
                 <a:latin typeface="Source Han Sans CN"/>
                 <a:ea typeface="Source Han Sans CN"/>
               </a:rPr>
-              <a:t>−t/τ</a:t>
+              <a:t> </a:t>
             </a:r>
             <a:r>
               <a:rPr lang="zh-CN" sz="1050">
@@ -20489,7 +20564,7 @@
                 <a:latin typeface="Source Han Sans CN"/>
                 <a:ea typeface="Source Han Sans CN"/>
               </a:rPr>
-              <a:t>（防长期滞留）·</a:t>
+              <a:t>空间协同增益</a:t>
             </a:r>
             <a:r>
               <a:rPr lang="en-US" sz="1050">
@@ -20499,7 +20574,7 @@
                 <a:latin typeface="Source Han Sans CN"/>
                 <a:ea typeface="Source Han Sans CN"/>
               </a:rPr>
-              <a:t xml:space="preserve"> </a:t>
+              <a:t> G</a:t>
             </a:r>
             <a:r>
               <a:rPr lang="zh-CN" sz="1050">
@@ -20509,7 +20584,27 @@
                 <a:latin typeface="Source Han Sans CN"/>
                 <a:ea typeface="Source Han Sans CN"/>
               </a:rPr>
-              <a:t>空间协同增益</a:t>
+              <a:t>（近邻任务可同机连续执行，聚集是</a:t>
+            </a:r>
+            <a:r>
+              <a:rPr lang="zh-CN" sz="1050" b="1">
+                <a:solidFill>
+                  <a:srgbClr val="1E4FA8"/>
+                </a:solidFill>
+                <a:latin typeface="Source Han Sans CN"/>
+                <a:ea typeface="Source Han Sans CN"/>
+              </a:rPr>
+              <a:t>正因素</a:t>
+            </a:r>
+            <a:r>
+              <a:rPr lang="zh-CN" sz="1050">
+                <a:solidFill>
+                  <a:srgbClr val="4A5568"/>
+                </a:solidFill>
+                <a:latin typeface="Source Han Sans CN"/>
+                <a:ea typeface="Source Han Sans CN"/>
+              </a:rPr>
+              <a:t>）·</a:t>
             </a:r>
             <a:r>
               <a:rPr lang="en-US" sz="1050">
@@ -20519,7 +20614,7 @@
                 <a:latin typeface="Source Han Sans CN"/>
                 <a:ea typeface="Source Han Sans CN"/>
               </a:rPr>
-              <a:t xml:space="preserve"> G</a:t>
+              <a:t> </a:t>
             </a:r>
             <a:r>
               <a:rPr lang="zh-CN" sz="1050">
@@ -20529,17 +20624,17 @@
                 <a:latin typeface="Source Han Sans CN"/>
                 <a:ea typeface="Source Han Sans CN"/>
               </a:rPr>
-              <a:t>（近邻任务可同机连续执行，聚集是</a:t>
-            </a:r>
-            <a:r>
-              <a:rPr lang="zh-CN" sz="1050" b="1">
-                <a:solidFill>
-                  <a:srgbClr val="1E4FA8"/>
-                </a:solidFill>
-                <a:latin typeface="Source Han Sans CN"/>
-                <a:ea typeface="Source Han Sans CN"/>
-              </a:rPr>
-              <a:t>正因素</a:t>
+              <a:t>粗执行代价</a:t>
+            </a:r>
+            <a:r>
+              <a:rPr lang="en-US" sz="1050">
+                <a:solidFill>
+                  <a:srgbClr val="4A5568"/>
+                </a:solidFill>
+                <a:latin typeface="Source Han Sans CN"/>
+                <a:ea typeface="Source Han Sans CN"/>
+              </a:rPr>
+              <a:t> C</a:t>
             </a:r>
             <a:r>
               <a:rPr lang="zh-CN" sz="1050">
@@ -20549,7 +20644,7 @@
                 <a:latin typeface="Source Han Sans CN"/>
                 <a:ea typeface="Source Han Sans CN"/>
               </a:rPr>
-              <a:t>）·</a:t>
+              <a:t>；权重和为</a:t>
             </a:r>
             <a:r>
               <a:rPr lang="en-US" sz="1050">
@@ -20559,7 +20654,7 @@
                 <a:latin typeface="Source Han Sans CN"/>
                 <a:ea typeface="Source Han Sans CN"/>
               </a:rPr>
-              <a:t xml:space="preserve"> </a:t>
+              <a:t> 1</a:t>
             </a:r>
             <a:r>
               <a:rPr lang="zh-CN" sz="1050">
@@ -20569,7 +20664,7 @@
                 <a:latin typeface="Source Han Sans CN"/>
                 <a:ea typeface="Source Han Sans CN"/>
               </a:rPr>
-              <a:t>粗执行代价</a:t>
+              <a:t>，默认</a:t>
             </a:r>
             <a:r>
               <a:rPr lang="en-US" sz="1050">
@@ -20579,60 +20674,20 @@
                 <a:latin typeface="Source Han Sans CN"/>
                 <a:ea typeface="Source Han Sans CN"/>
               </a:rPr>
-              <a:t xml:space="preserve"> C</a:t>
-            </a:r>
-            <a:r>
-              <a:rPr lang="zh-CN" sz="1050">
-                <a:solidFill>
-                  <a:srgbClr val="4A5568"/>
-                </a:solidFill>
-                <a:latin typeface="Source Han Sans CN"/>
-                <a:ea typeface="Source Han Sans CN"/>
-              </a:rPr>
-              <a:t>；权重和为</a:t>
-            </a:r>
-            <a:r>
-              <a:rPr lang="en-US" sz="1050">
-                <a:solidFill>
-                  <a:srgbClr val="4A5568"/>
-                </a:solidFill>
-                <a:latin typeface="Source Han Sans CN"/>
-                <a:ea typeface="Source Han Sans CN"/>
-              </a:rPr>
-              <a:t xml:space="preserve"> 1</a:t>
-            </a:r>
-            <a:r>
-              <a:rPr lang="zh-CN" sz="1050">
-                <a:solidFill>
-                  <a:srgbClr val="4A5568"/>
-                </a:solidFill>
-                <a:latin typeface="Source Han Sans CN"/>
-                <a:ea typeface="Source Han Sans CN"/>
-              </a:rPr>
-              <a:t>，默认</a:t>
-            </a:r>
-            <a:r>
-              <a:rPr lang="en-US" sz="1050">
-                <a:solidFill>
-                  <a:srgbClr val="4A5568"/>
-                </a:solidFill>
-                <a:latin typeface="Source Han Sans CN"/>
-                <a:ea typeface="Source Han Sans CN"/>
-              </a:rPr>
-              <a:t xml:space="preserve"> 0.30 / 0.25 / 0.15 / 0.15 / 0.15</a:t>
-            </a:r>
-            <a:endParaRPr/>
-          </a:p>
-        </p:txBody>
-      </p:sp>
-      <p:sp>
-        <p:nvSpPr>
-          <p:cNvPr id="393" name=""/>
+              <a:t> 0.30 / 0.25 / 0.15 / 0.15 / 0.15</a:t>
+            </a:r>
+            <a:endParaRPr/>
+          </a:p>
+        </p:txBody>
+      </p:sp>
+      <p:sp>
+        <p:nvSpPr>
+          <p:cNvPr id="393" name="矩形: 圆角 392"/>
           <p:cNvSpPr/>
           <p:nvPr/>
         </p:nvSpPr>
         <p:spPr>
-          <a:xfrm rot="0" flipH="0" flipV="0">
+          <a:xfrm>
             <a:off x="381000" y="3343275"/>
             <a:ext cx="6667500" cy="1905000"/>
           </a:xfrm>
@@ -20653,24 +20708,30 @@
         </p:spPr>
         <p:txBody>
           <a:bodyPr/>
-          <a:p/>
-        </p:txBody>
-      </p:sp>
-      <p:sp>
-        <p:nvSpPr>
-          <p:cNvPr id="394" name="" descr="{&quot;isTemplate&quot;:true,&quot;type&quot;:&quot;text&quot;}"/>
+          <a:lstStyle/>
+          <a:p>
+            <a:endParaRPr/>
+          </a:p>
+        </p:txBody>
+      </p:sp>
+      <p:sp>
+        <p:nvSpPr>
+          <p:cNvPr id="394" name="文本框 393" descr="{&quot;isTemplate&quot;:true,&quot;type&quot;:&quot;text&quot;}"/>
           <p:cNvSpPr txBox="1"/>
           <p:nvPr/>
         </p:nvSpPr>
         <p:spPr>
-          <a:xfrm rot="0" flipH="0" flipV="0">
+          <a:xfrm>
             <a:off x="571500" y="3495675"/>
             <a:ext cx="6286500" cy="219075"/>
           </a:xfrm>
-          <a:prstGeom prst="rect"/>
+          <a:prstGeom prst="rect">
+            <a:avLst/>
+          </a:prstGeom>
         </p:spPr>
         <p:txBody>
           <a:bodyPr wrap="none" lIns="0" tIns="0" rIns="0" bIns="0"/>
+          <a:lstStyle/>
           <a:p>
             <a:pPr>
               <a:lnSpc>
@@ -20685,7 +20746,7 @@
                 <a:latin typeface="Source Han Sans CN"/>
                 <a:ea typeface="Source Han Sans CN"/>
               </a:rPr>
-              <a:t xml:space="preserve">② </a:t>
+              <a:t>② </a:t>
             </a:r>
             <a:r>
               <a:rPr lang="zh-CN" sz="1425" b="1">
@@ -20705,7 +20766,7 @@
                 <a:latin typeface="Source Han Sans CN"/>
                 <a:ea typeface="Source Han Sans CN"/>
               </a:rPr>
-              <a:t xml:space="preserve">/ </a:t>
+              <a:t>/ </a:t>
             </a:r>
             <a:r>
               <a:rPr lang="zh-CN" sz="1425" b="1">
@@ -20725,7 +20786,7 @@
                 <a:latin typeface="Source Han Sans CN"/>
                 <a:ea typeface="Source Han Sans CN"/>
               </a:rPr>
-              <a:t xml:space="preserve"> cap</a:t>
+              <a:t> cap</a:t>
             </a:r>
             <a:r>
               <a:rPr lang="zh-CN" sz="1425" b="1">
@@ -20745,7 +20806,7 @@
                 <a:latin typeface="Source Han Sans CN"/>
                 <a:ea typeface="Source Han Sans CN"/>
               </a:rPr>
-              <a:t xml:space="preserve"> × </a:t>
+              <a:t> × </a:t>
             </a:r>
             <a:r>
               <a:rPr lang="zh-CN" sz="1425" b="1">
@@ -20763,12 +20824,12 @@
       </p:sp>
       <p:sp>
         <p:nvSpPr>
-          <p:cNvPr id="395" name=""/>
+          <p:cNvPr id="395" name="矩形: 圆角 394"/>
           <p:cNvSpPr/>
           <p:nvPr/>
         </p:nvSpPr>
         <p:spPr>
-          <a:xfrm rot="0" flipH="0" flipV="0">
+          <a:xfrm>
             <a:off x="571500" y="3829050"/>
             <a:ext cx="6286500" cy="619125"/>
           </a:xfrm>
@@ -20784,24 +20845,30 @@
         </p:spPr>
         <p:txBody>
           <a:bodyPr/>
-          <a:p/>
-        </p:txBody>
-      </p:sp>
-      <p:sp>
-        <p:nvSpPr>
-          <p:cNvPr id="396" name="" descr="{&quot;isTemplate&quot;:true,&quot;type&quot;:&quot;text&quot;}"/>
+          <a:lstStyle/>
+          <a:p>
+            <a:endParaRPr/>
+          </a:p>
+        </p:txBody>
+      </p:sp>
+      <p:sp>
+        <p:nvSpPr>
+          <p:cNvPr id="396" name="文本框 395" descr="{&quot;isTemplate&quot;:true,&quot;type&quot;:&quot;text&quot;}"/>
           <p:cNvSpPr txBox="1"/>
           <p:nvPr/>
         </p:nvSpPr>
         <p:spPr>
-          <a:xfrm rot="0" flipH="0" flipV="0">
+          <a:xfrm>
             <a:off x="904875" y="3943350"/>
             <a:ext cx="5629275" cy="190500"/>
           </a:xfrm>
-          <a:prstGeom prst="rect"/>
+          <a:prstGeom prst="rect">
+            <a:avLst/>
+          </a:prstGeom>
         </p:spPr>
         <p:txBody>
           <a:bodyPr wrap="none" lIns="0" tIns="0" rIns="0" bIns="0"/>
+          <a:lstStyle/>
           <a:p>
             <a:pPr>
               <a:lnSpc>
@@ -20836,57 +20903,30 @@
                 <a:latin typeface="Source Han Sans CN"/>
                 <a:ea typeface="Source Han Sans CN"/>
               </a:rPr>
-              <a:t>n_sel = min</a:t>
-            </a:r>
-            <a:r>
-              <a:rPr lang="en-US" sz="1238" b="1">
-                <a:solidFill>
-                  <a:srgbClr val="0E3F8C"/>
-                </a:solidFill>
-                <a:latin typeface="Source Han Sans CN"/>
-                <a:ea typeface="Source Han Sans CN"/>
-              </a:rPr>
-              <a:t>{</a:t>
-            </a:r>
-            <a:r>
-              <a:rPr lang="en-US" sz="1238" b="1">
-                <a:solidFill>
-                  <a:srgbClr val="0E3F8C"/>
-                </a:solidFill>
-                <a:latin typeface="Source Han Sans CN"/>
-                <a:ea typeface="Source Han Sans CN"/>
-              </a:rPr>
-              <a:t>ceil(max_ratio·K), cap(t)</a:t>
-            </a:r>
-            <a:r>
-              <a:rPr lang="en-US" sz="1238" b="1">
-                <a:solidFill>
-                  <a:srgbClr val="0E3F8C"/>
-                </a:solidFill>
-                <a:latin typeface="Source Han Sans CN"/>
-                <a:ea typeface="Source Han Sans CN"/>
-              </a:rPr>
-              <a:t>}</a:t>
-            </a:r>
-            <a:endParaRPr/>
-          </a:p>
-        </p:txBody>
-      </p:sp>
-      <p:sp>
-        <p:nvSpPr>
-          <p:cNvPr id="397" name="" descr="{&quot;isTemplate&quot;:true,&quot;type&quot;:&quot;text&quot;}"/>
+              <a:t>n_sel = min{ceil(max_ratio·K), cap(t)}</a:t>
+            </a:r>
+            <a:endParaRPr/>
+          </a:p>
+        </p:txBody>
+      </p:sp>
+      <p:sp>
+        <p:nvSpPr>
+          <p:cNvPr id="397" name="文本框 396" descr="{&quot;isTemplate&quot;:true,&quot;type&quot;:&quot;text&quot;}"/>
           <p:cNvSpPr txBox="1"/>
           <p:nvPr/>
         </p:nvSpPr>
         <p:spPr>
-          <a:xfrm rot="0" flipH="0" flipV="0">
+          <a:xfrm>
             <a:off x="1181100" y="4181475"/>
             <a:ext cx="5067300" cy="152400"/>
           </a:xfrm>
-          <a:prstGeom prst="rect"/>
+          <a:prstGeom prst="rect">
+            <a:avLst/>
+          </a:prstGeom>
         </p:spPr>
         <p:txBody>
           <a:bodyPr wrap="none" lIns="0" tIns="0" rIns="0" bIns="0"/>
+          <a:lstStyle/>
           <a:p>
             <a:pPr>
               <a:lnSpc>
@@ -20921,7 +20961,7 @@
                 <a:latin typeface="Source Han Sans CN"/>
                 <a:ea typeface="Source Han Sans CN"/>
               </a:rPr>
-              <a:t xml:space="preserve">K = </a:t>
+              <a:t>K = </a:t>
             </a:r>
             <a:r>
               <a:rPr lang="zh-CN" sz="975">
@@ -20941,7 +20981,7 @@
                 <a:latin typeface="Source Han Sans CN"/>
                 <a:ea typeface="Source Han Sans CN"/>
               </a:rPr>
-              <a:t xml:space="preserve"> = 2.5</a:t>
+              <a:t> = 2.5</a:t>
             </a:r>
             <a:r>
               <a:rPr lang="zh-CN" sz="975">
@@ -20961,7 +21001,7 @@
                 <a:latin typeface="Source Han Sans CN"/>
                 <a:ea typeface="Source Han Sans CN"/>
               </a:rPr>
-              <a:t xml:space="preserve">max_ratio = 2.0 </a:t>
+              <a:t>max_ratio = 2.0 </a:t>
             </a:r>
             <a:r>
               <a:rPr lang="zh-CN" sz="975">
@@ -20979,21 +21019,24 @@
       </p:sp>
       <p:sp>
         <p:nvSpPr>
-          <p:cNvPr id="398" name="" descr="{&quot;isTemplate&quot;:true,&quot;type&quot;:&quot;text&quot;}"/>
+          <p:cNvPr id="398" name="文本框 397" descr="{&quot;isTemplate&quot;:true,&quot;type&quot;:&quot;text&quot;}"/>
           <p:cNvSpPr txBox="1"/>
           <p:nvPr/>
         </p:nvSpPr>
         <p:spPr>
-          <a:xfrm rot="0" flipH="0" flipV="0">
+          <a:xfrm>
             <a:off x="571500" y="4543425"/>
             <a:ext cx="6286500" cy="552450"/>
           </a:xfrm>
-          <a:prstGeom prst="rect"/>
+          <a:prstGeom prst="rect">
+            <a:avLst/>
+          </a:prstGeom>
         </p:spPr>
         <p:txBody>
           <a:bodyPr wrap="square" lIns="0" tIns="0" rIns="0" bIns="0">
             <a:normAutofit/>
           </a:bodyPr>
+          <a:lstStyle/>
           <a:p>
             <a:pPr>
               <a:lnSpc>
@@ -21038,7 +21081,7 @@
                 <a:latin typeface="Source Han Sans CN"/>
                 <a:ea typeface="Source Han Sans CN"/>
               </a:rPr>
-              <a:t xml:space="preserve"> B(t)——</a:t>
+              <a:t> B(t)——</a:t>
             </a:r>
             <a:r>
               <a:rPr lang="zh-CN" sz="1050">
@@ -21076,12 +21119,12 @@
       </p:sp>
       <p:sp>
         <p:nvSpPr>
-          <p:cNvPr id="399" name=""/>
+          <p:cNvPr id="399" name="矩形: 圆角 398"/>
           <p:cNvSpPr/>
           <p:nvPr/>
         </p:nvSpPr>
         <p:spPr>
-          <a:xfrm rot="0" flipH="0" flipV="0">
+          <a:xfrm>
             <a:off x="381000" y="5400675"/>
             <a:ext cx="6667500" cy="495300"/>
           </a:xfrm>
@@ -21102,24 +21145,30 @@
         </p:spPr>
         <p:txBody>
           <a:bodyPr/>
-          <a:p/>
-        </p:txBody>
-      </p:sp>
-      <p:sp>
-        <p:nvSpPr>
-          <p:cNvPr id="400" name="" descr="{&quot;isTemplate&quot;:true,&quot;type&quot;:&quot;text&quot;}"/>
+          <a:lstStyle/>
+          <a:p>
+            <a:endParaRPr/>
+          </a:p>
+        </p:txBody>
+      </p:sp>
+      <p:sp>
+        <p:nvSpPr>
+          <p:cNvPr id="400" name="文本框 399" descr="{&quot;isTemplate&quot;:true,&quot;type&quot;:&quot;text&quot;}"/>
           <p:cNvSpPr txBox="1"/>
           <p:nvPr/>
         </p:nvSpPr>
         <p:spPr>
-          <a:xfrm rot="0" flipH="0" flipV="0">
+          <a:xfrm>
             <a:off x="571500" y="5562600"/>
             <a:ext cx="571500" cy="171450"/>
           </a:xfrm>
-          <a:prstGeom prst="rect"/>
+          <a:prstGeom prst="rect">
+            <a:avLst/>
+          </a:prstGeom>
         </p:spPr>
         <p:txBody>
           <a:bodyPr wrap="none" lIns="0" tIns="0" rIns="0" bIns="0"/>
+          <a:lstStyle/>
           <a:p>
             <a:pPr>
               <a:lnSpc>
@@ -21142,12 +21191,12 @@
       </p:sp>
       <p:sp>
         <p:nvSpPr>
-          <p:cNvPr id="401" name=""/>
+          <p:cNvPr id="401" name="矩形: 圆角 400"/>
           <p:cNvSpPr/>
           <p:nvPr/>
         </p:nvSpPr>
         <p:spPr>
-          <a:xfrm rot="0" flipH="0" flipV="0">
+          <a:xfrm>
             <a:off x="1238250" y="5438775"/>
             <a:ext cx="666750" cy="419100"/>
           </a:xfrm>
@@ -21168,26 +21217,32 @@
         </p:spPr>
         <p:txBody>
           <a:bodyPr/>
-          <a:p/>
-        </p:txBody>
-      </p:sp>
-      <p:sp>
-        <p:nvSpPr>
-          <p:cNvPr id="402" name="" descr="{&quot;isTemplate&quot;:true,&quot;type&quot;:&quot;text&quot;}"/>
+          <a:lstStyle/>
+          <a:p>
+            <a:endParaRPr/>
+          </a:p>
+        </p:txBody>
+      </p:sp>
+      <p:sp>
+        <p:nvSpPr>
+          <p:cNvPr id="402" name="文本框 401" descr="{&quot;isTemplate&quot;:true,&quot;type&quot;:&quot;text&quot;}"/>
           <p:cNvSpPr txBox="1"/>
           <p:nvPr/>
         </p:nvSpPr>
         <p:spPr>
-          <a:xfrm rot="0" flipH="0" flipV="0">
+          <a:xfrm>
             <a:off x="1352550" y="5495925"/>
             <a:ext cx="438150" cy="304800"/>
           </a:xfrm>
-          <a:prstGeom prst="rect"/>
+          <a:prstGeom prst="rect">
+            <a:avLst/>
+          </a:prstGeom>
         </p:spPr>
         <p:txBody>
           <a:bodyPr wrap="square" lIns="0" tIns="0" rIns="0" bIns="0">
             <a:normAutofit/>
           </a:bodyPr>
+          <a:lstStyle/>
           <a:p>
             <a:pPr>
               <a:lnSpc>
@@ -21212,7 +21267,7 @@
                 <a:latin typeface="Source Han Sans CN"/>
                 <a:ea typeface="Source Han Sans CN"/>
               </a:rPr>
-              <a:t xml:space="preserve"> P_i </a:t>
+              <a:t> P_i </a:t>
             </a:r>
             <a:r>
               <a:rPr lang="zh-CN" sz="975">
@@ -21230,19 +21285,22 @@
       </p:sp>
       <p:sp>
         <p:nvSpPr>
-          <p:cNvPr id="403" name="" descr="{&quot;isTemplate&quot;:true,&quot;type&quot;:&quot;text&quot;}"/>
+          <p:cNvPr id="403" name="文本框 402" descr="{&quot;isTemplate&quot;:true,&quot;type&quot;:&quot;text&quot;}"/>
           <p:cNvSpPr txBox="1"/>
           <p:nvPr/>
         </p:nvSpPr>
         <p:spPr>
-          <a:xfrm rot="0" flipH="0" flipV="0">
+          <a:xfrm>
             <a:off x="2000250" y="5553075"/>
             <a:ext cx="123825" cy="190500"/>
           </a:xfrm>
-          <a:prstGeom prst="rect"/>
+          <a:prstGeom prst="rect">
+            <a:avLst/>
+          </a:prstGeom>
         </p:spPr>
         <p:txBody>
           <a:bodyPr wrap="none" lIns="0" tIns="0" rIns="0" bIns="0"/>
+          <a:lstStyle/>
           <a:p>
             <a:pPr>
               <a:lnSpc>
@@ -21265,12 +21323,12 @@
       </p:sp>
       <p:sp>
         <p:nvSpPr>
-          <p:cNvPr id="404" name=""/>
+          <p:cNvPr id="404" name="矩形: 圆角 403"/>
           <p:cNvSpPr/>
           <p:nvPr/>
         </p:nvSpPr>
         <p:spPr>
-          <a:xfrm rot="0" flipH="0" flipV="0">
+          <a:xfrm>
             <a:off x="2219325" y="5438775"/>
             <a:ext cx="885825" cy="419100"/>
           </a:xfrm>
@@ -21291,26 +21349,32 @@
         </p:spPr>
         <p:txBody>
           <a:bodyPr/>
-          <a:p/>
-        </p:txBody>
-      </p:sp>
-      <p:sp>
-        <p:nvSpPr>
-          <p:cNvPr id="405" name="" descr="{&quot;isTemplate&quot;:true,&quot;type&quot;:&quot;text&quot;}"/>
+          <a:lstStyle/>
+          <a:p>
+            <a:endParaRPr/>
+          </a:p>
+        </p:txBody>
+      </p:sp>
+      <p:sp>
+        <p:nvSpPr>
+          <p:cNvPr id="405" name="文本框 404" descr="{&quot;isTemplate&quot;:true,&quot;type&quot;:&quot;text&quot;}"/>
           <p:cNvSpPr txBox="1"/>
           <p:nvPr/>
         </p:nvSpPr>
         <p:spPr>
-          <a:xfrm rot="0" flipH="0" flipV="0">
+          <a:xfrm>
             <a:off x="2333625" y="5495925"/>
             <a:ext cx="657225" cy="304800"/>
           </a:xfrm>
-          <a:prstGeom prst="rect"/>
+          <a:prstGeom prst="rect">
+            <a:avLst/>
+          </a:prstGeom>
         </p:spPr>
         <p:txBody>
           <a:bodyPr wrap="square" lIns="0" tIns="0" rIns="0" bIns="0">
             <a:normAutofit/>
           </a:bodyPr>
+          <a:lstStyle/>
           <a:p>
             <a:pPr>
               <a:lnSpc>
@@ -21325,7 +21389,7 @@
                 <a:latin typeface="Source Han Sans CN"/>
                 <a:ea typeface="Source Han Sans CN"/>
               </a:rPr>
-              <a:t xml:space="preserve">n_cand </a:t>
+              <a:t>n_cand </a:t>
             </a:r>
             <a:r>
               <a:rPr lang="zh-CN" sz="975">
@@ -21373,19 +21437,22 @@
       </p:sp>
       <p:sp>
         <p:nvSpPr>
-          <p:cNvPr id="406" name="" descr="{&quot;isTemplate&quot;:true,&quot;type&quot;:&quot;text&quot;}"/>
+          <p:cNvPr id="406" name="文本框 405" descr="{&quot;isTemplate&quot;:true,&quot;type&quot;:&quot;text&quot;}"/>
           <p:cNvSpPr txBox="1"/>
           <p:nvPr/>
         </p:nvSpPr>
         <p:spPr>
-          <a:xfrm rot="0" flipH="0" flipV="0">
+          <a:xfrm>
             <a:off x="3200400" y="5553075"/>
             <a:ext cx="123825" cy="190500"/>
           </a:xfrm>
-          <a:prstGeom prst="rect"/>
+          <a:prstGeom prst="rect">
+            <a:avLst/>
+          </a:prstGeom>
         </p:spPr>
         <p:txBody>
           <a:bodyPr wrap="none" lIns="0" tIns="0" rIns="0" bIns="0"/>
+          <a:lstStyle/>
           <a:p>
             <a:pPr>
               <a:lnSpc>
@@ -21408,12 +21475,12 @@
       </p:sp>
       <p:sp>
         <p:nvSpPr>
-          <p:cNvPr id="407" name=""/>
+          <p:cNvPr id="407" name="矩形: 圆角 406"/>
           <p:cNvSpPr/>
           <p:nvPr/>
         </p:nvSpPr>
         <p:spPr>
-          <a:xfrm rot="0" flipH="0" flipV="0">
+          <a:xfrm>
             <a:off x="3419475" y="5438775"/>
             <a:ext cx="857250" cy="419100"/>
           </a:xfrm>
@@ -21434,26 +21501,32 @@
         </p:spPr>
         <p:txBody>
           <a:bodyPr/>
-          <a:p/>
-        </p:txBody>
-      </p:sp>
-      <p:sp>
-        <p:nvSpPr>
-          <p:cNvPr id="408" name="" descr="{&quot;isTemplate&quot;:true,&quot;type&quot;:&quot;text&quot;}"/>
+          <a:lstStyle/>
+          <a:p>
+            <a:endParaRPr/>
+          </a:p>
+        </p:txBody>
+      </p:sp>
+      <p:sp>
+        <p:nvSpPr>
+          <p:cNvPr id="408" name="文本框 407" descr="{&quot;isTemplate&quot;:true,&quot;type&quot;:&quot;text&quot;}"/>
           <p:cNvSpPr txBox="1"/>
           <p:nvPr/>
         </p:nvSpPr>
         <p:spPr>
-          <a:xfrm rot="0" flipH="0" flipV="0">
+          <a:xfrm>
             <a:off x="3533775" y="5495925"/>
             <a:ext cx="628650" cy="304800"/>
           </a:xfrm>
-          <a:prstGeom prst="rect"/>
+          <a:prstGeom prst="rect">
+            <a:avLst/>
+          </a:prstGeom>
         </p:spPr>
         <p:txBody>
           <a:bodyPr wrap="square" lIns="0" tIns="0" rIns="0" bIns="0">
             <a:normAutofit/>
           </a:bodyPr>
+          <a:lstStyle/>
           <a:p>
             <a:pPr>
               <a:lnSpc>
@@ -21478,27 +21551,30 @@
                 <a:latin typeface="Source Han Sans CN"/>
                 <a:ea typeface="Source Han Sans CN"/>
               </a:rPr>
-              <a:t xml:space="preserve"> prefilter</a:t>
-            </a:r>
-            <a:endParaRPr/>
-          </a:p>
-        </p:txBody>
-      </p:sp>
-      <p:sp>
-        <p:nvSpPr>
-          <p:cNvPr id="409" name="" descr="{&quot;isTemplate&quot;:true,&quot;type&quot;:&quot;text&quot;}"/>
+              <a:t> prefilter</a:t>
+            </a:r>
+            <a:endParaRPr/>
+          </a:p>
+        </p:txBody>
+      </p:sp>
+      <p:sp>
+        <p:nvSpPr>
+          <p:cNvPr id="409" name="文本框 408" descr="{&quot;isTemplate&quot;:true,&quot;type&quot;:&quot;text&quot;}"/>
           <p:cNvSpPr txBox="1"/>
           <p:nvPr/>
         </p:nvSpPr>
         <p:spPr>
-          <a:xfrm rot="0" flipH="0" flipV="0">
+          <a:xfrm>
             <a:off x="4371975" y="5553075"/>
             <a:ext cx="123825" cy="190500"/>
           </a:xfrm>
-          <a:prstGeom prst="rect"/>
+          <a:prstGeom prst="rect">
+            <a:avLst/>
+          </a:prstGeom>
         </p:spPr>
         <p:txBody>
           <a:bodyPr wrap="none" lIns="0" tIns="0" rIns="0" bIns="0"/>
+          <a:lstStyle/>
           <a:p>
             <a:pPr>
               <a:lnSpc>
@@ -21521,12 +21597,12 @@
       </p:sp>
       <p:sp>
         <p:nvSpPr>
-          <p:cNvPr id="410" name=""/>
+          <p:cNvPr id="410" name="矩形: 圆角 409"/>
           <p:cNvSpPr/>
           <p:nvPr/>
         </p:nvSpPr>
         <p:spPr>
-          <a:xfrm rot="0" flipH="0" flipV="0">
+          <a:xfrm>
             <a:off x="4591050" y="5438775"/>
             <a:ext cx="990600" cy="419100"/>
           </a:xfrm>
@@ -21547,26 +21623,32 @@
         </p:spPr>
         <p:txBody>
           <a:bodyPr/>
-          <a:p/>
-        </p:txBody>
-      </p:sp>
-      <p:sp>
-        <p:nvSpPr>
-          <p:cNvPr id="411" name="" descr="{&quot;isTemplate&quot;:true,&quot;type&quot;:&quot;text&quot;}"/>
+          <a:lstStyle/>
+          <a:p>
+            <a:endParaRPr/>
+          </a:p>
+        </p:txBody>
+      </p:sp>
+      <p:sp>
+        <p:nvSpPr>
+          <p:cNvPr id="411" name="文本框 410" descr="{&quot;isTemplate&quot;:true,&quot;type&quot;:&quot;text&quot;}"/>
           <p:cNvSpPr txBox="1"/>
           <p:nvPr/>
         </p:nvSpPr>
         <p:spPr>
-          <a:xfrm rot="0" flipH="0" flipV="0">
+          <a:xfrm>
             <a:off x="4705350" y="5495925"/>
             <a:ext cx="762000" cy="304800"/>
           </a:xfrm>
-          <a:prstGeom prst="rect"/>
+          <a:prstGeom prst="rect">
+            <a:avLst/>
+          </a:prstGeom>
         </p:spPr>
         <p:txBody>
           <a:bodyPr wrap="square" lIns="0" tIns="0" rIns="0" bIns="0">
             <a:normAutofit/>
           </a:bodyPr>
+          <a:lstStyle/>
           <a:p>
             <a:pPr>
               <a:lnSpc>
@@ -21581,7 +21663,7 @@
                 <a:latin typeface="Source Han Sans CN"/>
                 <a:ea typeface="Source Han Sans CN"/>
               </a:rPr>
-              <a:t xml:space="preserve">n_sel </a:t>
+              <a:t>n_sel </a:t>
             </a:r>
             <a:r>
               <a:rPr lang="zh-CN" sz="975">
@@ -21629,19 +21711,22 @@
       </p:sp>
       <p:sp>
         <p:nvSpPr>
-          <p:cNvPr id="412" name="" descr="{&quot;isTemplate&quot;:true,&quot;type&quot;:&quot;text&quot;}"/>
+          <p:cNvPr id="412" name="文本框 411" descr="{&quot;isTemplate&quot;:true,&quot;type&quot;:&quot;text&quot;}"/>
           <p:cNvSpPr txBox="1"/>
           <p:nvPr/>
         </p:nvSpPr>
         <p:spPr>
-          <a:xfrm rot="0" flipH="0" flipV="0">
+          <a:xfrm>
             <a:off x="5676900" y="5553075"/>
             <a:ext cx="123825" cy="190500"/>
           </a:xfrm>
-          <a:prstGeom prst="rect"/>
+          <a:prstGeom prst="rect">
+            <a:avLst/>
+          </a:prstGeom>
         </p:spPr>
         <p:txBody>
           <a:bodyPr wrap="none" lIns="0" tIns="0" rIns="0" bIns="0"/>
+          <a:lstStyle/>
           <a:p>
             <a:pPr>
               <a:lnSpc>
@@ -21664,12 +21749,12 @@
       </p:sp>
       <p:sp>
         <p:nvSpPr>
-          <p:cNvPr id="413" name=""/>
+          <p:cNvPr id="413" name="矩形: 圆角 412"/>
           <p:cNvSpPr/>
           <p:nvPr/>
         </p:nvSpPr>
         <p:spPr>
-          <a:xfrm rot="0" flipH="0" flipV="0">
+          <a:xfrm>
             <a:off x="5895975" y="5438775"/>
             <a:ext cx="962025" cy="419100"/>
           </a:xfrm>
@@ -21690,26 +21775,32 @@
         </p:spPr>
         <p:txBody>
           <a:bodyPr/>
-          <a:p/>
-        </p:txBody>
-      </p:sp>
-      <p:sp>
-        <p:nvSpPr>
-          <p:cNvPr id="414" name="" descr="{&quot;isTemplate&quot;:true,&quot;type&quot;:&quot;text&quot;}"/>
+          <a:lstStyle/>
+          <a:p>
+            <a:endParaRPr/>
+          </a:p>
+        </p:txBody>
+      </p:sp>
+      <p:sp>
+        <p:nvSpPr>
+          <p:cNvPr id="414" name="文本框 413" descr="{&quot;isTemplate&quot;:true,&quot;type&quot;:&quot;text&quot;}"/>
           <p:cNvSpPr txBox="1"/>
           <p:nvPr/>
         </p:nvSpPr>
         <p:spPr>
-          <a:xfrm rot="0" flipH="0" flipV="0">
+          <a:xfrm>
             <a:off x="6010275" y="5495925"/>
             <a:ext cx="733425" cy="304800"/>
           </a:xfrm>
-          <a:prstGeom prst="rect"/>
+          <a:prstGeom prst="rect">
+            <a:avLst/>
+          </a:prstGeom>
         </p:spPr>
         <p:txBody>
           <a:bodyPr wrap="square" lIns="0" tIns="0" rIns="0" bIns="0">
             <a:normAutofit/>
           </a:bodyPr>
+          <a:lstStyle/>
           <a:p>
             <a:pPr>
               <a:lnSpc>
@@ -21734,20 +21825,20 @@
                 <a:latin typeface="Source Han Sans CN"/>
                 <a:ea typeface="Source Han Sans CN"/>
               </a:rPr>
-              <a:t xml:space="preserve"> postcheck</a:t>
-            </a:r>
-            <a:endParaRPr/>
-          </a:p>
-        </p:txBody>
-      </p:sp>
-      <p:sp>
-        <p:nvSpPr>
-          <p:cNvPr id="415" name=""/>
+              <a:t> postcheck</a:t>
+            </a:r>
+            <a:endParaRPr/>
+          </a:p>
+        </p:txBody>
+      </p:sp>
+      <p:sp>
+        <p:nvSpPr>
+          <p:cNvPr id="415" name="矩形: 圆角 414"/>
           <p:cNvSpPr/>
           <p:nvPr/>
         </p:nvSpPr>
         <p:spPr>
-          <a:xfrm rot="0" flipH="0" flipV="0">
+          <a:xfrm>
             <a:off x="7277100" y="1143000"/>
             <a:ext cx="4533900" cy="2400300"/>
           </a:xfrm>
@@ -21763,21 +21854,29 @@
         </p:spPr>
         <p:txBody>
           <a:bodyPr/>
-          <a:p/>
-        </p:txBody>
-      </p:sp>
-      <p:sp>
-        <p:nvSpPr>
-          <p:cNvPr id="416" name=""/>
+          <a:lstStyle/>
+          <a:p>
+            <a:endParaRPr/>
+          </a:p>
+        </p:txBody>
+      </p:sp>
+      <p:sp>
+        <p:nvSpPr>
+          <p:cNvPr id="416" name="任意多边形: 形状 415"/>
           <p:cNvSpPr/>
           <p:nvPr/>
         </p:nvSpPr>
         <p:spPr>
-          <a:xfrm rot="0" flipH="0" flipV="0">
+          <a:xfrm>
             <a:off x="7277100" y="1143000"/>
             <a:ext cx="4533900" cy="2400300"/>
           </a:xfrm>
           <a:custGeom>
+            <a:avLst/>
+            <a:gdLst/>
+            <a:ahLst/>
+            <a:cxnLst/>
+            <a:rect l="0" t="0" r="0" b="0"/>
             <a:pathLst>
               <a:path w="476" h="252">
                 <a:moveTo>
@@ -21820,24 +21919,30 @@
         </p:spPr>
         <p:txBody>
           <a:bodyPr/>
-          <a:p/>
-        </p:txBody>
-      </p:sp>
-      <p:sp>
-        <p:nvSpPr>
-          <p:cNvPr id="417" name="" descr="{&quot;isTemplate&quot;:true,&quot;type&quot;:&quot;text&quot;}"/>
+          <a:lstStyle/>
+          <a:p>
+            <a:endParaRPr/>
+          </a:p>
+        </p:txBody>
+      </p:sp>
+      <p:sp>
+        <p:nvSpPr>
+          <p:cNvPr id="417" name="文本框 416" descr="{&quot;isTemplate&quot;:true,&quot;type&quot;:&quot;text&quot;}"/>
           <p:cNvSpPr txBox="1"/>
           <p:nvPr/>
         </p:nvSpPr>
         <p:spPr>
-          <a:xfrm rot="0" flipH="0" flipV="0">
+          <a:xfrm>
             <a:off x="7467600" y="1276350"/>
             <a:ext cx="4152900" cy="219075"/>
           </a:xfrm>
-          <a:prstGeom prst="rect"/>
+          <a:prstGeom prst="rect">
+            <a:avLst/>
+          </a:prstGeom>
         </p:spPr>
         <p:txBody>
           <a:bodyPr wrap="none" lIns="0" tIns="0" rIns="0" bIns="0"/>
+          <a:lstStyle/>
           <a:p>
             <a:pPr>
               <a:lnSpc>
@@ -21852,7 +21957,7 @@
                 <a:latin typeface="Source Han Sans CN"/>
                 <a:ea typeface="Source Han Sans CN"/>
               </a:rPr>
-              <a:t xml:space="preserve">③ </a:t>
+              <a:t>③ </a:t>
             </a:r>
             <a:r>
               <a:rPr lang="zh-CN" sz="1425" b="1">
@@ -21870,12 +21975,12 @@
       </p:sp>
       <p:sp>
         <p:nvSpPr>
-          <p:cNvPr id="418" name=""/>
+          <p:cNvPr id="418" name="矩形: 圆角 417"/>
           <p:cNvSpPr/>
           <p:nvPr/>
         </p:nvSpPr>
         <p:spPr>
-          <a:xfrm rot="0" flipH="0" flipV="0">
+          <a:xfrm>
             <a:off x="7467600" y="1590675"/>
             <a:ext cx="4152900" cy="885825"/>
           </a:xfrm>
@@ -21891,24 +21996,30 @@
         </p:spPr>
         <p:txBody>
           <a:bodyPr/>
-          <a:p/>
-        </p:txBody>
-      </p:sp>
-      <p:sp>
-        <p:nvSpPr>
-          <p:cNvPr id="419" name="" descr="{&quot;isTemplate&quot;:true,&quot;type&quot;:&quot;text&quot;}"/>
+          <a:lstStyle/>
+          <a:p>
+            <a:endParaRPr/>
+          </a:p>
+        </p:txBody>
+      </p:sp>
+      <p:sp>
+        <p:nvSpPr>
+          <p:cNvPr id="419" name="文本框 418" descr="{&quot;isTemplate&quot;:true,&quot;type&quot;:&quot;text&quot;}"/>
           <p:cNvSpPr txBox="1"/>
           <p:nvPr/>
         </p:nvSpPr>
         <p:spPr>
-          <a:xfrm rot="0" flipH="0" flipV="0">
+          <a:xfrm>
             <a:off x="8667750" y="1704975"/>
             <a:ext cx="1762125" cy="228600"/>
           </a:xfrm>
-          <a:prstGeom prst="rect"/>
+          <a:prstGeom prst="rect">
+            <a:avLst/>
+          </a:prstGeom>
         </p:spPr>
         <p:txBody>
           <a:bodyPr wrap="none" lIns="0" tIns="0" rIns="0" bIns="0"/>
+          <a:lstStyle/>
           <a:p>
             <a:pPr>
               <a:lnSpc>
@@ -21943,7 +22054,7 @@
                 <a:latin typeface="Source Han Sans CN"/>
                 <a:ea typeface="Source Han Sans CN"/>
               </a:rPr>
-              <a:t xml:space="preserve"> = ΔB</a:t>
+              <a:t> = ΔB</a:t>
             </a:r>
             <a:r>
               <a:rPr lang="en-US" sz="975" b="1">
@@ -21963,7 +22074,7 @@
                 <a:latin typeface="Source Han Sans CN"/>
                 <a:ea typeface="Source Han Sans CN"/>
               </a:rPr>
-              <a:t xml:space="preserve"> / (ΔC</a:t>
+              <a:t> / (ΔC</a:t>
             </a:r>
             <a:r>
               <a:rPr lang="en-US" sz="975" b="1">
@@ -21983,29 +22094,32 @@
                 <a:latin typeface="Source Han Sans CN"/>
                 <a:ea typeface="Source Han Sans CN"/>
               </a:rPr>
-              <a:t xml:space="preserve"> + ε)</a:t>
-            </a:r>
-            <a:endParaRPr/>
-          </a:p>
-        </p:txBody>
-      </p:sp>
-      <p:sp>
-        <p:nvSpPr>
-          <p:cNvPr id="420" name="" descr="{&quot;isTemplate&quot;:true,&quot;type&quot;:&quot;text&quot;}"/>
+              <a:t> + ε)</a:t>
+            </a:r>
+            <a:endParaRPr/>
+          </a:p>
+        </p:txBody>
+      </p:sp>
+      <p:sp>
+        <p:nvSpPr>
+          <p:cNvPr id="420" name="文本框 419" descr="{&quot;isTemplate&quot;:true,&quot;type&quot;:&quot;text&quot;}"/>
           <p:cNvSpPr txBox="1"/>
           <p:nvPr/>
         </p:nvSpPr>
         <p:spPr>
-          <a:xfrm rot="0" flipH="0" flipV="0">
+          <a:xfrm>
             <a:off x="7600950" y="1990725"/>
             <a:ext cx="3886200" cy="371475"/>
           </a:xfrm>
-          <a:prstGeom prst="rect"/>
+          <a:prstGeom prst="rect">
+            <a:avLst/>
+          </a:prstGeom>
         </p:spPr>
         <p:txBody>
           <a:bodyPr wrap="square" lIns="0" tIns="0" rIns="0" bIns="0">
             <a:normAutofit/>
           </a:bodyPr>
+          <a:lstStyle/>
           <a:p>
             <a:pPr>
               <a:lnSpc>
@@ -22040,7 +22154,7 @@
                 <a:latin typeface="Source Han Sans CN"/>
                 <a:ea typeface="Source Han Sans CN"/>
               </a:rPr>
-              <a:t xml:space="preserve"> = min</a:t>
+              <a:t> = min</a:t>
             </a:r>
             <a:r>
               <a:rPr lang="en-US" sz="900">
@@ -22050,7 +22164,17 @@
                 <a:latin typeface="Source Han Sans CN"/>
                 <a:ea typeface="Source Han Sans CN"/>
               </a:rPr>
-              <a:t>{</a:t>
+              <a:t>{ C</a:t>
+            </a:r>
+            <a:r>
+              <a:rPr lang="en-US" sz="750">
+                <a:solidFill>
+                  <a:srgbClr val="1E4FA8"/>
+                </a:solidFill>
+                <a:latin typeface="Source Han Sans CN"/>
+                <a:ea typeface="Source Han Sans CN"/>
+              </a:rPr>
+              <a:t>ai</a:t>
             </a:r>
             <a:r>
               <a:rPr lang="en-US" sz="900">
@@ -22060,7 +22184,7 @@
                 <a:latin typeface="Source Han Sans CN"/>
                 <a:ea typeface="Source Han Sans CN"/>
               </a:rPr>
-              <a:t xml:space="preserve"> C</a:t>
+              <a:t> + C</a:t>
             </a:r>
             <a:r>
               <a:rPr lang="en-US" sz="750">
@@ -22070,7 +22194,7 @@
                 <a:latin typeface="Source Han Sans CN"/>
                 <a:ea typeface="Source Han Sans CN"/>
               </a:rPr>
-              <a:t>ai</a:t>
+              <a:t>ib</a:t>
             </a:r>
             <a:r>
               <a:rPr lang="en-US" sz="900">
@@ -22080,7 +22204,7 @@
                 <a:latin typeface="Source Han Sans CN"/>
                 <a:ea typeface="Source Han Sans CN"/>
               </a:rPr>
-              <a:t xml:space="preserve"> + C</a:t>
+              <a:t> − C</a:t>
             </a:r>
             <a:r>
               <a:rPr lang="en-US" sz="750">
@@ -22090,7 +22214,7 @@
                 <a:latin typeface="Source Han Sans CN"/>
                 <a:ea typeface="Source Han Sans CN"/>
               </a:rPr>
-              <a:t>ib</a:t>
+              <a:t>ab</a:t>
             </a:r>
             <a:r>
               <a:rPr lang="en-US" sz="900">
@@ -22100,66 +22224,36 @@
                 <a:latin typeface="Source Han Sans CN"/>
                 <a:ea typeface="Source Han Sans CN"/>
               </a:rPr>
-              <a:t xml:space="preserve"> − C</a:t>
-            </a:r>
-            <a:r>
-              <a:rPr lang="en-US" sz="750">
+              <a:t> }</a:t>
+            </a:r>
+            <a:r>
+              <a:rPr lang="zh-CN" sz="1200">
                 <a:solidFill>
                   <a:srgbClr val="1E4FA8"/>
                 </a:solidFill>
                 <a:latin typeface="Source Han Sans CN"/>
                 <a:ea typeface="Source Han Sans CN"/>
               </a:rPr>
-              <a:t>ab</a:t>
-            </a:r>
-            <a:r>
-              <a:rPr lang="en-US" sz="900">
+              <a:t>（所有锚点对插入，统一</a:t>
+            </a:r>
+            <a:r>
+              <a:rPr lang="en-US" sz="1200">
                 <a:solidFill>
                   <a:srgbClr val="1E4FA8"/>
                 </a:solidFill>
                 <a:latin typeface="Source Han Sans CN"/>
                 <a:ea typeface="Source Han Sans CN"/>
               </a:rPr>
-              <a:t xml:space="preserve"> </a:t>
-            </a:r>
-            <a:r>
-              <a:rPr lang="en-US" sz="900">
+              <a:t> DEM </a:t>
+            </a:r>
+            <a:r>
+              <a:rPr lang="zh-CN" sz="1200">
                 <a:solidFill>
                   <a:srgbClr val="1E4FA8"/>
                 </a:solidFill>
                 <a:latin typeface="Source Han Sans CN"/>
                 <a:ea typeface="Source Han Sans CN"/>
               </a:rPr>
-              <a:t>}</a:t>
-            </a:r>
-            <a:r>
-              <a:rPr lang="zh-CN" sz="1200">
-                <a:solidFill>
-                  <a:srgbClr val="1E4FA8"/>
-                </a:solidFill>
-                <a:latin typeface="Source Han Sans CN"/>
-                <a:ea typeface="Source Han Sans CN"/>
-              </a:rPr>
-              <a:t>（所有锚点对插入，统一</a:t>
-            </a:r>
-            <a:r>
-              <a:rPr lang="en-US" sz="1200">
-                <a:solidFill>
-                  <a:srgbClr val="1E4FA8"/>
-                </a:solidFill>
-                <a:latin typeface="Source Han Sans CN"/>
-                <a:ea typeface="Source Han Sans CN"/>
-              </a:rPr>
-              <a:t xml:space="preserve"> DEM </a:t>
-            </a:r>
-            <a:r>
-              <a:rPr lang="zh-CN" sz="1200">
-                <a:solidFill>
-                  <a:srgbClr val="1E4FA8"/>
-                </a:solidFill>
-                <a:latin typeface="Source Han Sans CN"/>
-                <a:ea typeface="Source Han Sans CN"/>
-              </a:rPr>
               <a:t>三维航程）</a:t>
             </a:r>
             <a:endParaRPr/>
@@ -22168,21 +22262,24 @@
       </p:sp>
       <p:sp>
         <p:nvSpPr>
-          <p:cNvPr id="421" name="" descr="{&quot;isTemplate&quot;:true,&quot;type&quot;:&quot;text&quot;}"/>
+          <p:cNvPr id="421" name="文本框 420" descr="{&quot;isTemplate&quot;:true,&quot;type&quot;:&quot;text&quot;}"/>
           <p:cNvSpPr txBox="1"/>
           <p:nvPr/>
         </p:nvSpPr>
         <p:spPr>
-          <a:xfrm rot="0" flipH="0" flipV="0">
+          <a:xfrm>
             <a:off x="7467600" y="2552700"/>
             <a:ext cx="4152900" cy="819150"/>
           </a:xfrm>
-          <a:prstGeom prst="rect"/>
+          <a:prstGeom prst="rect">
+            <a:avLst/>
+          </a:prstGeom>
         </p:spPr>
         <p:txBody>
           <a:bodyPr wrap="square" lIns="0" tIns="0" rIns="0" bIns="0">
             <a:normAutofit/>
           </a:bodyPr>
+          <a:lstStyle/>
           <a:p>
             <a:pPr>
               <a:lnSpc>
@@ -22207,7 +22304,7 @@
                 <a:latin typeface="Source Han Sans CN"/>
                 <a:ea typeface="Source Han Sans CN"/>
               </a:rPr>
-              <a:t xml:space="preserve"> + </a:t>
+              <a:t> + </a:t>
             </a:r>
             <a:r>
               <a:rPr lang="zh-CN" sz="1050">
@@ -22247,7 +22344,7 @@
                 <a:latin typeface="Source Han Sans CN"/>
                 <a:ea typeface="Source Han Sans CN"/>
               </a:rPr>
-              <a:t xml:space="preserve"> i</a:t>
+              <a:t> i</a:t>
             </a:r>
             <a:r>
               <a:rPr lang="zh-CN" sz="1050">
@@ -22267,7 +22364,7 @@
                 <a:latin typeface="Source Han Sans CN"/>
                 <a:ea typeface="Source Han Sans CN"/>
               </a:rPr>
-              <a:t xml:space="preserve"> MUAS</a:t>
+              <a:t> MUAS</a:t>
             </a:r>
             <a:r>
               <a:rPr lang="zh-CN" sz="1050">
@@ -22285,12 +22382,12 @@
       </p:sp>
       <p:sp>
         <p:nvSpPr>
-          <p:cNvPr id="422" name=""/>
+          <p:cNvPr id="422" name="矩形: 圆角 421"/>
           <p:cNvSpPr/>
           <p:nvPr/>
         </p:nvSpPr>
         <p:spPr>
-          <a:xfrm rot="0" flipH="0" flipV="0">
+          <a:xfrm>
             <a:off x="7277100" y="3638550"/>
             <a:ext cx="4533900" cy="1323975"/>
           </a:xfrm>
@@ -22311,24 +22408,30 @@
         </p:spPr>
         <p:txBody>
           <a:bodyPr/>
-          <a:p/>
-        </p:txBody>
-      </p:sp>
-      <p:sp>
-        <p:nvSpPr>
-          <p:cNvPr id="423" name="" descr="{&quot;isTemplate&quot;:true,&quot;type&quot;:&quot;text&quot;}"/>
+          <a:lstStyle/>
+          <a:p>
+            <a:endParaRPr/>
+          </a:p>
+        </p:txBody>
+      </p:sp>
+      <p:sp>
+        <p:nvSpPr>
+          <p:cNvPr id="423" name="文本框 422" descr="{&quot;isTemplate&quot;:true,&quot;type&quot;:&quot;text&quot;}"/>
           <p:cNvSpPr txBox="1"/>
           <p:nvPr/>
         </p:nvSpPr>
         <p:spPr>
-          <a:xfrm rot="0" flipH="0" flipV="0">
+          <a:xfrm>
             <a:off x="7467600" y="3762375"/>
             <a:ext cx="4152900" cy="200025"/>
           </a:xfrm>
-          <a:prstGeom prst="rect"/>
+          <a:prstGeom prst="rect">
+            <a:avLst/>
+          </a:prstGeom>
         </p:spPr>
         <p:txBody>
           <a:bodyPr wrap="none" lIns="0" tIns="0" rIns="0" bIns="0"/>
+          <a:lstStyle/>
           <a:p>
             <a:pPr>
               <a:lnSpc>
@@ -22343,7 +22446,7 @@
                 <a:latin typeface="Source Han Sans CN"/>
                 <a:ea typeface="Source Han Sans CN"/>
               </a:rPr>
-              <a:t xml:space="preserve">④ </a:t>
+              <a:t>④ </a:t>
             </a:r>
             <a:r>
               <a:rPr lang="zh-CN" sz="1275" b="1">
@@ -22361,21 +22464,24 @@
       </p:sp>
       <p:sp>
         <p:nvSpPr>
-          <p:cNvPr id="424" name="" descr="{&quot;isTemplate&quot;:true,&quot;type&quot;:&quot;text&quot;}"/>
+          <p:cNvPr id="424" name="文本框 423" descr="{&quot;isTemplate&quot;:true,&quot;type&quot;:&quot;text&quot;}"/>
           <p:cNvSpPr txBox="1"/>
           <p:nvPr/>
         </p:nvSpPr>
         <p:spPr>
-          <a:xfrm rot="0" flipH="0" flipV="0">
+          <a:xfrm>
             <a:off x="7467600" y="4019550"/>
             <a:ext cx="4152900" cy="819150"/>
           </a:xfrm>
-          <a:prstGeom prst="rect"/>
+          <a:prstGeom prst="rect">
+            <a:avLst/>
+          </a:prstGeom>
         </p:spPr>
         <p:txBody>
           <a:bodyPr wrap="square" lIns="0" tIns="0" rIns="0" bIns="0">
             <a:normAutofit/>
           </a:bodyPr>
+          <a:lstStyle/>
           <a:p>
             <a:pPr>
               <a:lnSpc>
@@ -22400,7 +22506,7 @@
                 <a:latin typeface="Source Han Sans CN"/>
                 <a:ea typeface="Source Han Sans CN"/>
               </a:rPr>
-              <a:t xml:space="preserve"> prefilter</a:t>
+              <a:t> prefilter</a:t>
             </a:r>
             <a:r>
               <a:rPr lang="zh-CN" sz="1050">
@@ -22420,7 +22526,7 @@
                 <a:latin typeface="Source Han Sans CN"/>
                 <a:ea typeface="Source Han Sans CN"/>
               </a:rPr>
-              <a:t xml:space="preserve"> · </a:t>
+              <a:t> · </a:t>
             </a:r>
             <a:r>
               <a:rPr lang="zh-CN" sz="1050">
@@ -22440,7 +22546,7 @@
                 <a:latin typeface="Source Han Sans CN"/>
                 <a:ea typeface="Source Han Sans CN"/>
               </a:rPr>
-              <a:t xml:space="preserve"> · </a:t>
+              <a:t> · </a:t>
             </a:r>
             <a:r>
               <a:rPr lang="zh-CN" sz="1050">
@@ -22460,7 +22566,7 @@
                 <a:latin typeface="Source Han Sans CN"/>
                 <a:ea typeface="Source Han Sans CN"/>
               </a:rPr>
-              <a:t xml:space="preserve"> postcheck</a:t>
+              <a:t> postcheck</a:t>
             </a:r>
             <a:r>
               <a:rPr lang="zh-CN" sz="1050">
@@ -22478,12 +22584,12 @@
       </p:sp>
       <p:sp>
         <p:nvSpPr>
-          <p:cNvPr id="425" name=""/>
+          <p:cNvPr id="425" name="矩形: 圆角 424"/>
           <p:cNvSpPr/>
           <p:nvPr/>
         </p:nvSpPr>
         <p:spPr>
-          <a:xfrm rot="0" flipH="0" flipV="0">
+          <a:xfrm>
             <a:off x="7277100" y="5095875"/>
             <a:ext cx="4533900" cy="1152525"/>
           </a:xfrm>
@@ -22499,26 +22605,32 @@
         </p:spPr>
         <p:txBody>
           <a:bodyPr/>
-          <a:p/>
-        </p:txBody>
-      </p:sp>
-      <p:sp>
-        <p:nvSpPr>
-          <p:cNvPr id="426" name="" descr="{&quot;isTemplate&quot;:true,&quot;type&quot;:&quot;text&quot;}"/>
+          <a:lstStyle/>
+          <a:p>
+            <a:endParaRPr/>
+          </a:p>
+        </p:txBody>
+      </p:sp>
+      <p:sp>
+        <p:nvSpPr>
+          <p:cNvPr id="426" name="文本框 425" descr="{&quot;isTemplate&quot;:true,&quot;type&quot;:&quot;text&quot;}"/>
           <p:cNvSpPr txBox="1"/>
           <p:nvPr/>
         </p:nvSpPr>
         <p:spPr>
-          <a:xfrm rot="0" flipH="0" flipV="0">
+          <a:xfrm>
             <a:off x="7467600" y="5229225"/>
             <a:ext cx="4152900" cy="885825"/>
           </a:xfrm>
-          <a:prstGeom prst="rect"/>
+          <a:prstGeom prst="rect">
+            <a:avLst/>
+          </a:prstGeom>
         </p:spPr>
         <p:txBody>
           <a:bodyPr wrap="square" lIns="0" tIns="0" rIns="0" bIns="0">
             <a:normAutofit/>
           </a:bodyPr>
+          <a:lstStyle/>
           <a:p>
             <a:pPr>
               <a:lnSpc>
@@ -22543,7 +22655,7 @@
                 <a:latin typeface="Source Han Sans CN"/>
                 <a:ea typeface="Source Han Sans CN"/>
               </a:rPr>
-              <a:t xml:space="preserve"> × </a:t>
+              <a:t> × </a:t>
             </a:r>
             <a:r>
               <a:rPr lang="zh-CN" sz="1200" b="1">
@@ -22561,12 +22673,12 @@
       </p:sp>
       <p:sp>
         <p:nvSpPr>
-          <p:cNvPr id="427" name=""/>
+          <p:cNvPr id="427" name="矩形 426"/>
           <p:cNvSpPr/>
           <p:nvPr/>
         </p:nvSpPr>
         <p:spPr>
-          <a:xfrm rot="0" flipH="0" flipV="0">
+          <a:xfrm>
             <a:off x="0" y="6448425"/>
             <a:ext cx="12192000" cy="409575"/>
           </a:xfrm>
@@ -22580,21 +22692,29 @@
         </p:spPr>
         <p:txBody>
           <a:bodyPr/>
-          <a:p/>
-        </p:txBody>
-      </p:sp>
-      <p:sp>
-        <p:nvSpPr>
-          <p:cNvPr id="428" name=""/>
+          <a:lstStyle/>
+          <a:p>
+            <a:endParaRPr/>
+          </a:p>
+        </p:txBody>
+      </p:sp>
+      <p:sp>
+        <p:nvSpPr>
+          <p:cNvPr id="428" name="任意多边形: 形状 427"/>
           <p:cNvSpPr/>
           <p:nvPr/>
         </p:nvSpPr>
         <p:spPr>
-          <a:xfrm rot="0" flipH="0" flipV="0">
+          <a:xfrm>
             <a:off x="0" y="6438900"/>
             <a:ext cx="12192000" cy="419100"/>
           </a:xfrm>
           <a:custGeom>
+            <a:avLst/>
+            <a:gdLst/>
+            <a:ahLst/>
+            <a:cxnLst/>
+            <a:rect l="0" t="0" r="0" b="0"/>
             <a:pathLst>
               <a:path w="1280" h="44">
                 <a:moveTo>
@@ -22620,24 +22740,30 @@
         </p:spPr>
         <p:txBody>
           <a:bodyPr/>
-          <a:p/>
-        </p:txBody>
-      </p:sp>
-      <p:sp>
-        <p:nvSpPr>
-          <p:cNvPr id="429" name="" descr="{&quot;isTemplate&quot;:true,&quot;type&quot;:&quot;text&quot;}"/>
+          <a:lstStyle/>
+          <a:p>
+            <a:endParaRPr/>
+          </a:p>
+        </p:txBody>
+      </p:sp>
+      <p:sp>
+        <p:nvSpPr>
+          <p:cNvPr id="429" name="文本框 428" descr="{&quot;isTemplate&quot;:true,&quot;type&quot;:&quot;text&quot;}"/>
           <p:cNvSpPr txBox="1"/>
           <p:nvPr/>
         </p:nvSpPr>
         <p:spPr>
-          <a:xfrm rot="0" flipH="0" flipV="0">
+          <a:xfrm>
             <a:off x="381000" y="6581775"/>
             <a:ext cx="2828925" cy="152400"/>
           </a:xfrm>
-          <a:prstGeom prst="rect"/>
+          <a:prstGeom prst="rect">
+            <a:avLst/>
+          </a:prstGeom>
         </p:spPr>
         <p:txBody>
           <a:bodyPr wrap="none" lIns="0" tIns="0" rIns="0" bIns="0"/>
+          <a:lstStyle/>
           <a:p>
             <a:pPr>
               <a:lnSpc>
@@ -22662,7 +22788,7 @@
                 <a:latin typeface="Source Han Sans CN"/>
                 <a:ea typeface="Source Han Sans CN"/>
               </a:rPr>
-              <a:t xml:space="preserve"> · </a:t>
+              <a:t> · </a:t>
             </a:r>
             <a:r>
               <a:rPr lang="zh-CN" sz="975">
@@ -22680,19 +22806,22 @@
       </p:sp>
       <p:sp>
         <p:nvSpPr>
-          <p:cNvPr id="430" name="" descr="{&quot;isTemplate&quot;:true,&quot;type&quot;:&quot;text&quot;}"/>
+          <p:cNvPr id="430" name="文本框 429" descr="{&quot;isTemplate&quot;:true,&quot;type&quot;:&quot;text&quot;}"/>
           <p:cNvSpPr txBox="1"/>
           <p:nvPr/>
         </p:nvSpPr>
         <p:spPr>
-          <a:xfrm rot="0" flipH="0" flipV="0">
+          <a:xfrm>
             <a:off x="11296650" y="6572250"/>
             <a:ext cx="514350" cy="171450"/>
           </a:xfrm>
-          <a:prstGeom prst="rect"/>
+          <a:prstGeom prst="rect">
+            <a:avLst/>
+          </a:prstGeom>
         </p:spPr>
         <p:txBody>
           <a:bodyPr wrap="none" lIns="0" tIns="0" rIns="0" bIns="0"/>
+          <a:lstStyle/>
           <a:p>
             <a:pPr>
               <a:lnSpc>
@@ -22715,15 +22844,18 @@
       </p:sp>
     </p:spTree>
   </p:cSld>
+  <p:clrMapOvr>
+    <a:masterClrMapping/>
+  </p:clrMapOvr>
 </p:sld>
 </file>
 
 <file path=ppt/slides/slide8.xml><?xml version="1.0" encoding="utf-8"?>
-<p:sld xmlns:p="http://schemas.openxmlformats.org/presentationml/2006/main" xmlns:a="http://schemas.openxmlformats.org/drawingml/2006/main" xmlns:asvg="http://schemas.microsoft.com/office/drawing/2016/SVG/main" xmlns:r="http://schemas.openxmlformats.org/officeDocument/2006/relationships" xmlns:mc="http://schemas.openxmlformats.org/markup-compatibility/2006" mc:Ignorable="asvg">
+<p:sld xmlns:a="http://schemas.openxmlformats.org/drawingml/2006/main" xmlns:r="http://schemas.openxmlformats.org/officeDocument/2006/relationships" xmlns:p="http://schemas.openxmlformats.org/presentationml/2006/main">
   <p:cSld>
     <p:spTree>
       <p:nvGrpSpPr>
-        <p:cNvPr id="431" name=""/>
+        <p:cNvPr id="1" name=""/>
         <p:cNvGrpSpPr/>
         <p:nvPr/>
       </p:nvGrpSpPr>
@@ -22737,12 +22869,12 @@
       </p:grpSpPr>
       <p:sp>
         <p:nvSpPr>
-          <p:cNvPr id="432" name=""/>
+          <p:cNvPr id="432" name="矩形 431"/>
           <p:cNvSpPr/>
           <p:nvPr/>
         </p:nvSpPr>
         <p:spPr>
-          <a:xfrm rot="0" flipH="0" flipV="0">
+          <a:xfrm>
             <a:off x="0" y="0"/>
             <a:ext cx="12192000" cy="6858000"/>
           </a:xfrm>
@@ -22756,20 +22888,20 @@
         </p:spPr>
         <p:txBody>
           <a:bodyPr/>
-          <a:p>
-            <a:pPr/>
-            <a:endParaRPr/>
-          </a:p>
-        </p:txBody>
-      </p:sp>
-      <p:sp>
-        <p:nvSpPr>
-          <p:cNvPr id="433" name=""/>
+          <a:lstStyle/>
+          <a:p>
+            <a:endParaRPr/>
+          </a:p>
+        </p:txBody>
+      </p:sp>
+      <p:sp>
+        <p:nvSpPr>
+          <p:cNvPr id="433" name="矩形 432"/>
           <p:cNvSpPr/>
           <p:nvPr/>
         </p:nvSpPr>
         <p:spPr>
-          <a:xfrm rot="0" flipH="0" flipV="0">
+          <a:xfrm>
             <a:off x="0" y="0"/>
             <a:ext cx="12192000" cy="114300"/>
           </a:xfrm>
@@ -22783,20 +22915,20 @@
         </p:spPr>
         <p:txBody>
           <a:bodyPr/>
-          <a:p>
-            <a:pPr/>
-            <a:endParaRPr/>
-          </a:p>
-        </p:txBody>
-      </p:sp>
-      <p:sp>
-        <p:nvSpPr>
-          <p:cNvPr id="434" name=""/>
+          <a:lstStyle/>
+          <a:p>
+            <a:endParaRPr/>
+          </a:p>
+        </p:txBody>
+      </p:sp>
+      <p:sp>
+        <p:nvSpPr>
+          <p:cNvPr id="434" name="矩形 433"/>
           <p:cNvSpPr/>
           <p:nvPr/>
         </p:nvSpPr>
         <p:spPr>
-          <a:xfrm rot="0" flipH="0" flipV="0">
+          <a:xfrm>
             <a:off x="381000" y="314325"/>
             <a:ext cx="57150" cy="323850"/>
           </a:xfrm>
@@ -22810,27 +22942,30 @@
         </p:spPr>
         <p:txBody>
           <a:bodyPr/>
-          <a:p>
-            <a:pPr/>
-            <a:endParaRPr/>
-          </a:p>
-        </p:txBody>
-      </p:sp>
-      <p:sp>
-        <p:nvSpPr>
-          <p:cNvPr id="435" name="" descr="{&quot;isTemplate&quot;:true,&quot;type&quot;:&quot;text&quot;}"/>
+          <a:lstStyle/>
+          <a:p>
+            <a:endParaRPr/>
+          </a:p>
+        </p:txBody>
+      </p:sp>
+      <p:sp>
+        <p:nvSpPr>
+          <p:cNvPr id="435" name="文本框 434" descr="{&quot;isTemplate&quot;:true,&quot;type&quot;:&quot;text&quot;}"/>
           <p:cNvSpPr txBox="1"/>
           <p:nvPr/>
         </p:nvSpPr>
         <p:spPr>
-          <a:xfrm rot="0" flipH="0" flipV="0">
+          <a:xfrm>
             <a:off x="571500" y="285750"/>
             <a:ext cx="4629150" cy="371475"/>
           </a:xfrm>
-          <a:prstGeom prst="rect"/>
+          <a:prstGeom prst="rect">
+            <a:avLst/>
+          </a:prstGeom>
         </p:spPr>
         <p:txBody>
           <a:bodyPr wrap="none" lIns="0" tIns="0" rIns="0" bIns="0"/>
+          <a:lstStyle/>
           <a:p>
             <a:pPr>
               <a:lnSpc>
@@ -22873,19 +23008,22 @@
       </p:sp>
       <p:sp>
         <p:nvSpPr>
-          <p:cNvPr id="436" name="" descr="{&quot;isTemplate&quot;:true,&quot;type&quot;:&quot;text&quot;}"/>
+          <p:cNvPr id="436" name="文本框 435" descr="{&quot;isTemplate&quot;:true,&quot;type&quot;:&quot;text&quot;}"/>
           <p:cNvSpPr txBox="1"/>
           <p:nvPr/>
         </p:nvSpPr>
         <p:spPr>
-          <a:xfrm rot="0" flipH="0" flipV="0">
+          <a:xfrm>
             <a:off x="571500" y="742950"/>
             <a:ext cx="4962525" cy="171450"/>
           </a:xfrm>
-          <a:prstGeom prst="rect"/>
+          <a:prstGeom prst="rect">
+            <a:avLst/>
+          </a:prstGeom>
         </p:spPr>
         <p:txBody>
           <a:bodyPr wrap="none" lIns="0" tIns="0" rIns="0" bIns="0"/>
+          <a:lstStyle/>
           <a:p>
             <a:pPr>
               <a:lnSpc>
@@ -22910,7 +23048,7 @@
                 <a:latin typeface="Source Han Sans CN"/>
                 <a:ea typeface="Source Han Sans CN"/>
               </a:rPr>
-              <a:t xml:space="preserve">UAV </a:t>
+              <a:t>UAV </a:t>
             </a:r>
             <a:r>
               <a:rPr lang="zh-CN" sz="1125">
@@ -22930,7 +23068,7 @@
                 <a:latin typeface="Source Han Sans CN"/>
                 <a:ea typeface="Source Han Sans CN"/>
               </a:rPr>
-              <a:t xml:space="preserve"> + </a:t>
+              <a:t> + </a:t>
             </a:r>
             <a:r>
               <a:rPr lang="zh-CN" sz="1125">
@@ -22948,17 +23086,17 @@
       </p:sp>
       <p:pic>
         <p:nvPicPr>
-          <p:cNvPr id="437" name=""/>
+          <p:cNvPr id="437" name="图形 436"/>
           <p:cNvPicPr>
             <a:picLocks noChangeAspect="1"/>
           </p:cNvPicPr>
           <p:nvPr/>
         </p:nvPicPr>
         <p:blipFill>
-          <a:blip>
+          <a:blip r:embed="rId2">
             <a:extLst>
               <a:ext uri="{96DAC541-7B7A-43D3-8B79-37D633B846F1}">
-                <asvg:svgBlip r:embed="rId1"/>
+                <asvg:svgBlip xmlns:asvg="http://schemas.microsoft.com/office/drawing/2016/SVG/main" r:embed="rId3"/>
               </a:ext>
             </a:extLst>
           </a:blip>
@@ -22967,7 +23105,7 @@
           </a:stretch>
         </p:blipFill>
         <p:spPr>
-          <a:xfrm rot="0" flipH="0" flipV="0">
+          <a:xfrm>
             <a:off x="571500" y="933450"/>
             <a:ext cx="11049000" cy="2400300"/>
           </a:xfrm>
@@ -22979,12 +23117,12 @@
       </p:pic>
       <p:sp>
         <p:nvSpPr>
-          <p:cNvPr id="438" name=""/>
+          <p:cNvPr id="438" name="矩形: 圆角 437"/>
           <p:cNvSpPr/>
           <p:nvPr/>
         </p:nvSpPr>
         <p:spPr>
-          <a:xfrm rot="0" flipH="0" flipV="0">
+          <a:xfrm>
             <a:off x="571500" y="3543300"/>
             <a:ext cx="323850" cy="323850"/>
           </a:xfrm>
@@ -23000,27 +23138,30 @@
         </p:spPr>
         <p:txBody>
           <a:bodyPr/>
-          <a:p>
-            <a:pPr/>
-            <a:endParaRPr/>
-          </a:p>
-        </p:txBody>
-      </p:sp>
-      <p:sp>
-        <p:nvSpPr>
-          <p:cNvPr id="439" name="" descr="{&quot;isTemplate&quot;:true,&quot;type&quot;:&quot;text&quot;}"/>
+          <a:lstStyle/>
+          <a:p>
+            <a:endParaRPr/>
+          </a:p>
+        </p:txBody>
+      </p:sp>
+      <p:sp>
+        <p:nvSpPr>
+          <p:cNvPr id="439" name="文本框 438" descr="{&quot;isTemplate&quot;:true,&quot;type&quot;:&quot;text&quot;}"/>
           <p:cNvSpPr txBox="1"/>
           <p:nvPr/>
         </p:nvSpPr>
         <p:spPr>
-          <a:xfrm rot="0" flipH="0" flipV="0">
+          <a:xfrm>
             <a:off x="685800" y="3609975"/>
             <a:ext cx="95250" cy="190500"/>
           </a:xfrm>
-          <a:prstGeom prst="rect"/>
+          <a:prstGeom prst="rect">
+            <a:avLst/>
+          </a:prstGeom>
         </p:spPr>
         <p:txBody>
           <a:bodyPr wrap="none" lIns="0" tIns="0" rIns="0" bIns="0"/>
+          <a:lstStyle/>
           <a:p>
             <a:pPr>
               <a:lnSpc>
@@ -23043,19 +23184,22 @@
       </p:sp>
       <p:sp>
         <p:nvSpPr>
-          <p:cNvPr id="440" name="" descr="{&quot;isTemplate&quot;:true,&quot;type&quot;:&quot;text&quot;}"/>
+          <p:cNvPr id="440" name="文本框 439" descr="{&quot;isTemplate&quot;:true,&quot;type&quot;:&quot;text&quot;}"/>
           <p:cNvSpPr txBox="1"/>
           <p:nvPr/>
         </p:nvSpPr>
         <p:spPr>
-          <a:xfrm rot="0" flipH="0" flipV="0">
+          <a:xfrm>
             <a:off x="990600" y="3600450"/>
             <a:ext cx="857250" cy="209550"/>
           </a:xfrm>
-          <a:prstGeom prst="rect"/>
+          <a:prstGeom prst="rect">
+            <a:avLst/>
+          </a:prstGeom>
         </p:spPr>
         <p:txBody>
           <a:bodyPr wrap="none" lIns="0" tIns="0" rIns="0" bIns="0"/>
+          <a:lstStyle/>
           <a:p>
             <a:pPr>
               <a:lnSpc>
@@ -23078,21 +23222,24 @@
       </p:sp>
       <p:sp>
         <p:nvSpPr>
-          <p:cNvPr id="441" name="" descr="{&quot;isTemplate&quot;:true,&quot;type&quot;:&quot;text&quot;}"/>
+          <p:cNvPr id="441" name="文本框 440" descr="{&quot;isTemplate&quot;:true,&quot;type&quot;:&quot;text&quot;}"/>
           <p:cNvSpPr txBox="1"/>
           <p:nvPr/>
         </p:nvSpPr>
         <p:spPr>
-          <a:xfrm rot="0" flipH="0" flipV="0">
+          <a:xfrm>
             <a:off x="571500" y="3943350"/>
             <a:ext cx="2667000" cy="495300"/>
           </a:xfrm>
-          <a:prstGeom prst="rect"/>
+          <a:prstGeom prst="rect">
+            <a:avLst/>
+          </a:prstGeom>
         </p:spPr>
         <p:txBody>
           <a:bodyPr wrap="square" lIns="0" tIns="0" rIns="114300" bIns="0">
             <a:normAutofit/>
           </a:bodyPr>
+          <a:lstStyle/>
           <a:p>
             <a:pPr>
               <a:lnSpc>
@@ -23117,7 +23264,7 @@
                 <a:latin typeface="Source Han Sans CN"/>
                 <a:ea typeface="Source Han Sans CN"/>
               </a:rPr>
-              <a:t xml:space="preserve"> softmax</a:t>
+              <a:t> softmax</a:t>
             </a:r>
             <a:r>
               <a:rPr lang="zh-CN" sz="1013">
@@ -23135,12 +23282,12 @@
       </p:sp>
       <p:sp>
         <p:nvSpPr>
-          <p:cNvPr id="442" name=""/>
+          <p:cNvPr id="442" name="矩形: 圆角 441"/>
           <p:cNvSpPr/>
           <p:nvPr/>
         </p:nvSpPr>
         <p:spPr>
-          <a:xfrm rot="0" flipH="0" flipV="0">
+          <a:xfrm>
             <a:off x="3362325" y="3543300"/>
             <a:ext cx="323850" cy="323850"/>
           </a:xfrm>
@@ -23156,27 +23303,30 @@
         </p:spPr>
         <p:txBody>
           <a:bodyPr/>
-          <a:p>
-            <a:pPr/>
-            <a:endParaRPr/>
-          </a:p>
-        </p:txBody>
-      </p:sp>
-      <p:sp>
-        <p:nvSpPr>
-          <p:cNvPr id="443" name="" descr="{&quot;isTemplate&quot;:true,&quot;type&quot;:&quot;text&quot;}"/>
+          <a:lstStyle/>
+          <a:p>
+            <a:endParaRPr/>
+          </a:p>
+        </p:txBody>
+      </p:sp>
+      <p:sp>
+        <p:nvSpPr>
+          <p:cNvPr id="443" name="文本框 442" descr="{&quot;isTemplate&quot;:true,&quot;type&quot;:&quot;text&quot;}"/>
           <p:cNvSpPr txBox="1"/>
           <p:nvPr/>
         </p:nvSpPr>
         <p:spPr>
-          <a:xfrm rot="0" flipH="0" flipV="0">
+          <a:xfrm>
             <a:off x="3476625" y="3609975"/>
             <a:ext cx="95250" cy="190500"/>
           </a:xfrm>
-          <a:prstGeom prst="rect"/>
+          <a:prstGeom prst="rect">
+            <a:avLst/>
+          </a:prstGeom>
         </p:spPr>
         <p:txBody>
           <a:bodyPr wrap="none" lIns="0" tIns="0" rIns="0" bIns="0"/>
+          <a:lstStyle/>
           <a:p>
             <a:pPr>
               <a:lnSpc>
@@ -23199,19 +23349,22 @@
       </p:sp>
       <p:sp>
         <p:nvSpPr>
-          <p:cNvPr id="444" name="" descr="{&quot;isTemplate&quot;:true,&quot;type&quot;:&quot;text&quot;}"/>
+          <p:cNvPr id="444" name="文本框 443" descr="{&quot;isTemplate&quot;:true,&quot;type&quot;:&quot;text&quot;}"/>
           <p:cNvSpPr txBox="1"/>
           <p:nvPr/>
         </p:nvSpPr>
         <p:spPr>
-          <a:xfrm rot="0" flipH="0" flipV="0">
+          <a:xfrm>
             <a:off x="3781425" y="3600450"/>
             <a:ext cx="857250" cy="209550"/>
           </a:xfrm>
-          <a:prstGeom prst="rect"/>
+          <a:prstGeom prst="rect">
+            <a:avLst/>
+          </a:prstGeom>
         </p:spPr>
         <p:txBody>
           <a:bodyPr wrap="none" lIns="0" tIns="0" rIns="0" bIns="0"/>
+          <a:lstStyle/>
           <a:p>
             <a:pPr>
               <a:lnSpc>
@@ -23234,21 +23387,24 @@
       </p:sp>
       <p:sp>
         <p:nvSpPr>
-          <p:cNvPr id="445" name="" descr="{&quot;isTemplate&quot;:true,&quot;type&quot;:&quot;text&quot;}"/>
+          <p:cNvPr id="445" name="文本框 444" descr="{&quot;isTemplate&quot;:true,&quot;type&quot;:&quot;text&quot;}"/>
           <p:cNvSpPr txBox="1"/>
           <p:nvPr/>
         </p:nvSpPr>
         <p:spPr>
-          <a:xfrm rot="0" flipH="0" flipV="0">
+          <a:xfrm>
             <a:off x="3362325" y="3943350"/>
             <a:ext cx="2543175" cy="742950"/>
           </a:xfrm>
-          <a:prstGeom prst="rect"/>
+          <a:prstGeom prst="rect">
+            <a:avLst/>
+          </a:prstGeom>
         </p:spPr>
         <p:txBody>
           <a:bodyPr wrap="square" lIns="0" tIns="0" rIns="114300" bIns="0">
             <a:normAutofit/>
           </a:bodyPr>
+          <a:lstStyle/>
           <a:p>
             <a:pPr>
               <a:lnSpc>
@@ -23271,12 +23427,12 @@
       </p:sp>
       <p:sp>
         <p:nvSpPr>
-          <p:cNvPr id="446" name=""/>
+          <p:cNvPr id="446" name="矩形: 圆角 445"/>
           <p:cNvSpPr/>
           <p:nvPr/>
         </p:nvSpPr>
         <p:spPr>
-          <a:xfrm rot="0" flipH="0" flipV="0">
+          <a:xfrm>
             <a:off x="6029325" y="3543300"/>
             <a:ext cx="323850" cy="323850"/>
           </a:xfrm>
@@ -23292,27 +23448,30 @@
         </p:spPr>
         <p:txBody>
           <a:bodyPr/>
-          <a:p>
-            <a:pPr/>
-            <a:endParaRPr/>
-          </a:p>
-        </p:txBody>
-      </p:sp>
-      <p:sp>
-        <p:nvSpPr>
-          <p:cNvPr id="447" name="" descr="{&quot;isTemplate&quot;:true,&quot;type&quot;:&quot;text&quot;}"/>
+          <a:lstStyle/>
+          <a:p>
+            <a:endParaRPr/>
+          </a:p>
+        </p:txBody>
+      </p:sp>
+      <p:sp>
+        <p:nvSpPr>
+          <p:cNvPr id="447" name="文本框 446" descr="{&quot;isTemplate&quot;:true,&quot;type&quot;:&quot;text&quot;}"/>
           <p:cNvSpPr txBox="1"/>
           <p:nvPr/>
         </p:nvSpPr>
         <p:spPr>
-          <a:xfrm rot="0" flipH="0" flipV="0">
+          <a:xfrm>
             <a:off x="6143625" y="3609975"/>
             <a:ext cx="95250" cy="190500"/>
           </a:xfrm>
-          <a:prstGeom prst="rect"/>
+          <a:prstGeom prst="rect">
+            <a:avLst/>
+          </a:prstGeom>
         </p:spPr>
         <p:txBody>
           <a:bodyPr wrap="none" lIns="0" tIns="0" rIns="0" bIns="0"/>
+          <a:lstStyle/>
           <a:p>
             <a:pPr>
               <a:lnSpc>
@@ -23335,19 +23494,22 @@
       </p:sp>
       <p:sp>
         <p:nvSpPr>
-          <p:cNvPr id="448" name="" descr="{&quot;isTemplate&quot;:true,&quot;type&quot;:&quot;text&quot;}"/>
+          <p:cNvPr id="448" name="文本框 447" descr="{&quot;isTemplate&quot;:true,&quot;type&quot;:&quot;text&quot;}"/>
           <p:cNvSpPr txBox="1"/>
           <p:nvPr/>
         </p:nvSpPr>
         <p:spPr>
-          <a:xfrm rot="0" flipH="0" flipV="0">
+          <a:xfrm>
             <a:off x="6448425" y="3600450"/>
             <a:ext cx="685800" cy="209550"/>
           </a:xfrm>
-          <a:prstGeom prst="rect"/>
+          <a:prstGeom prst="rect">
+            <a:avLst/>
+          </a:prstGeom>
         </p:spPr>
         <p:txBody>
           <a:bodyPr wrap="none" lIns="0" tIns="0" rIns="0" bIns="0"/>
+          <a:lstStyle/>
           <a:p>
             <a:pPr>
               <a:lnSpc>
@@ -23370,21 +23532,24 @@
       </p:sp>
       <p:sp>
         <p:nvSpPr>
-          <p:cNvPr id="449" name="" descr="{&quot;isTemplate&quot;:true,&quot;type&quot;:&quot;text&quot;}"/>
+          <p:cNvPr id="449" name="文本框 448" descr="{&quot;isTemplate&quot;:true,&quot;type&quot;:&quot;text&quot;}"/>
           <p:cNvSpPr txBox="1"/>
           <p:nvPr/>
         </p:nvSpPr>
         <p:spPr>
-          <a:xfrm rot="0" flipH="0" flipV="0">
+          <a:xfrm>
             <a:off x="6029325" y="3943350"/>
             <a:ext cx="2543175" cy="495300"/>
           </a:xfrm>
-          <a:prstGeom prst="rect"/>
+          <a:prstGeom prst="rect">
+            <a:avLst/>
+          </a:prstGeom>
         </p:spPr>
         <p:txBody>
           <a:bodyPr wrap="square" lIns="0" tIns="0" rIns="114300" bIns="0">
             <a:normAutofit/>
           </a:bodyPr>
+          <a:lstStyle/>
           <a:p>
             <a:pPr>
               <a:lnSpc>
@@ -23409,7 +23574,7 @@
                 <a:latin typeface="Source Han Sans CN"/>
                 <a:ea typeface="Source Han Sans CN"/>
               </a:rPr>
-              <a:t xml:space="preserve"> swap / insert / reverse </a:t>
+              <a:t> swap / insert / reverse </a:t>
             </a:r>
             <a:r>
               <a:rPr lang="zh-CN" sz="1013">
@@ -23427,12 +23592,12 @@
       </p:sp>
       <p:sp>
         <p:nvSpPr>
-          <p:cNvPr id="450" name=""/>
+          <p:cNvPr id="450" name="矩形: 圆角 449"/>
           <p:cNvSpPr/>
           <p:nvPr/>
         </p:nvSpPr>
         <p:spPr>
-          <a:xfrm rot="0" flipH="0" flipV="0">
+          <a:xfrm>
             <a:off x="8696325" y="3543300"/>
             <a:ext cx="323850" cy="323850"/>
           </a:xfrm>
@@ -23448,27 +23613,30 @@
         </p:spPr>
         <p:txBody>
           <a:bodyPr/>
-          <a:p>
-            <a:pPr/>
-            <a:endParaRPr/>
-          </a:p>
-        </p:txBody>
-      </p:sp>
-      <p:sp>
-        <p:nvSpPr>
-          <p:cNvPr id="451" name="" descr="{&quot;isTemplate&quot;:true,&quot;type&quot;:&quot;text&quot;}"/>
+          <a:lstStyle/>
+          <a:p>
+            <a:endParaRPr/>
+          </a:p>
+        </p:txBody>
+      </p:sp>
+      <p:sp>
+        <p:nvSpPr>
+          <p:cNvPr id="451" name="文本框 450" descr="{&quot;isTemplate&quot;:true,&quot;type&quot;:&quot;text&quot;}"/>
           <p:cNvSpPr txBox="1"/>
           <p:nvPr/>
         </p:nvSpPr>
         <p:spPr>
-          <a:xfrm rot="0" flipH="0" flipV="0">
+          <a:xfrm>
             <a:off x="8810625" y="3609975"/>
             <a:ext cx="95250" cy="190500"/>
           </a:xfrm>
-          <a:prstGeom prst="rect"/>
+          <a:prstGeom prst="rect">
+            <a:avLst/>
+          </a:prstGeom>
         </p:spPr>
         <p:txBody>
           <a:bodyPr wrap="none" lIns="0" tIns="0" rIns="0" bIns="0"/>
+          <a:lstStyle/>
           <a:p>
             <a:pPr>
               <a:lnSpc>
@@ -23491,19 +23659,22 @@
       </p:sp>
       <p:sp>
         <p:nvSpPr>
-          <p:cNvPr id="452" name="" descr="{&quot;isTemplate&quot;:true,&quot;type&quot;:&quot;text&quot;}"/>
+          <p:cNvPr id="452" name="文本框 451" descr="{&quot;isTemplate&quot;:true,&quot;type&quot;:&quot;text&quot;}"/>
           <p:cNvSpPr txBox="1"/>
           <p:nvPr/>
         </p:nvSpPr>
         <p:spPr>
-          <a:xfrm rot="0" flipH="0" flipV="0">
+          <a:xfrm>
             <a:off x="9115425" y="3600450"/>
             <a:ext cx="1028700" cy="209550"/>
           </a:xfrm>
-          <a:prstGeom prst="rect"/>
+          <a:prstGeom prst="rect">
+            <a:avLst/>
+          </a:prstGeom>
         </p:spPr>
         <p:txBody>
           <a:bodyPr wrap="none" lIns="0" tIns="0" rIns="0" bIns="0"/>
+          <a:lstStyle/>
           <a:p>
             <a:pPr>
               <a:lnSpc>
@@ -23526,21 +23697,24 @@
       </p:sp>
       <p:sp>
         <p:nvSpPr>
-          <p:cNvPr id="453" name="" descr="{&quot;isTemplate&quot;:true,&quot;type&quot;:&quot;text&quot;}"/>
+          <p:cNvPr id="453" name="文本框 452" descr="{&quot;isTemplate&quot;:true,&quot;type&quot;:&quot;text&quot;}"/>
           <p:cNvSpPr txBox="1"/>
           <p:nvPr/>
         </p:nvSpPr>
         <p:spPr>
-          <a:xfrm rot="0" flipH="0" flipV="0">
+          <a:xfrm>
             <a:off x="8696325" y="3943350"/>
             <a:ext cx="2543175" cy="742950"/>
           </a:xfrm>
-          <a:prstGeom prst="rect"/>
+          <a:prstGeom prst="rect">
+            <a:avLst/>
+          </a:prstGeom>
         </p:spPr>
         <p:txBody>
           <a:bodyPr wrap="square" lIns="0" tIns="0" rIns="114300" bIns="0">
             <a:normAutofit/>
           </a:bodyPr>
+          <a:lstStyle/>
           <a:p>
             <a:pPr>
               <a:lnSpc>
@@ -23565,7 +23739,7 @@
                 <a:latin typeface="Source Han Sans CN"/>
                 <a:ea typeface="Source Han Sans CN"/>
               </a:rPr>
-              <a:t xml:space="preserve"> UAV </a:t>
+              <a:t> UAV </a:t>
             </a:r>
             <a:r>
               <a:rPr lang="zh-CN" sz="1013">
@@ -23585,7 +23759,7 @@
                 <a:latin typeface="Source Han Sans CN"/>
                 <a:ea typeface="Source Han Sans CN"/>
               </a:rPr>
-              <a:t xml:space="preserve"> SRP </a:t>
+              <a:t> SRP </a:t>
             </a:r>
             <a:r>
               <a:rPr lang="zh-CN" sz="1013">
@@ -23603,12 +23777,12 @@
       </p:sp>
       <p:sp>
         <p:nvSpPr>
-          <p:cNvPr id="454" name=""/>
+          <p:cNvPr id="454" name="矩形: 圆角 453"/>
           <p:cNvSpPr/>
           <p:nvPr/>
         </p:nvSpPr>
         <p:spPr>
-          <a:xfrm rot="0" flipH="0" flipV="0">
+          <a:xfrm>
             <a:off x="609600" y="4762500"/>
             <a:ext cx="5429250" cy="990600"/>
           </a:xfrm>
@@ -23624,24 +23798,29 @@
         </p:spPr>
         <p:txBody>
           <a:bodyPr/>
-          <a:p>
-            <a:pPr/>
-            <a:endParaRPr/>
-          </a:p>
-        </p:txBody>
-      </p:sp>
-      <p:sp>
-        <p:nvSpPr>
-          <p:cNvPr id="455" name=""/>
+          <a:lstStyle/>
+          <a:p>
+            <a:endParaRPr/>
+          </a:p>
+        </p:txBody>
+      </p:sp>
+      <p:sp>
+        <p:nvSpPr>
+          <p:cNvPr id="455" name="任意多边形: 形状 454"/>
           <p:cNvSpPr/>
           <p:nvPr/>
         </p:nvSpPr>
         <p:spPr>
-          <a:xfrm rot="0" flipH="0" flipV="0">
+          <a:xfrm>
             <a:off x="609600" y="4762500"/>
             <a:ext cx="5429250" cy="990600"/>
           </a:xfrm>
           <a:custGeom>
+            <a:avLst/>
+            <a:gdLst/>
+            <a:ahLst/>
+            <a:cxnLst/>
+            <a:rect l="0" t="0" r="0" b="0"/>
             <a:pathLst>
               <a:path w="570" h="104">
                 <a:moveTo>
@@ -23684,27 +23863,30 @@
         </p:spPr>
         <p:txBody>
           <a:bodyPr/>
-          <a:p>
-            <a:pPr/>
-            <a:endParaRPr/>
-          </a:p>
-        </p:txBody>
-      </p:sp>
-      <p:sp>
-        <p:nvSpPr>
-          <p:cNvPr id="456" name="" descr="{&quot;isTemplate&quot;:true,&quot;type&quot;:&quot;text&quot;}"/>
+          <a:lstStyle/>
+          <a:p>
+            <a:endParaRPr/>
+          </a:p>
+        </p:txBody>
+      </p:sp>
+      <p:sp>
+        <p:nvSpPr>
+          <p:cNvPr id="456" name="文本框 455" descr="{&quot;isTemplate&quot;:true,&quot;type&quot;:&quot;text&quot;}"/>
           <p:cNvSpPr txBox="1"/>
           <p:nvPr/>
         </p:nvSpPr>
         <p:spPr>
-          <a:xfrm rot="0" flipH="0" flipV="0">
+          <a:xfrm>
             <a:off x="781050" y="4886325"/>
             <a:ext cx="5048250" cy="180975"/>
           </a:xfrm>
-          <a:prstGeom prst="rect"/>
+          <a:prstGeom prst="rect">
+            <a:avLst/>
+          </a:prstGeom>
         </p:spPr>
         <p:txBody>
           <a:bodyPr wrap="none" lIns="0" tIns="0" rIns="0" bIns="0"/>
+          <a:lstStyle/>
           <a:p>
             <a:pPr>
               <a:lnSpc>
@@ -23729,7 +23911,7 @@
                 <a:latin typeface="Source Han Sans CN"/>
                 <a:ea typeface="Source Han Sans CN"/>
               </a:rPr>
-              <a:t xml:space="preserve"> y=0 </a:t>
+              <a:t> y=0 </a:t>
             </a:r>
             <a:r>
               <a:rPr lang="zh-CN" sz="1163" b="1">
@@ -23747,21 +23929,24 @@
       </p:sp>
       <p:sp>
         <p:nvSpPr>
-          <p:cNvPr id="457" name="" descr="{&quot;isTemplate&quot;:true,&quot;type&quot;:&quot;text&quot;}"/>
+          <p:cNvPr id="457" name="文本框 456" descr="{&quot;isTemplate&quot;:true,&quot;type&quot;:&quot;text&quot;}"/>
           <p:cNvSpPr txBox="1"/>
           <p:nvPr/>
         </p:nvSpPr>
         <p:spPr>
-          <a:xfrm rot="0" flipH="0" flipV="0">
+          <a:xfrm>
             <a:off x="781050" y="5114925"/>
             <a:ext cx="5048250" cy="514350"/>
           </a:xfrm>
-          <a:prstGeom prst="rect"/>
+          <a:prstGeom prst="rect">
+            <a:avLst/>
+          </a:prstGeom>
         </p:spPr>
         <p:txBody>
           <a:bodyPr wrap="square" lIns="0" tIns="0" rIns="0" bIns="0">
-            <a:normAutofit/>
+            <a:normAutofit fontScale="77500" lnSpcReduction="20000"/>
           </a:bodyPr>
+          <a:lstStyle/>
           <a:p>
             <a:pPr>
               <a:lnSpc>
@@ -23769,17 +23954,17 @@
               </a:lnSpc>
             </a:pPr>
             <a:r>
-              <a:rPr lang="en-US" sz="1013">
-                <a:solidFill>
-                  <a:srgbClr val="4A5568"/>
-                </a:solidFill>
-                <a:latin typeface="Source Han Sans CN"/>
-                <a:ea typeface="Source Han Sans CN"/>
-              </a:rPr>
-              <a:t xml:space="preserve">DE </a:t>
-            </a:r>
-            <a:r>
-              <a:rPr lang="zh-CN" sz="1013">
+              <a:rPr lang="en-US" sz="1013" dirty="0">
+                <a:solidFill>
+                  <a:srgbClr val="4A5568"/>
+                </a:solidFill>
+                <a:latin typeface="Source Han Sans CN"/>
+                <a:ea typeface="Source Han Sans CN"/>
+              </a:rPr>
+              <a:t>DE </a:t>
+            </a:r>
+            <a:r>
+              <a:rPr lang="zh-CN" sz="1013" dirty="0">
                 <a:solidFill>
                   <a:srgbClr val="4A5568"/>
                 </a:solidFill>
@@ -23788,18 +23973,108 @@
               </a:rPr>
               <a:t>空间中每个任务都被分配，「暂不执行」由解码后的可行性修复在评估端裁量（航程超限移除），并支持「任务少时并入更少机」的合并修复——空闲机零成本。</a:t>
             </a:r>
-            <a:endParaRPr/>
-          </a:p>
-        </p:txBody>
-      </p:sp>
-      <p:sp>
-        <p:nvSpPr>
-          <p:cNvPr id="458" name=""/>
+            <a:r>
+              <a:rPr lang="zh-CN" altLang="en-US" sz="1013" dirty="0">
+                <a:solidFill>
+                  <a:srgbClr val="4A5568"/>
+                </a:solidFill>
+                <a:latin typeface="Source Han Sans CN"/>
+                <a:ea typeface="Source Han Sans CN"/>
+              </a:rPr>
+              <a:t>“每个 </a:t>
+            </a:r>
+            <a:r>
+              <a:rPr lang="en-US" altLang="zh-CN" sz="1013" dirty="0">
+                <a:solidFill>
+                  <a:srgbClr val="4A5568"/>
+                </a:solidFill>
+                <a:latin typeface="Source Han Sans CN"/>
+                <a:ea typeface="Source Han Sans CN"/>
+              </a:rPr>
+              <a:t>U </a:t>
+            </a:r>
+            <a:r>
+              <a:rPr lang="zh-CN" altLang="en-US" sz="1013" dirty="0">
+                <a:solidFill>
+                  <a:srgbClr val="4A5568"/>
+                </a:solidFill>
+                <a:latin typeface="Source Han Sans CN"/>
+                <a:ea typeface="Source Han Sans CN"/>
+              </a:rPr>
+              <a:t>至少一个目标”是 </a:t>
+            </a:r>
+            <a:r>
+              <a:rPr lang="en-US" altLang="zh-CN" sz="1013" dirty="0">
+                <a:solidFill>
+                  <a:srgbClr val="4A5568"/>
+                </a:solidFill>
+                <a:latin typeface="Source Han Sans CN"/>
+                <a:ea typeface="Source Han Sans CN"/>
+              </a:rPr>
+              <a:t>DE </a:t>
+            </a:r>
+            <a:r>
+              <a:rPr lang="zh-CN" altLang="en-US" sz="1013" dirty="0">
+                <a:solidFill>
+                  <a:srgbClr val="4A5568"/>
+                </a:solidFill>
+                <a:latin typeface="Source Han Sans CN"/>
+                <a:ea typeface="Source Han Sans CN"/>
+              </a:rPr>
+              <a:t>映射的布局不变量；闲置表达放在解码端 </a:t>
+            </a:r>
+            <a:r>
+              <a:rPr lang="en-US" altLang="zh-CN" sz="1013" dirty="0">
+                <a:solidFill>
+                  <a:srgbClr val="4A5568"/>
+                </a:solidFill>
+                <a:latin typeface="Source Han Sans CN"/>
+                <a:ea typeface="Source Han Sans CN"/>
+              </a:rPr>
+              <a:t>_consolidate</a:t>
+            </a:r>
+            <a:r>
+              <a:rPr lang="zh-CN" altLang="en-US" sz="1013" dirty="0">
+                <a:solidFill>
+                  <a:srgbClr val="4A5568"/>
+                </a:solidFill>
+                <a:latin typeface="Source Han Sans CN"/>
+                <a:ea typeface="Source Han Sans CN"/>
+              </a:rPr>
+              <a:t>。所以是有意设计：空闲 </a:t>
+            </a:r>
+            <a:r>
+              <a:rPr lang="en-US" altLang="zh-CN" sz="1013" dirty="0">
+                <a:solidFill>
+                  <a:srgbClr val="4A5568"/>
+                </a:solidFill>
+                <a:latin typeface="Source Han Sans CN"/>
+                <a:ea typeface="Source Han Sans CN"/>
+              </a:rPr>
+              <a:t>= </a:t>
+            </a:r>
+            <a:r>
+              <a:rPr lang="zh-CN" altLang="en-US" sz="1013" dirty="0">
+                <a:solidFill>
+                  <a:srgbClr val="4A5568"/>
+                </a:solidFill>
+                <a:latin typeface="Source Han Sans CN"/>
+                <a:ea typeface="Source Han Sans CN"/>
+              </a:rPr>
+              <a:t>解码侧概念，不进基因。</a:t>
+            </a:r>
+            <a:endParaRPr dirty="0"/>
+          </a:p>
+        </p:txBody>
+      </p:sp>
+      <p:sp>
+        <p:nvSpPr>
+          <p:cNvPr id="458" name="矩形: 圆角 457"/>
           <p:cNvSpPr/>
           <p:nvPr/>
         </p:nvSpPr>
         <p:spPr>
-          <a:xfrm rot="0" flipH="0" flipV="0">
+          <a:xfrm>
             <a:off x="6229350" y="4762500"/>
             <a:ext cx="5429250" cy="990600"/>
           </a:xfrm>
@@ -23815,24 +24090,29 @@
         </p:spPr>
         <p:txBody>
           <a:bodyPr/>
-          <a:p>
-            <a:pPr/>
-            <a:endParaRPr/>
-          </a:p>
-        </p:txBody>
-      </p:sp>
-      <p:sp>
-        <p:nvSpPr>
-          <p:cNvPr id="459" name=""/>
+          <a:lstStyle/>
+          <a:p>
+            <a:endParaRPr/>
+          </a:p>
+        </p:txBody>
+      </p:sp>
+      <p:sp>
+        <p:nvSpPr>
+          <p:cNvPr id="459" name="任意多边形: 形状 458"/>
           <p:cNvSpPr/>
           <p:nvPr/>
         </p:nvSpPr>
         <p:spPr>
-          <a:xfrm rot="0" flipH="0" flipV="0">
+          <a:xfrm>
             <a:off x="6229350" y="4762500"/>
             <a:ext cx="5429250" cy="990600"/>
           </a:xfrm>
           <a:custGeom>
+            <a:avLst/>
+            <a:gdLst/>
+            <a:ahLst/>
+            <a:cxnLst/>
+            <a:rect l="0" t="0" r="0" b="0"/>
             <a:pathLst>
               <a:path w="570" h="104">
                 <a:moveTo>
@@ -23875,27 +24155,30 @@
         </p:spPr>
         <p:txBody>
           <a:bodyPr/>
-          <a:p>
-            <a:pPr/>
-            <a:endParaRPr/>
-          </a:p>
-        </p:txBody>
-      </p:sp>
-      <p:sp>
-        <p:nvSpPr>
-          <p:cNvPr id="460" name="" descr="{&quot;isTemplate&quot;:true,&quot;type&quot;:&quot;text&quot;}"/>
+          <a:lstStyle/>
+          <a:p>
+            <a:endParaRPr/>
+          </a:p>
+        </p:txBody>
+      </p:sp>
+      <p:sp>
+        <p:nvSpPr>
+          <p:cNvPr id="460" name="文本框 459" descr="{&quot;isTemplate&quot;:true,&quot;type&quot;:&quot;text&quot;}"/>
           <p:cNvSpPr txBox="1"/>
           <p:nvPr/>
         </p:nvSpPr>
         <p:spPr>
-          <a:xfrm rot="0" flipH="0" flipV="0">
+          <a:xfrm>
             <a:off x="6400800" y="4886325"/>
             <a:ext cx="5048250" cy="180975"/>
           </a:xfrm>
-          <a:prstGeom prst="rect"/>
+          <a:prstGeom prst="rect">
+            <a:avLst/>
+          </a:prstGeom>
         </p:spPr>
         <p:txBody>
           <a:bodyPr wrap="none" lIns="0" tIns="0" rIns="0" bIns="0"/>
+          <a:lstStyle/>
           <a:p>
             <a:pPr>
               <a:lnSpc>
@@ -23910,7 +24193,7 @@
                 <a:latin typeface="Source Han Sans CN"/>
                 <a:ea typeface="Source Han Sans CN"/>
               </a:rPr>
-              <a:t xml:space="preserve">Lamarckian </a:t>
+              <a:t>Lamarckian </a:t>
             </a:r>
             <a:r>
               <a:rPr lang="zh-CN" sz="1163" b="1">
@@ -23928,21 +24211,24 @@
       </p:sp>
       <p:sp>
         <p:nvSpPr>
-          <p:cNvPr id="461" name="" descr="{&quot;isTemplate&quot;:true,&quot;type&quot;:&quot;text&quot;}"/>
+          <p:cNvPr id="461" name="文本框 460" descr="{&quot;isTemplate&quot;:true,&quot;type&quot;:&quot;text&quot;}"/>
           <p:cNvSpPr txBox="1"/>
           <p:nvPr/>
         </p:nvSpPr>
         <p:spPr>
-          <a:xfrm rot="0" flipH="0" flipV="0">
+          <a:xfrm>
             <a:off x="6400800" y="5114925"/>
             <a:ext cx="5048250" cy="514350"/>
           </a:xfrm>
-          <a:prstGeom prst="rect"/>
+          <a:prstGeom prst="rect">
+            <a:avLst/>
+          </a:prstGeom>
         </p:spPr>
         <p:txBody>
           <a:bodyPr wrap="square" lIns="0" tIns="0" rIns="0" bIns="0">
             <a:normAutofit/>
           </a:bodyPr>
+          <a:lstStyle/>
           <a:p>
             <a:pPr>
               <a:lnSpc>
@@ -23965,12 +24251,12 @@
       </p:sp>
       <p:sp>
         <p:nvSpPr>
-          <p:cNvPr id="462" name=""/>
+          <p:cNvPr id="462" name="矩形 461"/>
           <p:cNvSpPr/>
           <p:nvPr/>
         </p:nvSpPr>
         <p:spPr>
-          <a:xfrm rot="0" flipH="0" flipV="0">
+          <a:xfrm>
             <a:off x="0" y="6448425"/>
             <a:ext cx="12192000" cy="409575"/>
           </a:xfrm>
@@ -23984,24 +24270,29 @@
         </p:spPr>
         <p:txBody>
           <a:bodyPr/>
-          <a:p>
-            <a:pPr/>
-            <a:endParaRPr/>
-          </a:p>
-        </p:txBody>
-      </p:sp>
-      <p:sp>
-        <p:nvSpPr>
-          <p:cNvPr id="463" name=""/>
+          <a:lstStyle/>
+          <a:p>
+            <a:endParaRPr/>
+          </a:p>
+        </p:txBody>
+      </p:sp>
+      <p:sp>
+        <p:nvSpPr>
+          <p:cNvPr id="463" name="任意多边形: 形状 462"/>
           <p:cNvSpPr/>
           <p:nvPr/>
         </p:nvSpPr>
         <p:spPr>
-          <a:xfrm rot="0" flipH="0" flipV="0">
+          <a:xfrm>
             <a:off x="0" y="6438900"/>
             <a:ext cx="12192000" cy="419100"/>
           </a:xfrm>
           <a:custGeom>
+            <a:avLst/>
+            <a:gdLst/>
+            <a:ahLst/>
+            <a:cxnLst/>
+            <a:rect l="0" t="0" r="0" b="0"/>
             <a:pathLst>
               <a:path w="1280" h="44">
                 <a:moveTo>
@@ -24027,27 +24318,30 @@
         </p:spPr>
         <p:txBody>
           <a:bodyPr/>
-          <a:p>
-            <a:pPr/>
-            <a:endParaRPr/>
-          </a:p>
-        </p:txBody>
-      </p:sp>
-      <p:sp>
-        <p:nvSpPr>
-          <p:cNvPr id="464" name="" descr="{&quot;isTemplate&quot;:true,&quot;type&quot;:&quot;text&quot;}"/>
+          <a:lstStyle/>
+          <a:p>
+            <a:endParaRPr/>
+          </a:p>
+        </p:txBody>
+      </p:sp>
+      <p:sp>
+        <p:nvSpPr>
+          <p:cNvPr id="464" name="文本框 463" descr="{&quot;isTemplate&quot;:true,&quot;type&quot;:&quot;text&quot;}"/>
           <p:cNvSpPr txBox="1"/>
           <p:nvPr/>
         </p:nvSpPr>
         <p:spPr>
-          <a:xfrm rot="0" flipH="0" flipV="0">
+          <a:xfrm>
             <a:off x="381000" y="6581775"/>
             <a:ext cx="2828925" cy="152400"/>
           </a:xfrm>
-          <a:prstGeom prst="rect"/>
+          <a:prstGeom prst="rect">
+            <a:avLst/>
+          </a:prstGeom>
         </p:spPr>
         <p:txBody>
           <a:bodyPr wrap="none" lIns="0" tIns="0" rIns="0" bIns="0"/>
+          <a:lstStyle/>
           <a:p>
             <a:pPr>
               <a:lnSpc>
@@ -24072,7 +24366,7 @@
                 <a:latin typeface="Source Han Sans CN"/>
                 <a:ea typeface="Source Han Sans CN"/>
               </a:rPr>
-              <a:t xml:space="preserve"> · </a:t>
+              <a:t> · </a:t>
             </a:r>
             <a:r>
               <a:rPr lang="zh-CN" sz="975">
@@ -24090,19 +24384,22 @@
       </p:sp>
       <p:sp>
         <p:nvSpPr>
-          <p:cNvPr id="465" name="" descr="{&quot;isTemplate&quot;:true,&quot;type&quot;:&quot;text&quot;}"/>
+          <p:cNvPr id="465" name="文本框 464" descr="{&quot;isTemplate&quot;:true,&quot;type&quot;:&quot;text&quot;}"/>
           <p:cNvSpPr txBox="1"/>
           <p:nvPr/>
         </p:nvSpPr>
         <p:spPr>
-          <a:xfrm rot="0" flipH="0" flipV="0">
+          <a:xfrm>
             <a:off x="11296650" y="6572250"/>
             <a:ext cx="514350" cy="171450"/>
           </a:xfrm>
-          <a:prstGeom prst="rect"/>
+          <a:prstGeom prst="rect">
+            <a:avLst/>
+          </a:prstGeom>
         </p:spPr>
         <p:txBody>
           <a:bodyPr wrap="none" lIns="0" tIns="0" rIns="0" bIns="0"/>
+          <a:lstStyle/>
           <a:p>
             <a:pPr>
               <a:lnSpc>
@@ -24125,15 +24422,18 @@
       </p:sp>
     </p:spTree>
   </p:cSld>
+  <p:clrMapOvr>
+    <a:masterClrMapping/>
+  </p:clrMapOvr>
 </p:sld>
 </file>
 
 <file path=ppt/slides/slide9.xml><?xml version="1.0" encoding="utf-8"?>
-<p:sld xmlns:p="http://schemas.openxmlformats.org/presentationml/2006/main" xmlns:a="http://schemas.openxmlformats.org/drawingml/2006/main">
+<p:sld xmlns:a="http://schemas.openxmlformats.org/drawingml/2006/main" xmlns:r="http://schemas.openxmlformats.org/officeDocument/2006/relationships" xmlns:p="http://schemas.openxmlformats.org/presentationml/2006/main">
   <p:cSld>
     <p:spTree>
       <p:nvGrpSpPr>
-        <p:cNvPr id="466" name=""/>
+        <p:cNvPr id="1" name=""/>
         <p:cNvGrpSpPr/>
         <p:nvPr/>
       </p:nvGrpSpPr>
@@ -24168,7 +24468,6 @@
           <a:bodyPr/>
           <a:lstStyle/>
           <a:p>
-            <a:pPr/>
             <a:endParaRPr/>
           </a:p>
         </p:txBody>
@@ -24196,7 +24495,6 @@
           <a:bodyPr/>
           <a:lstStyle/>
           <a:p>
-            <a:pPr/>
             <a:endParaRPr/>
           </a:p>
         </p:txBody>
@@ -24224,7 +24522,6 @@
           <a:bodyPr/>
           <a:lstStyle/>
           <a:p>
-            <a:pPr/>
             <a:endParaRPr/>
           </a:p>
         </p:txBody>
@@ -24271,7 +24568,7 @@
                 <a:latin typeface="Source Han Sans CN"/>
                 <a:ea typeface="Source Han Sans CN"/>
               </a:rPr>
-              <a:t xml:space="preserve"> MUAS </a:t>
+              <a:t> MUAS </a:t>
             </a:r>
             <a:r>
               <a:rPr lang="zh-CN" sz="2400" b="1">
@@ -24355,7 +24652,6 @@
           <a:bodyPr/>
           <a:lstStyle/>
           <a:p>
-            <a:pPr/>
             <a:endParaRPr/>
           </a:p>
         </p:txBody>
@@ -24392,7 +24688,7 @@
                 <a:latin typeface="Source Han Sans CN"/>
                 <a:ea typeface="Source Han Sans CN"/>
               </a:rPr>
-              <a:t xml:space="preserve">① </a:t>
+              <a:t>① </a:t>
             </a:r>
             <a:r>
               <a:rPr lang="zh-CN" sz="1350" b="1">
@@ -24433,7 +24729,6 @@
           <a:bodyPr/>
           <a:lstStyle/>
           <a:p>
-            <a:pPr/>
             <a:endParaRPr/>
           </a:p>
         </p:txBody>
@@ -24490,7 +24785,7 @@
                 <a:latin typeface="Source Han Sans CN"/>
                 <a:ea typeface="Source Han Sans CN"/>
               </a:rPr>
-              <a:t xml:space="preserve"> ∈ {0,1}</a:t>
+              <a:t> ∈ {0,1}</a:t>
             </a:r>
             <a:r>
               <a:rPr lang="zh-CN" sz="1350" b="1">
@@ -24530,7 +24825,7 @@
                 <a:latin typeface="Source Han Sans CN"/>
                 <a:ea typeface="Source Han Sans CN"/>
               </a:rPr>
-              <a:t xml:space="preserve"> ∈ {0,1}</a:t>
+              <a:t> ∈ {0,1}</a:t>
             </a:r>
             <a:r>
               <a:rPr lang="zh-CN" sz="1350" b="1">
@@ -24640,7 +24935,7 @@
                 <a:latin typeface="Source Han Sans CN"/>
                 <a:ea typeface="Source Han Sans CN"/>
               </a:rPr>
-              <a:t xml:space="preserve"> ∈ {0,1}</a:t>
+              <a:t> ∈ {0,1}</a:t>
             </a:r>
             <a:endParaRPr/>
           </a:p>
@@ -24698,7 +24993,7 @@
                 <a:latin typeface="Source Han Sans CN"/>
                 <a:ea typeface="Source Han Sans CN"/>
               </a:rPr>
-              <a:t xml:space="preserve"> x</a:t>
+              <a:t> x</a:t>
             </a:r>
             <a:r>
               <a:rPr lang="en-US" sz="825">
@@ -24718,7 +25013,7 @@
                 <a:latin typeface="Source Han Sans CN"/>
                 <a:ea typeface="Source Han Sans CN"/>
               </a:rPr>
-              <a:t xml:space="preserve"> = y</a:t>
+              <a:t> = y</a:t>
             </a:r>
             <a:r>
               <a:rPr lang="en-US" sz="825">
@@ -24748,7 +25043,7 @@
                 <a:latin typeface="Source Han Sans CN"/>
                 <a:ea typeface="Source Han Sans CN"/>
               </a:rPr>
-              <a:t xml:space="preserve">y=0 </a:t>
+              <a:t>y=0 </a:t>
             </a:r>
             <a:r>
               <a:rPr lang="zh-CN" sz="1275">
@@ -24878,7 +25173,7 @@
                 <a:latin typeface="Source Han Sans CN"/>
                 <a:ea typeface="Source Han Sans CN"/>
               </a:rPr>
-              <a:t xml:space="preserve"> n</a:t>
+              <a:t> n</a:t>
             </a:r>
             <a:r>
               <a:rPr lang="en-US" sz="825">
@@ -24918,7 +25213,7 @@
                 <a:latin typeface="Source Han Sans CN"/>
                 <a:ea typeface="Source Han Sans CN"/>
               </a:rPr>
-              <a:t xml:space="preserve"> UAV </a:t>
+              <a:t> UAV </a:t>
             </a:r>
             <a:r>
               <a:rPr lang="zh-CN" sz="1050">
@@ -24964,7 +25259,6 @@
           <a:bodyPr/>
           <a:lstStyle/>
           <a:p>
-            <a:pPr/>
             <a:endParaRPr/>
           </a:p>
         </p:txBody>
@@ -25001,7 +25295,7 @@
                 <a:latin typeface="Source Han Sans CN"/>
                 <a:ea typeface="Source Han Sans CN"/>
               </a:rPr>
-              <a:t xml:space="preserve">② </a:t>
+              <a:t>② </a:t>
             </a:r>
             <a:r>
               <a:rPr lang="zh-CN" sz="1350" b="1">
@@ -25021,7 +25315,7 @@
                 <a:latin typeface="Source Han Sans CN"/>
                 <a:ea typeface="Source Han Sans CN"/>
               </a:rPr>
-              <a:t xml:space="preserve"> × </a:t>
+              <a:t> × </a:t>
             </a:r>
             <a:r>
               <a:rPr lang="zh-CN" sz="1350" b="1">
@@ -25062,7 +25356,6 @@
           <a:bodyPr/>
           <a:lstStyle/>
           <a:p>
-            <a:pPr/>
             <a:endParaRPr/>
           </a:p>
         </p:txBody>
@@ -25119,7 +25412,7 @@
                 <a:latin typeface="Source Han Sans CN"/>
                 <a:ea typeface="Source Han Sans CN"/>
               </a:rPr>
-              <a:t xml:space="preserve"> = Σ</a:t>
+              <a:t> = Σ</a:t>
             </a:r>
             <a:r>
               <a:rPr lang="en-US" sz="825" b="1">
@@ -25139,7 +25432,7 @@
                 <a:latin typeface="Source Han Sans CN"/>
                 <a:ea typeface="Source Han Sans CN"/>
               </a:rPr>
-              <a:t xml:space="preserve"> R</a:t>
+              <a:t> R</a:t>
             </a:r>
             <a:r>
               <a:rPr lang="en-US" sz="825" b="1">
@@ -25209,7 +25502,7 @@
                 <a:latin typeface="Source Han Sans CN"/>
                 <a:ea typeface="Source Han Sans CN"/>
               </a:rPr>
-              <a:t xml:space="preserve"> = C(x, π, z, y)</a:t>
+              <a:t> = C(x, π, z, y)</a:t>
             </a:r>
             <a:endParaRPr/>
           </a:p>
@@ -25249,7 +25542,7 @@
                 <a:latin typeface="Source Han Sans CN"/>
                 <a:ea typeface="Source Han Sans CN"/>
               </a:rPr>
-              <a:t xml:space="preserve">F2 </a:t>
+              <a:t>F2 </a:t>
             </a:r>
             <a:r>
               <a:rPr lang="zh-CN" sz="1050">
@@ -25269,7 +25562,7 @@
                 <a:latin typeface="Source Han Sans CN"/>
                 <a:ea typeface="Source Han Sans CN"/>
               </a:rPr>
-              <a:t xml:space="preserve"> = </a:t>
+              <a:t> = </a:t>
             </a:r>
             <a:r>
               <a:rPr lang="zh-CN" sz="1050">
@@ -25289,7 +25582,7 @@
                 <a:latin typeface="Source Han Sans CN"/>
                 <a:ea typeface="Source Han Sans CN"/>
               </a:rPr>
-              <a:t xml:space="preserve"> − </a:t>
+              <a:t> − </a:t>
             </a:r>
             <a:r>
               <a:rPr lang="zh-CN" sz="1050">
@@ -25309,7 +25602,7 @@
                 <a:latin typeface="Source Han Sans CN"/>
                 <a:ea typeface="Source Han Sans CN"/>
               </a:rPr>
-              <a:t xml:space="preserve"> + </a:t>
+              <a:t> + </a:t>
             </a:r>
             <a:r>
               <a:rPr lang="zh-CN" sz="1050">
@@ -25350,7 +25643,6 @@
           <a:bodyPr/>
           <a:lstStyle/>
           <a:p>
-            <a:pPr/>
             <a:endParaRPr/>
           </a:p>
         </p:txBody>
@@ -25399,7 +25691,7 @@
                 <a:latin typeface="Source Han Sans CN"/>
                 <a:ea typeface="Source Han Sans CN"/>
               </a:rPr>
-              <a:t xml:space="preserve"> min Σ c</a:t>
+              <a:t> min Σ c</a:t>
             </a:r>
             <a:r>
               <a:rPr lang="en-US" sz="825" b="1">
@@ -25489,7 +25781,7 @@
                 <a:latin typeface="Source Han Sans CN"/>
                 <a:ea typeface="Source Han Sans CN"/>
               </a:rPr>
-              <a:t xml:space="preserve"> UAV </a:t>
+              <a:t> UAV </a:t>
             </a:r>
             <a:r>
               <a:rPr lang="zh-CN" sz="1125" b="1">
@@ -25530,7 +25822,6 @@
           <a:bodyPr/>
           <a:lstStyle/>
           <a:p>
-            <a:pPr/>
             <a:endParaRPr/>
           </a:p>
         </p:txBody>
@@ -25596,7 +25887,6 @@
           <a:bodyPr/>
           <a:lstStyle/>
           <a:p>
-            <a:pPr/>
             <a:endParaRPr/>
           </a:p>
         </p:txBody>
@@ -25633,7 +25923,7 @@
                 <a:latin typeface="Source Han Sans CN"/>
                 <a:ea typeface="Source Han Sans CN"/>
               </a:rPr>
-              <a:t xml:space="preserve">③ </a:t>
+              <a:t>③ </a:t>
             </a:r>
             <a:r>
               <a:rPr lang="zh-CN" sz="1350" b="1">
@@ -25674,7 +25964,6 @@
           <a:bodyPr/>
           <a:lstStyle/>
           <a:p>
-            <a:pPr/>
             <a:endParaRPr/>
           </a:p>
         </p:txBody>
@@ -25753,7 +26042,7 @@
                 <a:latin typeface="Source Han Sans CN"/>
                 <a:ea typeface="Source Han Sans CN"/>
               </a:rPr>
-              <a:t xml:space="preserve"> + w</a:t>
+              <a:t> + w</a:t>
             </a:r>
             <a:r>
               <a:rPr lang="en-US" sz="825" b="1">
@@ -25793,7 +26082,7 @@
                 <a:latin typeface="Source Han Sans CN"/>
                 <a:ea typeface="Source Han Sans CN"/>
               </a:rPr>
-              <a:t xml:space="preserve"> − m·F</a:t>
+              <a:t> − m·F</a:t>
             </a:r>
             <a:r>
               <a:rPr lang="en-US" sz="825" b="1">
@@ -25813,7 +26102,7 @@
                 <a:latin typeface="Source Han Sans CN"/>
                 <a:ea typeface="Source Han Sans CN"/>
               </a:rPr>
-              <a:t xml:space="preserve"> + w</a:t>
+              <a:t> + w</a:t>
             </a:r>
             <a:r>
               <a:rPr lang="en-US" sz="825" b="1">
@@ -25853,7 +26142,7 @@
                 <a:latin typeface="Source Han Sans CN"/>
                 <a:ea typeface="Source Han Sans CN"/>
               </a:rPr>
-              <a:t xml:space="preserve"> + λ·path + w</a:t>
+              <a:t> + λ·path + w</a:t>
             </a:r>
             <a:r>
               <a:rPr lang="en-US" sz="825" b="1">
@@ -25914,7 +26203,6 @@
           <a:bodyPr/>
           <a:lstStyle/>
           <a:p>
-            <a:pPr/>
             <a:endParaRPr/>
           </a:p>
         </p:txBody>
@@ -25951,7 +26239,7 @@
                 <a:latin typeface="Source Han Sans CN"/>
                 <a:ea typeface="Source Han Sans CN"/>
               </a:rPr>
-              <a:t xml:space="preserve">T0 </a:t>
+              <a:t>T0 </a:t>
             </a:r>
             <a:r>
               <a:rPr lang="zh-CN" sz="900" b="1">
@@ -26042,7 +26330,6 @@
           <a:bodyPr/>
           <a:lstStyle/>
           <a:p>
-            <a:pPr/>
             <a:endParaRPr/>
           </a:p>
         </p:txBody>
@@ -26079,7 +26366,7 @@
                 <a:latin typeface="Source Han Sans CN"/>
                 <a:ea typeface="Source Han Sans CN"/>
               </a:rPr>
-              <a:t xml:space="preserve">T1 </a:t>
+              <a:t>T1 </a:t>
             </a:r>
             <a:r>
               <a:rPr lang="zh-CN" sz="900" b="1">
@@ -26127,7 +26414,7 @@
                 <a:latin typeface="Source Han Sans CN"/>
                 <a:ea typeface="Source Han Sans CN"/>
               </a:rPr>
-              <a:t xml:space="preserve">F1_eff </a:t>
+              <a:t>F1_eff </a:t>
             </a:r>
             <a:r>
               <a:rPr lang="zh-CN" sz="975">
@@ -26147,7 +26434,7 @@
                 <a:latin typeface="Source Han Sans CN"/>
                 <a:ea typeface="Source Han Sans CN"/>
               </a:rPr>
-              <a:t xml:space="preserve"> eff = R·max(0, 1−L/W)</a:t>
+              <a:t> eff = R·max(0, 1−L/W)</a:t>
             </a:r>
             <a:r>
               <a:rPr lang="zh-CN" sz="975">
@@ -26198,7 +26485,6 @@
           <a:bodyPr/>
           <a:lstStyle/>
           <a:p>
-            <a:pPr/>
             <a:endParaRPr/>
           </a:p>
         </p:txBody>
@@ -26235,7 +26521,7 @@
                 <a:latin typeface="Source Han Sans CN"/>
                 <a:ea typeface="Source Han Sans CN"/>
               </a:rPr>
-              <a:t xml:space="preserve">T2 </a:t>
+              <a:t>T2 </a:t>
             </a:r>
             <a:r>
               <a:rPr lang="zh-CN" sz="900" b="1">
@@ -26324,7 +26610,6 @@
           <a:bodyPr/>
           <a:lstStyle/>
           <a:p>
-            <a:pPr/>
             <a:endParaRPr/>
           </a:p>
         </p:txBody>
@@ -26361,7 +26646,7 @@
                 <a:latin typeface="Source Han Sans CN"/>
                 <a:ea typeface="Source Han Sans CN"/>
               </a:rPr>
-              <a:t xml:space="preserve">T3 </a:t>
+              <a:t>T3 </a:t>
             </a:r>
             <a:r>
               <a:rPr lang="zh-CN" sz="900" b="1">
@@ -26495,7 +26780,6 @@
           <a:bodyPr/>
           <a:lstStyle/>
           <a:p>
-            <a:pPr/>
             <a:endParaRPr/>
           </a:p>
         </p:txBody>
@@ -26582,7 +26866,7 @@
                 <a:latin typeface="Source Han Sans CN"/>
                 <a:ea typeface="Source Han Sans CN"/>
               </a:rPr>
-              <a:t xml:space="preserve"> DMDE </a:t>
+              <a:t> DMDE </a:t>
             </a:r>
             <a:r>
               <a:rPr lang="zh-CN" sz="1050">
@@ -26602,7 +26886,7 @@
                 <a:latin typeface="Source Han Sans CN"/>
                 <a:ea typeface="Source Han Sans CN"/>
               </a:rPr>
-              <a:t xml:space="preserve"> Zhao Ming 2017 </a:t>
+              <a:t> Zhao Ming 2017 </a:t>
             </a:r>
             <a:r>
               <a:rPr lang="zh-CN" sz="1050">
@@ -26622,7 +26906,7 @@
                 <a:latin typeface="Source Han Sans CN"/>
                 <a:ea typeface="Source Han Sans CN"/>
               </a:rPr>
-              <a:t xml:space="preserve">T0 </a:t>
+              <a:t>T0 </a:t>
             </a:r>
             <a:r>
               <a:rPr lang="zh-CN" sz="1050">
@@ -26662,7 +26946,7 @@
                 <a:latin typeface="Source Han Sans CN"/>
                 <a:ea typeface="Source Han Sans CN"/>
               </a:rPr>
-              <a:t xml:space="preserve"> 22423 </a:t>
+              <a:t> 22423 </a:t>
             </a:r>
             <a:r>
               <a:rPr lang="zh-CN" sz="1050">
@@ -26682,7 +26966,7 @@
                 <a:latin typeface="Source Han Sans CN"/>
                 <a:ea typeface="Source Han Sans CN"/>
               </a:rPr>
-              <a:t xml:space="preserve"> 0 </a:t>
+              <a:t> 0 </a:t>
             </a:r>
             <a:r>
               <a:rPr lang="zh-CN" sz="1050">
@@ -26702,7 +26986,7 @@
                 <a:latin typeface="Source Han Sans CN"/>
                 <a:ea typeface="Source Han Sans CN"/>
               </a:rPr>
-              <a:t xml:space="preserve">T1 </a:t>
+              <a:t>T1 </a:t>
             </a:r>
             <a:r>
               <a:rPr lang="zh-CN" sz="1050">
@@ -26741,7 +27025,6 @@
           <a:bodyPr/>
           <a:lstStyle/>
           <a:p>
-            <a:pPr/>
             <a:endParaRPr/>
           </a:p>
         </p:txBody>
@@ -26790,7 +27073,6 @@
           <a:bodyPr/>
           <a:lstStyle/>
           <a:p>
-            <a:pPr/>
             <a:endParaRPr/>
           </a:p>
         </p:txBody>
@@ -26837,7 +27119,7 @@
                 <a:latin typeface="Source Han Sans CN"/>
                 <a:ea typeface="Source Han Sans CN"/>
               </a:rPr>
-              <a:t xml:space="preserve"> · </a:t>
+              <a:t> · </a:t>
             </a:r>
             <a:r>
               <a:rPr lang="zh-CN" sz="975">
@@ -27184,6 +27466,8 @@
       </a:bgFillStyleLst>
     </a:fmtScheme>
   </a:themeElements>
+  <a:objectDefaults/>
+  <a:extraClrSchemeLst/>
 </a:theme>
 </file>
 
@@ -27472,5 +27756,7 @@
       </a:bgFillStyleLst>
     </a:fmtScheme>
   </a:themeElements>
+  <a:objectDefaults/>
+  <a:extraClrSchemeLst/>
 </a:theme>
 </file>
--- a/UAV协同任务分配方法-进展汇报/UAV协同任务分配方法-进展汇报.pptx
+++ b/UAV协同任务分配方法-进展汇报/UAV协同任务分配方法-进展汇报.pptx
@@ -15,8 +15,9 @@
     <p:sldId id="260" r:id="rId6"/>
     <p:sldId id="261" r:id="rId7"/>
     <p:sldId id="262" r:id="rId8"/>
+    <p:sldId id="271" r:id="rId22"/>
+    <p:sldId id="264" r:id="rId10"/>
     <p:sldId id="263" r:id="rId9"/>
-    <p:sldId id="264" r:id="rId10"/>
     <p:sldId id="265" r:id="rId11"/>
     <p:sldId id="266" r:id="rId12"/>
     <p:sldId id="267" r:id="rId13"/>
@@ -1595,7 +1596,7 @@
       </p:grpSpPr>
       <p:sp>
         <p:nvSpPr>
-          <p:cNvPr id="22" name="矩形 56"/>
+          <p:cNvPr id="432" name="矩形 431"/>
           <p:cNvSpPr/>
           <p:nvPr/>
         </p:nvSpPr>
@@ -1622,7 +1623,7 @@
       </p:sp>
       <p:sp>
         <p:nvSpPr>
-          <p:cNvPr id="23" name="矩形 57"/>
+          <p:cNvPr id="433" name="矩形 432"/>
           <p:cNvSpPr/>
           <p:nvPr/>
         </p:nvSpPr>
@@ -1649,14 +1650,41 @@
       </p:sp>
       <p:sp>
         <p:nvSpPr>
-          <p:cNvPr id="24" name="文本框 58" descr="{&quot;isTemplate&quot;:true,&quot;type&quot;:&quot;text&quot;}"/>
+          <p:cNvPr id="434" name="矩形 433"/>
+          <p:cNvSpPr/>
+          <p:nvPr/>
+        </p:nvSpPr>
+        <p:spPr>
+          <a:xfrm>
+            <a:off x="381000" y="314325"/>
+            <a:ext cx="57150" cy="323850"/>
+          </a:xfrm>
+          <a:prstGeom prst="rect">
+            <a:avLst/>
+          </a:prstGeom>
+          <a:solidFill>
+            <a:srgbClr val="1E4FA8"/>
+          </a:solidFill>
+          <a:ln/>
+        </p:spPr>
+        <p:txBody>
+          <a:bodyPr/>
+          <a:lstStyle/>
+          <a:p>
+            <a:endParaRPr/>
+          </a:p>
+        </p:txBody>
+      </p:sp>
+      <p:sp>
+        <p:nvSpPr>
+          <p:cNvPr id="435" name="文本框 434" descr="{&quot;isTemplate&quot;:true,&quot;type&quot;:&quot;text&quot;}"/>
           <p:cNvSpPr txBox="1"/>
           <p:nvPr/>
         </p:nvSpPr>
         <p:spPr>
           <a:xfrm>
-            <a:off x="7734300" y="1238250"/>
-            <a:ext cx="3886200" cy="3771900"/>
+            <a:off x="571500" y="285750"/>
+            <a:ext cx="4629150" cy="371475"/>
           </a:xfrm>
           <a:prstGeom prst="rect">
             <a:avLst/>
@@ -1672,56 +1700,49 @@
               </a:lnSpc>
             </a:pPr>
             <a:r>
-              <a:rPr lang="en-US" sz="24750" b="1">
-                <a:solidFill>
-                  <a:srgbClr val="E8EFF8"/>
-                </a:solidFill>
-                <a:latin typeface="Source Han Sans CN"/>
-                <a:ea typeface="Source Han Sans CN"/>
-              </a:rPr>
-              <a:t>04</a:t>
-            </a:r>
-            <a:endParaRPr/>
-          </a:p>
-        </p:txBody>
-      </p:sp>
-      <p:sp>
-        <p:nvSpPr>
-          <p:cNvPr id="25" name="矩形 59"/>
-          <p:cNvSpPr/>
-          <p:nvPr/>
-        </p:nvSpPr>
-        <p:spPr>
-          <a:xfrm>
-            <a:off x="762000" y="1990725"/>
-            <a:ext cx="381000" cy="38100"/>
-          </a:xfrm>
-          <a:prstGeom prst="rect">
-            <a:avLst/>
-          </a:prstGeom>
-          <a:solidFill>
-            <a:srgbClr val="FFC107"/>
-          </a:solidFill>
-          <a:ln/>
-        </p:spPr>
-        <p:txBody>
-          <a:bodyPr/>
-          <a:lstStyle/>
-          <a:p>
-            <a:endParaRPr/>
-          </a:p>
-        </p:txBody>
-      </p:sp>
-      <p:sp>
-        <p:nvSpPr>
-          <p:cNvPr id="26" name="文本框 60" descr="{&quot;isTemplate&quot;:true,&quot;type&quot;:&quot;text&quot;}"/>
+              <a:rPr lang="zh-CN" sz="2400" b="1">
+                <a:solidFill>
+                  <a:srgbClr val="0E3F8C"/>
+                </a:solidFill>
+                <a:latin typeface="Source Han Sans CN"/>
+                <a:ea typeface="Source Han Sans CN"/>
+              </a:rPr>
+              <a:t>改进离散映射差分进化（</a:t>
+            </a:r>
+            <a:r>
+              <a:rPr lang="en-US" sz="2400" b="1">
+                <a:solidFill>
+                  <a:srgbClr val="0E3F8C"/>
+                </a:solidFill>
+                <a:latin typeface="Source Han Sans CN"/>
+                <a:ea typeface="Source Han Sans CN"/>
+              </a:rPr>
+              <a:t>DMDE</a:t>
+            </a:r>
+            <a:r>
+              <a:rPr lang="zh-CN" sz="2400" b="1">
+                <a:solidFill>
+                  <a:srgbClr val="0E3F8C"/>
+                </a:solidFill>
+                <a:latin typeface="Source Han Sans CN"/>
+                <a:ea typeface="Source Han Sans CN"/>
+              </a:rPr>
+              <a:t>）</a:t>
+            </a:r>
+            <a:endParaRPr/>
+          </a:p>
+        </p:txBody>
+      </p:sp>
+      <p:sp>
+        <p:nvSpPr>
+          <p:cNvPr id="436" name="文本框 435" descr="{&quot;isTemplate&quot;:true,&quot;type&quot;:&quot;text&quot;}"/>
           <p:cNvSpPr txBox="1"/>
           <p:nvPr/>
         </p:nvSpPr>
         <p:spPr>
           <a:xfrm>
-            <a:off x="1276350" y="1905000"/>
-            <a:ext cx="1457325" cy="200025"/>
+            <a:off x="571500" y="742950"/>
+            <a:ext cx="4962525" cy="171450"/>
           </a:xfrm>
           <a:prstGeom prst="rect">
             <a:avLst/>
@@ -1737,29 +1758,129 @@
               </a:lnSpc>
             </a:pPr>
             <a:r>
-              <a:rPr lang="en-US" sz="1275" spc="375">
-                <a:solidFill>
-                  <a:srgbClr val="3D7BD9"/>
-                </a:solidFill>
-                <a:latin typeface="Source Han Sans CN"/>
-                <a:ea typeface="Source Han Sans CN"/>
-              </a:rPr>
-              <a:t>CHAPTER 04</a:t>
-            </a:r>
-            <a:endParaRPr/>
-          </a:p>
-        </p:txBody>
-      </p:sp>
-      <p:sp>
-        <p:nvSpPr>
-          <p:cNvPr id="27" name="文本框 61" descr="{&quot;isTemplate&quot;:true,&quot;type&quot;:&quot;text&quot;}"/>
+              <a:rPr lang="zh-CN" sz="1125">
+                <a:solidFill>
+                  <a:srgbClr val="8B97A8"/>
+                </a:solidFill>
+                <a:latin typeface="Source Han Sans CN"/>
+                <a:ea typeface="Source Han Sans CN"/>
+              </a:rPr>
+              <a:t>连续编码承载「</a:t>
+            </a:r>
+            <a:r>
+              <a:rPr lang="en-US" sz="1125">
+                <a:solidFill>
+                  <a:srgbClr val="8B97A8"/>
+                </a:solidFill>
+                <a:latin typeface="Source Han Sans CN"/>
+                <a:ea typeface="Source Han Sans CN"/>
+              </a:rPr>
+              <a:t>UAV </a:t>
+            </a:r>
+            <a:r>
+              <a:rPr lang="zh-CN" sz="1125">
+                <a:solidFill>
+                  <a:srgbClr val="8B97A8"/>
+                </a:solidFill>
+                <a:latin typeface="Source Han Sans CN"/>
+                <a:ea typeface="Source Han Sans CN"/>
+              </a:rPr>
+              <a:t>归属</a:t>
+            </a:r>
+            <a:r>
+              <a:rPr lang="en-US" sz="1125">
+                <a:solidFill>
+                  <a:srgbClr val="8B97A8"/>
+                </a:solidFill>
+                <a:latin typeface="Source Han Sans CN"/>
+                <a:ea typeface="Source Han Sans CN"/>
+              </a:rPr>
+              <a:t> + </a:t>
+            </a:r>
+            <a:r>
+              <a:rPr lang="zh-CN" sz="1125">
+                <a:solidFill>
+                  <a:srgbClr val="8B97A8"/>
+                </a:solidFill>
+                <a:latin typeface="Source Han Sans CN"/>
+                <a:ea typeface="Source Han Sans CN"/>
+              </a:rPr>
+              <a:t>访问顺序」，差分算子的搜索方向由地理代价引导</a:t>
+            </a:r>
+            <a:endParaRPr/>
+          </a:p>
+        </p:txBody>
+      </p:sp>
+      <p:pic>
+        <p:nvPicPr>
+          <p:cNvPr id="437" name="图形 436"/>
+          <p:cNvPicPr>
+            <a:picLocks noChangeAspect="1"/>
+          </p:cNvPicPr>
+          <p:nvPr/>
+        </p:nvPicPr>
+        <p:blipFill>
+          <a:blip r:embed="rId2">
+            <a:extLst>
+              <a:ext uri="{96DAC541-7B7A-43D3-8B79-37D633B846F1}">
+                <asvg:svgBlip xmlns:asvg="http://schemas.microsoft.com/office/drawing/2016/SVG/main" r:embed="rId3"/>
+              </a:ext>
+            </a:extLst>
+          </a:blip>
+          <a:stretch>
+            <a:fillRect/>
+          </a:stretch>
+        </p:blipFill>
+        <p:spPr>
+          <a:xfrm>
+            <a:off x="571500" y="933450"/>
+            <a:ext cx="11049000" cy="2400300"/>
+          </a:xfrm>
+          <a:prstGeom prst="rect">
+            <a:avLst/>
+          </a:prstGeom>
+          <a:ln/>
+        </p:spPr>
+      </p:pic>
+      <p:sp>
+        <p:nvSpPr>
+          <p:cNvPr id="438" name="矩形: 圆角 437"/>
+          <p:cNvSpPr/>
+          <p:nvPr/>
+        </p:nvSpPr>
+        <p:spPr>
+          <a:xfrm>
+            <a:off x="571500" y="3543300"/>
+            <a:ext cx="323850" cy="323850"/>
+          </a:xfrm>
+          <a:prstGeom prst="roundRect">
+            <a:avLst>
+              <a:gd name="adj" fmla="val 50000"/>
+            </a:avLst>
+          </a:prstGeom>
+          <a:solidFill>
+            <a:srgbClr val="1E4FA8"/>
+          </a:solidFill>
+          <a:ln/>
+        </p:spPr>
+        <p:txBody>
+          <a:bodyPr/>
+          <a:lstStyle/>
+          <a:p>
+            <a:endParaRPr/>
+          </a:p>
+        </p:txBody>
+      </p:sp>
+      <p:sp>
+        <p:nvSpPr>
+          <p:cNvPr id="439" name="文本框 438" descr="{&quot;isTemplate&quot;:true,&quot;type&quot;:&quot;text&quot;}"/>
           <p:cNvSpPr txBox="1"/>
           <p:nvPr/>
         </p:nvSpPr>
         <p:spPr>
           <a:xfrm>
-            <a:off x="762000" y="2276475"/>
-            <a:ext cx="7239000" cy="504825"/>
+            <a:off x="685800" y="3609975"/>
+            <a:ext cx="95250" cy="190500"/>
           </a:xfrm>
           <a:prstGeom prst="rect">
             <a:avLst/>
@@ -1775,422 +1896,29 @@
               </a:lnSpc>
             </a:pPr>
             <a:r>
-              <a:rPr lang="zh-CN" sz="3300" b="1">
-                <a:solidFill>
-                  <a:srgbClr val="0E3F8C"/>
-                </a:solidFill>
-                <a:latin typeface="Source Han Sans CN"/>
-                <a:ea typeface="Source Han Sans CN"/>
-              </a:rPr>
-              <a:t>实验验证与下一步</a:t>
-            </a:r>
-            <a:endParaRPr/>
-          </a:p>
-        </p:txBody>
-      </p:sp>
-      <p:sp>
-        <p:nvSpPr>
-          <p:cNvPr id="28" name="矩形: 圆角 62"/>
-          <p:cNvSpPr/>
-          <p:nvPr/>
-        </p:nvSpPr>
-        <p:spPr>
-          <a:xfrm>
-            <a:off x="762000" y="3209925"/>
-            <a:ext cx="76200" cy="76200"/>
-          </a:xfrm>
-          <a:prstGeom prst="roundRect">
-            <a:avLst>
-              <a:gd name="adj" fmla="val 50000"/>
-            </a:avLst>
-          </a:prstGeom>
-          <a:solidFill>
-            <a:srgbClr val="1E4FA8"/>
-          </a:solidFill>
-          <a:ln/>
-        </p:spPr>
-        <p:txBody>
-          <a:bodyPr/>
-          <a:lstStyle/>
-          <a:p>
-            <a:endParaRPr/>
-          </a:p>
-        </p:txBody>
-      </p:sp>
-      <p:sp>
-        <p:nvSpPr>
-          <p:cNvPr id="29" name="文本框 63" descr="{&quot;isTemplate&quot;:true,&quot;type&quot;:&quot;text&quot;}"/>
+              <a:rPr lang="en-US" sz="1200" b="1">
+                <a:solidFill>
+                  <a:srgbClr val="FFFFFF"/>
+                </a:solidFill>
+                <a:latin typeface="Source Han Sans CN"/>
+                <a:ea typeface="Source Han Sans CN"/>
+              </a:rPr>
+              <a:t>1</a:t>
+            </a:r>
+            <a:endParaRPr/>
+          </a:p>
+        </p:txBody>
+      </p:sp>
+      <p:sp>
+        <p:nvSpPr>
+          <p:cNvPr id="440" name="文本框 439" descr="{&quot;isTemplate&quot;:true,&quot;type&quot;:&quot;text&quot;}"/>
           <p:cNvSpPr txBox="1"/>
           <p:nvPr/>
         </p:nvSpPr>
         <p:spPr>
           <a:xfrm>
-            <a:off x="952500" y="3105150"/>
-            <a:ext cx="7048500" cy="371475"/>
-          </a:xfrm>
-          <a:prstGeom prst="rect">
-            <a:avLst/>
-          </a:prstGeom>
-        </p:spPr>
-        <p:txBody>
-          <a:bodyPr wrap="none" lIns="0" tIns="0" rIns="0" bIns="0"/>
-          <a:lstStyle/>
-          <a:p>
-            <a:pPr>
-              <a:lnSpc>
-                <a:spcPct val="170000"/>
-              </a:lnSpc>
-            </a:pPr>
-            <a:r>
-              <a:rPr lang="en-US" sz="1425">
-                <a:solidFill>
-                  <a:srgbClr val="1A2230"/>
-                </a:solidFill>
-                <a:latin typeface="Source Han Sans CN"/>
-                <a:ea typeface="Source Han Sans CN"/>
-              </a:rPr>
-              <a:t>exp01 </a:t>
-            </a:r>
-            <a:r>
-              <a:rPr lang="zh-CN" sz="1425">
-                <a:solidFill>
-                  <a:srgbClr val="1A2230"/>
-                </a:solidFill>
-                <a:latin typeface="Source Han Sans CN"/>
-                <a:ea typeface="Source Han Sans CN"/>
-              </a:rPr>
-              <a:t>多</a:t>
-            </a:r>
-            <a:r>
-              <a:rPr lang="en-US" sz="1425">
-                <a:solidFill>
-                  <a:srgbClr val="1A2230"/>
-                </a:solidFill>
-                <a:latin typeface="Source Han Sans CN"/>
-                <a:ea typeface="Source Han Sans CN"/>
-              </a:rPr>
-              <a:t> seed </a:t>
-            </a:r>
-            <a:r>
-              <a:rPr lang="zh-CN" sz="1425">
-                <a:solidFill>
-                  <a:srgbClr val="1A2230"/>
-                </a:solidFill>
-                <a:latin typeface="Source Han Sans CN"/>
-                <a:ea typeface="Source Han Sans CN"/>
-              </a:rPr>
-              <a:t>阶梯：改进方向</a:t>
-            </a:r>
-            <a:r>
-              <a:rPr lang="en-US" sz="1425">
-                <a:solidFill>
-                  <a:srgbClr val="1A2230"/>
-                </a:solidFill>
-                <a:latin typeface="Source Han Sans CN"/>
-                <a:ea typeface="Source Han Sans CN"/>
-              </a:rPr>
-              <a:t> </a:t>
-            </a:r>
-            <a:r>
-              <a:rPr lang="en-US" sz="1425" b="1">
-                <a:solidFill>
-                  <a:srgbClr val="1A2230"/>
-                </a:solidFill>
-                <a:latin typeface="Source Han Sans CN"/>
-                <a:ea typeface="Source Han Sans CN"/>
-              </a:rPr>
-              <a:t>3/3 seed </a:t>
-            </a:r>
-            <a:r>
-              <a:rPr lang="zh-CN" sz="1425" b="1">
-                <a:solidFill>
-                  <a:srgbClr val="1A2230"/>
-                </a:solidFill>
-                <a:latin typeface="Source Han Sans CN"/>
-                <a:ea typeface="Source Han Sans CN"/>
-              </a:rPr>
-              <a:t>一致</a:t>
-            </a:r>
-            <a:r>
-              <a:rPr lang="zh-CN" sz="1425">
-                <a:solidFill>
-                  <a:srgbClr val="1A2230"/>
-                </a:solidFill>
-                <a:latin typeface="Source Han Sans CN"/>
-                <a:ea typeface="Source Han Sans CN"/>
-              </a:rPr>
-              <a:t>、可逐位复现，幅度</a:t>
-            </a:r>
-            <a:r>
-              <a:rPr lang="en-US" sz="1425">
-                <a:solidFill>
-                  <a:srgbClr val="1A2230"/>
-                </a:solidFill>
-                <a:latin typeface="Source Han Sans CN"/>
-                <a:ea typeface="Source Han Sans CN"/>
-              </a:rPr>
-              <a:t> seed-dependent</a:t>
-            </a:r>
-            <a:endParaRPr/>
-          </a:p>
-        </p:txBody>
-      </p:sp>
-      <p:sp>
-        <p:nvSpPr>
-          <p:cNvPr id="30" name="矩形: 圆角 64"/>
-          <p:cNvSpPr/>
-          <p:nvPr/>
-        </p:nvSpPr>
-        <p:spPr>
-          <a:xfrm>
-            <a:off x="762000" y="3752850"/>
-            <a:ext cx="76200" cy="76200"/>
-          </a:xfrm>
-          <a:prstGeom prst="roundRect">
-            <a:avLst>
-              <a:gd name="adj" fmla="val 50000"/>
-            </a:avLst>
-          </a:prstGeom>
-          <a:solidFill>
-            <a:srgbClr val="1E4FA8"/>
-          </a:solidFill>
-          <a:ln/>
-        </p:spPr>
-        <p:txBody>
-          <a:bodyPr/>
-          <a:lstStyle/>
-          <a:p>
-            <a:endParaRPr/>
-          </a:p>
-        </p:txBody>
-      </p:sp>
-      <p:sp>
-        <p:nvSpPr>
-          <p:cNvPr id="31" name="文本框 65" descr="{&quot;isTemplate&quot;:true,&quot;type&quot;:&quot;text&quot;}"/>
-          <p:cNvSpPr txBox="1"/>
-          <p:nvPr/>
-        </p:nvSpPr>
-        <p:spPr>
-          <a:xfrm>
-            <a:off x="952500" y="3648075"/>
-            <a:ext cx="7048500" cy="371475"/>
-          </a:xfrm>
-          <a:prstGeom prst="rect">
-            <a:avLst/>
-          </a:prstGeom>
-        </p:spPr>
-        <p:txBody>
-          <a:bodyPr wrap="none" lIns="0" tIns="0" rIns="0" bIns="0"/>
-          <a:lstStyle/>
-          <a:p>
-            <a:pPr>
-              <a:lnSpc>
-                <a:spcPct val="170000"/>
-              </a:lnSpc>
-            </a:pPr>
-            <a:r>
-              <a:rPr lang="en-US" sz="1425">
-                <a:solidFill>
-                  <a:srgbClr val="1A2230"/>
-                </a:solidFill>
-                <a:latin typeface="Source Han Sans CN"/>
-                <a:ea typeface="Source Han Sans CN"/>
-              </a:rPr>
-              <a:t>exp02 </a:t>
-            </a:r>
-            <a:r>
-              <a:rPr lang="zh-CN" sz="1425">
-                <a:solidFill>
-                  <a:srgbClr val="1A2230"/>
-                </a:solidFill>
-                <a:latin typeface="Source Han Sans CN"/>
-                <a:ea typeface="Source Han Sans CN"/>
-              </a:rPr>
-              <a:t>规模标定：</a:t>
-            </a:r>
-            <a:r>
-              <a:rPr lang="zh-CN" sz="1425" b="1">
-                <a:solidFill>
-                  <a:srgbClr val="1A2230"/>
-                </a:solidFill>
-                <a:latin typeface="Source Han Sans CN"/>
-                <a:ea typeface="Source Han Sans CN"/>
-              </a:rPr>
-              <a:t>求解规模与任务规模</a:t>
-            </a:r>
-            <a:r>
-              <a:rPr lang="en-US" sz="1425" b="1">
-                <a:solidFill>
-                  <a:srgbClr val="1A2230"/>
-                </a:solidFill>
-                <a:latin typeface="Source Han Sans CN"/>
-                <a:ea typeface="Source Han Sans CN"/>
-              </a:rPr>
-              <a:t> N </a:t>
-            </a:r>
-            <a:r>
-              <a:rPr lang="zh-CN" sz="1425" b="1">
-                <a:solidFill>
-                  <a:srgbClr val="1A2230"/>
-                </a:solidFill>
-                <a:latin typeface="Source Han Sans CN"/>
-                <a:ea typeface="Source Han Sans CN"/>
-              </a:rPr>
-              <a:t>解耦</a:t>
-            </a:r>
-            <a:r>
-              <a:rPr lang="zh-CN" sz="1425">
-                <a:solidFill>
-                  <a:srgbClr val="1A2230"/>
-                </a:solidFill>
-                <a:latin typeface="Source Han Sans CN"/>
-                <a:ea typeface="Source Han Sans CN"/>
-              </a:rPr>
-              <a:t>，瓶颈定位到选择名额而非候选比例</a:t>
-            </a:r>
-            <a:endParaRPr/>
-          </a:p>
-        </p:txBody>
-      </p:sp>
-      <p:sp>
-        <p:nvSpPr>
-          <p:cNvPr id="32" name="文本框 66" descr="{&quot;isTemplate&quot;:true,&quot;type&quot;:&quot;text&quot;}"/>
-          <p:cNvSpPr txBox="1"/>
-          <p:nvPr/>
-        </p:nvSpPr>
-        <p:spPr>
-          <a:xfrm>
-            <a:off x="762000" y="4305300"/>
-            <a:ext cx="7239000" cy="666750"/>
-          </a:xfrm>
-          <a:prstGeom prst="rect">
-            <a:avLst/>
-          </a:prstGeom>
-        </p:spPr>
-        <p:txBody>
-          <a:bodyPr wrap="square" lIns="0" tIns="0" rIns="0" bIns="0">
-            <a:normAutofit/>
-          </a:bodyPr>
-          <a:lstStyle/>
-          <a:p>
-            <a:pPr>
-              <a:lnSpc>
-                <a:spcPct val="180000"/>
-              </a:lnSpc>
-            </a:pPr>
-            <a:r>
-              <a:rPr lang="zh-CN" sz="1200">
-                <a:solidFill>
-                  <a:srgbClr val="4A5568"/>
-                </a:solidFill>
-                <a:latin typeface="Source Han Sans CN"/>
-                <a:ea typeface="Source Han Sans CN"/>
-              </a:rPr>
-              <a:t>评估口径：长程滚动</a:t>
-            </a:r>
-            <a:r>
-              <a:rPr lang="en-US" sz="1200">
-                <a:solidFill>
-                  <a:srgbClr val="4A5568"/>
-                </a:solidFill>
-                <a:latin typeface="Source Han Sans CN"/>
-                <a:ea typeface="Source Han Sans CN"/>
-              </a:rPr>
-              <a:t> 24 </a:t>
-            </a:r>
-            <a:r>
-              <a:rPr lang="zh-CN" sz="1200">
-                <a:solidFill>
-                  <a:srgbClr val="4A5568"/>
-                </a:solidFill>
-                <a:latin typeface="Source Han Sans CN"/>
-                <a:ea typeface="Source Han Sans CN"/>
-              </a:rPr>
-              <a:t>周期、</a:t>
-            </a:r>
-            <a:r>
-              <a:rPr lang="en-US" sz="1200">
-                <a:solidFill>
-                  <a:srgbClr val="4A5568"/>
-                </a:solidFill>
-                <a:latin typeface="Source Han Sans CN"/>
-                <a:ea typeface="Source Han Sans CN"/>
-              </a:rPr>
-              <a:t>Poisson λ=5 </a:t>
-            </a:r>
-            <a:r>
-              <a:rPr lang="zh-CN" sz="1200">
-                <a:solidFill>
-                  <a:srgbClr val="4A5568"/>
-                </a:solidFill>
-                <a:latin typeface="Source Han Sans CN"/>
-                <a:ea typeface="Source Han Sans CN"/>
-              </a:rPr>
-              <a:t>到达；「任务不被完成只有物理约束被违反」——完成只认物理约束，迟到计奖励折减而非废飞。所有数字来自实验</a:t>
-            </a:r>
-            <a:r>
-              <a:rPr lang="en-US" sz="1200">
-                <a:solidFill>
-                  <a:srgbClr val="4A5568"/>
-                </a:solidFill>
-                <a:latin typeface="Source Han Sans CN"/>
-                <a:ea typeface="Source Han Sans CN"/>
-              </a:rPr>
-              <a:t> metrics </a:t>
-            </a:r>
-            <a:r>
-              <a:rPr lang="zh-CN" sz="1200">
-                <a:solidFill>
-                  <a:srgbClr val="4A5568"/>
-                </a:solidFill>
-                <a:latin typeface="Source Han Sans CN"/>
-                <a:ea typeface="Source Han Sans CN"/>
-              </a:rPr>
-              <a:t>原始记录，可复现。</a:t>
-            </a:r>
-            <a:endParaRPr/>
-          </a:p>
-        </p:txBody>
-      </p:sp>
-      <p:sp>
-        <p:nvSpPr>
-          <p:cNvPr id="33" name="矩形: 圆角 67"/>
-          <p:cNvSpPr/>
-          <p:nvPr/>
-        </p:nvSpPr>
-        <p:spPr>
-          <a:xfrm>
-            <a:off x="762000" y="5200650"/>
-            <a:ext cx="1104900" cy="295275"/>
-          </a:xfrm>
-          <a:prstGeom prst="roundRect">
-            <a:avLst>
-              <a:gd name="adj" fmla="val 19355"/>
-            </a:avLst>
-          </a:prstGeom>
-          <a:solidFill>
-            <a:srgbClr val="1E4FA8"/>
-          </a:solidFill>
-          <a:ln/>
-        </p:spPr>
-        <p:txBody>
-          <a:bodyPr/>
-          <a:lstStyle/>
-          <a:p>
-            <a:endParaRPr/>
-          </a:p>
-        </p:txBody>
-      </p:sp>
-      <p:sp>
-        <p:nvSpPr>
-          <p:cNvPr id="34" name="文本框 68" descr="{&quot;isTemplate&quot;:true,&quot;type&quot;:&quot;text&quot;}"/>
-          <p:cNvSpPr txBox="1"/>
-          <p:nvPr/>
-        </p:nvSpPr>
-        <p:spPr>
-          <a:xfrm>
-            <a:off x="914400" y="5267325"/>
-            <a:ext cx="800100" cy="161925"/>
+            <a:off x="990600" y="3600450"/>
+            <a:ext cx="857250" cy="209550"/>
           </a:xfrm>
           <a:prstGeom prst="rect">
             <a:avLst/>
@@ -2206,33 +1934,93 @@
               </a:lnSpc>
             </a:pPr>
             <a:r>
-              <a:rPr lang="en-US" sz="1050" b="1">
-                <a:solidFill>
-                  <a:srgbClr val="FFFFFF"/>
-                </a:solidFill>
-                <a:latin typeface="Source Han Sans CN"/>
-                <a:ea typeface="Source Han Sans CN"/>
-              </a:rPr>
-              <a:t>P12 · exp01</a:t>
-            </a:r>
-            <a:endParaRPr/>
-          </a:p>
-        </p:txBody>
-      </p:sp>
-      <p:sp>
-        <p:nvSpPr>
-          <p:cNvPr id="35" name="矩形: 圆角 69"/>
+              <a:rPr lang="zh-CN" sz="1350" b="1">
+                <a:solidFill>
+                  <a:srgbClr val="0E3F8C"/>
+                </a:solidFill>
+                <a:latin typeface="Source Han Sans CN"/>
+                <a:ea typeface="Source Han Sans CN"/>
+              </a:rPr>
+              <a:t>首任务匹配</a:t>
+            </a:r>
+            <a:endParaRPr/>
+          </a:p>
+        </p:txBody>
+      </p:sp>
+      <p:sp>
+        <p:nvSpPr>
+          <p:cNvPr id="441" name="文本框 440" descr="{&quot;isTemplate&quot;:true,&quot;type&quot;:&quot;text&quot;}"/>
+          <p:cNvSpPr txBox="1"/>
+          <p:nvPr/>
+        </p:nvSpPr>
+        <p:spPr>
+          <a:xfrm>
+            <a:off x="571500" y="3943350"/>
+            <a:ext cx="2667000" cy="495300"/>
+          </a:xfrm>
+          <a:prstGeom prst="rect">
+            <a:avLst/>
+          </a:prstGeom>
+        </p:spPr>
+        <p:txBody>
+          <a:bodyPr wrap="square" lIns="0" tIns="0" rIns="114300" bIns="0">
+            <a:normAutofit/>
+          </a:bodyPr>
+          <a:lstStyle/>
+          <a:p>
+            <a:pPr>
+              <a:lnSpc>
+                <a:spcPct val="160000"/>
+              </a:lnSpc>
+            </a:pPr>
+            <a:r>
+              <a:rPr lang="zh-CN" sz="1013">
+                <a:solidFill>
+                  <a:srgbClr val="4A5568"/>
+                </a:solidFill>
+                <a:latin typeface="Source Han Sans CN"/>
+                <a:ea typeface="Source Han Sans CN"/>
+              </a:rPr>
+              <a:t>温度自适应</a:t>
+            </a:r>
+            <a:r>
+              <a:rPr lang="en-US" sz="1013">
+                <a:solidFill>
+                  <a:srgbClr val="4A5568"/>
+                </a:solidFill>
+                <a:latin typeface="Source Han Sans CN"/>
+                <a:ea typeface="Source Han Sans CN"/>
+              </a:rPr>
+              <a:t> softmax</a:t>
+            </a:r>
+            <a:r>
+              <a:rPr lang="zh-CN" sz="1013">
+                <a:solidFill>
+                  <a:srgbClr val="4A5568"/>
+                </a:solidFill>
+                <a:latin typeface="Source Han Sans CN"/>
+                <a:ea typeface="Source Han Sans CN"/>
+              </a:rPr>
+              <a:t>：早期较大候选集软采样保多样性，随温度衰减收敛为贪心匹配</a:t>
+            </a:r>
+            <a:endParaRPr/>
+          </a:p>
+        </p:txBody>
+      </p:sp>
+      <p:sp>
+        <p:nvSpPr>
+          <p:cNvPr id="442" name="矩形: 圆角 441"/>
           <p:cNvSpPr/>
           <p:nvPr/>
         </p:nvSpPr>
         <p:spPr>
           <a:xfrm>
-            <a:off x="1981200" y="5200650"/>
-            <a:ext cx="1104900" cy="295275"/>
+            <a:off x="3362325" y="3543300"/>
+            <a:ext cx="323850" cy="323850"/>
           </a:xfrm>
           <a:prstGeom prst="roundRect">
             <a:avLst>
-              <a:gd name="adj" fmla="val 19355"/>
+              <a:gd name="adj" fmla="val 50000"/>
             </a:avLst>
           </a:prstGeom>
           <a:solidFill>
@@ -2250,14 +2038,14 @@
       </p:sp>
       <p:sp>
         <p:nvSpPr>
-          <p:cNvPr id="36" name="文本框 70" descr="{&quot;isTemplate&quot;:true,&quot;type&quot;:&quot;text&quot;}"/>
+          <p:cNvPr id="443" name="文本框 442" descr="{&quot;isTemplate&quot;:true,&quot;type&quot;:&quot;text&quot;}"/>
           <p:cNvSpPr txBox="1"/>
           <p:nvPr/>
         </p:nvSpPr>
         <p:spPr>
           <a:xfrm>
-            <a:off x="2133600" y="5267325"/>
-            <a:ext cx="800100" cy="161925"/>
+            <a:off x="3476625" y="3609975"/>
+            <a:ext cx="95250" cy="190500"/>
           </a:xfrm>
           <a:prstGeom prst="rect">
             <a:avLst/>
@@ -2273,58 +2061,29 @@
               </a:lnSpc>
             </a:pPr>
             <a:r>
-              <a:rPr lang="en-US" sz="1050" b="1">
+              <a:rPr lang="en-US" sz="1200" b="1">
                 <a:solidFill>
                   <a:srgbClr val="FFFFFF"/>
                 </a:solidFill>
                 <a:latin typeface="Source Han Sans CN"/>
                 <a:ea typeface="Source Han Sans CN"/>
               </a:rPr>
-              <a:t>P13 · exp02</a:t>
-            </a:r>
-            <a:endParaRPr/>
-          </a:p>
-        </p:txBody>
-      </p:sp>
-      <p:sp>
-        <p:nvSpPr>
-          <p:cNvPr id="37" name="矩形: 圆角 71"/>
-          <p:cNvSpPr/>
-          <p:nvPr/>
-        </p:nvSpPr>
-        <p:spPr>
-          <a:xfrm>
-            <a:off x="3200400" y="5200650"/>
-            <a:ext cx="1228725" cy="295275"/>
-          </a:xfrm>
-          <a:prstGeom prst="roundRect">
-            <a:avLst>
-              <a:gd name="adj" fmla="val 19355"/>
-            </a:avLst>
-          </a:prstGeom>
-          <a:solidFill>
-            <a:srgbClr val="1E4FA8"/>
-          </a:solidFill>
-          <a:ln/>
-        </p:spPr>
-        <p:txBody>
-          <a:bodyPr/>
-          <a:lstStyle/>
-          <a:p>
-            <a:endParaRPr/>
-          </a:p>
-        </p:txBody>
-      </p:sp>
-      <p:sp>
-        <p:nvSpPr>
-          <p:cNvPr id="38" name="文本框 72" descr="{&quot;isTemplate&quot;:true,&quot;type&quot;:&quot;text&quot;}"/>
+              <a:t>2</a:t>
+            </a:r>
+            <a:endParaRPr/>
+          </a:p>
+        </p:txBody>
+      </p:sp>
+      <p:sp>
+        <p:nvSpPr>
+          <p:cNvPr id="444" name="文本框 443" descr="{&quot;isTemplate&quot;:true,&quot;type&quot;:&quot;text&quot;}"/>
           <p:cNvSpPr txBox="1"/>
           <p:nvPr/>
         </p:nvSpPr>
         <p:spPr>
           <a:xfrm>
-            <a:off x="3352800" y="5267325"/>
-            <a:ext cx="923925" cy="161925"/>
+            <a:off x="3781425" y="3600450"/>
+            <a:ext cx="857250" cy="209550"/>
           </a:xfrm>
           <a:prstGeom prst="rect">
             <a:avLst/>
@@ -2340,43 +2099,73 @@
               </a:lnSpc>
             </a:pPr>
             <a:r>
-              <a:rPr lang="en-US" sz="1050" b="1">
-                <a:solidFill>
-                  <a:srgbClr val="FFFFFF"/>
-                </a:solidFill>
-                <a:latin typeface="Source Han Sans CN"/>
-                <a:ea typeface="Source Han Sans CN"/>
-              </a:rPr>
-              <a:t>P14 · </a:t>
-            </a:r>
-            <a:r>
-              <a:rPr lang="zh-CN" sz="1050" b="1">
-                <a:solidFill>
-                  <a:srgbClr val="FFFFFF"/>
-                </a:solidFill>
-                <a:latin typeface="Source Han Sans CN"/>
-                <a:ea typeface="Source Han Sans CN"/>
-              </a:rPr>
-              <a:t>性能瓶颈</a:t>
-            </a:r>
-            <a:endParaRPr/>
-          </a:p>
-        </p:txBody>
-      </p:sp>
-      <p:sp>
-        <p:nvSpPr>
-          <p:cNvPr id="39" name="矩形: 圆角 73"/>
+              <a:rPr lang="zh-CN" sz="1350" b="1">
+                <a:solidFill>
+                  <a:srgbClr val="0E3F8C"/>
+                </a:solidFill>
+                <a:latin typeface="Source Han Sans CN"/>
+                <a:ea typeface="Source Han Sans CN"/>
+              </a:rPr>
+              <a:t>巡游边匹配</a:t>
+            </a:r>
+            <a:endParaRPr/>
+          </a:p>
+        </p:txBody>
+      </p:sp>
+      <p:sp>
+        <p:nvSpPr>
+          <p:cNvPr id="445" name="文本框 444" descr="{&quot;isTemplate&quot;:true,&quot;type&quot;:&quot;text&quot;}"/>
+          <p:cNvSpPr txBox="1"/>
+          <p:nvPr/>
+        </p:nvSpPr>
+        <p:spPr>
+          <a:xfrm>
+            <a:off x="3362325" y="3943350"/>
+            <a:ext cx="2543175" cy="742950"/>
+          </a:xfrm>
+          <a:prstGeom prst="rect">
+            <a:avLst/>
+          </a:prstGeom>
+        </p:spPr>
+        <p:txBody>
+          <a:bodyPr wrap="square" lIns="0" tIns="0" rIns="114300" bIns="0">
+            <a:normAutofit/>
+          </a:bodyPr>
+          <a:lstStyle/>
+          <a:p>
+            <a:pPr>
+              <a:lnSpc>
+                <a:spcPct val="160000"/>
+              </a:lnSpc>
+            </a:pPr>
+            <a:r>
+              <a:rPr lang="zh-CN" sz="1013">
+                <a:solidFill>
+                  <a:srgbClr val="4A5568"/>
+                </a:solidFill>
+                <a:latin typeface="Source Han Sans CN"/>
+                <a:ea typeface="Source Han Sans CN"/>
+              </a:rPr>
+              <a:t>按迭代行替换：以已访问任务为新起点行继续匹配——访问顺序真正进入进化搜索空间</a:t>
+            </a:r>
+            <a:endParaRPr/>
+          </a:p>
+        </p:txBody>
+      </p:sp>
+      <p:sp>
+        <p:nvSpPr>
+          <p:cNvPr id="446" name="矩形: 圆角 445"/>
           <p:cNvSpPr/>
           <p:nvPr/>
         </p:nvSpPr>
         <p:spPr>
           <a:xfrm>
-            <a:off x="4543425" y="5200650"/>
-            <a:ext cx="1362075" cy="295275"/>
+            <a:off x="6029325" y="3543300"/>
+            <a:ext cx="323850" cy="323850"/>
           </a:xfrm>
           <a:prstGeom prst="roundRect">
             <a:avLst>
-              <a:gd name="adj" fmla="val 19355"/>
+              <a:gd name="adj" fmla="val 50000"/>
             </a:avLst>
           </a:prstGeom>
           <a:solidFill>
@@ -2394,14 +2183,14 @@
       </p:sp>
       <p:sp>
         <p:nvSpPr>
-          <p:cNvPr id="40" name="文本框 74" descr="{&quot;isTemplate&quot;:true,&quot;type&quot;:&quot;text&quot;}"/>
+          <p:cNvPr id="447" name="文本框 446" descr="{&quot;isTemplate&quot;:true,&quot;type&quot;:&quot;text&quot;}"/>
           <p:cNvSpPr txBox="1"/>
           <p:nvPr/>
         </p:nvSpPr>
         <p:spPr>
           <a:xfrm>
-            <a:off x="4695825" y="5267325"/>
-            <a:ext cx="1057275" cy="161925"/>
+            <a:off x="6143625" y="3609975"/>
+            <a:ext cx="95250" cy="190500"/>
           </a:xfrm>
           <a:prstGeom prst="rect">
             <a:avLst/>
@@ -2417,73 +2206,29 @@
               </a:lnSpc>
             </a:pPr>
             <a:r>
-              <a:rPr lang="en-US" sz="1050" b="1">
+              <a:rPr lang="en-US" sz="1200" b="1">
                 <a:solidFill>
                   <a:srgbClr val="FFFFFF"/>
                 </a:solidFill>
                 <a:latin typeface="Source Han Sans CN"/>
                 <a:ea typeface="Source Han Sans CN"/>
               </a:rPr>
-              <a:t>P15 · </a:t>
-            </a:r>
-            <a:r>
-              <a:rPr lang="zh-CN" sz="1050" b="1">
-                <a:solidFill>
-                  <a:srgbClr val="FFFFFF"/>
-                </a:solidFill>
-                <a:latin typeface="Source Han Sans CN"/>
-                <a:ea typeface="Source Han Sans CN"/>
-              </a:rPr>
-              <a:t>边界与计划</a:t>
-            </a:r>
-            <a:endParaRPr/>
-          </a:p>
-        </p:txBody>
-      </p:sp>
-      <p:sp>
-        <p:nvSpPr>
-          <p:cNvPr id="41" name="矩形: 圆角 75"/>
-          <p:cNvSpPr/>
-          <p:nvPr/>
-        </p:nvSpPr>
-        <p:spPr>
-          <a:xfrm>
-            <a:off x="9763125" y="4572000"/>
-            <a:ext cx="1666875" cy="323850"/>
-          </a:xfrm>
-          <a:prstGeom prst="roundRect">
-            <a:avLst>
-              <a:gd name="adj" fmla="val 52941"/>
-            </a:avLst>
-          </a:prstGeom>
-          <a:solidFill>
-            <a:srgbClr val="F0F5FC"/>
-          </a:solidFill>
-          <a:ln w="12700">
-            <a:solidFill>
-              <a:srgbClr val="D6DCE5"/>
-            </a:solidFill>
-            <a:prstDash val="solid"/>
-          </a:ln>
-        </p:spPr>
-        <p:txBody>
-          <a:bodyPr/>
-          <a:lstStyle/>
-          <a:p>
-            <a:endParaRPr/>
-          </a:p>
-        </p:txBody>
-      </p:sp>
-      <p:sp>
-        <p:nvSpPr>
-          <p:cNvPr id="42" name="文本框 76" descr="{&quot;isTemplate&quot;:true,&quot;type&quot;:&quot;text&quot;}"/>
+              <a:t>3</a:t>
+            </a:r>
+            <a:endParaRPr/>
+          </a:p>
+        </p:txBody>
+      </p:sp>
+      <p:sp>
+        <p:nvSpPr>
+          <p:cNvPr id="448" name="文本框 447" descr="{&quot;isTemplate&quot;:true,&quot;type&quot;:&quot;text&quot;}"/>
           <p:cNvSpPr txBox="1"/>
           <p:nvPr/>
         </p:nvSpPr>
         <p:spPr>
           <a:xfrm>
-            <a:off x="9934575" y="4648200"/>
-            <a:ext cx="1323975" cy="171450"/>
+            <a:off x="6448425" y="3600450"/>
+            <a:ext cx="685800" cy="209550"/>
           </a:xfrm>
           <a:prstGeom prst="rect">
             <a:avLst/>
@@ -2499,54 +2244,99 @@
               </a:lnSpc>
             </a:pPr>
             <a:r>
-              <a:rPr lang="zh-CN" sz="1125" b="1">
-                <a:solidFill>
-                  <a:srgbClr val="1E4FA8"/>
-                </a:solidFill>
-                <a:latin typeface="Source Han Sans CN"/>
-                <a:ea typeface="Source Han Sans CN"/>
-              </a:rPr>
-              <a:t>按时率</a:t>
-            </a:r>
-            <a:r>
-              <a:rPr lang="en-US" sz="1125" b="1">
-                <a:solidFill>
-                  <a:srgbClr val="1E4FA8"/>
-                </a:solidFill>
-                <a:latin typeface="Source Han Sans CN"/>
-                <a:ea typeface="Source Han Sans CN"/>
-              </a:rPr>
-              <a:t> 93.3% ± 3.6</a:t>
-            </a:r>
-            <a:endParaRPr/>
-          </a:p>
-        </p:txBody>
-      </p:sp>
-      <p:sp>
-        <p:nvSpPr>
-          <p:cNvPr id="43" name="矩形: 圆角 77"/>
+              <a:rPr lang="zh-CN" sz="1350" b="1">
+                <a:solidFill>
+                  <a:srgbClr val="0E3F8C"/>
+                </a:solidFill>
+                <a:latin typeface="Source Han Sans CN"/>
+                <a:ea typeface="Source Han Sans CN"/>
+              </a:rPr>
+              <a:t>扰动增强</a:t>
+            </a:r>
+            <a:endParaRPr/>
+          </a:p>
+        </p:txBody>
+      </p:sp>
+      <p:sp>
+        <p:nvSpPr>
+          <p:cNvPr id="449" name="文本框 448" descr="{&quot;isTemplate&quot;:true,&quot;type&quot;:&quot;text&quot;}"/>
+          <p:cNvSpPr txBox="1"/>
+          <p:nvPr/>
+        </p:nvSpPr>
+        <p:spPr>
+          <a:xfrm>
+            <a:off x="6029325" y="3943350"/>
+            <a:ext cx="2543175" cy="495300"/>
+          </a:xfrm>
+          <a:prstGeom prst="rect">
+            <a:avLst/>
+          </a:prstGeom>
+        </p:spPr>
+        <p:txBody>
+          <a:bodyPr wrap="square" lIns="0" tIns="0" rIns="114300" bIns="0">
+            <a:normAutofit/>
+          </a:bodyPr>
+          <a:lstStyle/>
+          <a:p>
+            <a:pPr>
+              <a:lnSpc>
+                <a:spcPct val="160000"/>
+              </a:lnSpc>
+            </a:pPr>
+            <a:r>
+              <a:rPr lang="zh-CN" sz="1013">
+                <a:solidFill>
+                  <a:srgbClr val="4A5568"/>
+                </a:solidFill>
+                <a:latin typeface="Source Han Sans CN"/>
+                <a:ea typeface="Source Han Sans CN"/>
+              </a:rPr>
+              <a:t>匹配后辅以</a:t>
+            </a:r>
+            <a:r>
+              <a:rPr lang="en-US" sz="1013">
+                <a:solidFill>
+                  <a:srgbClr val="4A5568"/>
+                </a:solidFill>
+                <a:latin typeface="Source Han Sans CN"/>
+                <a:ea typeface="Source Han Sans CN"/>
+              </a:rPr>
+              <a:t> swap / insert / reverse </a:t>
+            </a:r>
+            <a:r>
+              <a:rPr lang="zh-CN" sz="1013">
+                <a:solidFill>
+                  <a:srgbClr val="4A5568"/>
+                </a:solidFill>
+                <a:latin typeface="Source Han Sans CN"/>
+                <a:ea typeface="Source Han Sans CN"/>
+              </a:rPr>
+              <a:t>扰动，跳出局部结构</a:t>
+            </a:r>
+            <a:endParaRPr/>
+          </a:p>
+        </p:txBody>
+      </p:sp>
+      <p:sp>
+        <p:nvSpPr>
+          <p:cNvPr id="450" name="矩形: 圆角 449"/>
           <p:cNvSpPr/>
           <p:nvPr/>
         </p:nvSpPr>
         <p:spPr>
           <a:xfrm>
-            <a:off x="9772650" y="5010150"/>
-            <a:ext cx="1657350" cy="323850"/>
+            <a:off x="8696325" y="3543300"/>
+            <a:ext cx="323850" cy="323850"/>
           </a:xfrm>
           <a:prstGeom prst="roundRect">
             <a:avLst>
-              <a:gd name="adj" fmla="val 52941"/>
+              <a:gd name="adj" fmla="val 50000"/>
             </a:avLst>
           </a:prstGeom>
           <a:solidFill>
-            <a:srgbClr val="F0F5FC"/>
+            <a:srgbClr val="1E4FA8"/>
           </a:solidFill>
-          <a:ln w="12700">
-            <a:solidFill>
-              <a:srgbClr val="D6DCE5"/>
-            </a:solidFill>
-            <a:prstDash val="solid"/>
-          </a:ln>
+          <a:ln/>
         </p:spPr>
         <p:txBody>
           <a:bodyPr/>
@@ -2558,14 +2348,14 @@
       </p:sp>
       <p:sp>
         <p:nvSpPr>
-          <p:cNvPr id="44" name="文本框 78" descr="{&quot;isTemplate&quot;:true,&quot;type&quot;:&quot;text&quot;}"/>
+          <p:cNvPr id="451" name="文本框 450" descr="{&quot;isTemplate&quot;:true,&quot;type&quot;:&quot;text&quot;}"/>
           <p:cNvSpPr txBox="1"/>
           <p:nvPr/>
         </p:nvSpPr>
         <p:spPr>
           <a:xfrm>
-            <a:off x="9944100" y="5086350"/>
-            <a:ext cx="1314450" cy="171450"/>
+            <a:off x="8810625" y="3609975"/>
+            <a:ext cx="95250" cy="190500"/>
           </a:xfrm>
           <a:prstGeom prst="rect">
             <a:avLst/>
@@ -2581,93 +2371,29 @@
               </a:lnSpc>
             </a:pPr>
             <a:r>
-              <a:rPr lang="zh-CN" sz="1125" b="1">
-                <a:solidFill>
-                  <a:srgbClr val="1E4FA8"/>
-                </a:solidFill>
-                <a:latin typeface="Source Han Sans CN"/>
-                <a:ea typeface="Source Han Sans CN"/>
-              </a:rPr>
-              <a:t>完成</a:t>
-            </a:r>
-            <a:r>
-              <a:rPr lang="en-US" sz="1125" b="1">
-                <a:solidFill>
-                  <a:srgbClr val="1E4FA8"/>
-                </a:solidFill>
-                <a:latin typeface="Source Han Sans CN"/>
-                <a:ea typeface="Source Han Sans CN"/>
-              </a:rPr>
-              <a:t> 60/60 · </a:t>
-            </a:r>
-            <a:r>
-              <a:rPr lang="zh-CN" sz="1125" b="1">
-                <a:solidFill>
-                  <a:srgbClr val="1E4FA8"/>
-                </a:solidFill>
-                <a:latin typeface="Source Han Sans CN"/>
-                <a:ea typeface="Source Han Sans CN"/>
-              </a:rPr>
-              <a:t>废飞</a:t>
-            </a:r>
-            <a:r>
-              <a:rPr lang="en-US" sz="1125" b="1">
-                <a:solidFill>
-                  <a:srgbClr val="1E4FA8"/>
-                </a:solidFill>
-                <a:latin typeface="Source Han Sans CN"/>
-                <a:ea typeface="Source Han Sans CN"/>
-              </a:rPr>
-              <a:t> 0</a:t>
-            </a:r>
-            <a:endParaRPr/>
-          </a:p>
-        </p:txBody>
-      </p:sp>
-      <p:sp>
-        <p:nvSpPr>
-          <p:cNvPr id="45" name="矩形: 圆角 79"/>
-          <p:cNvSpPr/>
-          <p:nvPr/>
-        </p:nvSpPr>
-        <p:spPr>
-          <a:xfrm>
-            <a:off x="9877425" y="5448300"/>
-            <a:ext cx="1552575" cy="323850"/>
-          </a:xfrm>
-          <a:prstGeom prst="roundRect">
-            <a:avLst>
-              <a:gd name="adj" fmla="val 52941"/>
-            </a:avLst>
-          </a:prstGeom>
-          <a:solidFill>
-            <a:srgbClr val="F0F5FC"/>
-          </a:solidFill>
-          <a:ln w="12700">
-            <a:solidFill>
-              <a:srgbClr val="D6DCE5"/>
-            </a:solidFill>
-            <a:prstDash val="solid"/>
-          </a:ln>
-        </p:spPr>
-        <p:txBody>
-          <a:bodyPr/>
-          <a:lstStyle/>
-          <a:p>
-            <a:endParaRPr/>
-          </a:p>
-        </p:txBody>
-      </p:sp>
-      <p:sp>
-        <p:nvSpPr>
-          <p:cNvPr id="46" name="文本框 80" descr="{&quot;isTemplate&quot;:true,&quot;type&quot;:&quot;text&quot;}"/>
+              <a:rPr lang="en-US" sz="1200" b="1">
+                <a:solidFill>
+                  <a:srgbClr val="FFFFFF"/>
+                </a:solidFill>
+                <a:latin typeface="Source Han Sans CN"/>
+                <a:ea typeface="Source Han Sans CN"/>
+              </a:rPr>
+              <a:t>4</a:t>
+            </a:r>
+            <a:endParaRPr/>
+          </a:p>
+        </p:txBody>
+      </p:sp>
+      <p:sp>
+        <p:nvSpPr>
+          <p:cNvPr id="452" name="文本框 451" descr="{&quot;isTemplate&quot;:true,&quot;type&quot;:&quot;text&quot;}"/>
           <p:cNvSpPr txBox="1"/>
           <p:nvPr/>
         </p:nvSpPr>
         <p:spPr>
           <a:xfrm>
-            <a:off x="10048875" y="5524500"/>
-            <a:ext cx="1209675" cy="171450"/>
+            <a:off x="9115425" y="3600450"/>
+            <a:ext cx="1028700" cy="209550"/>
           </a:xfrm>
           <a:prstGeom prst="rect">
             <a:avLst/>
@@ -2683,53 +2409,113 @@
               </a:lnSpc>
             </a:pPr>
             <a:r>
-              <a:rPr lang="zh-CN" sz="1125" b="1">
-                <a:solidFill>
-                  <a:srgbClr val="1E4FA8"/>
-                </a:solidFill>
-                <a:latin typeface="Source Han Sans CN"/>
-                <a:ea typeface="Source Han Sans CN"/>
-              </a:rPr>
-              <a:t>求解规模与</a:t>
-            </a:r>
-            <a:r>
-              <a:rPr lang="en-US" sz="1125" b="1">
-                <a:solidFill>
-                  <a:srgbClr val="1E4FA8"/>
-                </a:solidFill>
-                <a:latin typeface="Source Han Sans CN"/>
-                <a:ea typeface="Source Han Sans CN"/>
-              </a:rPr>
-              <a:t> N </a:t>
-            </a:r>
-            <a:r>
-              <a:rPr lang="zh-CN" sz="1125" b="1">
-                <a:solidFill>
-                  <a:srgbClr val="1E4FA8"/>
-                </a:solidFill>
-                <a:latin typeface="Source Han Sans CN"/>
-                <a:ea typeface="Source Han Sans CN"/>
-              </a:rPr>
-              <a:t>解耦</a:t>
-            </a:r>
-            <a:endParaRPr/>
-          </a:p>
-        </p:txBody>
-      </p:sp>
-      <p:sp>
-        <p:nvSpPr>
-          <p:cNvPr id="47" name="矩形: 圆角 81"/>
+              <a:rPr lang="zh-CN" sz="1350" b="1">
+                <a:solidFill>
+                  <a:srgbClr val="0E3F8C"/>
+                </a:solidFill>
+                <a:latin typeface="Source Han Sans CN"/>
+                <a:ea typeface="Source Han Sans CN"/>
+              </a:rPr>
+              <a:t>段结构规范化</a:t>
+            </a:r>
+            <a:endParaRPr/>
+          </a:p>
+        </p:txBody>
+      </p:sp>
+      <p:sp>
+        <p:nvSpPr>
+          <p:cNvPr id="453" name="文本框 452" descr="{&quot;isTemplate&quot;:true,&quot;type&quot;:&quot;text&quot;}"/>
+          <p:cNvSpPr txBox="1"/>
+          <p:nvPr/>
+        </p:nvSpPr>
+        <p:spPr>
+          <a:xfrm>
+            <a:off x="8696325" y="3943350"/>
+            <a:ext cx="2543175" cy="742950"/>
+          </a:xfrm>
+          <a:prstGeom prst="rect">
+            <a:avLst/>
+          </a:prstGeom>
+        </p:spPr>
+        <p:txBody>
+          <a:bodyPr wrap="square" lIns="0" tIns="0" rIns="114300" bIns="0">
+            <a:normAutofit/>
+          </a:bodyPr>
+          <a:lstStyle/>
+          <a:p>
+            <a:pPr>
+              <a:lnSpc>
+                <a:spcPct val="160000"/>
+              </a:lnSpc>
+            </a:pPr>
+            <a:r>
+              <a:rPr lang="zh-CN" sz="1013">
+                <a:solidFill>
+                  <a:srgbClr val="4A5568"/>
+                </a:solidFill>
+                <a:latin typeface="Source Han Sans CN"/>
+                <a:ea typeface="Source Han Sans CN"/>
+              </a:rPr>
+              <a:t>重建航次分段：起始基因按 UAV 升序、巡游基因紧跟其段——SRP 不变式（每任务恰一次、无终止基因）</a:t>
+            </a:r>
+            <a:r>
+              <a:rPr lang="en-US" sz="1013">
+                <a:solidFill>
+                  <a:srgbClr val="4A5568"/>
+                </a:solidFill>
+                <a:latin typeface="Source Han Sans CN"/>
+                <a:ea typeface="Source Han Sans CN"/>
+              </a:rPr>
+              <a:t/>
+            </a:r>
+            <a:r>
+              <a:rPr lang="zh-CN" sz="1013">
+                <a:solidFill>
+                  <a:srgbClr val="4A5568"/>
+                </a:solidFill>
+                <a:latin typeface="Source Han Sans CN"/>
+                <a:ea typeface="Source Han Sans CN"/>
+              </a:rPr>
+              <a:t/>
+            </a:r>
+            <a:r>
+              <a:rPr lang="en-US" sz="1013">
+                <a:solidFill>
+                  <a:srgbClr val="4A5568"/>
+                </a:solidFill>
+                <a:latin typeface="Source Han Sans CN"/>
+                <a:ea typeface="Source Han Sans CN"/>
+              </a:rPr>
+              <a:t/>
+            </a:r>
+            <a:r>
+              <a:rPr lang="zh-CN" sz="1013">
+                <a:solidFill>
+                  <a:srgbClr val="4A5568"/>
+                </a:solidFill>
+                <a:latin typeface="Source Han Sans CN"/>
+                <a:ea typeface="Source Han Sans CN"/>
+              </a:rPr>
+              <a:t/>
+            </a:r>
+            <a:endParaRPr/>
+          </a:p>
+        </p:txBody>
+      </p:sp>
+      <p:sp>
+        <p:nvSpPr>
+          <p:cNvPr id="454" name="矩形: 圆角 453"/>
           <p:cNvSpPr/>
           <p:nvPr/>
         </p:nvSpPr>
         <p:spPr>
           <a:xfrm>
-            <a:off x="762000" y="5857875"/>
-            <a:ext cx="476250" cy="276225"/>
+            <a:off x="609600" y="4762500"/>
+            <a:ext cx="5429250" cy="990600"/>
           </a:xfrm>
           <a:prstGeom prst="roundRect">
             <a:avLst>
-              <a:gd name="adj" fmla="val 48276"/>
+              <a:gd name="adj" fmla="val 9615"/>
             </a:avLst>
           </a:prstGeom>
           <a:solidFill>
@@ -2747,14 +2533,79 @@
       </p:sp>
       <p:sp>
         <p:nvSpPr>
-          <p:cNvPr id="48" name="文本框 82" descr="{&quot;isTemplate&quot;:true,&quot;type&quot;:&quot;text&quot;}"/>
+          <p:cNvPr id="455" name="任意多边形: 形状 454"/>
+          <p:cNvSpPr/>
+          <p:nvPr/>
+        </p:nvSpPr>
+        <p:spPr>
+          <a:xfrm>
+            <a:off x="609600" y="4762500"/>
+            <a:ext cx="5429250" cy="990600"/>
+          </a:xfrm>
+          <a:custGeom>
+            <a:avLst/>
+            <a:gdLst/>
+            <a:ahLst/>
+            <a:cxnLst/>
+            <a:rect l="0" t="0" r="0" b="0"/>
+            <a:pathLst>
+              <a:path w="570" h="104">
+                <a:moveTo>
+                  <a:pt x="9" y="0"/>
+                </a:moveTo>
+                <a:cubicBezTo>
+                  <a:pt x="6" y="0"/>
+                  <a:pt x="4" y="3"/>
+                  <a:pt x="4" y="6"/>
+                </a:cubicBezTo>
+                <a:lnTo>
+                  <a:pt x="4" y="98"/>
+                </a:lnTo>
+                <a:cubicBezTo>
+                  <a:pt x="4" y="101"/>
+                  <a:pt x="6" y="103"/>
+                  <a:pt x="9" y="104"/>
+                </a:cubicBezTo>
+                <a:cubicBezTo>
+                  <a:pt x="4" y="103"/>
+                  <a:pt x="0" y="99"/>
+                  <a:pt x="0" y="94"/>
+                </a:cubicBezTo>
+                <a:lnTo>
+                  <a:pt x="0" y="10"/>
+                </a:lnTo>
+                <a:cubicBezTo>
+                  <a:pt x="0" y="5"/>
+                  <a:pt x="4" y="0"/>
+                  <a:pt x="10" y="0"/>
+                </a:cubicBezTo>
+                <a:close/>
+              </a:path>
+            </a:pathLst>
+          </a:custGeom>
+          <a:solidFill>
+            <a:srgbClr val="1E4FA8"/>
+          </a:solidFill>
+          <a:ln/>
+        </p:spPr>
+        <p:txBody>
+          <a:bodyPr/>
+          <a:lstStyle/>
+          <a:p>
+            <a:endParaRPr/>
+          </a:p>
+        </p:txBody>
+      </p:sp>
+      <p:sp>
+        <p:nvSpPr>
+          <p:cNvPr id="456" name="文本框 455" descr="{&quot;isTemplate&quot;:true,&quot;type&quot;:&quot;text&quot;}"/>
           <p:cNvSpPr txBox="1"/>
           <p:nvPr/>
         </p:nvSpPr>
         <p:spPr>
           <a:xfrm>
-            <a:off x="914400" y="5915025"/>
-            <a:ext cx="171450" cy="161925"/>
+            <a:off x="781050" y="4886325"/>
+            <a:ext cx="5048250" cy="180975"/>
           </a:xfrm>
           <a:prstGeom prst="rect">
             <a:avLst/>
@@ -2770,33 +2621,193 @@
               </a:lnSpc>
             </a:pPr>
             <a:r>
-              <a:rPr lang="en-US" sz="1050" b="1">
-                <a:solidFill>
-                  <a:srgbClr val="8B97A8"/>
-                </a:solidFill>
-                <a:latin typeface="Source Han Sans CN"/>
-                <a:ea typeface="Source Han Sans CN"/>
-              </a:rPr>
-              <a:t>01</a:t>
-            </a:r>
-            <a:endParaRPr/>
-          </a:p>
-        </p:txBody>
-      </p:sp>
-      <p:sp>
-        <p:nvSpPr>
-          <p:cNvPr id="49" name="矩形: 圆角 83"/>
+              <a:rPr lang="zh-CN" sz="1163" b="1">
+                <a:solidFill>
+                  <a:srgbClr val="0E3F8C"/>
+                </a:solidFill>
+                <a:latin typeface="Source Han Sans CN"/>
+                <a:ea typeface="Source Han Sans CN"/>
+              </a:rPr>
+              <a:t>选择性</a:t>
+            </a:r>
+            <a:r>
+              <a:rPr lang="en-US" sz="1163" b="1">
+                <a:solidFill>
+                  <a:srgbClr val="0E3F8C"/>
+                </a:solidFill>
+                <a:latin typeface="Source Han Sans CN"/>
+                <a:ea typeface="Source Han Sans CN"/>
+              </a:rPr>
+              <a:t> y=0 </a:t>
+            </a:r>
+            <a:r>
+              <a:rPr lang="zh-CN" sz="1163" b="1">
+                <a:solidFill>
+                  <a:srgbClr val="0E3F8C"/>
+                </a:solidFill>
+                <a:latin typeface="Source Han Sans CN"/>
+                <a:ea typeface="Source Han Sans CN"/>
+              </a:rPr>
+              <a:t>的决策位置：不占编码维度</a:t>
+            </a:r>
+            <a:endParaRPr/>
+          </a:p>
+        </p:txBody>
+      </p:sp>
+      <p:sp>
+        <p:nvSpPr>
+          <p:cNvPr id="457" name="文本框 456" descr="{&quot;isTemplate&quot;:true,&quot;type&quot;:&quot;text&quot;}"/>
+          <p:cNvSpPr txBox="1"/>
+          <p:nvPr/>
+        </p:nvSpPr>
+        <p:spPr>
+          <a:xfrm>
+            <a:off x="781050" y="5114925"/>
+            <a:ext cx="5048250" cy="514350"/>
+          </a:xfrm>
+          <a:prstGeom prst="rect">
+            <a:avLst/>
+          </a:prstGeom>
+        </p:spPr>
+        <p:txBody>
+          <a:bodyPr wrap="square" lIns="0" tIns="0" rIns="0" bIns="0">
+            <a:normAutofit fontScale="77500" lnSpcReduction="20000"/>
+          </a:bodyPr>
+          <a:lstStyle/>
+          <a:p>
+            <a:pPr>
+              <a:lnSpc>
+                <a:spcPct val="165000"/>
+              </a:lnSpc>
+            </a:pPr>
+            <a:r>
+              <a:rPr lang="en-US" sz="1013" dirty="0">
+                <a:solidFill>
+                  <a:srgbClr val="4A5568"/>
+                </a:solidFill>
+                <a:latin typeface="Source Han Sans CN"/>
+                <a:ea typeface="Source Han Sans CN"/>
+              </a:rPr>
+              <a:t>DE 空间中每个任务都被分配，「暂不执行」不占基因维度——由解码端修复链裁量（物理不可行才移除/改派，能装必装由覆盖门禁保证），并支持「任务少时并入更少机」的合并修复 _consolidate：空闲是解码侧概念，不进基因。</a:t>
+            </a:r>
+            <a:r>
+              <a:rPr lang="zh-CN" sz="1013" dirty="0">
+                <a:solidFill>
+                  <a:srgbClr val="4A5568"/>
+                </a:solidFill>
+                <a:latin typeface="Source Han Sans CN"/>
+                <a:ea typeface="Source Han Sans CN"/>
+              </a:rPr>
+              <a:t/>
+            </a:r>
+            <a:r>
+              <a:rPr lang="zh-CN" altLang="en-US" sz="1013" dirty="0">
+                <a:solidFill>
+                  <a:srgbClr val="4A5568"/>
+                </a:solidFill>
+                <a:latin typeface="Source Han Sans CN"/>
+                <a:ea typeface="Source Han Sans CN"/>
+              </a:rPr>
+              <a:t/>
+            </a:r>
+            <a:r>
+              <a:rPr lang="en-US" altLang="zh-CN" sz="1013" dirty="0">
+                <a:solidFill>
+                  <a:srgbClr val="4A5568"/>
+                </a:solidFill>
+                <a:latin typeface="Source Han Sans CN"/>
+                <a:ea typeface="Source Han Sans CN"/>
+              </a:rPr>
+              <a:t/>
+            </a:r>
+            <a:r>
+              <a:rPr lang="zh-CN" altLang="en-US" sz="1013" dirty="0">
+                <a:solidFill>
+                  <a:srgbClr val="4A5568"/>
+                </a:solidFill>
+                <a:latin typeface="Source Han Sans CN"/>
+                <a:ea typeface="Source Han Sans CN"/>
+              </a:rPr>
+              <a:t/>
+            </a:r>
+            <a:r>
+              <a:rPr lang="en-US" altLang="zh-CN" sz="1013" dirty="0">
+                <a:solidFill>
+                  <a:srgbClr val="4A5568"/>
+                </a:solidFill>
+                <a:latin typeface="Source Han Sans CN"/>
+                <a:ea typeface="Source Han Sans CN"/>
+              </a:rPr>
+              <a:t/>
+            </a:r>
+            <a:r>
+              <a:rPr lang="zh-CN" altLang="en-US" sz="1013" dirty="0">
+                <a:solidFill>
+                  <a:srgbClr val="4A5568"/>
+                </a:solidFill>
+                <a:latin typeface="Source Han Sans CN"/>
+                <a:ea typeface="Source Han Sans CN"/>
+              </a:rPr>
+              <a:t/>
+            </a:r>
+            <a:r>
+              <a:rPr lang="en-US" altLang="zh-CN" sz="1013" dirty="0">
+                <a:solidFill>
+                  <a:srgbClr val="4A5568"/>
+                </a:solidFill>
+                <a:latin typeface="Source Han Sans CN"/>
+                <a:ea typeface="Source Han Sans CN"/>
+              </a:rPr>
+              <a:t/>
+            </a:r>
+            <a:r>
+              <a:rPr lang="zh-CN" altLang="en-US" sz="1013" dirty="0">
+                <a:solidFill>
+                  <a:srgbClr val="4A5568"/>
+                </a:solidFill>
+                <a:latin typeface="Source Han Sans CN"/>
+                <a:ea typeface="Source Han Sans CN"/>
+              </a:rPr>
+              <a:t/>
+            </a:r>
+            <a:r>
+              <a:rPr lang="en-US" altLang="zh-CN" sz="1013" dirty="0">
+                <a:solidFill>
+                  <a:srgbClr val="4A5568"/>
+                </a:solidFill>
+                <a:latin typeface="Source Han Sans CN"/>
+                <a:ea typeface="Source Han Sans CN"/>
+              </a:rPr>
+              <a:t/>
+            </a:r>
+            <a:r>
+              <a:rPr lang="zh-CN" altLang="en-US" sz="1013" dirty="0">
+                <a:solidFill>
+                  <a:srgbClr val="4A5568"/>
+                </a:solidFill>
+                <a:latin typeface="Source Han Sans CN"/>
+                <a:ea typeface="Source Han Sans CN"/>
+              </a:rPr>
+              <a:t/>
+            </a:r>
+            <a:endParaRPr dirty="0"/>
+          </a:p>
+        </p:txBody>
+      </p:sp>
+      <p:sp>
+        <p:nvSpPr>
+          <p:cNvPr id="458" name="矩形: 圆角 457"/>
           <p:cNvSpPr/>
           <p:nvPr/>
         </p:nvSpPr>
         <p:spPr>
           <a:xfrm>
-            <a:off x="1352550" y="5857875"/>
-            <a:ext cx="476250" cy="276225"/>
+            <a:off x="6229350" y="4762500"/>
+            <a:ext cx="5429250" cy="990600"/>
           </a:xfrm>
           <a:prstGeom prst="roundRect">
             <a:avLst>
-              <a:gd name="adj" fmla="val 48276"/>
+              <a:gd name="adj" fmla="val 9615"/>
             </a:avLst>
           </a:prstGeom>
           <a:solidFill>
@@ -2814,14 +2825,79 @@
       </p:sp>
       <p:sp>
         <p:nvSpPr>
-          <p:cNvPr id="50" name="文本框 84" descr="{&quot;isTemplate&quot;:true,&quot;type&quot;:&quot;text&quot;}"/>
+          <p:cNvPr id="459" name="任意多边形: 形状 458"/>
+          <p:cNvSpPr/>
+          <p:nvPr/>
+        </p:nvSpPr>
+        <p:spPr>
+          <a:xfrm>
+            <a:off x="6229350" y="4762500"/>
+            <a:ext cx="5429250" cy="990600"/>
+          </a:xfrm>
+          <a:custGeom>
+            <a:avLst/>
+            <a:gdLst/>
+            <a:ahLst/>
+            <a:cxnLst/>
+            <a:rect l="0" t="0" r="0" b="0"/>
+            <a:pathLst>
+              <a:path w="570" h="104">
+                <a:moveTo>
+                  <a:pt x="9" y="0"/>
+                </a:moveTo>
+                <a:cubicBezTo>
+                  <a:pt x="6" y="0"/>
+                  <a:pt x="4" y="3"/>
+                  <a:pt x="4" y="6"/>
+                </a:cubicBezTo>
+                <a:lnTo>
+                  <a:pt x="4" y="98"/>
+                </a:lnTo>
+                <a:cubicBezTo>
+                  <a:pt x="4" y="101"/>
+                  <a:pt x="6" y="103"/>
+                  <a:pt x="9" y="104"/>
+                </a:cubicBezTo>
+                <a:cubicBezTo>
+                  <a:pt x="4" y="103"/>
+                  <a:pt x="0" y="99"/>
+                  <a:pt x="0" y="94"/>
+                </a:cubicBezTo>
+                <a:lnTo>
+                  <a:pt x="0" y="10"/>
+                </a:lnTo>
+                <a:cubicBezTo>
+                  <a:pt x="0" y="5"/>
+                  <a:pt x="4" y="0"/>
+                  <a:pt x="10" y="0"/>
+                </a:cubicBezTo>
+                <a:close/>
+              </a:path>
+            </a:pathLst>
+          </a:custGeom>
+          <a:solidFill>
+            <a:srgbClr val="0E3F8C"/>
+          </a:solidFill>
+          <a:ln/>
+        </p:spPr>
+        <p:txBody>
+          <a:bodyPr/>
+          <a:lstStyle/>
+          <a:p>
+            <a:endParaRPr/>
+          </a:p>
+        </p:txBody>
+      </p:sp>
+      <p:sp>
+        <p:nvSpPr>
+          <p:cNvPr id="460" name="文本框 459" descr="{&quot;isTemplate&quot;:true,&quot;type&quot;:&quot;text&quot;}"/>
           <p:cNvSpPr txBox="1"/>
           <p:nvPr/>
         </p:nvSpPr>
         <p:spPr>
           <a:xfrm>
-            <a:off x="1504950" y="5915025"/>
-            <a:ext cx="171450" cy="161925"/>
+            <a:off x="6400800" y="4886325"/>
+            <a:ext cx="5048250" cy="180975"/>
           </a:xfrm>
           <a:prstGeom prst="rect">
             <a:avLst/>
@@ -2837,234 +2913,72 @@
               </a:lnSpc>
             </a:pPr>
             <a:r>
-              <a:rPr lang="en-US" sz="1050" b="1">
-                <a:solidFill>
-                  <a:srgbClr val="8B97A8"/>
-                </a:solidFill>
-                <a:latin typeface="Source Han Sans CN"/>
-                <a:ea typeface="Source Han Sans CN"/>
-              </a:rPr>
-              <a:t>02</a:t>
-            </a:r>
-            <a:endParaRPr/>
-          </a:p>
-        </p:txBody>
-      </p:sp>
-      <p:sp>
-        <p:nvSpPr>
-          <p:cNvPr id="51" name="矩形: 圆角 85"/>
-          <p:cNvSpPr/>
-          <p:nvPr/>
-        </p:nvSpPr>
-        <p:spPr>
-          <a:xfrm>
-            <a:off x="1943100" y="5857875"/>
-            <a:ext cx="476250" cy="276225"/>
-          </a:xfrm>
-          <a:prstGeom prst="roundRect">
-            <a:avLst>
-              <a:gd name="adj" fmla="val 48276"/>
-            </a:avLst>
-          </a:prstGeom>
-          <a:solidFill>
-            <a:srgbClr val="F0F5FC"/>
-          </a:solidFill>
-          <a:ln/>
-        </p:spPr>
-        <p:txBody>
-          <a:bodyPr/>
-          <a:lstStyle/>
-          <a:p>
-            <a:endParaRPr/>
-          </a:p>
-        </p:txBody>
-      </p:sp>
-      <p:sp>
-        <p:nvSpPr>
-          <p:cNvPr id="52" name="文本框 86" descr="{&quot;isTemplate&quot;:true,&quot;type&quot;:&quot;text&quot;}"/>
+              <a:rPr lang="en-US" sz="1163" b="1">
+                <a:solidFill>
+                  <a:srgbClr val="0E3F8C"/>
+                </a:solidFill>
+                <a:latin typeface="Source Han Sans CN"/>
+                <a:ea typeface="Source Han Sans CN"/>
+              </a:rPr>
+              <a:t>Lamarckian </a:t>
+            </a:r>
+            <a:r>
+              <a:rPr lang="zh-CN" sz="1163" b="1">
+                <a:solidFill>
+                  <a:srgbClr val="0E3F8C"/>
+                </a:solidFill>
+                <a:latin typeface="Source Han Sans CN"/>
+                <a:ea typeface="Source Han Sans CN"/>
+              </a:rPr>
+              <a:t>回写：只回写起始基因</a:t>
+            </a:r>
+            <a:endParaRPr/>
+          </a:p>
+        </p:txBody>
+      </p:sp>
+      <p:sp>
+        <p:nvSpPr>
+          <p:cNvPr id="461" name="文本框 460" descr="{&quot;isTemplate&quot;:true,&quot;type&quot;:&quot;text&quot;}"/>
           <p:cNvSpPr txBox="1"/>
           <p:nvPr/>
         </p:nvSpPr>
         <p:spPr>
           <a:xfrm>
-            <a:off x="2095500" y="5915025"/>
-            <a:ext cx="171450" cy="161925"/>
-          </a:xfrm>
-          <a:prstGeom prst="rect">
-            <a:avLst/>
-          </a:prstGeom>
-        </p:spPr>
-        <p:txBody>
-          <a:bodyPr wrap="none" lIns="0" tIns="0" rIns="0" bIns="0"/>
+            <a:off x="6400800" y="5114925"/>
+            <a:ext cx="5048250" cy="514350"/>
+          </a:xfrm>
+          <a:prstGeom prst="rect">
+            <a:avLst/>
+          </a:prstGeom>
+        </p:spPr>
+        <p:txBody>
+          <a:bodyPr wrap="square" lIns="0" tIns="0" rIns="0" bIns="0">
+            <a:normAutofit/>
+          </a:bodyPr>
           <a:lstStyle/>
           <a:p>
             <a:pPr>
               <a:lnSpc>
-                <a:spcPct val="100000"/>
+                <a:spcPct val="165000"/>
               </a:lnSpc>
             </a:pPr>
             <a:r>
-              <a:rPr lang="en-US" sz="1050" b="1">
-                <a:solidFill>
-                  <a:srgbClr val="8B97A8"/>
-                </a:solidFill>
-                <a:latin typeface="Source Han Sans CN"/>
-                <a:ea typeface="Source Han Sans CN"/>
-              </a:rPr>
-              <a:t>03</a:t>
-            </a:r>
-            <a:endParaRPr/>
-          </a:p>
-        </p:txBody>
-      </p:sp>
-      <p:sp>
-        <p:nvSpPr>
-          <p:cNvPr id="53" name="矩形: 圆角 87"/>
-          <p:cNvSpPr/>
-          <p:nvPr/>
-        </p:nvSpPr>
-        <p:spPr>
-          <a:xfrm>
-            <a:off x="2533650" y="5857875"/>
-            <a:ext cx="476250" cy="276225"/>
-          </a:xfrm>
-          <a:prstGeom prst="roundRect">
-            <a:avLst>
-              <a:gd name="adj" fmla="val 48276"/>
-            </a:avLst>
-          </a:prstGeom>
-          <a:solidFill>
-            <a:srgbClr val="1E4FA8"/>
-          </a:solidFill>
-          <a:ln/>
-        </p:spPr>
-        <p:txBody>
-          <a:bodyPr/>
-          <a:lstStyle/>
-          <a:p>
-            <a:endParaRPr/>
-          </a:p>
-        </p:txBody>
-      </p:sp>
-      <p:sp>
-        <p:nvSpPr>
-          <p:cNvPr id="54" name="文本框 88" descr="{&quot;isTemplate&quot;:true,&quot;type&quot;:&quot;text&quot;}"/>
-          <p:cNvSpPr txBox="1"/>
-          <p:nvPr/>
-        </p:nvSpPr>
-        <p:spPr>
-          <a:xfrm>
-            <a:off x="2686050" y="5915025"/>
-            <a:ext cx="171450" cy="161925"/>
-          </a:xfrm>
-          <a:prstGeom prst="rect">
-            <a:avLst/>
-          </a:prstGeom>
-        </p:spPr>
-        <p:txBody>
-          <a:bodyPr wrap="none" lIns="0" tIns="0" rIns="0" bIns="0"/>
-          <a:lstStyle/>
-          <a:p>
-            <a:pPr>
-              <a:lnSpc>
-                <a:spcPct val="100000"/>
-              </a:lnSpc>
-            </a:pPr>
-            <a:r>
-              <a:rPr lang="en-US" sz="1050" b="1">
-                <a:solidFill>
-                  <a:srgbClr val="FFFFFF"/>
-                </a:solidFill>
-                <a:latin typeface="Source Han Sans CN"/>
-                <a:ea typeface="Source Han Sans CN"/>
-              </a:rPr>
-              <a:t>04</a:t>
-            </a:r>
-            <a:endParaRPr/>
-          </a:p>
-        </p:txBody>
-      </p:sp>
-      <p:sp>
-        <p:nvSpPr>
-          <p:cNvPr id="55" name="文本框 89" descr="{&quot;isTemplate&quot;:true,&quot;type&quot;:&quot;text&quot;}"/>
-          <p:cNvSpPr txBox="1"/>
-          <p:nvPr/>
-        </p:nvSpPr>
-        <p:spPr>
-          <a:xfrm>
-            <a:off x="3200400" y="5915025"/>
-            <a:ext cx="1962150" cy="161925"/>
-          </a:xfrm>
-          <a:prstGeom prst="rect">
-            <a:avLst/>
-          </a:prstGeom>
-        </p:spPr>
-        <p:txBody>
-          <a:bodyPr wrap="none" lIns="0" tIns="0" rIns="0" bIns="0"/>
-          <a:lstStyle/>
-          <a:p>
-            <a:pPr>
-              <a:lnSpc>
-                <a:spcPct val="100000"/>
-              </a:lnSpc>
-            </a:pPr>
-            <a:r>
-              <a:rPr lang="zh-CN" sz="1050">
-                <a:solidFill>
-                  <a:srgbClr val="8B97A8"/>
-                </a:solidFill>
-                <a:latin typeface="Source Han Sans CN"/>
-                <a:ea typeface="Source Han Sans CN"/>
-              </a:rPr>
-              <a:t>研究问题</a:t>
-            </a:r>
-            <a:r>
-              <a:rPr lang="en-US" sz="1050">
-                <a:solidFill>
-                  <a:srgbClr val="8B97A8"/>
-                </a:solidFill>
-                <a:latin typeface="Source Han Sans CN"/>
-                <a:ea typeface="Source Han Sans CN"/>
-              </a:rPr>
-              <a:t> · </a:t>
-            </a:r>
-            <a:r>
-              <a:rPr lang="zh-CN" sz="1050">
-                <a:solidFill>
-                  <a:srgbClr val="8B97A8"/>
-                </a:solidFill>
-                <a:latin typeface="Source Han Sans CN"/>
-                <a:ea typeface="Source Han Sans CN"/>
-              </a:rPr>
-              <a:t>方法两阶段</a:t>
-            </a:r>
-            <a:r>
-              <a:rPr lang="en-US" sz="1050">
-                <a:solidFill>
-                  <a:srgbClr val="8B97A8"/>
-                </a:solidFill>
-                <a:latin typeface="Source Han Sans CN"/>
-                <a:ea typeface="Source Han Sans CN"/>
-              </a:rPr>
-              <a:t> · </a:t>
-            </a:r>
-            <a:r>
-              <a:rPr lang="zh-CN" sz="1050">
-                <a:solidFill>
-                  <a:srgbClr val="8B97A8"/>
-                </a:solidFill>
-                <a:latin typeface="Source Han Sans CN"/>
-                <a:ea typeface="Source Han Sans CN"/>
-              </a:rPr>
-              <a:t>实验验证</a:t>
-            </a:r>
-            <a:endParaRPr/>
-          </a:p>
-        </p:txBody>
-      </p:sp>
-      <p:sp>
-        <p:nvSpPr>
-          <p:cNvPr id="56" name="矩形 90"/>
+              <a:rPr lang="zh-CN" sz="1013">
+                <a:solidFill>
+                  <a:srgbClr val="4A5568"/>
+                </a:solidFill>
+                <a:latin typeface="Source Han Sans CN"/>
+                <a:ea typeface="Source Han Sans CN"/>
+              </a:rPr>
+              <a:t>修复解只把首任务写回获胜个体的起始基因，巡游基因原样保留、绝不增删——基因长度恒定，这是「每任务恰出现一次」不变式下可安全落地的关键。</a:t>
+            </a:r>
+            <a:endParaRPr/>
+          </a:p>
+        </p:txBody>
+      </p:sp>
+      <p:sp>
+        <p:nvSpPr>
+          <p:cNvPr id="462" name="矩形 461"/>
           <p:cNvSpPr/>
           <p:nvPr/>
         </p:nvSpPr>
@@ -3091,7 +3005,7 @@
       </p:sp>
       <p:sp>
         <p:nvSpPr>
-          <p:cNvPr id="57" name="任意多边形: 形状 91"/>
+          <p:cNvPr id="463" name="任意多边形: 形状 462"/>
           <p:cNvSpPr/>
           <p:nvPr/>
         </p:nvSpPr>
@@ -3139,7 +3053,7 @@
       </p:sp>
       <p:sp>
         <p:nvSpPr>
-          <p:cNvPr id="58" name="文本框 92" descr="{&quot;isTemplate&quot;:true,&quot;type&quot;:&quot;text&quot;}"/>
+          <p:cNvPr id="464" name="文本框 463" descr="{&quot;isTemplate&quot;:true,&quot;type&quot;:&quot;text&quot;}"/>
           <p:cNvSpPr txBox="1"/>
           <p:nvPr/>
         </p:nvSpPr>
@@ -3197,7 +3111,7 @@
       </p:sp>
       <p:sp>
         <p:nvSpPr>
-          <p:cNvPr id="59" name="文本框 93" descr="{&quot;isTemplate&quot;:true,&quot;type&quot;:&quot;text&quot;}"/>
+          <p:cNvPr id="465" name="文本框 464" descr="{&quot;isTemplate&quot;:true,&quot;type&quot;:&quot;text&quot;}"/>
           <p:cNvSpPr txBox="1"/>
           <p:nvPr/>
         </p:nvSpPr>
@@ -3227,7 +3141,7 @@
                 <a:latin typeface="Source Han Sans CN"/>
                 <a:ea typeface="Source Han Sans CN"/>
               </a:rPr>
-              <a:t>11 / 16</a:t>
+              <a:t>10 / 16</a:t>
             </a:r>
             <a:endParaRPr/>
           </a:p>
@@ -3260,7 +3174,7 @@
       </p:grpSpPr>
       <p:sp>
         <p:nvSpPr>
-          <p:cNvPr id="61" name="矩形 95"/>
+          <p:cNvPr id="22" name="矩形 56"/>
           <p:cNvSpPr/>
           <p:nvPr/>
         </p:nvSpPr>
@@ -3287,7 +3201,7 @@
       </p:sp>
       <p:sp>
         <p:nvSpPr>
-          <p:cNvPr id="62" name="矩形 96"/>
+          <p:cNvPr id="23" name="矩形 57"/>
           <p:cNvSpPr/>
           <p:nvPr/>
         </p:nvSpPr>
@@ -3314,41 +3228,14 @@
       </p:sp>
       <p:sp>
         <p:nvSpPr>
-          <p:cNvPr id="63" name="矩形 97"/>
-          <p:cNvSpPr/>
-          <p:nvPr/>
-        </p:nvSpPr>
-        <p:spPr>
-          <a:xfrm>
-            <a:off x="381000" y="314325"/>
-            <a:ext cx="57150" cy="323850"/>
-          </a:xfrm>
-          <a:prstGeom prst="rect">
-            <a:avLst/>
-          </a:prstGeom>
-          <a:solidFill>
-            <a:srgbClr val="1E4FA8"/>
-          </a:solidFill>
-          <a:ln/>
-        </p:spPr>
-        <p:txBody>
-          <a:bodyPr/>
-          <a:lstStyle/>
-          <a:p>
-            <a:endParaRPr/>
-          </a:p>
-        </p:txBody>
-      </p:sp>
-      <p:sp>
-        <p:nvSpPr>
-          <p:cNvPr id="64" name="文本框 98" descr="{&quot;isTemplate&quot;:true,&quot;type&quot;:&quot;text&quot;}"/>
+          <p:cNvPr id="24" name="文本框 58" descr="{&quot;isTemplate&quot;:true,&quot;type&quot;:&quot;text&quot;}"/>
           <p:cNvSpPr txBox="1"/>
           <p:nvPr/>
         </p:nvSpPr>
         <p:spPr>
           <a:xfrm>
-            <a:off x="571500" y="285750"/>
-            <a:ext cx="6753225" cy="371475"/>
+            <a:off x="7734300" y="1238250"/>
+            <a:ext cx="3886200" cy="3771900"/>
           </a:xfrm>
           <a:prstGeom prst="rect">
             <a:avLst/>
@@ -3364,59 +3251,56 @@
               </a:lnSpc>
             </a:pPr>
             <a:r>
-              <a:rPr lang="en-US" sz="2400" b="1">
-                <a:solidFill>
-                  <a:srgbClr val="0E3F8C"/>
-                </a:solidFill>
-                <a:latin typeface="Source Han Sans CN"/>
-                <a:ea typeface="Source Han Sans CN"/>
-              </a:rPr>
-              <a:t>exp01</a:t>
-            </a:r>
-            <a:r>
-              <a:rPr lang="zh-CN" sz="2400" b="1">
-                <a:solidFill>
-                  <a:srgbClr val="0E3F8C"/>
-                </a:solidFill>
-                <a:latin typeface="Source Han Sans CN"/>
-                <a:ea typeface="Source Han Sans CN"/>
-              </a:rPr>
-              <a:t>：多</a:t>
-            </a:r>
-            <a:r>
-              <a:rPr lang="en-US" sz="2400" b="1">
-                <a:solidFill>
-                  <a:srgbClr val="0E3F8C"/>
-                </a:solidFill>
-                <a:latin typeface="Source Han Sans CN"/>
-                <a:ea typeface="Source Han Sans CN"/>
-              </a:rPr>
-              <a:t> seed </a:t>
-            </a:r>
-            <a:r>
-              <a:rPr lang="zh-CN" sz="2400" b="1">
-                <a:solidFill>
-                  <a:srgbClr val="0E3F8C"/>
-                </a:solidFill>
-                <a:latin typeface="Source Han Sans CN"/>
-                <a:ea typeface="Source Han Sans CN"/>
-              </a:rPr>
-              <a:t>阶梯——改进方向一致且可复现</a:t>
-            </a:r>
-            <a:endParaRPr/>
-          </a:p>
-        </p:txBody>
-      </p:sp>
-      <p:sp>
-        <p:nvSpPr>
-          <p:cNvPr id="65" name="文本框 99" descr="{&quot;isTemplate&quot;:true,&quot;type&quot;:&quot;text&quot;}"/>
+              <a:rPr lang="en-US" sz="24750" b="1">
+                <a:solidFill>
+                  <a:srgbClr val="E8EFF8"/>
+                </a:solidFill>
+                <a:latin typeface="Source Han Sans CN"/>
+                <a:ea typeface="Source Han Sans CN"/>
+              </a:rPr>
+              <a:t>04</a:t>
+            </a:r>
+            <a:endParaRPr/>
+          </a:p>
+        </p:txBody>
+      </p:sp>
+      <p:sp>
+        <p:nvSpPr>
+          <p:cNvPr id="25" name="矩形 59"/>
+          <p:cNvSpPr/>
+          <p:nvPr/>
+        </p:nvSpPr>
+        <p:spPr>
+          <a:xfrm>
+            <a:off x="762000" y="1990725"/>
+            <a:ext cx="381000" cy="38100"/>
+          </a:xfrm>
+          <a:prstGeom prst="rect">
+            <a:avLst/>
+          </a:prstGeom>
+          <a:solidFill>
+            <a:srgbClr val="FFC107"/>
+          </a:solidFill>
+          <a:ln/>
+        </p:spPr>
+        <p:txBody>
+          <a:bodyPr/>
+          <a:lstStyle/>
+          <a:p>
+            <a:endParaRPr/>
+          </a:p>
+        </p:txBody>
+      </p:sp>
+      <p:sp>
+        <p:nvSpPr>
+          <p:cNvPr id="26" name="文本框 60" descr="{&quot;isTemplate&quot;:true,&quot;type&quot;:&quot;text&quot;}"/>
           <p:cNvSpPr txBox="1"/>
           <p:nvPr/>
         </p:nvSpPr>
         <p:spPr>
           <a:xfrm>
-            <a:off x="571500" y="742950"/>
-            <a:ext cx="4381500" cy="171450"/>
+            <a:off x="1276350" y="1905000"/>
+            <a:ext cx="1457325" cy="200025"/>
           </a:xfrm>
           <a:prstGeom prst="rect">
             <a:avLst/>
@@ -3432,6 +3316,1701 @@
               </a:lnSpc>
             </a:pPr>
             <a:r>
+              <a:rPr lang="en-US" sz="1275" spc="375">
+                <a:solidFill>
+                  <a:srgbClr val="3D7BD9"/>
+                </a:solidFill>
+                <a:latin typeface="Source Han Sans CN"/>
+                <a:ea typeface="Source Han Sans CN"/>
+              </a:rPr>
+              <a:t>CHAPTER 04</a:t>
+            </a:r>
+            <a:endParaRPr/>
+          </a:p>
+        </p:txBody>
+      </p:sp>
+      <p:sp>
+        <p:nvSpPr>
+          <p:cNvPr id="27" name="文本框 61" descr="{&quot;isTemplate&quot;:true,&quot;type&quot;:&quot;text&quot;}"/>
+          <p:cNvSpPr txBox="1"/>
+          <p:nvPr/>
+        </p:nvSpPr>
+        <p:spPr>
+          <a:xfrm>
+            <a:off x="762000" y="2276475"/>
+            <a:ext cx="7239000" cy="504825"/>
+          </a:xfrm>
+          <a:prstGeom prst="rect">
+            <a:avLst/>
+          </a:prstGeom>
+        </p:spPr>
+        <p:txBody>
+          <a:bodyPr wrap="none" lIns="0" tIns="0" rIns="0" bIns="0"/>
+          <a:lstStyle/>
+          <a:p>
+            <a:pPr>
+              <a:lnSpc>
+                <a:spcPct val="100000"/>
+              </a:lnSpc>
+            </a:pPr>
+            <a:r>
+              <a:rPr lang="zh-CN" sz="3300" b="1">
+                <a:solidFill>
+                  <a:srgbClr val="0E3F8C"/>
+                </a:solidFill>
+                <a:latin typeface="Source Han Sans CN"/>
+                <a:ea typeface="Source Han Sans CN"/>
+              </a:rPr>
+              <a:t>实验验证与下一步</a:t>
+            </a:r>
+            <a:endParaRPr/>
+          </a:p>
+        </p:txBody>
+      </p:sp>
+      <p:sp>
+        <p:nvSpPr>
+          <p:cNvPr id="28" name="矩形: 圆角 62"/>
+          <p:cNvSpPr/>
+          <p:nvPr/>
+        </p:nvSpPr>
+        <p:spPr>
+          <a:xfrm>
+            <a:off x="762000" y="3209925"/>
+            <a:ext cx="76200" cy="76200"/>
+          </a:xfrm>
+          <a:prstGeom prst="roundRect">
+            <a:avLst>
+              <a:gd name="adj" fmla="val 50000"/>
+            </a:avLst>
+          </a:prstGeom>
+          <a:solidFill>
+            <a:srgbClr val="1E4FA8"/>
+          </a:solidFill>
+          <a:ln/>
+        </p:spPr>
+        <p:txBody>
+          <a:bodyPr/>
+          <a:lstStyle/>
+          <a:p>
+            <a:endParaRPr/>
+          </a:p>
+        </p:txBody>
+      </p:sp>
+      <p:sp>
+        <p:nvSpPr>
+          <p:cNvPr id="29" name="文本框 63" descr="{&quot;isTemplate&quot;:true,&quot;type&quot;:&quot;text&quot;}"/>
+          <p:cNvSpPr txBox="1"/>
+          <p:nvPr/>
+        </p:nvSpPr>
+        <p:spPr>
+          <a:xfrm>
+            <a:off x="952500" y="3105150"/>
+            <a:ext cx="7048500" cy="371475"/>
+          </a:xfrm>
+          <a:prstGeom prst="rect">
+            <a:avLst/>
+          </a:prstGeom>
+        </p:spPr>
+        <p:txBody>
+          <a:bodyPr wrap="none" lIns="0" tIns="0" rIns="0" bIns="0"/>
+          <a:lstStyle/>
+          <a:p>
+            <a:pPr>
+              <a:lnSpc>
+                <a:spcPct val="170000"/>
+              </a:lnSpc>
+            </a:pPr>
+            <a:r>
+              <a:rPr lang="en-US" sz="1425">
+                <a:solidFill>
+                  <a:srgbClr val="1A2230"/>
+                </a:solidFill>
+                <a:latin typeface="Source Han Sans CN"/>
+                <a:ea typeface="Source Han Sans CN"/>
+              </a:rPr>
+              <a:t>exp01 </a:t>
+            </a:r>
+            <a:r>
+              <a:rPr lang="zh-CN" sz="1425">
+                <a:solidFill>
+                  <a:srgbClr val="1A2230"/>
+                </a:solidFill>
+                <a:latin typeface="Source Han Sans CN"/>
+                <a:ea typeface="Source Han Sans CN"/>
+              </a:rPr>
+              <a:t>多</a:t>
+            </a:r>
+            <a:r>
+              <a:rPr lang="en-US" sz="1425">
+                <a:solidFill>
+                  <a:srgbClr val="1A2230"/>
+                </a:solidFill>
+                <a:latin typeface="Source Han Sans CN"/>
+                <a:ea typeface="Source Han Sans CN"/>
+              </a:rPr>
+              <a:t> seed </a:t>
+            </a:r>
+            <a:r>
+              <a:rPr lang="zh-CN" sz="1425">
+                <a:solidFill>
+                  <a:srgbClr val="1A2230"/>
+                </a:solidFill>
+                <a:latin typeface="Source Han Sans CN"/>
+                <a:ea typeface="Source Han Sans CN"/>
+              </a:rPr>
+              <a:t>阶梯：改进方向</a:t>
+            </a:r>
+            <a:r>
+              <a:rPr lang="en-US" sz="1425">
+                <a:solidFill>
+                  <a:srgbClr val="1A2230"/>
+                </a:solidFill>
+                <a:latin typeface="Source Han Sans CN"/>
+                <a:ea typeface="Source Han Sans CN"/>
+              </a:rPr>
+              <a:t> </a:t>
+            </a:r>
+            <a:r>
+              <a:rPr lang="en-US" sz="1425" b="1">
+                <a:solidFill>
+                  <a:srgbClr val="1A2230"/>
+                </a:solidFill>
+                <a:latin typeface="Source Han Sans CN"/>
+                <a:ea typeface="Source Han Sans CN"/>
+              </a:rPr>
+              <a:t>3/3 seed </a:t>
+            </a:r>
+            <a:r>
+              <a:rPr lang="zh-CN" sz="1425" b="1">
+                <a:solidFill>
+                  <a:srgbClr val="1A2230"/>
+                </a:solidFill>
+                <a:latin typeface="Source Han Sans CN"/>
+                <a:ea typeface="Source Han Sans CN"/>
+              </a:rPr>
+              <a:t>一致</a:t>
+            </a:r>
+            <a:r>
+              <a:rPr lang="zh-CN" sz="1425">
+                <a:solidFill>
+                  <a:srgbClr val="1A2230"/>
+                </a:solidFill>
+                <a:latin typeface="Source Han Sans CN"/>
+                <a:ea typeface="Source Han Sans CN"/>
+              </a:rPr>
+              <a:t>、可逐位复现，幅度</a:t>
+            </a:r>
+            <a:r>
+              <a:rPr lang="en-US" sz="1425">
+                <a:solidFill>
+                  <a:srgbClr val="1A2230"/>
+                </a:solidFill>
+                <a:latin typeface="Source Han Sans CN"/>
+                <a:ea typeface="Source Han Sans CN"/>
+              </a:rPr>
+              <a:t> seed-dependent</a:t>
+            </a:r>
+            <a:endParaRPr/>
+          </a:p>
+        </p:txBody>
+      </p:sp>
+      <p:sp>
+        <p:nvSpPr>
+          <p:cNvPr id="30" name="矩形: 圆角 64"/>
+          <p:cNvSpPr/>
+          <p:nvPr/>
+        </p:nvSpPr>
+        <p:spPr>
+          <a:xfrm>
+            <a:off x="762000" y="3752850"/>
+            <a:ext cx="76200" cy="76200"/>
+          </a:xfrm>
+          <a:prstGeom prst="roundRect">
+            <a:avLst>
+              <a:gd name="adj" fmla="val 50000"/>
+            </a:avLst>
+          </a:prstGeom>
+          <a:solidFill>
+            <a:srgbClr val="1E4FA8"/>
+          </a:solidFill>
+          <a:ln/>
+        </p:spPr>
+        <p:txBody>
+          <a:bodyPr/>
+          <a:lstStyle/>
+          <a:p>
+            <a:endParaRPr/>
+          </a:p>
+        </p:txBody>
+      </p:sp>
+      <p:sp>
+        <p:nvSpPr>
+          <p:cNvPr id="31" name="文本框 65" descr="{&quot;isTemplate&quot;:true,&quot;type&quot;:&quot;text&quot;}"/>
+          <p:cNvSpPr txBox="1"/>
+          <p:nvPr/>
+        </p:nvSpPr>
+        <p:spPr>
+          <a:xfrm>
+            <a:off x="952500" y="3648075"/>
+            <a:ext cx="7048500" cy="371475"/>
+          </a:xfrm>
+          <a:prstGeom prst="rect">
+            <a:avLst/>
+          </a:prstGeom>
+        </p:spPr>
+        <p:txBody>
+          <a:bodyPr wrap="none" lIns="0" tIns="0" rIns="0" bIns="0"/>
+          <a:lstStyle/>
+          <a:p>
+            <a:pPr>
+              <a:lnSpc>
+                <a:spcPct val="170000"/>
+              </a:lnSpc>
+            </a:pPr>
+            <a:r>
+              <a:rPr lang="en-US" sz="1425">
+                <a:solidFill>
+                  <a:srgbClr val="1A2230"/>
+                </a:solidFill>
+                <a:latin typeface="Source Han Sans CN"/>
+                <a:ea typeface="Source Han Sans CN"/>
+              </a:rPr>
+              <a:t>exp02 </a:t>
+            </a:r>
+            <a:r>
+              <a:rPr lang="zh-CN" sz="1425">
+                <a:solidFill>
+                  <a:srgbClr val="1A2230"/>
+                </a:solidFill>
+                <a:latin typeface="Source Han Sans CN"/>
+                <a:ea typeface="Source Han Sans CN"/>
+              </a:rPr>
+              <a:t>规模标定：</a:t>
+            </a:r>
+            <a:r>
+              <a:rPr lang="zh-CN" sz="1425" b="1">
+                <a:solidFill>
+                  <a:srgbClr val="1A2230"/>
+                </a:solidFill>
+                <a:latin typeface="Source Han Sans CN"/>
+                <a:ea typeface="Source Han Sans CN"/>
+              </a:rPr>
+              <a:t>求解规模与任务规模</a:t>
+            </a:r>
+            <a:r>
+              <a:rPr lang="en-US" sz="1425" b="1">
+                <a:solidFill>
+                  <a:srgbClr val="1A2230"/>
+                </a:solidFill>
+                <a:latin typeface="Source Han Sans CN"/>
+                <a:ea typeface="Source Han Sans CN"/>
+              </a:rPr>
+              <a:t> N </a:t>
+            </a:r>
+            <a:r>
+              <a:rPr lang="zh-CN" sz="1425" b="1">
+                <a:solidFill>
+                  <a:srgbClr val="1A2230"/>
+                </a:solidFill>
+                <a:latin typeface="Source Han Sans CN"/>
+                <a:ea typeface="Source Han Sans CN"/>
+              </a:rPr>
+              <a:t>解耦</a:t>
+            </a:r>
+            <a:r>
+              <a:rPr lang="zh-CN" sz="1425">
+                <a:solidFill>
+                  <a:srgbClr val="1A2230"/>
+                </a:solidFill>
+                <a:latin typeface="Source Han Sans CN"/>
+                <a:ea typeface="Source Han Sans CN"/>
+              </a:rPr>
+              <a:t>，瓶颈定位到选择名额而非候选比例</a:t>
+            </a:r>
+            <a:endParaRPr/>
+          </a:p>
+        </p:txBody>
+      </p:sp>
+      <p:sp>
+        <p:nvSpPr>
+          <p:cNvPr id="32" name="文本框 66" descr="{&quot;isTemplate&quot;:true,&quot;type&quot;:&quot;text&quot;}"/>
+          <p:cNvSpPr txBox="1"/>
+          <p:nvPr/>
+        </p:nvSpPr>
+        <p:spPr>
+          <a:xfrm>
+            <a:off x="762000" y="4305300"/>
+            <a:ext cx="7239000" cy="666750"/>
+          </a:xfrm>
+          <a:prstGeom prst="rect">
+            <a:avLst/>
+          </a:prstGeom>
+        </p:spPr>
+        <p:txBody>
+          <a:bodyPr wrap="square" lIns="0" tIns="0" rIns="0" bIns="0">
+            <a:normAutofit/>
+          </a:bodyPr>
+          <a:lstStyle/>
+          <a:p>
+            <a:pPr>
+              <a:lnSpc>
+                <a:spcPct val="180000"/>
+              </a:lnSpc>
+            </a:pPr>
+            <a:r>
+              <a:rPr lang="zh-CN" sz="1200">
+                <a:solidFill>
+                  <a:srgbClr val="4A5568"/>
+                </a:solidFill>
+                <a:latin typeface="Source Han Sans CN"/>
+                <a:ea typeface="Source Han Sans CN"/>
+              </a:rPr>
+              <a:t>评估口径：长程滚动</a:t>
+            </a:r>
+            <a:r>
+              <a:rPr lang="en-US" sz="1200">
+                <a:solidFill>
+                  <a:srgbClr val="4A5568"/>
+                </a:solidFill>
+                <a:latin typeface="Source Han Sans CN"/>
+                <a:ea typeface="Source Han Sans CN"/>
+              </a:rPr>
+              <a:t> 24 </a:t>
+            </a:r>
+            <a:r>
+              <a:rPr lang="zh-CN" sz="1200">
+                <a:solidFill>
+                  <a:srgbClr val="4A5568"/>
+                </a:solidFill>
+                <a:latin typeface="Source Han Sans CN"/>
+                <a:ea typeface="Source Han Sans CN"/>
+              </a:rPr>
+              <a:t>周期、</a:t>
+            </a:r>
+            <a:r>
+              <a:rPr lang="en-US" sz="1200">
+                <a:solidFill>
+                  <a:srgbClr val="4A5568"/>
+                </a:solidFill>
+                <a:latin typeface="Source Han Sans CN"/>
+                <a:ea typeface="Source Han Sans CN"/>
+              </a:rPr>
+              <a:t>Poisson λ=5 </a:t>
+            </a:r>
+            <a:r>
+              <a:rPr lang="zh-CN" sz="1200">
+                <a:solidFill>
+                  <a:srgbClr val="4A5568"/>
+                </a:solidFill>
+                <a:latin typeface="Source Han Sans CN"/>
+                <a:ea typeface="Source Han Sans CN"/>
+              </a:rPr>
+              <a:t>到达；「任务不被完成只有物理约束被违反」——完成只认物理约束，迟到折价而非废飞。所有数字来自实验</a:t>
+            </a:r>
+            <a:r>
+              <a:rPr lang="en-US" sz="1200">
+                <a:solidFill>
+                  <a:srgbClr val="4A5568"/>
+                </a:solidFill>
+                <a:latin typeface="Source Han Sans CN"/>
+                <a:ea typeface="Source Han Sans CN"/>
+              </a:rPr>
+              <a:t> metrics </a:t>
+            </a:r>
+            <a:r>
+              <a:rPr lang="zh-CN" sz="1200">
+                <a:solidFill>
+                  <a:srgbClr val="4A5568"/>
+                </a:solidFill>
+                <a:latin typeface="Source Han Sans CN"/>
+                <a:ea typeface="Source Han Sans CN"/>
+              </a:rPr>
+              <a:t>原始记录。</a:t>
+            </a:r>
+            <a:endParaRPr/>
+          </a:p>
+        </p:txBody>
+      </p:sp>
+      <p:sp>
+        <p:nvSpPr>
+          <p:cNvPr id="33" name="矩形: 圆角 67"/>
+          <p:cNvSpPr/>
+          <p:nvPr/>
+        </p:nvSpPr>
+        <p:spPr>
+          <a:xfrm>
+            <a:off x="762000" y="5200650"/>
+            <a:ext cx="1104900" cy="295275"/>
+          </a:xfrm>
+          <a:prstGeom prst="roundRect">
+            <a:avLst>
+              <a:gd name="adj" fmla="val 19355"/>
+            </a:avLst>
+          </a:prstGeom>
+          <a:solidFill>
+            <a:srgbClr val="1E4FA8"/>
+          </a:solidFill>
+          <a:ln/>
+        </p:spPr>
+        <p:txBody>
+          <a:bodyPr/>
+          <a:lstStyle/>
+          <a:p>
+            <a:endParaRPr/>
+          </a:p>
+        </p:txBody>
+      </p:sp>
+      <p:sp>
+        <p:nvSpPr>
+          <p:cNvPr id="34" name="文本框 68" descr="{&quot;isTemplate&quot;:true,&quot;type&quot;:&quot;text&quot;}"/>
+          <p:cNvSpPr txBox="1"/>
+          <p:nvPr/>
+        </p:nvSpPr>
+        <p:spPr>
+          <a:xfrm>
+            <a:off x="914400" y="5267325"/>
+            <a:ext cx="800100" cy="161925"/>
+          </a:xfrm>
+          <a:prstGeom prst="rect">
+            <a:avLst/>
+          </a:prstGeom>
+        </p:spPr>
+        <p:txBody>
+          <a:bodyPr wrap="none" lIns="0" tIns="0" rIns="0" bIns="0"/>
+          <a:lstStyle/>
+          <a:p>
+            <a:pPr>
+              <a:lnSpc>
+                <a:spcPct val="100000"/>
+              </a:lnSpc>
+            </a:pPr>
+            <a:r>
+              <a:rPr lang="en-US" sz="1050" b="1">
+                <a:solidFill>
+                  <a:srgbClr val="FFFFFF"/>
+                </a:solidFill>
+                <a:latin typeface="Source Han Sans CN"/>
+                <a:ea typeface="Source Han Sans CN"/>
+              </a:rPr>
+              <a:t>P12 · exp01</a:t>
+            </a:r>
+            <a:endParaRPr/>
+          </a:p>
+        </p:txBody>
+      </p:sp>
+      <p:sp>
+        <p:nvSpPr>
+          <p:cNvPr id="35" name="矩形: 圆角 69"/>
+          <p:cNvSpPr/>
+          <p:nvPr/>
+        </p:nvSpPr>
+        <p:spPr>
+          <a:xfrm>
+            <a:off x="1981200" y="5200650"/>
+            <a:ext cx="1104900" cy="295275"/>
+          </a:xfrm>
+          <a:prstGeom prst="roundRect">
+            <a:avLst>
+              <a:gd name="adj" fmla="val 19355"/>
+            </a:avLst>
+          </a:prstGeom>
+          <a:solidFill>
+            <a:srgbClr val="1E4FA8"/>
+          </a:solidFill>
+          <a:ln/>
+        </p:spPr>
+        <p:txBody>
+          <a:bodyPr/>
+          <a:lstStyle/>
+          <a:p>
+            <a:endParaRPr/>
+          </a:p>
+        </p:txBody>
+      </p:sp>
+      <p:sp>
+        <p:nvSpPr>
+          <p:cNvPr id="36" name="文本框 70" descr="{&quot;isTemplate&quot;:true,&quot;type&quot;:&quot;text&quot;}"/>
+          <p:cNvSpPr txBox="1"/>
+          <p:nvPr/>
+        </p:nvSpPr>
+        <p:spPr>
+          <a:xfrm>
+            <a:off x="2133600" y="5267325"/>
+            <a:ext cx="800100" cy="161925"/>
+          </a:xfrm>
+          <a:prstGeom prst="rect">
+            <a:avLst/>
+          </a:prstGeom>
+        </p:spPr>
+        <p:txBody>
+          <a:bodyPr wrap="none" lIns="0" tIns="0" rIns="0" bIns="0"/>
+          <a:lstStyle/>
+          <a:p>
+            <a:pPr>
+              <a:lnSpc>
+                <a:spcPct val="100000"/>
+              </a:lnSpc>
+            </a:pPr>
+            <a:r>
+              <a:rPr lang="en-US" sz="1050" b="1">
+                <a:solidFill>
+                  <a:srgbClr val="FFFFFF"/>
+                </a:solidFill>
+                <a:latin typeface="Source Han Sans CN"/>
+                <a:ea typeface="Source Han Sans CN"/>
+              </a:rPr>
+              <a:t>P13 · exp02</a:t>
+            </a:r>
+            <a:endParaRPr/>
+          </a:p>
+        </p:txBody>
+      </p:sp>
+      <p:sp>
+        <p:nvSpPr>
+          <p:cNvPr id="37" name="矩形: 圆角 71"/>
+          <p:cNvSpPr/>
+          <p:nvPr/>
+        </p:nvSpPr>
+        <p:spPr>
+          <a:xfrm>
+            <a:off x="3200400" y="5200650"/>
+            <a:ext cx="1228725" cy="295275"/>
+          </a:xfrm>
+          <a:prstGeom prst="roundRect">
+            <a:avLst>
+              <a:gd name="adj" fmla="val 19355"/>
+            </a:avLst>
+          </a:prstGeom>
+          <a:solidFill>
+            <a:srgbClr val="1E4FA8"/>
+          </a:solidFill>
+          <a:ln/>
+        </p:spPr>
+        <p:txBody>
+          <a:bodyPr/>
+          <a:lstStyle/>
+          <a:p>
+            <a:endParaRPr/>
+          </a:p>
+        </p:txBody>
+      </p:sp>
+      <p:sp>
+        <p:nvSpPr>
+          <p:cNvPr id="38" name="文本框 72" descr="{&quot;isTemplate&quot;:true,&quot;type&quot;:&quot;text&quot;}"/>
+          <p:cNvSpPr txBox="1"/>
+          <p:nvPr/>
+        </p:nvSpPr>
+        <p:spPr>
+          <a:xfrm>
+            <a:off x="3352800" y="5267325"/>
+            <a:ext cx="923925" cy="161925"/>
+          </a:xfrm>
+          <a:prstGeom prst="rect">
+            <a:avLst/>
+          </a:prstGeom>
+        </p:spPr>
+        <p:txBody>
+          <a:bodyPr wrap="none" lIns="0" tIns="0" rIns="0" bIns="0"/>
+          <a:lstStyle/>
+          <a:p>
+            <a:pPr>
+              <a:lnSpc>
+                <a:spcPct val="100000"/>
+              </a:lnSpc>
+            </a:pPr>
+            <a:r>
+              <a:rPr lang="en-US" sz="1050" b="1">
+                <a:solidFill>
+                  <a:srgbClr val="FFFFFF"/>
+                </a:solidFill>
+                <a:latin typeface="Source Han Sans CN"/>
+                <a:ea typeface="Source Han Sans CN"/>
+              </a:rPr>
+              <a:t>P14 · </a:t>
+            </a:r>
+            <a:r>
+              <a:rPr lang="zh-CN" sz="1050" b="1">
+                <a:solidFill>
+                  <a:srgbClr val="FFFFFF"/>
+                </a:solidFill>
+                <a:latin typeface="Source Han Sans CN"/>
+                <a:ea typeface="Source Han Sans CN"/>
+              </a:rPr>
+              <a:t>性能瓶颈</a:t>
+            </a:r>
+            <a:endParaRPr/>
+          </a:p>
+        </p:txBody>
+      </p:sp>
+      <p:sp>
+        <p:nvSpPr>
+          <p:cNvPr id="39" name="矩形: 圆角 73"/>
+          <p:cNvSpPr/>
+          <p:nvPr/>
+        </p:nvSpPr>
+        <p:spPr>
+          <a:xfrm>
+            <a:off x="4543425" y="5200650"/>
+            <a:ext cx="1362075" cy="295275"/>
+          </a:xfrm>
+          <a:prstGeom prst="roundRect">
+            <a:avLst>
+              <a:gd name="adj" fmla="val 19355"/>
+            </a:avLst>
+          </a:prstGeom>
+          <a:solidFill>
+            <a:srgbClr val="1E4FA8"/>
+          </a:solidFill>
+          <a:ln/>
+        </p:spPr>
+        <p:txBody>
+          <a:bodyPr/>
+          <a:lstStyle/>
+          <a:p>
+            <a:endParaRPr/>
+          </a:p>
+        </p:txBody>
+      </p:sp>
+      <p:sp>
+        <p:nvSpPr>
+          <p:cNvPr id="40" name="文本框 74" descr="{&quot;isTemplate&quot;:true,&quot;type&quot;:&quot;text&quot;}"/>
+          <p:cNvSpPr txBox="1"/>
+          <p:nvPr/>
+        </p:nvSpPr>
+        <p:spPr>
+          <a:xfrm>
+            <a:off x="4695825" y="5267325"/>
+            <a:ext cx="1057275" cy="161925"/>
+          </a:xfrm>
+          <a:prstGeom prst="rect">
+            <a:avLst/>
+          </a:prstGeom>
+        </p:spPr>
+        <p:txBody>
+          <a:bodyPr wrap="none" lIns="0" tIns="0" rIns="0" bIns="0"/>
+          <a:lstStyle/>
+          <a:p>
+            <a:pPr>
+              <a:lnSpc>
+                <a:spcPct val="100000"/>
+              </a:lnSpc>
+            </a:pPr>
+            <a:r>
+              <a:rPr lang="en-US" sz="1050" b="1">
+                <a:solidFill>
+                  <a:srgbClr val="FFFFFF"/>
+                </a:solidFill>
+                <a:latin typeface="Source Han Sans CN"/>
+                <a:ea typeface="Source Han Sans CN"/>
+              </a:rPr>
+              <a:t>P15 · </a:t>
+            </a:r>
+            <a:r>
+              <a:rPr lang="zh-CN" sz="1050" b="1">
+                <a:solidFill>
+                  <a:srgbClr val="FFFFFF"/>
+                </a:solidFill>
+                <a:latin typeface="Source Han Sans CN"/>
+                <a:ea typeface="Source Han Sans CN"/>
+              </a:rPr>
+              <a:t>边界与计划</a:t>
+            </a:r>
+            <a:endParaRPr/>
+          </a:p>
+        </p:txBody>
+      </p:sp>
+      <p:sp>
+        <p:nvSpPr>
+          <p:cNvPr id="41" name="矩形: 圆角 75"/>
+          <p:cNvSpPr/>
+          <p:nvPr/>
+        </p:nvSpPr>
+        <p:spPr>
+          <a:xfrm>
+            <a:off x="9763125" y="4572000"/>
+            <a:ext cx="1666875" cy="323850"/>
+          </a:xfrm>
+          <a:prstGeom prst="roundRect">
+            <a:avLst>
+              <a:gd name="adj" fmla="val 52941"/>
+            </a:avLst>
+          </a:prstGeom>
+          <a:solidFill>
+            <a:srgbClr val="F0F5FC"/>
+          </a:solidFill>
+          <a:ln w="12700">
+            <a:solidFill>
+              <a:srgbClr val="D6DCE5"/>
+            </a:solidFill>
+            <a:prstDash val="solid"/>
+          </a:ln>
+        </p:spPr>
+        <p:txBody>
+          <a:bodyPr/>
+          <a:lstStyle/>
+          <a:p>
+            <a:endParaRPr/>
+          </a:p>
+        </p:txBody>
+      </p:sp>
+      <p:sp>
+        <p:nvSpPr>
+          <p:cNvPr id="42" name="文本框 76" descr="{&quot;isTemplate&quot;:true,&quot;type&quot;:&quot;text&quot;}"/>
+          <p:cNvSpPr txBox="1"/>
+          <p:nvPr/>
+        </p:nvSpPr>
+        <p:spPr>
+          <a:xfrm>
+            <a:off x="9934575" y="4648200"/>
+            <a:ext cx="1323975" cy="171450"/>
+          </a:xfrm>
+          <a:prstGeom prst="rect">
+            <a:avLst/>
+          </a:prstGeom>
+        </p:spPr>
+        <p:txBody>
+          <a:bodyPr wrap="none" lIns="0" tIns="0" rIns="0" bIns="0"/>
+          <a:lstStyle/>
+          <a:p>
+            <a:pPr>
+              <a:lnSpc>
+                <a:spcPct val="100000"/>
+              </a:lnSpc>
+            </a:pPr>
+            <a:r>
+              <a:rPr lang="zh-CN" sz="1125" b="1">
+                <a:solidFill>
+                  <a:srgbClr val="1E4FA8"/>
+                </a:solidFill>
+                <a:latin typeface="Source Han Sans CN"/>
+                <a:ea typeface="Source Han Sans CN"/>
+              </a:rPr>
+              <a:t>按时率</a:t>
+            </a:r>
+            <a:r>
+              <a:rPr lang="en-US" sz="1125" b="1">
+                <a:solidFill>
+                  <a:srgbClr val="1E4FA8"/>
+                </a:solidFill>
+                <a:latin typeface="Source Han Sans CN"/>
+                <a:ea typeface="Source Han Sans CN"/>
+              </a:rPr>
+              <a:t> 93.3% ± 3.6</a:t>
+            </a:r>
+            <a:endParaRPr/>
+          </a:p>
+        </p:txBody>
+      </p:sp>
+      <p:sp>
+        <p:nvSpPr>
+          <p:cNvPr id="43" name="矩形: 圆角 77"/>
+          <p:cNvSpPr/>
+          <p:nvPr/>
+        </p:nvSpPr>
+        <p:spPr>
+          <a:xfrm>
+            <a:off x="9772650" y="5010150"/>
+            <a:ext cx="1657350" cy="323850"/>
+          </a:xfrm>
+          <a:prstGeom prst="roundRect">
+            <a:avLst>
+              <a:gd name="adj" fmla="val 52941"/>
+            </a:avLst>
+          </a:prstGeom>
+          <a:solidFill>
+            <a:srgbClr val="F0F5FC"/>
+          </a:solidFill>
+          <a:ln w="12700">
+            <a:solidFill>
+              <a:srgbClr val="D6DCE5"/>
+            </a:solidFill>
+            <a:prstDash val="solid"/>
+          </a:ln>
+        </p:spPr>
+        <p:txBody>
+          <a:bodyPr/>
+          <a:lstStyle/>
+          <a:p>
+            <a:endParaRPr/>
+          </a:p>
+        </p:txBody>
+      </p:sp>
+      <p:sp>
+        <p:nvSpPr>
+          <p:cNvPr id="44" name="文本框 78" descr="{&quot;isTemplate&quot;:true,&quot;type&quot;:&quot;text&quot;}"/>
+          <p:cNvSpPr txBox="1"/>
+          <p:nvPr/>
+        </p:nvSpPr>
+        <p:spPr>
+          <a:xfrm>
+            <a:off x="9944100" y="5086350"/>
+            <a:ext cx="1314450" cy="171450"/>
+          </a:xfrm>
+          <a:prstGeom prst="rect">
+            <a:avLst/>
+          </a:prstGeom>
+        </p:spPr>
+        <p:txBody>
+          <a:bodyPr wrap="none" lIns="0" tIns="0" rIns="0" bIns="0"/>
+          <a:lstStyle/>
+          <a:p>
+            <a:pPr>
+              <a:lnSpc>
+                <a:spcPct val="100000"/>
+              </a:lnSpc>
+            </a:pPr>
+            <a:r>
+              <a:rPr lang="zh-CN" sz="1125" b="1">
+                <a:solidFill>
+                  <a:srgbClr val="1E4FA8"/>
+                </a:solidFill>
+                <a:latin typeface="Source Han Sans CN"/>
+                <a:ea typeface="Source Han Sans CN"/>
+              </a:rPr>
+              <a:t>完成</a:t>
+            </a:r>
+            <a:r>
+              <a:rPr lang="en-US" sz="1125" b="1">
+                <a:solidFill>
+                  <a:srgbClr val="1E4FA8"/>
+                </a:solidFill>
+                <a:latin typeface="Source Han Sans CN"/>
+                <a:ea typeface="Source Han Sans CN"/>
+              </a:rPr>
+              <a:t> 60/60 · </a:t>
+            </a:r>
+            <a:r>
+              <a:rPr lang="zh-CN" sz="1125" b="1">
+                <a:solidFill>
+                  <a:srgbClr val="1E4FA8"/>
+                </a:solidFill>
+                <a:latin typeface="Source Han Sans CN"/>
+                <a:ea typeface="Source Han Sans CN"/>
+              </a:rPr>
+              <a:t>废飞</a:t>
+            </a:r>
+            <a:r>
+              <a:rPr lang="en-US" sz="1125" b="1">
+                <a:solidFill>
+                  <a:srgbClr val="1E4FA8"/>
+                </a:solidFill>
+                <a:latin typeface="Source Han Sans CN"/>
+                <a:ea typeface="Source Han Sans CN"/>
+              </a:rPr>
+              <a:t> 0</a:t>
+            </a:r>
+            <a:endParaRPr/>
+          </a:p>
+        </p:txBody>
+      </p:sp>
+      <p:sp>
+        <p:nvSpPr>
+          <p:cNvPr id="45" name="矩形: 圆角 79"/>
+          <p:cNvSpPr/>
+          <p:nvPr/>
+        </p:nvSpPr>
+        <p:spPr>
+          <a:xfrm>
+            <a:off x="9877425" y="5448300"/>
+            <a:ext cx="1552575" cy="323850"/>
+          </a:xfrm>
+          <a:prstGeom prst="roundRect">
+            <a:avLst>
+              <a:gd name="adj" fmla="val 52941"/>
+            </a:avLst>
+          </a:prstGeom>
+          <a:solidFill>
+            <a:srgbClr val="F0F5FC"/>
+          </a:solidFill>
+          <a:ln w="12700">
+            <a:solidFill>
+              <a:srgbClr val="D6DCE5"/>
+            </a:solidFill>
+            <a:prstDash val="solid"/>
+          </a:ln>
+        </p:spPr>
+        <p:txBody>
+          <a:bodyPr/>
+          <a:lstStyle/>
+          <a:p>
+            <a:endParaRPr/>
+          </a:p>
+        </p:txBody>
+      </p:sp>
+      <p:sp>
+        <p:nvSpPr>
+          <p:cNvPr id="46" name="文本框 80" descr="{&quot;isTemplate&quot;:true,&quot;type&quot;:&quot;text&quot;}"/>
+          <p:cNvSpPr txBox="1"/>
+          <p:nvPr/>
+        </p:nvSpPr>
+        <p:spPr>
+          <a:xfrm>
+            <a:off x="10048875" y="5524500"/>
+            <a:ext cx="1209675" cy="171450"/>
+          </a:xfrm>
+          <a:prstGeom prst="rect">
+            <a:avLst/>
+          </a:prstGeom>
+        </p:spPr>
+        <p:txBody>
+          <a:bodyPr wrap="none" lIns="0" tIns="0" rIns="0" bIns="0"/>
+          <a:lstStyle/>
+          <a:p>
+            <a:pPr>
+              <a:lnSpc>
+                <a:spcPct val="100000"/>
+              </a:lnSpc>
+            </a:pPr>
+            <a:r>
+              <a:rPr lang="zh-CN" sz="1125" b="1">
+                <a:solidFill>
+                  <a:srgbClr val="1E4FA8"/>
+                </a:solidFill>
+                <a:latin typeface="Source Han Sans CN"/>
+                <a:ea typeface="Source Han Sans CN"/>
+              </a:rPr>
+              <a:t>求解规模与</a:t>
+            </a:r>
+            <a:r>
+              <a:rPr lang="en-US" sz="1125" b="1">
+                <a:solidFill>
+                  <a:srgbClr val="1E4FA8"/>
+                </a:solidFill>
+                <a:latin typeface="Source Han Sans CN"/>
+                <a:ea typeface="Source Han Sans CN"/>
+              </a:rPr>
+              <a:t> N </a:t>
+            </a:r>
+            <a:r>
+              <a:rPr lang="zh-CN" sz="1125" b="1">
+                <a:solidFill>
+                  <a:srgbClr val="1E4FA8"/>
+                </a:solidFill>
+                <a:latin typeface="Source Han Sans CN"/>
+                <a:ea typeface="Source Han Sans CN"/>
+              </a:rPr>
+              <a:t>解耦</a:t>
+            </a:r>
+            <a:endParaRPr/>
+          </a:p>
+        </p:txBody>
+      </p:sp>
+      <p:sp>
+        <p:nvSpPr>
+          <p:cNvPr id="47" name="矩形: 圆角 81"/>
+          <p:cNvSpPr/>
+          <p:nvPr/>
+        </p:nvSpPr>
+        <p:spPr>
+          <a:xfrm>
+            <a:off x="762000" y="5857875"/>
+            <a:ext cx="476250" cy="276225"/>
+          </a:xfrm>
+          <a:prstGeom prst="roundRect">
+            <a:avLst>
+              <a:gd name="adj" fmla="val 48276"/>
+            </a:avLst>
+          </a:prstGeom>
+          <a:solidFill>
+            <a:srgbClr val="F0F5FC"/>
+          </a:solidFill>
+          <a:ln/>
+        </p:spPr>
+        <p:txBody>
+          <a:bodyPr/>
+          <a:lstStyle/>
+          <a:p>
+            <a:endParaRPr/>
+          </a:p>
+        </p:txBody>
+      </p:sp>
+      <p:sp>
+        <p:nvSpPr>
+          <p:cNvPr id="48" name="文本框 82" descr="{&quot;isTemplate&quot;:true,&quot;type&quot;:&quot;text&quot;}"/>
+          <p:cNvSpPr txBox="1"/>
+          <p:nvPr/>
+        </p:nvSpPr>
+        <p:spPr>
+          <a:xfrm>
+            <a:off x="914400" y="5915025"/>
+            <a:ext cx="171450" cy="161925"/>
+          </a:xfrm>
+          <a:prstGeom prst="rect">
+            <a:avLst/>
+          </a:prstGeom>
+        </p:spPr>
+        <p:txBody>
+          <a:bodyPr wrap="none" lIns="0" tIns="0" rIns="0" bIns="0"/>
+          <a:lstStyle/>
+          <a:p>
+            <a:pPr>
+              <a:lnSpc>
+                <a:spcPct val="100000"/>
+              </a:lnSpc>
+            </a:pPr>
+            <a:r>
+              <a:rPr lang="en-US" sz="1050" b="1">
+                <a:solidFill>
+                  <a:srgbClr val="8B97A8"/>
+                </a:solidFill>
+                <a:latin typeface="Source Han Sans CN"/>
+                <a:ea typeface="Source Han Sans CN"/>
+              </a:rPr>
+              <a:t>01</a:t>
+            </a:r>
+            <a:endParaRPr/>
+          </a:p>
+        </p:txBody>
+      </p:sp>
+      <p:sp>
+        <p:nvSpPr>
+          <p:cNvPr id="49" name="矩形: 圆角 83"/>
+          <p:cNvSpPr/>
+          <p:nvPr/>
+        </p:nvSpPr>
+        <p:spPr>
+          <a:xfrm>
+            <a:off x="1352550" y="5857875"/>
+            <a:ext cx="476250" cy="276225"/>
+          </a:xfrm>
+          <a:prstGeom prst="roundRect">
+            <a:avLst>
+              <a:gd name="adj" fmla="val 48276"/>
+            </a:avLst>
+          </a:prstGeom>
+          <a:solidFill>
+            <a:srgbClr val="F0F5FC"/>
+          </a:solidFill>
+          <a:ln/>
+        </p:spPr>
+        <p:txBody>
+          <a:bodyPr/>
+          <a:lstStyle/>
+          <a:p>
+            <a:endParaRPr/>
+          </a:p>
+        </p:txBody>
+      </p:sp>
+      <p:sp>
+        <p:nvSpPr>
+          <p:cNvPr id="50" name="文本框 84" descr="{&quot;isTemplate&quot;:true,&quot;type&quot;:&quot;text&quot;}"/>
+          <p:cNvSpPr txBox="1"/>
+          <p:nvPr/>
+        </p:nvSpPr>
+        <p:spPr>
+          <a:xfrm>
+            <a:off x="1504950" y="5915025"/>
+            <a:ext cx="171450" cy="161925"/>
+          </a:xfrm>
+          <a:prstGeom prst="rect">
+            <a:avLst/>
+          </a:prstGeom>
+        </p:spPr>
+        <p:txBody>
+          <a:bodyPr wrap="none" lIns="0" tIns="0" rIns="0" bIns="0"/>
+          <a:lstStyle/>
+          <a:p>
+            <a:pPr>
+              <a:lnSpc>
+                <a:spcPct val="100000"/>
+              </a:lnSpc>
+            </a:pPr>
+            <a:r>
+              <a:rPr lang="en-US" sz="1050" b="1">
+                <a:solidFill>
+                  <a:srgbClr val="8B97A8"/>
+                </a:solidFill>
+                <a:latin typeface="Source Han Sans CN"/>
+                <a:ea typeface="Source Han Sans CN"/>
+              </a:rPr>
+              <a:t>02</a:t>
+            </a:r>
+            <a:endParaRPr/>
+          </a:p>
+        </p:txBody>
+      </p:sp>
+      <p:sp>
+        <p:nvSpPr>
+          <p:cNvPr id="51" name="矩形: 圆角 85"/>
+          <p:cNvSpPr/>
+          <p:nvPr/>
+        </p:nvSpPr>
+        <p:spPr>
+          <a:xfrm>
+            <a:off x="1943100" y="5857875"/>
+            <a:ext cx="476250" cy="276225"/>
+          </a:xfrm>
+          <a:prstGeom prst="roundRect">
+            <a:avLst>
+              <a:gd name="adj" fmla="val 48276"/>
+            </a:avLst>
+          </a:prstGeom>
+          <a:solidFill>
+            <a:srgbClr val="F0F5FC"/>
+          </a:solidFill>
+          <a:ln/>
+        </p:spPr>
+        <p:txBody>
+          <a:bodyPr/>
+          <a:lstStyle/>
+          <a:p>
+            <a:endParaRPr/>
+          </a:p>
+        </p:txBody>
+      </p:sp>
+      <p:sp>
+        <p:nvSpPr>
+          <p:cNvPr id="52" name="文本框 86" descr="{&quot;isTemplate&quot;:true,&quot;type&quot;:&quot;text&quot;}"/>
+          <p:cNvSpPr txBox="1"/>
+          <p:nvPr/>
+        </p:nvSpPr>
+        <p:spPr>
+          <a:xfrm>
+            <a:off x="2095500" y="5915025"/>
+            <a:ext cx="171450" cy="161925"/>
+          </a:xfrm>
+          <a:prstGeom prst="rect">
+            <a:avLst/>
+          </a:prstGeom>
+        </p:spPr>
+        <p:txBody>
+          <a:bodyPr wrap="none" lIns="0" tIns="0" rIns="0" bIns="0"/>
+          <a:lstStyle/>
+          <a:p>
+            <a:pPr>
+              <a:lnSpc>
+                <a:spcPct val="100000"/>
+              </a:lnSpc>
+            </a:pPr>
+            <a:r>
+              <a:rPr lang="en-US" sz="1050" b="1">
+                <a:solidFill>
+                  <a:srgbClr val="8B97A8"/>
+                </a:solidFill>
+                <a:latin typeface="Source Han Sans CN"/>
+                <a:ea typeface="Source Han Sans CN"/>
+              </a:rPr>
+              <a:t>03</a:t>
+            </a:r>
+            <a:endParaRPr/>
+          </a:p>
+        </p:txBody>
+      </p:sp>
+      <p:sp>
+        <p:nvSpPr>
+          <p:cNvPr id="53" name="矩形: 圆角 87"/>
+          <p:cNvSpPr/>
+          <p:nvPr/>
+        </p:nvSpPr>
+        <p:spPr>
+          <a:xfrm>
+            <a:off x="2533650" y="5857875"/>
+            <a:ext cx="476250" cy="276225"/>
+          </a:xfrm>
+          <a:prstGeom prst="roundRect">
+            <a:avLst>
+              <a:gd name="adj" fmla="val 48276"/>
+            </a:avLst>
+          </a:prstGeom>
+          <a:solidFill>
+            <a:srgbClr val="1E4FA8"/>
+          </a:solidFill>
+          <a:ln/>
+        </p:spPr>
+        <p:txBody>
+          <a:bodyPr/>
+          <a:lstStyle/>
+          <a:p>
+            <a:endParaRPr/>
+          </a:p>
+        </p:txBody>
+      </p:sp>
+      <p:sp>
+        <p:nvSpPr>
+          <p:cNvPr id="54" name="文本框 88" descr="{&quot;isTemplate&quot;:true,&quot;type&quot;:&quot;text&quot;}"/>
+          <p:cNvSpPr txBox="1"/>
+          <p:nvPr/>
+        </p:nvSpPr>
+        <p:spPr>
+          <a:xfrm>
+            <a:off x="2686050" y="5915025"/>
+            <a:ext cx="171450" cy="161925"/>
+          </a:xfrm>
+          <a:prstGeom prst="rect">
+            <a:avLst/>
+          </a:prstGeom>
+        </p:spPr>
+        <p:txBody>
+          <a:bodyPr wrap="none" lIns="0" tIns="0" rIns="0" bIns="0"/>
+          <a:lstStyle/>
+          <a:p>
+            <a:pPr>
+              <a:lnSpc>
+                <a:spcPct val="100000"/>
+              </a:lnSpc>
+            </a:pPr>
+            <a:r>
+              <a:rPr lang="en-US" sz="1050" b="1">
+                <a:solidFill>
+                  <a:srgbClr val="FFFFFF"/>
+                </a:solidFill>
+                <a:latin typeface="Source Han Sans CN"/>
+                <a:ea typeface="Source Han Sans CN"/>
+              </a:rPr>
+              <a:t>04</a:t>
+            </a:r>
+            <a:endParaRPr/>
+          </a:p>
+        </p:txBody>
+      </p:sp>
+      <p:sp>
+        <p:nvSpPr>
+          <p:cNvPr id="55" name="文本框 89" descr="{&quot;isTemplate&quot;:true,&quot;type&quot;:&quot;text&quot;}"/>
+          <p:cNvSpPr txBox="1"/>
+          <p:nvPr/>
+        </p:nvSpPr>
+        <p:spPr>
+          <a:xfrm>
+            <a:off x="3200400" y="5915025"/>
+            <a:ext cx="1962150" cy="161925"/>
+          </a:xfrm>
+          <a:prstGeom prst="rect">
+            <a:avLst/>
+          </a:prstGeom>
+        </p:spPr>
+        <p:txBody>
+          <a:bodyPr wrap="none" lIns="0" tIns="0" rIns="0" bIns="0"/>
+          <a:lstStyle/>
+          <a:p>
+            <a:pPr>
+              <a:lnSpc>
+                <a:spcPct val="100000"/>
+              </a:lnSpc>
+            </a:pPr>
+            <a:r>
+              <a:rPr lang="zh-CN" sz="1050">
+                <a:solidFill>
+                  <a:srgbClr val="8B97A8"/>
+                </a:solidFill>
+                <a:latin typeface="Source Han Sans CN"/>
+                <a:ea typeface="Source Han Sans CN"/>
+              </a:rPr>
+              <a:t>研究问题</a:t>
+            </a:r>
+            <a:r>
+              <a:rPr lang="en-US" sz="1050">
+                <a:solidFill>
+                  <a:srgbClr val="8B97A8"/>
+                </a:solidFill>
+                <a:latin typeface="Source Han Sans CN"/>
+                <a:ea typeface="Source Han Sans CN"/>
+              </a:rPr>
+              <a:t> · </a:t>
+            </a:r>
+            <a:r>
+              <a:rPr lang="zh-CN" sz="1050">
+                <a:solidFill>
+                  <a:srgbClr val="8B97A8"/>
+                </a:solidFill>
+                <a:latin typeface="Source Han Sans CN"/>
+                <a:ea typeface="Source Han Sans CN"/>
+              </a:rPr>
+              <a:t>方法两阶段</a:t>
+            </a:r>
+            <a:r>
+              <a:rPr lang="en-US" sz="1050">
+                <a:solidFill>
+                  <a:srgbClr val="8B97A8"/>
+                </a:solidFill>
+                <a:latin typeface="Source Han Sans CN"/>
+                <a:ea typeface="Source Han Sans CN"/>
+              </a:rPr>
+              <a:t> · </a:t>
+            </a:r>
+            <a:r>
+              <a:rPr lang="zh-CN" sz="1050">
+                <a:solidFill>
+                  <a:srgbClr val="8B97A8"/>
+                </a:solidFill>
+                <a:latin typeface="Source Han Sans CN"/>
+                <a:ea typeface="Source Han Sans CN"/>
+              </a:rPr>
+              <a:t>实验验证</a:t>
+            </a:r>
+            <a:endParaRPr/>
+          </a:p>
+        </p:txBody>
+      </p:sp>
+      <p:sp>
+        <p:nvSpPr>
+          <p:cNvPr id="56" name="矩形 90"/>
+          <p:cNvSpPr/>
+          <p:nvPr/>
+        </p:nvSpPr>
+        <p:spPr>
+          <a:xfrm>
+            <a:off x="0" y="6448425"/>
+            <a:ext cx="12192000" cy="409575"/>
+          </a:xfrm>
+          <a:prstGeom prst="rect">
+            <a:avLst/>
+          </a:prstGeom>
+          <a:solidFill>
+            <a:srgbClr val="F7F9FC"/>
+          </a:solidFill>
+          <a:ln/>
+        </p:spPr>
+        <p:txBody>
+          <a:bodyPr/>
+          <a:lstStyle/>
+          <a:p>
+            <a:endParaRPr/>
+          </a:p>
+        </p:txBody>
+      </p:sp>
+      <p:sp>
+        <p:nvSpPr>
+          <p:cNvPr id="57" name="任意多边形: 形状 91"/>
+          <p:cNvSpPr/>
+          <p:nvPr/>
+        </p:nvSpPr>
+        <p:spPr>
+          <a:xfrm>
+            <a:off x="0" y="6438900"/>
+            <a:ext cx="12192000" cy="419100"/>
+          </a:xfrm>
+          <a:custGeom>
+            <a:avLst/>
+            <a:gdLst/>
+            <a:ahLst/>
+            <a:cxnLst/>
+            <a:rect l="0" t="0" r="0" b="0"/>
+            <a:pathLst>
+              <a:path w="1280" h="44">
+                <a:moveTo>
+                  <a:pt x="0" y="0"/>
+                </a:moveTo>
+                <a:lnTo>
+                  <a:pt x="1280" y="0"/>
+                </a:lnTo>
+                <a:lnTo>
+                  <a:pt x="1280" y="1"/>
+                </a:lnTo>
+                <a:lnTo>
+                  <a:pt x="0" y="1"/>
+                </a:lnTo>
+                <a:close/>
+              </a:path>
+            </a:pathLst>
+          </a:custGeom>
+          <a:solidFill>
+            <a:srgbClr val="E5E7EB"/>
+          </a:solidFill>
+          <a:ln/>
+        </p:spPr>
+        <p:txBody>
+          <a:bodyPr/>
+          <a:lstStyle/>
+          <a:p>
+            <a:endParaRPr/>
+          </a:p>
+        </p:txBody>
+      </p:sp>
+      <p:sp>
+        <p:nvSpPr>
+          <p:cNvPr id="58" name="文本框 92" descr="{&quot;isTemplate&quot;:true,&quot;type&quot;:&quot;text&quot;}"/>
+          <p:cNvSpPr txBox="1"/>
+          <p:nvPr/>
+        </p:nvSpPr>
+        <p:spPr>
+          <a:xfrm>
+            <a:off x="381000" y="6581775"/>
+            <a:ext cx="2828925" cy="152400"/>
+          </a:xfrm>
+          <a:prstGeom prst="rect">
+            <a:avLst/>
+          </a:prstGeom>
+        </p:spPr>
+        <p:txBody>
+          <a:bodyPr wrap="none" lIns="0" tIns="0" rIns="0" bIns="0"/>
+          <a:lstStyle/>
+          <a:p>
+            <a:pPr>
+              <a:lnSpc>
+                <a:spcPct val="100000"/>
+              </a:lnSpc>
+            </a:pPr>
+            <a:r>
+              <a:rPr lang="zh-CN" sz="975">
+                <a:solidFill>
+                  <a:srgbClr val="8B97A8"/>
+                </a:solidFill>
+                <a:latin typeface="Source Han Sans CN"/>
+                <a:ea typeface="Source Han Sans CN"/>
+              </a:rPr>
+              <a:t>动态滚动的多机巢多无人机协同任务分配</a:t>
+            </a:r>
+            <a:r>
+              <a:rPr lang="en-US" sz="975">
+                <a:solidFill>
+                  <a:srgbClr val="8B97A8"/>
+                </a:solidFill>
+                <a:latin typeface="Source Han Sans CN"/>
+                <a:ea typeface="Source Han Sans CN"/>
+              </a:rPr>
+              <a:t> · </a:t>
+            </a:r>
+            <a:r>
+              <a:rPr lang="zh-CN" sz="975">
+                <a:solidFill>
+                  <a:srgbClr val="8B97A8"/>
+                </a:solidFill>
+                <a:latin typeface="Source Han Sans CN"/>
+                <a:ea typeface="Source Han Sans CN"/>
+              </a:rPr>
+              <a:t>进展汇报</a:t>
+            </a:r>
+            <a:endParaRPr/>
+          </a:p>
+        </p:txBody>
+      </p:sp>
+      <p:sp>
+        <p:nvSpPr>
+          <p:cNvPr id="59" name="文本框 93" descr="{&quot;isTemplate&quot;:true,&quot;type&quot;:&quot;text&quot;}"/>
+          <p:cNvSpPr txBox="1"/>
+          <p:nvPr/>
+        </p:nvSpPr>
+        <p:spPr>
+          <a:xfrm>
+            <a:off x="11296650" y="6572250"/>
+            <a:ext cx="514350" cy="171450"/>
+          </a:xfrm>
+          <a:prstGeom prst="rect">
+            <a:avLst/>
+          </a:prstGeom>
+        </p:spPr>
+        <p:txBody>
+          <a:bodyPr wrap="none" lIns="0" tIns="0" rIns="0" bIns="0"/>
+          <a:lstStyle/>
+          <a:p>
+            <a:pPr>
+              <a:lnSpc>
+                <a:spcPct val="100000"/>
+              </a:lnSpc>
+            </a:pPr>
+            <a:r>
+              <a:rPr lang="en-US" sz="1125" b="1">
+                <a:solidFill>
+                  <a:srgbClr val="1E4FA8"/>
+                </a:solidFill>
+                <a:latin typeface="Source Han Sans CN"/>
+                <a:ea typeface="Source Han Sans CN"/>
+              </a:rPr>
+              <a:t>11 / 16</a:t>
+            </a:r>
+            <a:endParaRPr/>
+          </a:p>
+        </p:txBody>
+      </p:sp>
+    </p:spTree>
+  </p:cSld>
+  <p:clrMapOvr>
+    <a:masterClrMapping/>
+  </p:clrMapOvr>
+</p:sld>
+</file>
+
+<file path=ppt/slides/slide12.xml><?xml version="1.0" encoding="utf-8"?>
+<p:sld xmlns:a="http://schemas.openxmlformats.org/drawingml/2006/main" xmlns:r="http://schemas.openxmlformats.org/officeDocument/2006/relationships" xmlns:p="http://schemas.openxmlformats.org/presentationml/2006/main">
+  <p:cSld>
+    <p:spTree>
+      <p:nvGrpSpPr>
+        <p:cNvPr id="1" name=""/>
+        <p:cNvGrpSpPr/>
+        <p:nvPr/>
+      </p:nvGrpSpPr>
+      <p:grpSpPr>
+        <a:xfrm>
+          <a:off x="0" y="0"/>
+          <a:ext cx="0" cy="0"/>
+          <a:chOff x="0" y="0"/>
+          <a:chExt cx="0" cy="0"/>
+        </a:xfrm>
+      </p:grpSpPr>
+      <p:sp>
+        <p:nvSpPr>
+          <p:cNvPr id="61" name="矩形 95"/>
+          <p:cNvSpPr/>
+          <p:nvPr/>
+        </p:nvSpPr>
+        <p:spPr>
+          <a:xfrm>
+            <a:off x="0" y="0"/>
+            <a:ext cx="12192000" cy="6858000"/>
+          </a:xfrm>
+          <a:prstGeom prst="rect">
+            <a:avLst/>
+          </a:prstGeom>
+          <a:solidFill>
+            <a:srgbClr val="FFFFFF"/>
+          </a:solidFill>
+          <a:ln/>
+        </p:spPr>
+        <p:txBody>
+          <a:bodyPr/>
+          <a:lstStyle/>
+          <a:p>
+            <a:endParaRPr/>
+          </a:p>
+        </p:txBody>
+      </p:sp>
+      <p:sp>
+        <p:nvSpPr>
+          <p:cNvPr id="62" name="矩形 96"/>
+          <p:cNvSpPr/>
+          <p:nvPr/>
+        </p:nvSpPr>
+        <p:spPr>
+          <a:xfrm>
+            <a:off x="0" y="0"/>
+            <a:ext cx="12192000" cy="114300"/>
+          </a:xfrm>
+          <a:prstGeom prst="rect">
+            <a:avLst/>
+          </a:prstGeom>
+          <a:solidFill>
+            <a:srgbClr val="1E4FA8"/>
+          </a:solidFill>
+          <a:ln/>
+        </p:spPr>
+        <p:txBody>
+          <a:bodyPr/>
+          <a:lstStyle/>
+          <a:p>
+            <a:endParaRPr/>
+          </a:p>
+        </p:txBody>
+      </p:sp>
+      <p:sp>
+        <p:nvSpPr>
+          <p:cNvPr id="63" name="矩形 97"/>
+          <p:cNvSpPr/>
+          <p:nvPr/>
+        </p:nvSpPr>
+        <p:spPr>
+          <a:xfrm>
+            <a:off x="381000" y="314325"/>
+            <a:ext cx="57150" cy="323850"/>
+          </a:xfrm>
+          <a:prstGeom prst="rect">
+            <a:avLst/>
+          </a:prstGeom>
+          <a:solidFill>
+            <a:srgbClr val="1E4FA8"/>
+          </a:solidFill>
+          <a:ln/>
+        </p:spPr>
+        <p:txBody>
+          <a:bodyPr/>
+          <a:lstStyle/>
+          <a:p>
+            <a:endParaRPr/>
+          </a:p>
+        </p:txBody>
+      </p:sp>
+      <p:sp>
+        <p:nvSpPr>
+          <p:cNvPr id="64" name="文本框 98" descr="{&quot;isTemplate&quot;:true,&quot;type&quot;:&quot;text&quot;}"/>
+          <p:cNvSpPr txBox="1"/>
+          <p:nvPr/>
+        </p:nvSpPr>
+        <p:spPr>
+          <a:xfrm>
+            <a:off x="571500" y="285750"/>
+            <a:ext cx="6753225" cy="371475"/>
+          </a:xfrm>
+          <a:prstGeom prst="rect">
+            <a:avLst/>
+          </a:prstGeom>
+        </p:spPr>
+        <p:txBody>
+          <a:bodyPr wrap="none" lIns="0" tIns="0" rIns="0" bIns="0"/>
+          <a:lstStyle/>
+          <a:p>
+            <a:pPr>
+              <a:lnSpc>
+                <a:spcPct val="100000"/>
+              </a:lnSpc>
+            </a:pPr>
+            <a:r>
+              <a:rPr lang="en-US" sz="2400" b="1">
+                <a:solidFill>
+                  <a:srgbClr val="0E3F8C"/>
+                </a:solidFill>
+                <a:latin typeface="Source Han Sans CN"/>
+                <a:ea typeface="Source Han Sans CN"/>
+              </a:rPr>
+              <a:t>exp01</a:t>
+            </a:r>
+            <a:r>
+              <a:rPr lang="zh-CN" sz="2400" b="1">
+                <a:solidFill>
+                  <a:srgbClr val="0E3F8C"/>
+                </a:solidFill>
+                <a:latin typeface="Source Han Sans CN"/>
+                <a:ea typeface="Source Han Sans CN"/>
+              </a:rPr>
+              <a:t>：多</a:t>
+            </a:r>
+            <a:r>
+              <a:rPr lang="en-US" sz="2400" b="1">
+                <a:solidFill>
+                  <a:srgbClr val="0E3F8C"/>
+                </a:solidFill>
+                <a:latin typeface="Source Han Sans CN"/>
+                <a:ea typeface="Source Han Sans CN"/>
+              </a:rPr>
+              <a:t> seed </a:t>
+            </a:r>
+            <a:r>
+              <a:rPr lang="zh-CN" sz="2400" b="1">
+                <a:solidFill>
+                  <a:srgbClr val="0E3F8C"/>
+                </a:solidFill>
+                <a:latin typeface="Source Han Sans CN"/>
+                <a:ea typeface="Source Han Sans CN"/>
+              </a:rPr>
+              <a:t>阶梯——改进方向一致且可复现</a:t>
+            </a:r>
+            <a:endParaRPr/>
+          </a:p>
+        </p:txBody>
+      </p:sp>
+      <p:sp>
+        <p:nvSpPr>
+          <p:cNvPr id="65" name="文本框 99" descr="{&quot;isTemplate&quot;:true,&quot;type&quot;:&quot;text&quot;}"/>
+          <p:cNvSpPr txBox="1"/>
+          <p:nvPr/>
+        </p:nvSpPr>
+        <p:spPr>
+          <a:xfrm>
+            <a:off x="571500" y="742950"/>
+            <a:ext cx="4381500" cy="171450"/>
+          </a:xfrm>
+          <a:prstGeom prst="rect">
+            <a:avLst/>
+          </a:prstGeom>
+        </p:spPr>
+        <p:txBody>
+          <a:bodyPr wrap="none" lIns="0" tIns="0" rIns="0" bIns="0"/>
+          <a:lstStyle/>
+          <a:p>
+            <a:pPr>
+              <a:lnSpc>
+                <a:spcPct val="100000"/>
+              </a:lnSpc>
+            </a:pPr>
+            <a:r>
               <a:rPr lang="zh-CN" sz="1125">
                 <a:solidFill>
                   <a:srgbClr val="8B97A8"/>
@@ -3439,7 +5018,7 @@
                 <a:latin typeface="Source Han Sans CN"/>
                 <a:ea typeface="Source Han Sans CN"/>
               </a:rPr>
-              <a:t>长程滚动</a:t>
+              <a:t>长程滚动 24 周期 · Poisson λ=5 · 3 seed 复跑（10-21 代码口径）</a:t>
             </a:r>
             <a:r>
               <a:rPr lang="en-US" sz="1125">
@@ -3449,7 +5028,7 @@
                 <a:latin typeface="Source Han Sans CN"/>
                 <a:ea typeface="Source Han Sans CN"/>
               </a:rPr>
-              <a:t> 24 </a:t>
+              <a:t/>
             </a:r>
             <a:r>
               <a:rPr lang="zh-CN" sz="1125">
@@ -3459,7 +5038,7 @@
                 <a:latin typeface="Source Han Sans CN"/>
                 <a:ea typeface="Source Han Sans CN"/>
               </a:rPr>
-              <a:t>周期</a:t>
+              <a:t/>
             </a:r>
             <a:r>
               <a:rPr lang="en-US" sz="1125">
@@ -3469,7 +5048,7 @@
                 <a:latin typeface="Source Han Sans CN"/>
                 <a:ea typeface="Source Han Sans CN"/>
               </a:rPr>
-              <a:t> · Poisson λ=5 · 3 seed </a:t>
+              <a:t/>
             </a:r>
             <a:r>
               <a:rPr lang="zh-CN" sz="1125">
@@ -3479,7 +5058,7 @@
                 <a:latin typeface="Source Han Sans CN"/>
                 <a:ea typeface="Source Han Sans CN"/>
               </a:rPr>
-              <a:t>全新复跑（当前代码版本）</a:t>
+              <a:t/>
             </a:r>
             <a:endParaRPr/>
           </a:p>
@@ -6578,7 +8157,7 @@
 </p:sld>
 </file>
 
-<file path=ppt/slides/slide12.xml><?xml version="1.0" encoding="utf-8"?>
+<file path=ppt/slides/slide13.xml><?xml version="1.0" encoding="utf-8"?>
 <p:sld xmlns:a="http://schemas.openxmlformats.org/drawingml/2006/main" xmlns:r="http://schemas.openxmlformats.org/officeDocument/2006/relationships" xmlns:p="http://schemas.openxmlformats.org/presentationml/2006/main">
   <p:cSld>
     <p:spTree>
@@ -6776,7 +8355,7 @@
                 <a:latin typeface="Source Han Sans CN"/>
                 <a:ea typeface="Source Han Sans CN"/>
               </a:rPr>
-              <a:t>17 </a:t>
+              <a:t>17 格变体扫描（N = 50/100/200 × 名额族与能力族，10-20 扫描口径），下图为「吞吐—耗时—质量」权衡核心图</a:t>
             </a:r>
             <a:r>
               <a:rPr lang="zh-CN" sz="1125">
@@ -6786,7 +8365,7 @@
                 <a:latin typeface="Source Han Sans CN"/>
                 <a:ea typeface="Source Han Sans CN"/>
               </a:rPr>
-              <a:t>格变体扫描（</a:t>
+              <a:t/>
             </a:r>
             <a:r>
               <a:rPr lang="en-US" sz="1125">
@@ -6796,7 +8375,7 @@
                 <a:latin typeface="Source Han Sans CN"/>
                 <a:ea typeface="Source Han Sans CN"/>
               </a:rPr>
-              <a:t>N = 50 / 100 / 200 × </a:t>
+              <a:t/>
             </a:r>
             <a:r>
               <a:rPr lang="zh-CN" sz="1125">
@@ -6806,7 +8385,7 @@
                 <a:latin typeface="Source Han Sans CN"/>
                 <a:ea typeface="Source Han Sans CN"/>
               </a:rPr>
-              <a:t>名额族与能力族），下图为「吞吐—耗时—质量」权衡核心图</a:t>
+              <a:t/>
             </a:r>
             <a:endParaRPr/>
           </a:p>
@@ -7441,7 +9020,7 @@
 </p:sld>
 </file>
 
-<file path=ppt/slides/slide13.xml><?xml version="1.0" encoding="utf-8"?>
+<file path=ppt/slides/slide14.xml><?xml version="1.0" encoding="utf-8"?>
 <p:sld xmlns:a="http://schemas.openxmlformats.org/drawingml/2006/main" xmlns:r="http://schemas.openxmlformats.org/officeDocument/2006/relationships" xmlns:p="http://schemas.openxmlformats.org/presentationml/2006/main">
   <p:cSld>
     <p:spTree>
@@ -8921,7 +10500,7 @@
 </p:sld>
 </file>
 
-<file path=ppt/slides/slide14.xml><?xml version="1.0" encoding="utf-8"?>
+<file path=ppt/slides/slide15.xml><?xml version="1.0" encoding="utf-8"?>
 <p:sld xmlns:a="http://schemas.openxmlformats.org/drawingml/2006/main" xmlns:r="http://schemas.openxmlformats.org/officeDocument/2006/relationships" xmlns:p="http://schemas.openxmlformats.org/presentationml/2006/main">
   <p:cSld>
     <p:spTree>
@@ -9745,7 +11324,7 @@
                 <a:latin typeface="Source Han Sans CN"/>
                 <a:ea typeface="Source Han Sans CN"/>
               </a:rPr>
-              <a:t>exp02 </a:t>
+              <a:t>exp02 为单 seed、40 代轻预算，且为 N=50/100/200 旧规模口径（现行 10/50/100 待复跑）；实测数据均在 big-M 旧口径取得、门禁口径待复跑——量的是曲线形状，非生产级解质量。</a:t>
             </a:r>
             <a:r>
               <a:rPr lang="zh-CN" sz="1050">
@@ -9755,7 +11334,7 @@
                 <a:latin typeface="Source Han Sans CN"/>
                 <a:ea typeface="Source Han Sans CN"/>
               </a:rPr>
-              <a:t>为单</a:t>
+              <a:t/>
             </a:r>
             <a:r>
               <a:rPr lang="en-US" sz="1050">
@@ -9765,7 +11344,7 @@
                 <a:latin typeface="Source Han Sans CN"/>
                 <a:ea typeface="Source Han Sans CN"/>
               </a:rPr>
-              <a:t> seed</a:t>
+              <a:t/>
             </a:r>
             <a:r>
               <a:rPr lang="zh-CN" sz="1050">
@@ -9775,7 +11354,7 @@
                 <a:latin typeface="Source Han Sans CN"/>
                 <a:ea typeface="Source Han Sans CN"/>
               </a:rPr>
-              <a:t>、</a:t>
+              <a:t/>
             </a:r>
             <a:r>
               <a:rPr lang="en-US" sz="1050">
@@ -9785,7 +11364,7 @@
                 <a:latin typeface="Source Han Sans CN"/>
                 <a:ea typeface="Source Han Sans CN"/>
               </a:rPr>
-              <a:t>40 </a:t>
+              <a:t/>
             </a:r>
             <a:r>
               <a:rPr lang="zh-CN" sz="1050">
@@ -9795,7 +11374,7 @@
                 <a:latin typeface="Source Han Sans CN"/>
                 <a:ea typeface="Source Han Sans CN"/>
               </a:rPr>
-              <a:t>代轻预算——量的是「吞吐</a:t>
+              <a:t/>
             </a:r>
             <a:r>
               <a:rPr lang="en-US" sz="1050">
@@ -9805,7 +11384,7 @@
                 <a:latin typeface="Source Han Sans CN"/>
                 <a:ea typeface="Source Han Sans CN"/>
               </a:rPr>
-              <a:t>-</a:t>
+              <a:t/>
             </a:r>
             <a:r>
               <a:rPr lang="zh-CN" sz="1050">
@@ -9815,7 +11394,7 @@
                 <a:latin typeface="Source Han Sans CN"/>
                 <a:ea typeface="Source Han Sans CN"/>
               </a:rPr>
-              <a:t>耗时</a:t>
+              <a:t/>
             </a:r>
             <a:r>
               <a:rPr lang="en-US" sz="1050">
@@ -9825,7 +11404,7 @@
                 <a:latin typeface="Source Han Sans CN"/>
                 <a:ea typeface="Source Han Sans CN"/>
               </a:rPr>
-              <a:t>-</a:t>
+              <a:t/>
             </a:r>
             <a:r>
               <a:rPr lang="zh-CN" sz="1050">
@@ -9835,7 +11414,7 @@
                 <a:latin typeface="Source Han Sans CN"/>
                 <a:ea typeface="Source Han Sans CN"/>
               </a:rPr>
-              <a:t>质量」曲线形状，不是生产级解质量；生产化（选择数接</a:t>
+              <a:t/>
             </a:r>
             <a:r>
               <a:rPr lang="en-US" sz="1050">
@@ -9845,7 +11424,7 @@
                 <a:latin typeface="Source Han Sans CN"/>
                 <a:ea typeface="Source Han Sans CN"/>
               </a:rPr>
-              <a:t> cap(t)</a:t>
+              <a:t/>
             </a:r>
             <a:r>
               <a:rPr lang="zh-CN" sz="1050">
@@ -9855,7 +11434,7 @@
                 <a:latin typeface="Source Han Sans CN"/>
                 <a:ea typeface="Source Han Sans CN"/>
               </a:rPr>
-              <a:t>）须走</a:t>
+              <a:t/>
             </a:r>
             <a:r>
               <a:rPr lang="en-US" sz="1050">
@@ -9865,7 +11444,7 @@
                 <a:latin typeface="Source Han Sans CN"/>
                 <a:ea typeface="Source Han Sans CN"/>
               </a:rPr>
-              <a:t> exp04 </a:t>
+              <a:t/>
             </a:r>
             <a:r>
               <a:rPr lang="zh-CN" sz="1050">
@@ -9875,7 +11454,7 @@
                 <a:latin typeface="Source Han Sans CN"/>
                 <a:ea typeface="Source Han Sans CN"/>
               </a:rPr>
-              <a:t>消融评估后落地。</a:t>
+              <a:t/>
             </a:r>
             <a:endParaRPr/>
           </a:p>
@@ -11414,7 +12993,7 @@
 </p:sld>
 </file>
 
-<file path=ppt/slides/slide15.xml><?xml version="1.0" encoding="utf-8"?>
+<file path=ppt/slides/slide16.xml><?xml version="1.0" encoding="utf-8"?>
 <p:sld xmlns:a="http://schemas.openxmlformats.org/drawingml/2006/main" xmlns:r="http://schemas.openxmlformats.org/officeDocument/2006/relationships" xmlns:p="http://schemas.openxmlformats.org/presentationml/2006/main">
   <p:cSld>
     <p:spTree>
@@ -20941,7 +22520,7 @@
                 <a:latin typeface="Source Han Sans CN"/>
                 <a:ea typeface="Source Han Sans CN"/>
               </a:rPr>
-              <a:t>cap(t) = floor(B(t) / c_med)</a:t>
+              <a:t>cap(t) = max(min_cap, ⌊B(t)/c_med⌋)</a:t>
             </a:r>
             <a:r>
               <a:rPr lang="zh-CN" sz="975">
@@ -21011,7 +22590,7 @@
                 <a:latin typeface="Source Han Sans CN"/>
                 <a:ea typeface="Source Han Sans CN"/>
               </a:rPr>
-              <a:t>均为机数倍率</a:t>
+              <a:t>为机数倍率</a:t>
             </a:r>
             <a:endParaRPr/>
           </a:p>
@@ -22536,7 +24115,7 @@
                 <a:latin typeface="Source Han Sans CN"/>
                 <a:ea typeface="Source Han Sans CN"/>
               </a:rPr>
-              <a:t>单任务往返可达</a:t>
+              <a:t>往返航程可达（DEM 口径）</a:t>
             </a:r>
             <a:r>
               <a:rPr lang="en-US" sz="1050">
@@ -22546,7 +24125,7 @@
                 <a:latin typeface="Source Han Sans CN"/>
                 <a:ea typeface="Source Han Sans CN"/>
               </a:rPr>
-              <a:t> · </a:t>
+              <a:t/>
             </a:r>
             <a:r>
               <a:rPr lang="zh-CN" sz="1050">
@@ -22556,7 +24135,7 @@
                 <a:latin typeface="Source Han Sans CN"/>
                 <a:ea typeface="Source Han Sans CN"/>
               </a:rPr>
-              <a:t>三维地形不可达；闸门②</a:t>
+              <a:t>闸门②</a:t>
             </a:r>
             <a:r>
               <a:rPr lang="en-US" sz="1050">
@@ -22851,7 +24430,7 @@
 </file>
 
 <file path=ppt/slides/slide8.xml><?xml version="1.0" encoding="utf-8"?>
-<p:sld xmlns:a="http://schemas.openxmlformats.org/drawingml/2006/main" xmlns:r="http://schemas.openxmlformats.org/officeDocument/2006/relationships" xmlns:p="http://schemas.openxmlformats.org/presentationml/2006/main">
+<p:sld xmlns:a="http://schemas.openxmlformats.org/drawingml/2006/main" xmlns:p="http://schemas.openxmlformats.org/presentationml/2006/main" xmlns:r="http://schemas.openxmlformats.org/officeDocument/2006/relationships">
   <p:cSld>
     <p:spTree>
       <p:nvGrpSpPr>
@@ -22859,17 +24438,10 @@
         <p:cNvGrpSpPr/>
         <p:nvPr/>
       </p:nvGrpSpPr>
-      <p:grpSpPr>
-        <a:xfrm>
-          <a:off x="0" y="0"/>
-          <a:ext cx="0" cy="0"/>
-          <a:chOff x="0" y="0"/>
-          <a:chExt cx="0" cy="0"/>
-        </a:xfrm>
-      </p:grpSpPr>
-      <p:sp>
-        <p:nvSpPr>
-          <p:cNvPr id="432" name="矩形 431"/>
+      <p:grpSpPr/>
+      <p:sp>
+        <p:nvSpPr>
+          <p:cNvPr id="350" name="矩形 349"/>
           <p:cNvSpPr/>
           <p:nvPr/>
         </p:nvSpPr>
@@ -22896,7 +24468,7 @@
       </p:sp>
       <p:sp>
         <p:nvSpPr>
-          <p:cNvPr id="433" name="矩形 432"/>
+          <p:cNvPr id="351" name="矩形 350"/>
           <p:cNvSpPr/>
           <p:nvPr/>
         </p:nvSpPr>
@@ -22923,41 +24495,14 @@
       </p:sp>
       <p:sp>
         <p:nvSpPr>
-          <p:cNvPr id="434" name="矩形 433"/>
-          <p:cNvSpPr/>
-          <p:nvPr/>
-        </p:nvSpPr>
-        <p:spPr>
-          <a:xfrm>
-            <a:off x="381000" y="314325"/>
-            <a:ext cx="57150" cy="323850"/>
-          </a:xfrm>
-          <a:prstGeom prst="rect">
-            <a:avLst/>
-          </a:prstGeom>
-          <a:solidFill>
-            <a:srgbClr val="1E4FA8"/>
-          </a:solidFill>
-          <a:ln/>
-        </p:spPr>
-        <p:txBody>
-          <a:bodyPr/>
-          <a:lstStyle/>
-          <a:p>
-            <a:endParaRPr/>
-          </a:p>
-        </p:txBody>
-      </p:sp>
-      <p:sp>
-        <p:nvSpPr>
-          <p:cNvPr id="435" name="文本框 434" descr="{&quot;isTemplate&quot;:true,&quot;type&quot;:&quot;text&quot;}"/>
+          <p:cNvPr id="352" name="文本框 351" descr="{&quot;isTemplate&quot;:true,&quot;type&quot;:&quot;text&quot;}"/>
           <p:cNvSpPr txBox="1"/>
           <p:nvPr/>
         </p:nvSpPr>
         <p:spPr>
           <a:xfrm>
-            <a:off x="571500" y="285750"/>
-            <a:ext cx="4629150" cy="371475"/>
+            <a:off x="7734300" y="1238250"/>
+            <a:ext cx="3886200" cy="3771900"/>
           </a:xfrm>
           <a:prstGeom prst="rect">
             <a:avLst/>
@@ -22973,49 +24518,56 @@
               </a:lnSpc>
             </a:pPr>
             <a:r>
-              <a:rPr lang="zh-CN" sz="2400" b="1">
-                <a:solidFill>
-                  <a:srgbClr val="0E3F8C"/>
-                </a:solidFill>
-                <a:latin typeface="Source Han Sans CN"/>
-                <a:ea typeface="Source Han Sans CN"/>
-              </a:rPr>
-              <a:t>改进离散映射差分进化（</a:t>
-            </a:r>
-            <a:r>
-              <a:rPr lang="en-US" sz="2400" b="1">
-                <a:solidFill>
-                  <a:srgbClr val="0E3F8C"/>
-                </a:solidFill>
-                <a:latin typeface="Source Han Sans CN"/>
-                <a:ea typeface="Source Han Sans CN"/>
-              </a:rPr>
-              <a:t>DMDE</a:t>
-            </a:r>
-            <a:r>
-              <a:rPr lang="zh-CN" sz="2400" b="1">
-                <a:solidFill>
-                  <a:srgbClr val="0E3F8C"/>
-                </a:solidFill>
-                <a:latin typeface="Source Han Sans CN"/>
-                <a:ea typeface="Source Han Sans CN"/>
-              </a:rPr>
-              <a:t>）</a:t>
-            </a:r>
-            <a:endParaRPr/>
-          </a:p>
-        </p:txBody>
-      </p:sp>
-      <p:sp>
-        <p:nvSpPr>
-          <p:cNvPr id="436" name="文本框 435" descr="{&quot;isTemplate&quot;:true,&quot;type&quot;:&quot;text&quot;}"/>
+              <a:rPr lang="en-US" sz="24750" b="1">
+                <a:solidFill>
+                  <a:srgbClr val="E8EFF8"/>
+                </a:solidFill>
+                <a:latin typeface="Source Han Sans CN"/>
+                <a:ea typeface="Source Han Sans CN"/>
+              </a:rPr>
+              <a:t>03</a:t>
+            </a:r>
+            <a:endParaRPr/>
+          </a:p>
+        </p:txBody>
+      </p:sp>
+      <p:sp>
+        <p:nvSpPr>
+          <p:cNvPr id="353" name="矩形 352"/>
+          <p:cNvSpPr/>
+          <p:nvPr/>
+        </p:nvSpPr>
+        <p:spPr>
+          <a:xfrm>
+            <a:off x="762000" y="1990725"/>
+            <a:ext cx="381000" cy="38100"/>
+          </a:xfrm>
+          <a:prstGeom prst="rect">
+            <a:avLst/>
+          </a:prstGeom>
+          <a:solidFill>
+            <a:srgbClr val="FFC107"/>
+          </a:solidFill>
+          <a:ln/>
+        </p:spPr>
+        <p:txBody>
+          <a:bodyPr/>
+          <a:lstStyle/>
+          <a:p>
+            <a:endParaRPr/>
+          </a:p>
+        </p:txBody>
+      </p:sp>
+      <p:sp>
+        <p:nvSpPr>
+          <p:cNvPr id="354" name="文本框 353" descr="{&quot;isTemplate&quot;:true,&quot;type&quot;:&quot;text&quot;}"/>
           <p:cNvSpPr txBox="1"/>
           <p:nvPr/>
         </p:nvSpPr>
         <p:spPr>
           <a:xfrm>
-            <a:off x="571500" y="742950"/>
-            <a:ext cx="4962525" cy="171450"/>
+            <a:off x="1276350" y="1905000"/>
+            <a:ext cx="1457325" cy="200025"/>
           </a:xfrm>
           <a:prstGeom prst="rect">
             <a:avLst/>
@@ -23031,129 +24583,29 @@
               </a:lnSpc>
             </a:pPr>
             <a:r>
-              <a:rPr lang="zh-CN" sz="1125">
-                <a:solidFill>
-                  <a:srgbClr val="8B97A8"/>
-                </a:solidFill>
-                <a:latin typeface="Source Han Sans CN"/>
-                <a:ea typeface="Source Han Sans CN"/>
-              </a:rPr>
-              <a:t>连续编码承载「</a:t>
-            </a:r>
-            <a:r>
-              <a:rPr lang="en-US" sz="1125">
-                <a:solidFill>
-                  <a:srgbClr val="8B97A8"/>
-                </a:solidFill>
-                <a:latin typeface="Source Han Sans CN"/>
-                <a:ea typeface="Source Han Sans CN"/>
-              </a:rPr>
-              <a:t>UAV </a:t>
-            </a:r>
-            <a:r>
-              <a:rPr lang="zh-CN" sz="1125">
-                <a:solidFill>
-                  <a:srgbClr val="8B97A8"/>
-                </a:solidFill>
-                <a:latin typeface="Source Han Sans CN"/>
-                <a:ea typeface="Source Han Sans CN"/>
-              </a:rPr>
-              <a:t>归属</a:t>
-            </a:r>
-            <a:r>
-              <a:rPr lang="en-US" sz="1125">
-                <a:solidFill>
-                  <a:srgbClr val="8B97A8"/>
-                </a:solidFill>
-                <a:latin typeface="Source Han Sans CN"/>
-                <a:ea typeface="Source Han Sans CN"/>
-              </a:rPr>
-              <a:t> + </a:t>
-            </a:r>
-            <a:r>
-              <a:rPr lang="zh-CN" sz="1125">
-                <a:solidFill>
-                  <a:srgbClr val="8B97A8"/>
-                </a:solidFill>
-                <a:latin typeface="Source Han Sans CN"/>
-                <a:ea typeface="Source Han Sans CN"/>
-              </a:rPr>
-              <a:t>访问顺序」，差分算子的搜索方向由地理代价引导</a:t>
-            </a:r>
-            <a:endParaRPr/>
-          </a:p>
-        </p:txBody>
-      </p:sp>
-      <p:pic>
-        <p:nvPicPr>
-          <p:cNvPr id="437" name="图形 436"/>
-          <p:cNvPicPr>
-            <a:picLocks noChangeAspect="1"/>
-          </p:cNvPicPr>
-          <p:nvPr/>
-        </p:nvPicPr>
-        <p:blipFill>
-          <a:blip r:embed="rId2">
-            <a:extLst>
-              <a:ext uri="{96DAC541-7B7A-43D3-8B79-37D633B846F1}">
-                <asvg:svgBlip xmlns:asvg="http://schemas.microsoft.com/office/drawing/2016/SVG/main" r:embed="rId3"/>
-              </a:ext>
-            </a:extLst>
-          </a:blip>
-          <a:stretch>
-            <a:fillRect/>
-          </a:stretch>
-        </p:blipFill>
-        <p:spPr>
-          <a:xfrm>
-            <a:off x="571500" y="933450"/>
-            <a:ext cx="11049000" cy="2400300"/>
-          </a:xfrm>
-          <a:prstGeom prst="rect">
-            <a:avLst/>
-          </a:prstGeom>
-          <a:ln/>
-        </p:spPr>
-      </p:pic>
-      <p:sp>
-        <p:nvSpPr>
-          <p:cNvPr id="438" name="矩形: 圆角 437"/>
-          <p:cNvSpPr/>
-          <p:nvPr/>
-        </p:nvSpPr>
-        <p:spPr>
-          <a:xfrm>
-            <a:off x="571500" y="3543300"/>
-            <a:ext cx="323850" cy="323850"/>
-          </a:xfrm>
-          <a:prstGeom prst="roundRect">
-            <a:avLst>
-              <a:gd name="adj" fmla="val 50000"/>
-            </a:avLst>
-          </a:prstGeom>
-          <a:solidFill>
-            <a:srgbClr val="1E4FA8"/>
-          </a:solidFill>
-          <a:ln/>
-        </p:spPr>
-        <p:txBody>
-          <a:bodyPr/>
-          <a:lstStyle/>
-          <a:p>
-            <a:endParaRPr/>
-          </a:p>
-        </p:txBody>
-      </p:sp>
-      <p:sp>
-        <p:nvSpPr>
-          <p:cNvPr id="439" name="文本框 438" descr="{&quot;isTemplate&quot;:true,&quot;type&quot;:&quot;text&quot;}"/>
+              <a:rPr lang="en-US" sz="1275" spc="375">
+                <a:solidFill>
+                  <a:srgbClr val="3D7BD9"/>
+                </a:solidFill>
+                <a:latin typeface="Source Han Sans CN"/>
+                <a:ea typeface="Source Han Sans CN"/>
+              </a:rPr>
+              <a:t>CHAPTER 03</a:t>
+            </a:r>
+            <a:endParaRPr/>
+          </a:p>
+        </p:txBody>
+      </p:sp>
+      <p:sp>
+        <p:nvSpPr>
+          <p:cNvPr id="355" name="文本框 354" descr="{&quot;isTemplate&quot;:true,&quot;type&quot;:&quot;text&quot;}"/>
           <p:cNvSpPr txBox="1"/>
           <p:nvPr/>
         </p:nvSpPr>
         <p:spPr>
           <a:xfrm>
-            <a:off x="685800" y="3609975"/>
-            <a:ext cx="95250" cy="190500"/>
+            <a:off x="762000" y="2276475"/>
+            <a:ext cx="7239000" cy="504825"/>
           </a:xfrm>
           <a:prstGeom prst="rect">
             <a:avLst/>
@@ -23169,29 +24621,406 @@
               </a:lnSpc>
             </a:pPr>
             <a:r>
-              <a:rPr lang="en-US" sz="1200" b="1">
-                <a:solidFill>
-                  <a:srgbClr val="FFFFFF"/>
-                </a:solidFill>
-                <a:latin typeface="Source Han Sans CN"/>
-                <a:ea typeface="Source Han Sans CN"/>
-              </a:rPr>
-              <a:t>1</a:t>
-            </a:r>
-            <a:endParaRPr/>
-          </a:p>
-        </p:txBody>
-      </p:sp>
-      <p:sp>
-        <p:nvSpPr>
-          <p:cNvPr id="440" name="文本框 439" descr="{&quot;isTemplate&quot;:true,&quot;type&quot;:&quot;text&quot;}"/>
+              <a:rPr lang="zh-CN" sz="3300" b="1">
+                <a:solidFill>
+                  <a:srgbClr val="0E3F8C"/>
+                </a:solidFill>
+                <a:latin typeface="Source Han Sans CN"/>
+                <a:ea typeface="Source Han Sans CN"/>
+              </a:rPr>
+              <a:t>第二阶段：选择性 MUAS 与 DMDE</a:t>
+            </a:r>
+            <a:endParaRPr/>
+          </a:p>
+        </p:txBody>
+      </p:sp>
+      <p:sp>
+        <p:nvSpPr>
+          <p:cNvPr id="356" name="矩形: 圆角 355"/>
+          <p:cNvSpPr/>
+          <p:nvPr/>
+        </p:nvSpPr>
+        <p:spPr>
+          <a:xfrm>
+            <a:off x="762000" y="3209925"/>
+            <a:ext cx="76200" cy="76200"/>
+          </a:xfrm>
+          <a:prstGeom prst="roundRect">
+            <a:avLst>
+              <a:gd name="adj" fmla="val 50000"/>
+            </a:avLst>
+          </a:prstGeom>
+          <a:solidFill>
+            <a:srgbClr val="1E4FA8"/>
+          </a:solidFill>
+          <a:ln/>
+        </p:spPr>
+        <p:txBody>
+          <a:bodyPr/>
+          <a:lstStyle/>
+          <a:p>
+            <a:endParaRPr/>
+          </a:p>
+        </p:txBody>
+      </p:sp>
+      <p:sp>
+        <p:nvSpPr>
+          <p:cNvPr id="357" name="文本框 356" descr="{&quot;isTemplate&quot;:true,&quot;type&quot;:&quot;text&quot;}"/>
           <p:cNvSpPr txBox="1"/>
           <p:nvPr/>
         </p:nvSpPr>
         <p:spPr>
           <a:xfrm>
-            <a:off x="990600" y="3600450"/>
-            <a:ext cx="857250" cy="209550"/>
+            <a:off x="952500" y="3105150"/>
+            <a:ext cx="7048500" cy="742950"/>
+          </a:xfrm>
+          <a:prstGeom prst="rect">
+            <a:avLst/>
+          </a:prstGeom>
+        </p:spPr>
+        <p:txBody>
+          <a:bodyPr wrap="square" lIns="0" tIns="0" rIns="0" bIns="0">
+            <a:normAutofit/>
+          </a:bodyPr>
+          <a:lstStyle/>
+          <a:p>
+            <a:pPr>
+              <a:lnSpc>
+                <a:spcPct val="170000"/>
+              </a:lnSpc>
+            </a:pPr>
+            <a:r>
+              <a:rPr lang="zh-CN" sz="1425" b="1">
+                <a:solidFill>
+                  <a:srgbClr val="1A2230"/>
+                </a:solidFill>
+                <a:latin typeface="Source Han Sans CN"/>
+                <a:ea typeface="Source Han Sans CN"/>
+              </a:rPr>
+              <a:t>单周期精细规划建模为多机巢条件下的选择性多无人机协同任务分配：是否执行 × 归属 × 顺序 × 终点机巢联合决策</a:t>
+            </a:r>
+            <a:r>
+              <a:rPr lang="zh-CN" sz="1425">
+                <a:solidFill>
+                  <a:srgbClr val="1A2230"/>
+                </a:solidFill>
+                <a:latin typeface="Source Han Sans CN"/>
+                <a:ea typeface="Source Han Sans CN"/>
+              </a:rPr>
+              <a:t/>
+            </a:r>
+            <a:r>
+              <a:rPr lang="en-US" sz="1425">
+                <a:solidFill>
+                  <a:srgbClr val="1A2230"/>
+                </a:solidFill>
+                <a:latin typeface="Source Han Sans CN"/>
+                <a:ea typeface="Source Han Sans CN"/>
+              </a:rPr>
+              <a:t/>
+            </a:r>
+            <a:r>
+              <a:rPr lang="zh-CN" sz="1425">
+                <a:solidFill>
+                  <a:srgbClr val="1A2230"/>
+                </a:solidFill>
+                <a:latin typeface="Source Han Sans CN"/>
+                <a:ea typeface="Source Han Sans CN"/>
+              </a:rPr>
+              <a:t/>
+            </a:r>
+            <a:r>
+              <a:rPr lang="en-US" sz="1425">
+                <a:solidFill>
+                  <a:srgbClr val="1A2230"/>
+                </a:solidFill>
+                <a:latin typeface="Source Han Sans CN"/>
+                <a:ea typeface="Source Han Sans CN"/>
+              </a:rPr>
+              <a:t/>
+            </a:r>
+            <a:r>
+              <a:rPr lang="zh-CN" sz="1425">
+                <a:solidFill>
+                  <a:srgbClr val="1A2230"/>
+                </a:solidFill>
+                <a:latin typeface="Source Han Sans CN"/>
+                <a:ea typeface="Source Han Sans CN"/>
+              </a:rPr>
+              <a:t/>
+            </a:r>
+            <a:endParaRPr/>
+          </a:p>
+        </p:txBody>
+      </p:sp>
+      <p:sp>
+        <p:nvSpPr>
+          <p:cNvPr id="358" name="矩形: 圆角 357"/>
+          <p:cNvSpPr/>
+          <p:nvPr/>
+        </p:nvSpPr>
+        <p:spPr>
+          <a:xfrm>
+            <a:off x="762000" y="4124325"/>
+            <a:ext cx="76200" cy="76200"/>
+          </a:xfrm>
+          <a:prstGeom prst="roundRect">
+            <a:avLst>
+              <a:gd name="adj" fmla="val 50000"/>
+            </a:avLst>
+          </a:prstGeom>
+          <a:solidFill>
+            <a:srgbClr val="1E4FA8"/>
+          </a:solidFill>
+          <a:ln/>
+        </p:spPr>
+        <p:txBody>
+          <a:bodyPr/>
+          <a:lstStyle/>
+          <a:p>
+            <a:endParaRPr/>
+          </a:p>
+        </p:txBody>
+      </p:sp>
+      <p:sp>
+        <p:nvSpPr>
+          <p:cNvPr id="359" name="文本框 358" descr="{&quot;isTemplate&quot;:true,&quot;type&quot;:&quot;text&quot;}"/>
+          <p:cNvSpPr txBox="1"/>
+          <p:nvPr/>
+        </p:nvSpPr>
+        <p:spPr>
+          <a:xfrm>
+            <a:off x="952500" y="4019550"/>
+            <a:ext cx="7048500" cy="742950"/>
+          </a:xfrm>
+          <a:prstGeom prst="rect">
+            <a:avLst/>
+          </a:prstGeom>
+        </p:spPr>
+        <p:txBody>
+          <a:bodyPr wrap="square" lIns="0" tIns="0" rIns="0" bIns="0">
+            <a:normAutofit/>
+          </a:bodyPr>
+          <a:lstStyle/>
+          <a:p>
+            <a:pPr>
+              <a:lnSpc>
+                <a:spcPct val="170000"/>
+              </a:lnSpc>
+            </a:pPr>
+            <a:r>
+              <a:rPr lang="zh-CN" sz="1425">
+                <a:solidFill>
+                  <a:srgbClr val="1A2230"/>
+                </a:solidFill>
+                <a:latin typeface="Source Han Sans CN"/>
+                <a:ea typeface="Source Han Sans CN"/>
+              </a:rPr>
+              <a:t>以离散映射差分进化（DMDE）为基础做结构扩展，支持部分分配、顺序搜索与异巢终止</a:t>
+            </a:r>
+            <a:r>
+              <a:rPr lang="zh-CN" sz="1425" b="1">
+                <a:solidFill>
+                  <a:srgbClr val="1A2230"/>
+                </a:solidFill>
+                <a:latin typeface="Source Han Sans CN"/>
+                <a:ea typeface="Source Han Sans CN"/>
+              </a:rPr>
+              <a:t/>
+            </a:r>
+            <a:r>
+              <a:rPr lang="zh-CN" sz="1425">
+                <a:solidFill>
+                  <a:srgbClr val="1A2230"/>
+                </a:solidFill>
+                <a:latin typeface="Source Han Sans CN"/>
+                <a:ea typeface="Source Han Sans CN"/>
+              </a:rPr>
+              <a:t/>
+            </a:r>
+            <a:r>
+              <a:rPr lang="en-US" sz="1425">
+                <a:solidFill>
+                  <a:srgbClr val="1A2230"/>
+                </a:solidFill>
+                <a:latin typeface="Source Han Sans CN"/>
+                <a:ea typeface="Source Han Sans CN"/>
+              </a:rPr>
+              <a:t/>
+            </a:r>
+            <a:r>
+              <a:rPr lang="zh-CN" sz="1425">
+                <a:solidFill>
+                  <a:srgbClr val="1A2230"/>
+                </a:solidFill>
+                <a:latin typeface="Source Han Sans CN"/>
+                <a:ea typeface="Source Han Sans CN"/>
+              </a:rPr>
+              <a:t/>
+            </a:r>
+            <a:r>
+              <a:rPr lang="en-US" sz="1425">
+                <a:solidFill>
+                  <a:srgbClr val="1A2230"/>
+                </a:solidFill>
+                <a:latin typeface="Source Han Sans CN"/>
+                <a:ea typeface="Source Han Sans CN"/>
+              </a:rPr>
+              <a:t/>
+            </a:r>
+            <a:r>
+              <a:rPr lang="en-US" sz="1425" b="1">
+                <a:solidFill>
+                  <a:srgbClr val="1A2230"/>
+                </a:solidFill>
+                <a:latin typeface="Source Han Sans CN"/>
+                <a:ea typeface="Source Han Sans CN"/>
+              </a:rPr>
+              <a:t/>
+            </a:r>
+            <a:r>
+              <a:rPr lang="en-US" sz="1425">
+                <a:solidFill>
+                  <a:srgbClr val="1A2230"/>
+                </a:solidFill>
+                <a:latin typeface="Source Han Sans CN"/>
+                <a:ea typeface="Source Han Sans CN"/>
+              </a:rPr>
+              <a:t/>
+            </a:r>
+            <a:r>
+              <a:rPr lang="zh-CN" sz="1425">
+                <a:solidFill>
+                  <a:srgbClr val="1A2230"/>
+                </a:solidFill>
+                <a:latin typeface="Source Han Sans CN"/>
+                <a:ea typeface="Source Han Sans CN"/>
+              </a:rPr>
+              <a:t/>
+            </a:r>
+            <a:r>
+              <a:rPr lang="en-US" sz="1425">
+                <a:solidFill>
+                  <a:srgbClr val="1A2230"/>
+                </a:solidFill>
+                <a:latin typeface="Source Han Sans CN"/>
+                <a:ea typeface="Source Han Sans CN"/>
+              </a:rPr>
+              <a:t/>
+            </a:r>
+            <a:r>
+              <a:rPr lang="zh-CN" sz="1425">
+                <a:solidFill>
+                  <a:srgbClr val="1A2230"/>
+                </a:solidFill>
+                <a:latin typeface="Source Han Sans CN"/>
+                <a:ea typeface="Source Han Sans CN"/>
+              </a:rPr>
+              <a:t/>
+            </a:r>
+            <a:endParaRPr/>
+          </a:p>
+        </p:txBody>
+      </p:sp>
+      <p:sp>
+        <p:nvSpPr>
+          <p:cNvPr id="360" name="文本框 359" descr="{&quot;isTemplate&quot;:true,&quot;type&quot;:&quot;text&quot;}"/>
+          <p:cNvSpPr txBox="1"/>
+          <p:nvPr/>
+        </p:nvSpPr>
+        <p:spPr>
+          <a:xfrm>
+            <a:off x="762000" y="5048250"/>
+            <a:ext cx="7239000" cy="666750"/>
+          </a:xfrm>
+          <a:prstGeom prst="rect">
+            <a:avLst/>
+          </a:prstGeom>
+        </p:spPr>
+        <p:txBody>
+          <a:bodyPr wrap="square" lIns="0" tIns="0" rIns="0" bIns="0">
+            <a:normAutofit/>
+          </a:bodyPr>
+          <a:lstStyle/>
+          <a:p>
+            <a:pPr>
+              <a:lnSpc>
+                <a:spcPct val="180000"/>
+              </a:lnSpc>
+            </a:pPr>
+            <a:r>
+              <a:rPr lang="zh-CN" sz="1200">
+                <a:solidFill>
+                  <a:srgbClr val="4A5568"/>
+                </a:solidFill>
+                <a:latin typeface="Source Han Sans CN"/>
+                <a:ea typeface="Source Han Sans CN"/>
+              </a:rPr>
+              <a:t>起点机巢由 UAV 停靠状态唯一确定（已知），终点机巢在可行集合内择优（决策变量）——「异源起飞—异巢终止」协同；每任务至多一机，部分 UAV 可空闲。</a:t>
+            </a:r>
+            <a:r>
+              <a:rPr lang="en-US" sz="1200">
+                <a:solidFill>
+                  <a:srgbClr val="4A5568"/>
+                </a:solidFill>
+                <a:latin typeface="Source Han Sans CN"/>
+                <a:ea typeface="Source Han Sans CN"/>
+              </a:rPr>
+              <a:t/>
+            </a:r>
+            <a:r>
+              <a:rPr lang="zh-CN" sz="1200">
+                <a:solidFill>
+                  <a:srgbClr val="4A5568"/>
+                </a:solidFill>
+                <a:latin typeface="Source Han Sans CN"/>
+                <a:ea typeface="Source Han Sans CN"/>
+              </a:rPr>
+              <a:t/>
+            </a:r>
+            <a:endParaRPr/>
+          </a:p>
+        </p:txBody>
+      </p:sp>
+      <p:sp>
+        <p:nvSpPr>
+          <p:cNvPr id="361" name="矩形: 圆角 360"/>
+          <p:cNvSpPr/>
+          <p:nvPr/>
+        </p:nvSpPr>
+        <p:spPr>
+          <a:xfrm>
+            <a:off x="762000" y="5943600"/>
+            <a:ext cx="4191000" cy="295275"/>
+          </a:xfrm>
+          <a:prstGeom prst="roundRect">
+            <a:avLst>
+              <a:gd name="adj" fmla="val 19355"/>
+            </a:avLst>
+          </a:prstGeom>
+          <a:solidFill>
+            <a:srgbClr val="1E4FA8"/>
+          </a:solidFill>
+          <a:ln/>
+        </p:spPr>
+        <p:txBody>
+          <a:bodyPr/>
+          <a:lstStyle/>
+          <a:p>
+            <a:endParaRPr/>
+          </a:p>
+        </p:txBody>
+      </p:sp>
+      <p:sp>
+        <p:nvSpPr>
+          <p:cNvPr id="362" name="文本框 361" descr="{&quot;isTemplate&quot;:true,&quot;type&quot;:&quot;text&quot;}"/>
+          <p:cNvSpPr txBox="1"/>
+          <p:nvPr/>
+        </p:nvSpPr>
+        <p:spPr>
+          <a:xfrm>
+            <a:off x="914400" y="6010275"/>
+            <a:ext cx="3937000" cy="161925"/>
           </a:xfrm>
           <a:prstGeom prst="rect">
             <a:avLst/>
@@ -23207,99 +25036,54 @@
               </a:lnSpc>
             </a:pPr>
             <a:r>
-              <a:rPr lang="zh-CN" sz="1350" b="1">
-                <a:solidFill>
-                  <a:srgbClr val="0E3F8C"/>
-                </a:solidFill>
-                <a:latin typeface="Source Han Sans CN"/>
-                <a:ea typeface="Source Han Sans CN"/>
-              </a:rPr>
-              <a:t>首任务匹配</a:t>
-            </a:r>
-            <a:endParaRPr/>
-          </a:p>
-        </p:txBody>
-      </p:sp>
-      <p:sp>
-        <p:nvSpPr>
-          <p:cNvPr id="441" name="文本框 440" descr="{&quot;isTemplate&quot;:true,&quot;type&quot;:&quot;text&quot;}"/>
-          <p:cNvSpPr txBox="1"/>
-          <p:nvPr/>
-        </p:nvSpPr>
-        <p:spPr>
-          <a:xfrm>
-            <a:off x="571500" y="3943350"/>
-            <a:ext cx="2667000" cy="495300"/>
-          </a:xfrm>
-          <a:prstGeom prst="rect">
-            <a:avLst/>
-          </a:prstGeom>
-        </p:spPr>
-        <p:txBody>
-          <a:bodyPr wrap="square" lIns="0" tIns="0" rIns="114300" bIns="0">
-            <a:normAutofit/>
-          </a:bodyPr>
-          <a:lstStyle/>
-          <a:p>
-            <a:pPr>
-              <a:lnSpc>
-                <a:spcPct val="160000"/>
-              </a:lnSpc>
-            </a:pPr>
-            <a:r>
-              <a:rPr lang="zh-CN" sz="1013">
-                <a:solidFill>
-                  <a:srgbClr val="4A5568"/>
-                </a:solidFill>
-                <a:latin typeface="Source Han Sans CN"/>
-                <a:ea typeface="Source Han Sans CN"/>
-              </a:rPr>
-              <a:t>温度自适应</a:t>
-            </a:r>
-            <a:r>
-              <a:rPr lang="en-US" sz="1013">
-                <a:solidFill>
-                  <a:srgbClr val="4A5568"/>
-                </a:solidFill>
-                <a:latin typeface="Source Han Sans CN"/>
-                <a:ea typeface="Source Han Sans CN"/>
-              </a:rPr>
-              <a:t> softmax</a:t>
-            </a:r>
-            <a:r>
-              <a:rPr lang="zh-CN" sz="1013">
-                <a:solidFill>
-                  <a:srgbClr val="4A5568"/>
-                </a:solidFill>
-                <a:latin typeface="Source Han Sans CN"/>
-                <a:ea typeface="Source Han Sans CN"/>
-              </a:rPr>
-              <a:t>：早期较大候选集软采样保多样性，随温度衰减收敛为贪心匹配</a:t>
-            </a:r>
-            <a:endParaRPr/>
-          </a:p>
-        </p:txBody>
-      </p:sp>
-      <p:sp>
-        <p:nvSpPr>
-          <p:cNvPr id="442" name="矩形: 圆角 441"/>
+              <a:rPr lang="en-US" sz="1050" b="1">
+                <a:solidFill>
+                  <a:srgbClr val="FFFFFF"/>
+                </a:solidFill>
+                <a:latin typeface="Source Han Sans CN"/>
+                <a:ea typeface="Source Han Sans CN"/>
+              </a:rPr>
+              <a:t>P9 · 优化模型与适应度　　P10 · 改进 DMDE</a:t>
+            </a:r>
+            <a:r>
+              <a:rPr lang="zh-CN" sz="1050" b="1">
+                <a:solidFill>
+                  <a:srgbClr val="FFFFFF"/>
+                </a:solidFill>
+                <a:latin typeface="Source Han Sans CN"/>
+                <a:ea typeface="Source Han Sans CN"/>
+              </a:rPr>
+              <a:t/>
+            </a:r>
+            <a:endParaRPr/>
+          </a:p>
+        </p:txBody>
+      </p:sp>
+      <p:sp>
+        <p:nvSpPr>
+          <p:cNvPr id="363" name="矩形: 圆角 362"/>
           <p:cNvSpPr/>
           <p:nvPr/>
         </p:nvSpPr>
         <p:spPr>
           <a:xfrm>
-            <a:off x="3362325" y="3543300"/>
-            <a:ext cx="323850" cy="323850"/>
+            <a:off x="9588500" y="4572000"/>
+            <a:ext cx="1841500" cy="323850"/>
           </a:xfrm>
           <a:prstGeom prst="roundRect">
             <a:avLst>
-              <a:gd name="adj" fmla="val 50000"/>
+              <a:gd name="adj" fmla="val 52941"/>
             </a:avLst>
           </a:prstGeom>
           <a:solidFill>
-            <a:srgbClr val="1E4FA8"/>
+            <a:srgbClr val="F0F5FC"/>
           </a:solidFill>
-          <a:ln/>
+          <a:ln w="12700">
+            <a:solidFill>
+              <a:srgbClr val="D6DCE5"/>
+            </a:solidFill>
+            <a:prstDash val="solid"/>
+          </a:ln>
         </p:spPr>
         <p:txBody>
           <a:bodyPr/>
@@ -23311,14 +25095,14 @@
       </p:sp>
       <p:sp>
         <p:nvSpPr>
-          <p:cNvPr id="443" name="文本框 442" descr="{&quot;isTemplate&quot;:true,&quot;type&quot;:&quot;text&quot;}"/>
+          <p:cNvPr id="364" name="文本框 363" descr="{&quot;isTemplate&quot;:true,&quot;type&quot;:&quot;text&quot;}"/>
           <p:cNvSpPr txBox="1"/>
           <p:nvPr/>
         </p:nvSpPr>
         <p:spPr>
           <a:xfrm>
-            <a:off x="3476625" y="3609975"/>
-            <a:ext cx="95250" cy="190500"/>
+            <a:off x="9753600" y="4648200"/>
+            <a:ext cx="1511300" cy="171450"/>
           </a:xfrm>
           <a:prstGeom prst="rect">
             <a:avLst/>
@@ -23334,29 +25118,63 @@
               </a:lnSpc>
             </a:pPr>
             <a:r>
-              <a:rPr lang="en-US" sz="1200" b="1">
-                <a:solidFill>
-                  <a:srgbClr val="FFFFFF"/>
-                </a:solidFill>
-                <a:latin typeface="Source Han Sans CN"/>
-                <a:ea typeface="Source Han Sans CN"/>
-              </a:rPr>
-              <a:t>2</a:t>
-            </a:r>
-            <a:endParaRPr/>
-          </a:p>
-        </p:txBody>
-      </p:sp>
-      <p:sp>
-        <p:nvSpPr>
-          <p:cNvPr id="444" name="文本框 443" descr="{&quot;isTemplate&quot;:true,&quot;type&quot;:&quot;text&quot;}"/>
+              <a:rPr lang="zh-CN" sz="1125" b="1">
+                <a:solidFill>
+                  <a:srgbClr val="1E4FA8"/>
+                </a:solidFill>
+                <a:latin typeface="Source Han Sans CN"/>
+                <a:ea typeface="Source Han Sans CN"/>
+              </a:rPr>
+              <a:t>统一编码 + 逆映射</a:t>
+            </a:r>
+            <a:endParaRPr/>
+          </a:p>
+        </p:txBody>
+      </p:sp>
+      <p:sp>
+        <p:nvSpPr>
+          <p:cNvPr id="365" name="矩形: 圆角 364"/>
+          <p:cNvSpPr/>
+          <p:nvPr/>
+        </p:nvSpPr>
+        <p:spPr>
+          <a:xfrm>
+            <a:off x="9734550" y="5010150"/>
+            <a:ext cx="1695450" cy="323850"/>
+          </a:xfrm>
+          <a:prstGeom prst="roundRect">
+            <a:avLst>
+              <a:gd name="adj" fmla="val 52941"/>
+            </a:avLst>
+          </a:prstGeom>
+          <a:solidFill>
+            <a:srgbClr val="F0F5FC"/>
+          </a:solidFill>
+          <a:ln w="12700">
+            <a:solidFill>
+              <a:srgbClr val="D6DCE5"/>
+            </a:solidFill>
+            <a:prstDash val="solid"/>
+          </a:ln>
+        </p:spPr>
+        <p:txBody>
+          <a:bodyPr/>
+          <a:lstStyle/>
+          <a:p>
+            <a:endParaRPr/>
+          </a:p>
+        </p:txBody>
+      </p:sp>
+      <p:sp>
+        <p:nvSpPr>
+          <p:cNvPr id="366" name="文本框 365" descr="{&quot;isTemplate&quot;:true,&quot;type&quot;:&quot;text&quot;}"/>
           <p:cNvSpPr txBox="1"/>
           <p:nvPr/>
         </p:nvSpPr>
         <p:spPr>
           <a:xfrm>
-            <a:off x="3781425" y="3600450"/>
-            <a:ext cx="857250" cy="209550"/>
+            <a:off x="9899650" y="5086350"/>
+            <a:ext cx="1365250" cy="171450"/>
           </a:xfrm>
           <a:prstGeom prst="rect">
             <a:avLst/>
@@ -23372,79 +25190,54 @@
               </a:lnSpc>
             </a:pPr>
             <a:r>
-              <a:rPr lang="zh-CN" sz="1350" b="1">
-                <a:solidFill>
-                  <a:srgbClr val="0E3F8C"/>
-                </a:solidFill>
-                <a:latin typeface="Source Han Sans CN"/>
-                <a:ea typeface="Source Han Sans CN"/>
-              </a:rPr>
-              <a:t>巡游边匹配</a:t>
-            </a:r>
-            <a:endParaRPr/>
-          </a:p>
-        </p:txBody>
-      </p:sp>
-      <p:sp>
-        <p:nvSpPr>
-          <p:cNvPr id="445" name="文本框 444" descr="{&quot;isTemplate&quot;:true,&quot;type&quot;:&quot;text&quot;}"/>
-          <p:cNvSpPr txBox="1"/>
-          <p:nvPr/>
-        </p:nvSpPr>
-        <p:spPr>
-          <a:xfrm>
-            <a:off x="3362325" y="3943350"/>
-            <a:ext cx="2543175" cy="742950"/>
-          </a:xfrm>
-          <a:prstGeom prst="rect">
-            <a:avLst/>
-          </a:prstGeom>
-        </p:spPr>
-        <p:txBody>
-          <a:bodyPr wrap="square" lIns="0" tIns="0" rIns="114300" bIns="0">
-            <a:normAutofit/>
-          </a:bodyPr>
-          <a:lstStyle/>
-          <a:p>
-            <a:pPr>
-              <a:lnSpc>
-                <a:spcPct val="160000"/>
-              </a:lnSpc>
-            </a:pPr>
-            <a:r>
-              <a:rPr lang="zh-CN" sz="1013">
-                <a:solidFill>
-                  <a:srgbClr val="4A5568"/>
-                </a:solidFill>
-                <a:latin typeface="Source Han Sans CN"/>
-                <a:ea typeface="Source Han Sans CN"/>
-              </a:rPr>
-              <a:t>按迭代行替换：以已访问任务为新起点行继续匹配——访问顺序真正进入进化搜索空间</a:t>
-            </a:r>
-            <a:endParaRPr/>
-          </a:p>
-        </p:txBody>
-      </p:sp>
-      <p:sp>
-        <p:nvSpPr>
-          <p:cNvPr id="446" name="矩形: 圆角 445"/>
+              <a:rPr lang="zh-CN" sz="1125" b="1">
+                <a:solidFill>
+                  <a:srgbClr val="1E4FA8"/>
+                </a:solidFill>
+                <a:latin typeface="Source Han Sans CN"/>
+                <a:ea typeface="Source Han Sans CN"/>
+              </a:rPr>
+              <a:t>终点机巢最小费用流</a:t>
+            </a:r>
+            <a:r>
+              <a:rPr lang="en-US" sz="1125" b="1">
+                <a:solidFill>
+                  <a:srgbClr val="1E4FA8"/>
+                </a:solidFill>
+                <a:latin typeface="Source Han Sans CN"/>
+                <a:ea typeface="Source Han Sans CN"/>
+              </a:rPr>
+              <a:t/>
+            </a:r>
+            <a:endParaRPr/>
+          </a:p>
+        </p:txBody>
+      </p:sp>
+      <p:sp>
+        <p:nvSpPr>
+          <p:cNvPr id="367" name="矩形: 圆角 366"/>
           <p:cNvSpPr/>
           <p:nvPr/>
         </p:nvSpPr>
         <p:spPr>
           <a:xfrm>
-            <a:off x="6029325" y="3543300"/>
-            <a:ext cx="323850" cy="323850"/>
+            <a:off x="9734550" y="5448300"/>
+            <a:ext cx="1695450" cy="323850"/>
           </a:xfrm>
           <a:prstGeom prst="roundRect">
             <a:avLst>
-              <a:gd name="adj" fmla="val 50000"/>
+              <a:gd name="adj" fmla="val 52941"/>
             </a:avLst>
           </a:prstGeom>
           <a:solidFill>
-            <a:srgbClr val="1E4FA8"/>
+            <a:srgbClr val="F0F5FC"/>
           </a:solidFill>
-          <a:ln/>
+          <a:ln w="12700">
+            <a:solidFill>
+              <a:srgbClr val="D6DCE5"/>
+            </a:solidFill>
+            <a:prstDash val="solid"/>
+          </a:ln>
         </p:spPr>
         <p:txBody>
           <a:bodyPr/>
@@ -23456,14 +25249,14 @@
       </p:sp>
       <p:sp>
         <p:nvSpPr>
-          <p:cNvPr id="447" name="文本框 446" descr="{&quot;isTemplate&quot;:true,&quot;type&quot;:&quot;text&quot;}"/>
+          <p:cNvPr id="368" name="文本框 367" descr="{&quot;isTemplate&quot;:true,&quot;type&quot;:&quot;text&quot;}"/>
           <p:cNvSpPr txBox="1"/>
           <p:nvPr/>
         </p:nvSpPr>
         <p:spPr>
           <a:xfrm>
-            <a:off x="6143625" y="3609975"/>
-            <a:ext cx="95250" cy="190500"/>
+            <a:off x="9899650" y="5524500"/>
+            <a:ext cx="1365250" cy="171450"/>
           </a:xfrm>
           <a:prstGeom prst="rect">
             <a:avLst/>
@@ -23479,29 +25272,58 @@
               </a:lnSpc>
             </a:pPr>
             <a:r>
-              <a:rPr lang="en-US" sz="1200" b="1">
-                <a:solidFill>
-                  <a:srgbClr val="FFFFFF"/>
-                </a:solidFill>
-                <a:latin typeface="Source Han Sans CN"/>
-                <a:ea typeface="Source Han Sans CN"/>
-              </a:rPr>
-              <a:t>3</a:t>
-            </a:r>
-            <a:endParaRPr/>
-          </a:p>
-        </p:txBody>
-      </p:sp>
-      <p:sp>
-        <p:nvSpPr>
-          <p:cNvPr id="448" name="文本框 447" descr="{&quot;isTemplate&quot;:true,&quot;type&quot;:&quot;text&quot;}"/>
+              <a:rPr lang="zh-CN" sz="1125" b="1">
+                <a:solidFill>
+                  <a:srgbClr val="1E4FA8"/>
+                </a:solidFill>
+                <a:latin typeface="Source Han Sans CN"/>
+                <a:ea typeface="Source Han Sans CN"/>
+              </a:rPr>
+              <a:t>四层准字典序适应度</a:t>
+            </a:r>
+            <a:endParaRPr/>
+          </a:p>
+        </p:txBody>
+      </p:sp>
+      <p:sp>
+        <p:nvSpPr>
+          <p:cNvPr id="369" name="矩形: 圆角 368"/>
+          <p:cNvSpPr/>
+          <p:nvPr/>
+        </p:nvSpPr>
+        <p:spPr>
+          <a:xfrm>
+            <a:off x="762000" y="5857875"/>
+            <a:ext cx="476250" cy="276225"/>
+          </a:xfrm>
+          <a:prstGeom prst="roundRect">
+            <a:avLst>
+              <a:gd name="adj" fmla="val 48276"/>
+            </a:avLst>
+          </a:prstGeom>
+          <a:solidFill>
+            <a:srgbClr val="F0F5FC"/>
+          </a:solidFill>
+          <a:ln/>
+        </p:spPr>
+        <p:txBody>
+          <a:bodyPr/>
+          <a:lstStyle/>
+          <a:p>
+            <a:endParaRPr/>
+          </a:p>
+        </p:txBody>
+      </p:sp>
+      <p:sp>
+        <p:nvSpPr>
+          <p:cNvPr id="370" name="文本框 369" descr="{&quot;isTemplate&quot;:true,&quot;type&quot;:&quot;text&quot;}"/>
           <p:cNvSpPr txBox="1"/>
           <p:nvPr/>
         </p:nvSpPr>
         <p:spPr>
           <a:xfrm>
-            <a:off x="6448425" y="3600450"/>
-            <a:ext cx="685800" cy="209550"/>
+            <a:off x="914400" y="5915025"/>
+            <a:ext cx="171450" cy="161925"/>
           </a:xfrm>
           <a:prstGeom prst="rect">
             <a:avLst/>
@@ -23517,97 +25339,37 @@
               </a:lnSpc>
             </a:pPr>
             <a:r>
-              <a:rPr lang="zh-CN" sz="1350" b="1">
-                <a:solidFill>
-                  <a:srgbClr val="0E3F8C"/>
-                </a:solidFill>
-                <a:latin typeface="Source Han Sans CN"/>
-                <a:ea typeface="Source Han Sans CN"/>
-              </a:rPr>
-              <a:t>扰动增强</a:t>
-            </a:r>
-            <a:endParaRPr/>
-          </a:p>
-        </p:txBody>
-      </p:sp>
-      <p:sp>
-        <p:nvSpPr>
-          <p:cNvPr id="449" name="文本框 448" descr="{&quot;isTemplate&quot;:true,&quot;type&quot;:&quot;text&quot;}"/>
-          <p:cNvSpPr txBox="1"/>
-          <p:nvPr/>
-        </p:nvSpPr>
-        <p:spPr>
-          <a:xfrm>
-            <a:off x="6029325" y="3943350"/>
-            <a:ext cx="2543175" cy="495300"/>
-          </a:xfrm>
-          <a:prstGeom prst="rect">
-            <a:avLst/>
-          </a:prstGeom>
-        </p:spPr>
-        <p:txBody>
-          <a:bodyPr wrap="square" lIns="0" tIns="0" rIns="114300" bIns="0">
-            <a:normAutofit/>
-          </a:bodyPr>
-          <a:lstStyle/>
-          <a:p>
-            <a:pPr>
-              <a:lnSpc>
-                <a:spcPct val="160000"/>
-              </a:lnSpc>
-            </a:pPr>
-            <a:r>
-              <a:rPr lang="zh-CN" sz="1013">
-                <a:solidFill>
-                  <a:srgbClr val="4A5568"/>
-                </a:solidFill>
-                <a:latin typeface="Source Han Sans CN"/>
-                <a:ea typeface="Source Han Sans CN"/>
-              </a:rPr>
-              <a:t>匹配后辅以</a:t>
-            </a:r>
-            <a:r>
-              <a:rPr lang="en-US" sz="1013">
-                <a:solidFill>
-                  <a:srgbClr val="4A5568"/>
-                </a:solidFill>
-                <a:latin typeface="Source Han Sans CN"/>
-                <a:ea typeface="Source Han Sans CN"/>
-              </a:rPr>
-              <a:t> swap / insert / reverse </a:t>
-            </a:r>
-            <a:r>
-              <a:rPr lang="zh-CN" sz="1013">
-                <a:solidFill>
-                  <a:srgbClr val="4A5568"/>
-                </a:solidFill>
-                <a:latin typeface="Source Han Sans CN"/>
-                <a:ea typeface="Source Han Sans CN"/>
-              </a:rPr>
-              <a:t>扰动，跳出局部结构</a:t>
-            </a:r>
-            <a:endParaRPr/>
-          </a:p>
-        </p:txBody>
-      </p:sp>
-      <p:sp>
-        <p:nvSpPr>
-          <p:cNvPr id="450" name="矩形: 圆角 449"/>
+              <a:rPr lang="en-US" sz="1050" b="1">
+                <a:solidFill>
+                  <a:srgbClr val="8B97A8"/>
+                </a:solidFill>
+                <a:latin typeface="Source Han Sans CN"/>
+                <a:ea typeface="Source Han Sans CN"/>
+              </a:rPr>
+              <a:t>01</a:t>
+            </a:r>
+            <a:endParaRPr/>
+          </a:p>
+        </p:txBody>
+      </p:sp>
+      <p:sp>
+        <p:nvSpPr>
+          <p:cNvPr id="371" name="矩形: 圆角 370"/>
           <p:cNvSpPr/>
           <p:nvPr/>
         </p:nvSpPr>
         <p:spPr>
           <a:xfrm>
-            <a:off x="8696325" y="3543300"/>
-            <a:ext cx="323850" cy="323850"/>
+            <a:off x="1352550" y="5857875"/>
+            <a:ext cx="476250" cy="276225"/>
           </a:xfrm>
           <a:prstGeom prst="roundRect">
             <a:avLst>
-              <a:gd name="adj" fmla="val 50000"/>
+              <a:gd name="adj" fmla="val 48276"/>
             </a:avLst>
           </a:prstGeom>
           <a:solidFill>
-            <a:srgbClr val="1E4FA8"/>
+            <a:srgbClr val="F0F5FC"/>
           </a:solidFill>
           <a:ln/>
         </p:spPr>
@@ -23621,14 +25383,14 @@
       </p:sp>
       <p:sp>
         <p:nvSpPr>
-          <p:cNvPr id="451" name="文本框 450" descr="{&quot;isTemplate&quot;:true,&quot;type&quot;:&quot;text&quot;}"/>
+          <p:cNvPr id="372" name="文本框 371" descr="{&quot;isTemplate&quot;:true,&quot;type&quot;:&quot;text&quot;}"/>
           <p:cNvSpPr txBox="1"/>
           <p:nvPr/>
         </p:nvSpPr>
         <p:spPr>
           <a:xfrm>
-            <a:off x="8810625" y="3609975"/>
-            <a:ext cx="95250" cy="190500"/>
+            <a:off x="1504950" y="5915025"/>
+            <a:ext cx="171450" cy="161925"/>
           </a:xfrm>
           <a:prstGeom prst="rect">
             <a:avLst/>
@@ -23644,29 +25406,58 @@
               </a:lnSpc>
             </a:pPr>
             <a:r>
-              <a:rPr lang="en-US" sz="1200" b="1">
-                <a:solidFill>
-                  <a:srgbClr val="FFFFFF"/>
-                </a:solidFill>
-                <a:latin typeface="Source Han Sans CN"/>
-                <a:ea typeface="Source Han Sans CN"/>
-              </a:rPr>
-              <a:t>4</a:t>
-            </a:r>
-            <a:endParaRPr/>
-          </a:p>
-        </p:txBody>
-      </p:sp>
-      <p:sp>
-        <p:nvSpPr>
-          <p:cNvPr id="452" name="文本框 451" descr="{&quot;isTemplate&quot;:true,&quot;type&quot;:&quot;text&quot;}"/>
+              <a:rPr lang="en-US" sz="1050" b="1">
+                <a:solidFill>
+                  <a:srgbClr val="8B97A8"/>
+                </a:solidFill>
+                <a:latin typeface="Source Han Sans CN"/>
+                <a:ea typeface="Source Han Sans CN"/>
+              </a:rPr>
+              <a:t>02</a:t>
+            </a:r>
+            <a:endParaRPr/>
+          </a:p>
+        </p:txBody>
+      </p:sp>
+      <p:sp>
+        <p:nvSpPr>
+          <p:cNvPr id="373" name="矩形: 圆角 372"/>
+          <p:cNvSpPr/>
+          <p:nvPr/>
+        </p:nvSpPr>
+        <p:spPr>
+          <a:xfrm>
+            <a:off x="1943100" y="5857875"/>
+            <a:ext cx="476250" cy="276225"/>
+          </a:xfrm>
+          <a:prstGeom prst="roundRect">
+            <a:avLst>
+              <a:gd name="adj" fmla="val 48276"/>
+            </a:avLst>
+          </a:prstGeom>
+          <a:solidFill>
+            <a:srgbClr val="1E4FA8"/>
+          </a:solidFill>
+          <a:ln/>
+        </p:spPr>
+        <p:txBody>
+          <a:bodyPr/>
+          <a:lstStyle/>
+          <a:p>
+            <a:endParaRPr/>
+          </a:p>
+        </p:txBody>
+      </p:sp>
+      <p:sp>
+        <p:nvSpPr>
+          <p:cNvPr id="374" name="文本框 373" descr="{&quot;isTemplate&quot;:true,&quot;type&quot;:&quot;text&quot;}"/>
           <p:cNvSpPr txBox="1"/>
           <p:nvPr/>
         </p:nvSpPr>
         <p:spPr>
           <a:xfrm>
-            <a:off x="9115425" y="3600450"/>
-            <a:ext cx="1028700" cy="209550"/>
+            <a:off x="2095500" y="5915025"/>
+            <a:ext cx="171450" cy="161925"/>
           </a:xfrm>
           <a:prstGeom prst="rect">
             <a:avLst/>
@@ -23682,113 +25473,33 @@
               </a:lnSpc>
             </a:pPr>
             <a:r>
-              <a:rPr lang="zh-CN" sz="1350" b="1">
-                <a:solidFill>
-                  <a:srgbClr val="0E3F8C"/>
-                </a:solidFill>
-                <a:latin typeface="Source Han Sans CN"/>
-                <a:ea typeface="Source Han Sans CN"/>
-              </a:rPr>
-              <a:t>段结构规范化</a:t>
-            </a:r>
-            <a:endParaRPr/>
-          </a:p>
-        </p:txBody>
-      </p:sp>
-      <p:sp>
-        <p:nvSpPr>
-          <p:cNvPr id="453" name="文本框 452" descr="{&quot;isTemplate&quot;:true,&quot;type&quot;:&quot;text&quot;}"/>
-          <p:cNvSpPr txBox="1"/>
-          <p:nvPr/>
-        </p:nvSpPr>
-        <p:spPr>
-          <a:xfrm>
-            <a:off x="8696325" y="3943350"/>
-            <a:ext cx="2543175" cy="742950"/>
-          </a:xfrm>
-          <a:prstGeom prst="rect">
-            <a:avLst/>
-          </a:prstGeom>
-        </p:spPr>
-        <p:txBody>
-          <a:bodyPr wrap="square" lIns="0" tIns="0" rIns="114300" bIns="0">
-            <a:normAutofit/>
-          </a:bodyPr>
-          <a:lstStyle/>
-          <a:p>
-            <a:pPr>
-              <a:lnSpc>
-                <a:spcPct val="160000"/>
-              </a:lnSpc>
-            </a:pPr>
-            <a:r>
-              <a:rPr lang="zh-CN" sz="1013">
-                <a:solidFill>
-                  <a:srgbClr val="4A5568"/>
-                </a:solidFill>
-                <a:latin typeface="Source Han Sans CN"/>
-                <a:ea typeface="Source Han Sans CN"/>
-              </a:rPr>
-              <a:t>重建航次分段：起始基因按</a:t>
-            </a:r>
-            <a:r>
-              <a:rPr lang="en-US" sz="1013">
-                <a:solidFill>
-                  <a:srgbClr val="4A5568"/>
-                </a:solidFill>
-                <a:latin typeface="Source Han Sans CN"/>
-                <a:ea typeface="Source Han Sans CN"/>
-              </a:rPr>
-              <a:t> UAV </a:t>
-            </a:r>
-            <a:r>
-              <a:rPr lang="zh-CN" sz="1013">
-                <a:solidFill>
-                  <a:srgbClr val="4A5568"/>
-                </a:solidFill>
-                <a:latin typeface="Source Han Sans CN"/>
-                <a:ea typeface="Source Han Sans CN"/>
-              </a:rPr>
-              <a:t>升序、终止基因稳定落段末——保证</a:t>
-            </a:r>
-            <a:r>
-              <a:rPr lang="en-US" sz="1013">
-                <a:solidFill>
-                  <a:srgbClr val="4A5568"/>
-                </a:solidFill>
-                <a:latin typeface="Source Han Sans CN"/>
-                <a:ea typeface="Source Han Sans CN"/>
-              </a:rPr>
-              <a:t> SRP </a:t>
-            </a:r>
-            <a:r>
-              <a:rPr lang="zh-CN" sz="1013">
-                <a:solidFill>
-                  <a:srgbClr val="4A5568"/>
-                </a:solidFill>
-                <a:latin typeface="Source Han Sans CN"/>
-                <a:ea typeface="Source Han Sans CN"/>
-              </a:rPr>
-              <a:t>不变式</a:t>
-            </a:r>
-            <a:endParaRPr/>
-          </a:p>
-        </p:txBody>
-      </p:sp>
-      <p:sp>
-        <p:nvSpPr>
-          <p:cNvPr id="454" name="矩形: 圆角 453"/>
+              <a:rPr lang="en-US" sz="1050" b="1">
+                <a:solidFill>
+                  <a:srgbClr val="FFFFFF"/>
+                </a:solidFill>
+                <a:latin typeface="Source Han Sans CN"/>
+                <a:ea typeface="Source Han Sans CN"/>
+              </a:rPr>
+              <a:t>03</a:t>
+            </a:r>
+            <a:endParaRPr/>
+          </a:p>
+        </p:txBody>
+      </p:sp>
+      <p:sp>
+        <p:nvSpPr>
+          <p:cNvPr id="375" name="矩形: 圆角 374"/>
           <p:cNvSpPr/>
           <p:nvPr/>
         </p:nvSpPr>
         <p:spPr>
           <a:xfrm>
-            <a:off x="609600" y="4762500"/>
-            <a:ext cx="5429250" cy="990600"/>
+            <a:off x="2533650" y="5857875"/>
+            <a:ext cx="476250" cy="276225"/>
           </a:xfrm>
           <a:prstGeom prst="roundRect">
             <a:avLst>
-              <a:gd name="adj" fmla="val 9615"/>
+              <a:gd name="adj" fmla="val 48276"/>
             </a:avLst>
           </a:prstGeom>
           <a:solidFill>
@@ -23806,79 +25517,14 @@
       </p:sp>
       <p:sp>
         <p:nvSpPr>
-          <p:cNvPr id="455" name="任意多边形: 形状 454"/>
-          <p:cNvSpPr/>
-          <p:nvPr/>
-        </p:nvSpPr>
-        <p:spPr>
-          <a:xfrm>
-            <a:off x="609600" y="4762500"/>
-            <a:ext cx="5429250" cy="990600"/>
-          </a:xfrm>
-          <a:custGeom>
-            <a:avLst/>
-            <a:gdLst/>
-            <a:ahLst/>
-            <a:cxnLst/>
-            <a:rect l="0" t="0" r="0" b="0"/>
-            <a:pathLst>
-              <a:path w="570" h="104">
-                <a:moveTo>
-                  <a:pt x="9" y="0"/>
-                </a:moveTo>
-                <a:cubicBezTo>
-                  <a:pt x="6" y="0"/>
-                  <a:pt x="4" y="3"/>
-                  <a:pt x="4" y="6"/>
-                </a:cubicBezTo>
-                <a:lnTo>
-                  <a:pt x="4" y="98"/>
-                </a:lnTo>
-                <a:cubicBezTo>
-                  <a:pt x="4" y="101"/>
-                  <a:pt x="6" y="103"/>
-                  <a:pt x="9" y="104"/>
-                </a:cubicBezTo>
-                <a:cubicBezTo>
-                  <a:pt x="4" y="103"/>
-                  <a:pt x="0" y="99"/>
-                  <a:pt x="0" y="94"/>
-                </a:cubicBezTo>
-                <a:lnTo>
-                  <a:pt x="0" y="10"/>
-                </a:lnTo>
-                <a:cubicBezTo>
-                  <a:pt x="0" y="5"/>
-                  <a:pt x="4" y="0"/>
-                  <a:pt x="10" y="0"/>
-                </a:cubicBezTo>
-                <a:close/>
-              </a:path>
-            </a:pathLst>
-          </a:custGeom>
-          <a:solidFill>
-            <a:srgbClr val="1E4FA8"/>
-          </a:solidFill>
-          <a:ln/>
-        </p:spPr>
-        <p:txBody>
-          <a:bodyPr/>
-          <a:lstStyle/>
-          <a:p>
-            <a:endParaRPr/>
-          </a:p>
-        </p:txBody>
-      </p:sp>
-      <p:sp>
-        <p:nvSpPr>
-          <p:cNvPr id="456" name="文本框 455" descr="{&quot;isTemplate&quot;:true,&quot;type&quot;:&quot;text&quot;}"/>
+          <p:cNvPr id="376" name="文本框 375" descr="{&quot;isTemplate&quot;:true,&quot;type&quot;:&quot;text&quot;}"/>
           <p:cNvSpPr txBox="1"/>
           <p:nvPr/>
         </p:nvSpPr>
         <p:spPr>
           <a:xfrm>
-            <a:off x="781050" y="4886325"/>
-            <a:ext cx="5048250" cy="180975"/>
+            <a:off x="2686050" y="5915025"/>
+            <a:ext cx="171450" cy="161925"/>
           </a:xfrm>
           <a:prstGeom prst="rect">
             <a:avLst/>
@@ -23894,283 +25540,29 @@
               </a:lnSpc>
             </a:pPr>
             <a:r>
-              <a:rPr lang="zh-CN" sz="1163" b="1">
-                <a:solidFill>
-                  <a:srgbClr val="0E3F8C"/>
-                </a:solidFill>
-                <a:latin typeface="Source Han Sans CN"/>
-                <a:ea typeface="Source Han Sans CN"/>
-              </a:rPr>
-              <a:t>选择性</a:t>
-            </a:r>
-            <a:r>
-              <a:rPr lang="en-US" sz="1163" b="1">
-                <a:solidFill>
-                  <a:srgbClr val="0E3F8C"/>
-                </a:solidFill>
-                <a:latin typeface="Source Han Sans CN"/>
-                <a:ea typeface="Source Han Sans CN"/>
-              </a:rPr>
-              <a:t> y=0 </a:t>
-            </a:r>
-            <a:r>
-              <a:rPr lang="zh-CN" sz="1163" b="1">
-                <a:solidFill>
-                  <a:srgbClr val="0E3F8C"/>
-                </a:solidFill>
-                <a:latin typeface="Source Han Sans CN"/>
-                <a:ea typeface="Source Han Sans CN"/>
-              </a:rPr>
-              <a:t>的决策位置：不占编码维度</a:t>
-            </a:r>
-            <a:endParaRPr/>
-          </a:p>
-        </p:txBody>
-      </p:sp>
-      <p:sp>
-        <p:nvSpPr>
-          <p:cNvPr id="457" name="文本框 456" descr="{&quot;isTemplate&quot;:true,&quot;type&quot;:&quot;text&quot;}"/>
+              <a:rPr lang="en-US" sz="1050" b="1">
+                <a:solidFill>
+                  <a:srgbClr val="8B97A8"/>
+                </a:solidFill>
+                <a:latin typeface="Source Han Sans CN"/>
+                <a:ea typeface="Source Han Sans CN"/>
+              </a:rPr>
+              <a:t>04</a:t>
+            </a:r>
+            <a:endParaRPr/>
+          </a:p>
+        </p:txBody>
+      </p:sp>
+      <p:sp>
+        <p:nvSpPr>
+          <p:cNvPr id="377" name="文本框 376" descr="{&quot;isTemplate&quot;:true,&quot;type&quot;:&quot;text&quot;}"/>
           <p:cNvSpPr txBox="1"/>
           <p:nvPr/>
         </p:nvSpPr>
         <p:spPr>
           <a:xfrm>
-            <a:off x="781050" y="5114925"/>
-            <a:ext cx="5048250" cy="514350"/>
-          </a:xfrm>
-          <a:prstGeom prst="rect">
-            <a:avLst/>
-          </a:prstGeom>
-        </p:spPr>
-        <p:txBody>
-          <a:bodyPr wrap="square" lIns="0" tIns="0" rIns="0" bIns="0">
-            <a:normAutofit fontScale="77500" lnSpcReduction="20000"/>
-          </a:bodyPr>
-          <a:lstStyle/>
-          <a:p>
-            <a:pPr>
-              <a:lnSpc>
-                <a:spcPct val="165000"/>
-              </a:lnSpc>
-            </a:pPr>
-            <a:r>
-              <a:rPr lang="en-US" sz="1013" dirty="0">
-                <a:solidFill>
-                  <a:srgbClr val="4A5568"/>
-                </a:solidFill>
-                <a:latin typeface="Source Han Sans CN"/>
-                <a:ea typeface="Source Han Sans CN"/>
-              </a:rPr>
-              <a:t>DE </a:t>
-            </a:r>
-            <a:r>
-              <a:rPr lang="zh-CN" sz="1013" dirty="0">
-                <a:solidFill>
-                  <a:srgbClr val="4A5568"/>
-                </a:solidFill>
-                <a:latin typeface="Source Han Sans CN"/>
-                <a:ea typeface="Source Han Sans CN"/>
-              </a:rPr>
-              <a:t>空间中每个任务都被分配，「暂不执行」由解码后的可行性修复在评估端裁量（航程超限移除），并支持「任务少时并入更少机」的合并修复——空闲机零成本。</a:t>
-            </a:r>
-            <a:r>
-              <a:rPr lang="zh-CN" altLang="en-US" sz="1013" dirty="0">
-                <a:solidFill>
-                  <a:srgbClr val="4A5568"/>
-                </a:solidFill>
-                <a:latin typeface="Source Han Sans CN"/>
-                <a:ea typeface="Source Han Sans CN"/>
-              </a:rPr>
-              <a:t>“每个 </a:t>
-            </a:r>
-            <a:r>
-              <a:rPr lang="en-US" altLang="zh-CN" sz="1013" dirty="0">
-                <a:solidFill>
-                  <a:srgbClr val="4A5568"/>
-                </a:solidFill>
-                <a:latin typeface="Source Han Sans CN"/>
-                <a:ea typeface="Source Han Sans CN"/>
-              </a:rPr>
-              <a:t>U </a:t>
-            </a:r>
-            <a:r>
-              <a:rPr lang="zh-CN" altLang="en-US" sz="1013" dirty="0">
-                <a:solidFill>
-                  <a:srgbClr val="4A5568"/>
-                </a:solidFill>
-                <a:latin typeface="Source Han Sans CN"/>
-                <a:ea typeface="Source Han Sans CN"/>
-              </a:rPr>
-              <a:t>至少一个目标”是 </a:t>
-            </a:r>
-            <a:r>
-              <a:rPr lang="en-US" altLang="zh-CN" sz="1013" dirty="0">
-                <a:solidFill>
-                  <a:srgbClr val="4A5568"/>
-                </a:solidFill>
-                <a:latin typeface="Source Han Sans CN"/>
-                <a:ea typeface="Source Han Sans CN"/>
-              </a:rPr>
-              <a:t>DE </a:t>
-            </a:r>
-            <a:r>
-              <a:rPr lang="zh-CN" altLang="en-US" sz="1013" dirty="0">
-                <a:solidFill>
-                  <a:srgbClr val="4A5568"/>
-                </a:solidFill>
-                <a:latin typeface="Source Han Sans CN"/>
-                <a:ea typeface="Source Han Sans CN"/>
-              </a:rPr>
-              <a:t>映射的布局不变量；闲置表达放在解码端 </a:t>
-            </a:r>
-            <a:r>
-              <a:rPr lang="en-US" altLang="zh-CN" sz="1013" dirty="0">
-                <a:solidFill>
-                  <a:srgbClr val="4A5568"/>
-                </a:solidFill>
-                <a:latin typeface="Source Han Sans CN"/>
-                <a:ea typeface="Source Han Sans CN"/>
-              </a:rPr>
-              <a:t>_consolidate</a:t>
-            </a:r>
-            <a:r>
-              <a:rPr lang="zh-CN" altLang="en-US" sz="1013" dirty="0">
-                <a:solidFill>
-                  <a:srgbClr val="4A5568"/>
-                </a:solidFill>
-                <a:latin typeface="Source Han Sans CN"/>
-                <a:ea typeface="Source Han Sans CN"/>
-              </a:rPr>
-              <a:t>。所以是有意设计：空闲 </a:t>
-            </a:r>
-            <a:r>
-              <a:rPr lang="en-US" altLang="zh-CN" sz="1013" dirty="0">
-                <a:solidFill>
-                  <a:srgbClr val="4A5568"/>
-                </a:solidFill>
-                <a:latin typeface="Source Han Sans CN"/>
-                <a:ea typeface="Source Han Sans CN"/>
-              </a:rPr>
-              <a:t>= </a:t>
-            </a:r>
-            <a:r>
-              <a:rPr lang="zh-CN" altLang="en-US" sz="1013" dirty="0">
-                <a:solidFill>
-                  <a:srgbClr val="4A5568"/>
-                </a:solidFill>
-                <a:latin typeface="Source Han Sans CN"/>
-                <a:ea typeface="Source Han Sans CN"/>
-              </a:rPr>
-              <a:t>解码侧概念，不进基因。</a:t>
-            </a:r>
-            <a:endParaRPr dirty="0"/>
-          </a:p>
-        </p:txBody>
-      </p:sp>
-      <p:sp>
-        <p:nvSpPr>
-          <p:cNvPr id="458" name="矩形: 圆角 457"/>
-          <p:cNvSpPr/>
-          <p:nvPr/>
-        </p:nvSpPr>
-        <p:spPr>
-          <a:xfrm>
-            <a:off x="6229350" y="4762500"/>
-            <a:ext cx="5429250" cy="990600"/>
-          </a:xfrm>
-          <a:prstGeom prst="roundRect">
-            <a:avLst>
-              <a:gd name="adj" fmla="val 9615"/>
-            </a:avLst>
-          </a:prstGeom>
-          <a:solidFill>
-            <a:srgbClr val="F0F5FC"/>
-          </a:solidFill>
-          <a:ln/>
-        </p:spPr>
-        <p:txBody>
-          <a:bodyPr/>
-          <a:lstStyle/>
-          <a:p>
-            <a:endParaRPr/>
-          </a:p>
-        </p:txBody>
-      </p:sp>
-      <p:sp>
-        <p:nvSpPr>
-          <p:cNvPr id="459" name="任意多边形: 形状 458"/>
-          <p:cNvSpPr/>
-          <p:nvPr/>
-        </p:nvSpPr>
-        <p:spPr>
-          <a:xfrm>
-            <a:off x="6229350" y="4762500"/>
-            <a:ext cx="5429250" cy="990600"/>
-          </a:xfrm>
-          <a:custGeom>
-            <a:avLst/>
-            <a:gdLst/>
-            <a:ahLst/>
-            <a:cxnLst/>
-            <a:rect l="0" t="0" r="0" b="0"/>
-            <a:pathLst>
-              <a:path w="570" h="104">
-                <a:moveTo>
-                  <a:pt x="9" y="0"/>
-                </a:moveTo>
-                <a:cubicBezTo>
-                  <a:pt x="6" y="0"/>
-                  <a:pt x="4" y="3"/>
-                  <a:pt x="4" y="6"/>
-                </a:cubicBezTo>
-                <a:lnTo>
-                  <a:pt x="4" y="98"/>
-                </a:lnTo>
-                <a:cubicBezTo>
-                  <a:pt x="4" y="101"/>
-                  <a:pt x="6" y="103"/>
-                  <a:pt x="9" y="104"/>
-                </a:cubicBezTo>
-                <a:cubicBezTo>
-                  <a:pt x="4" y="103"/>
-                  <a:pt x="0" y="99"/>
-                  <a:pt x="0" y="94"/>
-                </a:cubicBezTo>
-                <a:lnTo>
-                  <a:pt x="0" y="10"/>
-                </a:lnTo>
-                <a:cubicBezTo>
-                  <a:pt x="0" y="5"/>
-                  <a:pt x="4" y="0"/>
-                  <a:pt x="10" y="0"/>
-                </a:cubicBezTo>
-                <a:close/>
-              </a:path>
-            </a:pathLst>
-          </a:custGeom>
-          <a:solidFill>
-            <a:srgbClr val="0E3F8C"/>
-          </a:solidFill>
-          <a:ln/>
-        </p:spPr>
-        <p:txBody>
-          <a:bodyPr/>
-          <a:lstStyle/>
-          <a:p>
-            <a:endParaRPr/>
-          </a:p>
-        </p:txBody>
-      </p:sp>
-      <p:sp>
-        <p:nvSpPr>
-          <p:cNvPr id="460" name="文本框 459" descr="{&quot;isTemplate&quot;:true,&quot;type&quot;:&quot;text&quot;}"/>
-          <p:cNvSpPr txBox="1"/>
-          <p:nvPr/>
-        </p:nvSpPr>
-        <p:spPr>
-          <a:xfrm>
-            <a:off x="6400800" y="4886325"/>
-            <a:ext cx="5048250" cy="180975"/>
+            <a:off x="3200400" y="5915025"/>
+            <a:ext cx="1962150" cy="161925"/>
           </a:xfrm>
           <a:prstGeom prst="rect">
             <a:avLst/>
@@ -24186,72 +25578,62 @@
               </a:lnSpc>
             </a:pPr>
             <a:r>
-              <a:rPr lang="en-US" sz="1163" b="1">
-                <a:solidFill>
-                  <a:srgbClr val="0E3F8C"/>
-                </a:solidFill>
-                <a:latin typeface="Source Han Sans CN"/>
-                <a:ea typeface="Source Han Sans CN"/>
-              </a:rPr>
-              <a:t>Lamarckian </a:t>
-            </a:r>
-            <a:r>
-              <a:rPr lang="zh-CN" sz="1163" b="1">
-                <a:solidFill>
-                  <a:srgbClr val="0E3F8C"/>
-                </a:solidFill>
-                <a:latin typeface="Source Han Sans CN"/>
-                <a:ea typeface="Source Han Sans CN"/>
-              </a:rPr>
-              <a:t>回写：只回写起始基因</a:t>
-            </a:r>
-            <a:endParaRPr/>
-          </a:p>
-        </p:txBody>
-      </p:sp>
-      <p:sp>
-        <p:nvSpPr>
-          <p:cNvPr id="461" name="文本框 460" descr="{&quot;isTemplate&quot;:true,&quot;type&quot;:&quot;text&quot;}"/>
-          <p:cNvSpPr txBox="1"/>
-          <p:nvPr/>
-        </p:nvSpPr>
-        <p:spPr>
-          <a:xfrm>
-            <a:off x="6400800" y="5114925"/>
-            <a:ext cx="5048250" cy="514350"/>
-          </a:xfrm>
-          <a:prstGeom prst="rect">
-            <a:avLst/>
-          </a:prstGeom>
-        </p:spPr>
-        <p:txBody>
-          <a:bodyPr wrap="square" lIns="0" tIns="0" rIns="0" bIns="0">
-            <a:normAutofit/>
-          </a:bodyPr>
-          <a:lstStyle/>
-          <a:p>
-            <a:pPr>
-              <a:lnSpc>
-                <a:spcPct val="165000"/>
-              </a:lnSpc>
-            </a:pPr>
-            <a:r>
-              <a:rPr lang="zh-CN" sz="1013">
-                <a:solidFill>
-                  <a:srgbClr val="4A5568"/>
-                </a:solidFill>
-                <a:latin typeface="Source Han Sans CN"/>
-                <a:ea typeface="Source Han Sans CN"/>
-              </a:rPr>
-              <a:t>修复解只把首任务写回获胜个体的起始基因，巡游基因原样保留、绝不增删——基因长度恒定，这是「每任务恰出现一次」不变式下可安全落地的关键。</a:t>
-            </a:r>
-            <a:endParaRPr/>
-          </a:p>
-        </p:txBody>
-      </p:sp>
-      <p:sp>
-        <p:nvSpPr>
-          <p:cNvPr id="462" name="矩形 461"/>
+              <a:rPr lang="zh-CN" sz="1050">
+                <a:solidFill>
+                  <a:srgbClr val="8B97A8"/>
+                </a:solidFill>
+                <a:latin typeface="Source Han Sans CN"/>
+                <a:ea typeface="Source Han Sans CN"/>
+              </a:rPr>
+              <a:t>研究问题</a:t>
+            </a:r>
+            <a:r>
+              <a:rPr lang="en-US" sz="1050">
+                <a:solidFill>
+                  <a:srgbClr val="8B97A8"/>
+                </a:solidFill>
+                <a:latin typeface="Source Han Sans CN"/>
+                <a:ea typeface="Source Han Sans CN"/>
+              </a:rPr>
+              <a:t> · </a:t>
+            </a:r>
+            <a:r>
+              <a:rPr lang="zh-CN" sz="1050">
+                <a:solidFill>
+                  <a:srgbClr val="8B97A8"/>
+                </a:solidFill>
+                <a:latin typeface="Source Han Sans CN"/>
+                <a:ea typeface="Source Han Sans CN"/>
+              </a:rPr>
+              <a:t>方法两阶段</a:t>
+            </a:r>
+            <a:r>
+              <a:rPr lang="en-US" sz="1050">
+                <a:solidFill>
+                  <a:srgbClr val="8B97A8"/>
+                </a:solidFill>
+                <a:latin typeface="Source Han Sans CN"/>
+                <a:ea typeface="Source Han Sans CN"/>
+              </a:rPr>
+              <a:t> · </a:t>
+            </a:r>
+            <a:r>
+              <a:rPr lang="zh-CN" sz="1050">
+                <a:solidFill>
+                  <a:srgbClr val="8B97A8"/>
+                </a:solidFill>
+                <a:latin typeface="Source Han Sans CN"/>
+                <a:ea typeface="Source Han Sans CN"/>
+              </a:rPr>
+              <a:t>实验验证</a:t>
+            </a:r>
+            <a:endParaRPr/>
+          </a:p>
+        </p:txBody>
+      </p:sp>
+      <p:sp>
+        <p:nvSpPr>
+          <p:cNvPr id="378" name="矩形 377"/>
           <p:cNvSpPr/>
           <p:nvPr/>
         </p:nvSpPr>
@@ -24278,7 +25660,7 @@
       </p:sp>
       <p:sp>
         <p:nvSpPr>
-          <p:cNvPr id="463" name="任意多边形: 形状 462"/>
+          <p:cNvPr id="379" name="任意多边形: 形状 378"/>
           <p:cNvSpPr/>
           <p:nvPr/>
         </p:nvSpPr>
@@ -24326,7 +25708,7 @@
       </p:sp>
       <p:sp>
         <p:nvSpPr>
-          <p:cNvPr id="464" name="文本框 463" descr="{&quot;isTemplate&quot;:true,&quot;type&quot;:&quot;text&quot;}"/>
+          <p:cNvPr id="380" name="文本框 379" descr="{&quot;isTemplate&quot;:true,&quot;type&quot;:&quot;text&quot;}"/>
           <p:cNvSpPr txBox="1"/>
           <p:nvPr/>
         </p:nvSpPr>
@@ -24384,7 +25766,7 @@
       </p:sp>
       <p:sp>
         <p:nvSpPr>
-          <p:cNvPr id="465" name="文本框 464" descr="{&quot;isTemplate&quot;:true,&quot;type&quot;:&quot;text&quot;}"/>
+          <p:cNvPr id="381" name="文本框 380" descr="{&quot;isTemplate&quot;:true,&quot;type&quot;:&quot;text&quot;}"/>
           <p:cNvSpPr txBox="1"/>
           <p:nvPr/>
         </p:nvSpPr>
@@ -24414,7 +25796,7 @@
                 <a:latin typeface="Source Han Sans CN"/>
                 <a:ea typeface="Source Han Sans CN"/>
               </a:rPr>
-              <a:t>10 / 16</a:t>
+              <a:t>08 / 16</a:t>
             </a:r>
             <a:endParaRPr/>
           </a:p>
@@ -24616,7 +25998,7 @@
                 <a:latin typeface="Source Han Sans CN"/>
                 <a:ea typeface="Source Han Sans CN"/>
               </a:rPr>
-              <a:t>左：论文组合优化模型　右：进化评价的现行生产口径（四层准字典序）</a:t>
+              <a:t>左：论文组合优化模型　右：进化评价分层结构（覆盖门禁口径）</a:t>
             </a:r>
             <a:endParaRPr/>
           </a:p>
@@ -25305,7 +26687,7 @@
                 <a:latin typeface="Source Han Sans CN"/>
                 <a:ea typeface="Source Han Sans CN"/>
               </a:rPr>
-              <a:t>双目标：收益最大</a:t>
+              <a:t>目标退化：完成是约束</a:t>
             </a:r>
             <a:r>
               <a:rPr lang="en-US" sz="1350" b="1">
@@ -25315,7 +26697,7 @@
                 <a:latin typeface="Source Han Sans CN"/>
                 <a:ea typeface="Source Han Sans CN"/>
               </a:rPr>
-              <a:t> × </a:t>
+              <a:t>，</a:t>
             </a:r>
             <a:r>
               <a:rPr lang="zh-CN" sz="1350" b="1">
@@ -25325,7 +26707,7 @@
                 <a:latin typeface="Source Han Sans CN"/>
                 <a:ea typeface="Source Han Sans CN"/>
               </a:rPr>
-              <a:t>代价最小</a:t>
+              <a:t>成本是目标</a:t>
             </a:r>
             <a:endParaRPr/>
           </a:p>
@@ -25392,7 +26774,7 @@
                 <a:latin typeface="Source Han Sans CN"/>
                 <a:ea typeface="Source Han Sans CN"/>
               </a:rPr>
-              <a:t>max F</a:t>
+              <a:t>F</a:t>
             </a:r>
             <a:r>
               <a:rPr lang="en-US" sz="900" b="1">
@@ -25472,7 +26854,7 @@
                 <a:latin typeface="Source Han Sans CN"/>
                 <a:ea typeface="Source Han Sans CN"/>
               </a:rPr>
-              <a:t>　　　</a:t>
+              <a:t>（事后统计指标）　　</a:t>
             </a:r>
             <a:r>
               <a:rPr lang="en-US" sz="1425" b="1">
@@ -25542,7 +26924,7 @@
                 <a:latin typeface="Source Han Sans CN"/>
                 <a:ea typeface="Source Han Sans CN"/>
               </a:rPr>
-              <a:t>F2 </a:t>
+              <a:t>F2 综合三维飞行代价与约束惩罚（航程、时间窗、终点可达、机巢容量末态泊位、三维地理、访问顺序）；「能装必交付」由覆盖门禁保证——F1 恒常、退化为事后指标</a:t>
             </a:r>
             <a:r>
               <a:rPr lang="zh-CN" sz="1050">
@@ -25552,7 +26934,7 @@
                 <a:latin typeface="Source Han Sans CN"/>
                 <a:ea typeface="Source Han Sans CN"/>
               </a:rPr>
-              <a:t>综合三维飞行代价、时间代价与约束惩罚；约束覆盖航程、时间窗、终点可达、机巢容量（末态泊位</a:t>
+              <a:t/>
             </a:r>
             <a:r>
               <a:rPr lang="en-US" sz="1050">
@@ -25562,7 +26944,7 @@
                 <a:latin typeface="Source Han Sans CN"/>
                 <a:ea typeface="Source Han Sans CN"/>
               </a:rPr>
-              <a:t> = </a:t>
+              <a:t/>
             </a:r>
             <a:r>
               <a:rPr lang="zh-CN" sz="1050">
@@ -25572,7 +26954,7 @@
                 <a:latin typeface="Source Han Sans CN"/>
                 <a:ea typeface="Source Han Sans CN"/>
               </a:rPr>
-              <a:t>现有</a:t>
+              <a:t/>
             </a:r>
             <a:r>
               <a:rPr lang="en-US" sz="1050">
@@ -25582,7 +26964,7 @@
                 <a:latin typeface="Source Han Sans CN"/>
                 <a:ea typeface="Source Han Sans CN"/>
               </a:rPr>
-              <a:t> − </a:t>
+              <a:t/>
             </a:r>
             <a:r>
               <a:rPr lang="zh-CN" sz="1050">
@@ -25592,7 +26974,7 @@
                 <a:latin typeface="Source Han Sans CN"/>
                 <a:ea typeface="Source Han Sans CN"/>
               </a:rPr>
-              <a:t>起飞</a:t>
+              <a:t/>
             </a:r>
             <a:r>
               <a:rPr lang="en-US" sz="1050">
@@ -25602,7 +26984,7 @@
                 <a:latin typeface="Source Han Sans CN"/>
                 <a:ea typeface="Source Han Sans CN"/>
               </a:rPr>
-              <a:t> + </a:t>
+              <a:t/>
             </a:r>
             <a:r>
               <a:rPr lang="zh-CN" sz="1050">
@@ -25612,7 +26994,7 @@
                 <a:latin typeface="Source Han Sans CN"/>
                 <a:ea typeface="Source Han Sans CN"/>
               </a:rPr>
-              <a:t>降落）、三维地理与访问顺序</a:t>
+              <a:t/>
             </a:r>
             <a:endParaRPr/>
           </a:p>
@@ -25933,7 +27315,7 @@
                 <a:latin typeface="Source Han Sans CN"/>
                 <a:ea typeface="Source Han Sans CN"/>
               </a:rPr>
-              <a:t>进化评价：四层准字典序（生产口径）</a:t>
+              <a:t>进化评价：四层准字典序（覆盖门禁口径）</a:t>
             </a:r>
             <a:endParaRPr/>
           </a:p>
@@ -26082,7 +27464,7 @@
                 <a:latin typeface="Source Han Sans CN"/>
                 <a:ea typeface="Source Han Sans CN"/>
               </a:rPr>
-              <a:t> − m·F</a:t>
+              <a:t> + W</a:t>
             </a:r>
             <a:r>
               <a:rPr lang="en-US" sz="825" b="1">
@@ -26092,7 +27474,7 @@
                 <a:latin typeface="Source Han Sans CN"/>
                 <a:ea typeface="Source Han Sans CN"/>
               </a:rPr>
-              <a:t>1eff</a:t>
+              <a:t>skip</a:t>
             </a:r>
             <a:r>
               <a:rPr lang="en-US" sz="1275" b="1">
@@ -26102,6 +27484,26 @@
                 <a:latin typeface="Source Han Sans CN"/>
                 <a:ea typeface="Source Han Sans CN"/>
               </a:rPr>
+              <a:t>·n</a:t>
+            </a:r>
+            <a:r>
+              <a:rPr lang="en-US" sz="825" b="1">
+                <a:solidFill>
+                  <a:srgbClr val="0E3F8C"/>
+                </a:solidFill>
+                <a:latin typeface="Source Han Sans CN"/>
+                <a:ea typeface="Source Han Sans CN"/>
+              </a:rPr>
+              <a:t>skip</a:t>
+            </a:r>
+            <a:r>
+              <a:rPr lang="en-US" sz="1275" b="1">
+                <a:solidFill>
+                  <a:srgbClr val="0E3F8C"/>
+                </a:solidFill>
+                <a:latin typeface="Source Han Sans CN"/>
+                <a:ea typeface="Source Han Sans CN"/>
+              </a:rPr>
               <a:t> + w</a:t>
             </a:r>
             <a:r>
@@ -26122,27 +27524,7 @@
                 <a:latin typeface="Source Han Sans CN"/>
                 <a:ea typeface="Source Han Sans CN"/>
               </a:rPr>
-              <a:t>·L</a:t>
-            </a:r>
-            <a:r>
-              <a:rPr lang="en-US" sz="825" b="1">
-                <a:solidFill>
-                  <a:srgbClr val="0E3F8C"/>
-                </a:solidFill>
-                <a:latin typeface="Source Han Sans CN"/>
-                <a:ea typeface="Source Han Sans CN"/>
-              </a:rPr>
-              <a:t>tot</a:t>
-            </a:r>
-            <a:r>
-              <a:rPr lang="en-US" sz="1275" b="1">
-                <a:solidFill>
-                  <a:srgbClr val="0E3F8C"/>
-                </a:solidFill>
-                <a:latin typeface="Source Han Sans CN"/>
-                <a:ea typeface="Source Han Sans CN"/>
-              </a:rPr>
-              <a:t> + λ·path + w</a:t>
+              <a:t>·L_tot + λ·path + w</a:t>
             </a:r>
             <a:r>
               <a:rPr lang="en-US" sz="825" b="1">
@@ -26249,7 +27631,7 @@
                 <a:latin typeface="Source Han Sans CN"/>
                 <a:ea typeface="Source Han Sans CN"/>
               </a:rPr>
-              <a:t>物理违约（硬）</a:t>
+              <a:t>物理硬约束</a:t>
             </a:r>
             <a:endParaRPr/>
           </a:p>
@@ -26299,7 +27681,7 @@
                 <a:latin typeface="Source Han Sans CN"/>
                 <a:ea typeface="Source Han Sans CN"/>
               </a:rPr>
-              <a:t>：任何一次违约压倒全部收益——幽灵交付永不入选</a:t>
+              <a:t>：任一次物理违约压倒其余各层全部差异——幽灵交付永不入选</a:t>
             </a:r>
             <a:endParaRPr/>
           </a:p>
@@ -26343,7 +27725,7 @@
         <p:spPr>
           <a:xfrm>
             <a:off x="6829425" y="3124200"/>
-            <a:ext cx="638175" cy="142875"/>
+            <a:ext cx="787400" cy="142875"/>
           </a:xfrm>
           <a:prstGeom prst="rect">
             <a:avLst/>
@@ -26366,7 +27748,7 @@
                 <a:latin typeface="Source Han Sans CN"/>
                 <a:ea typeface="Source Han Sans CN"/>
               </a:rPr>
-              <a:t>T1 </a:t>
+              <a:t>T0.5 </a:t>
             </a:r>
             <a:r>
               <a:rPr lang="zh-CN" sz="900" b="1">
@@ -26376,7 +27758,7 @@
                 <a:latin typeface="Source Han Sans CN"/>
                 <a:ea typeface="Source Han Sans CN"/>
               </a:rPr>
-              <a:t>交付收益</a:t>
+              <a:t>覆盖门禁</a:t>
             </a:r>
             <a:endParaRPr/>
           </a:p>
@@ -26414,7 +27796,7 @@
                 <a:latin typeface="Source Han Sans CN"/>
                 <a:ea typeface="Source Han Sans CN"/>
               </a:rPr>
-              <a:t>F1_eff </a:t>
+              <a:t>W_skip·n_skip：「能装却没装」即非法，不许成本权衡；构造修复下恒 0</a:t>
             </a:r>
             <a:r>
               <a:rPr lang="zh-CN" sz="975">
@@ -26424,7 +27806,7 @@
                 <a:latin typeface="Source Han Sans CN"/>
                 <a:ea typeface="Source Han Sans CN"/>
               </a:rPr>
-              <a:t>含迟到折减</a:t>
+              <a:t/>
             </a:r>
             <a:r>
               <a:rPr lang="en-US" sz="975">
@@ -26434,7 +27816,7 @@
                 <a:latin typeface="Source Han Sans CN"/>
                 <a:ea typeface="Source Han Sans CN"/>
               </a:rPr>
-              <a:t> eff = R·max(0, 1−L/W)</a:t>
+              <a:t/>
             </a:r>
             <a:r>
               <a:rPr lang="zh-CN" sz="975">
@@ -26444,7 +27826,7 @@
                 <a:latin typeface="Source Han Sans CN"/>
                 <a:ea typeface="Source Han Sans CN"/>
               </a:rPr>
-              <a:t>，</a:t>
+              <a:t/>
             </a:r>
             <a:r>
               <a:rPr lang="en-US" sz="975">
@@ -26454,7 +27836,7 @@
                 <a:latin typeface="Source Han Sans CN"/>
                 <a:ea typeface="Source Han Sans CN"/>
               </a:rPr>
-              <a:t>W=1800s</a:t>
+              <a:t/>
             </a:r>
             <a:endParaRPr/>
           </a:p>
@@ -26569,7 +27951,7 @@
                 <a:latin typeface="Source Han Sans CN"/>
                 <a:ea typeface="Source Han Sans CN"/>
               </a:rPr>
-              <a:t>0.01/s</a:t>
+              <a:t>w_late=0.01/s</a:t>
             </a:r>
             <a:r>
               <a:rPr lang="zh-CN" sz="975">
@@ -26579,7 +27961,7 @@
                 <a:latin typeface="Source Han Sans CN"/>
                 <a:ea typeface="Source Han Sans CN"/>
               </a:rPr>
-              <a:t>：迟到可接受但计价，只与路径同台竞争</a:t>
+              <a:t>：迟到可接受但不免费，与航程代价同台竞争</a:t>
             </a:r>
             <a:endParaRPr/>
           </a:p>
@@ -26656,7 +28038,7 @@
                 <a:latin typeface="Source Han Sans CN"/>
                 <a:ea typeface="Source Han Sans CN"/>
               </a:rPr>
-              <a:t>航程</a:t>
+              <a:t>航程与时间</a:t>
             </a:r>
             <a:r>
               <a:rPr lang="en-US" sz="900" b="1">
@@ -26666,7 +28048,7 @@
                 <a:latin typeface="Source Han Sans CN"/>
                 <a:ea typeface="Source Han Sans CN"/>
               </a:rPr>
-              <a:t>/</a:t>
+              <a:t/>
             </a:r>
             <a:r>
               <a:rPr lang="zh-CN" sz="900" b="1">
@@ -26676,7 +28058,7 @@
                 <a:latin typeface="Source Han Sans CN"/>
                 <a:ea typeface="Source Han Sans CN"/>
               </a:rPr>
-              <a:t>负载</a:t>
+              <a:t/>
             </a:r>
             <a:endParaRPr/>
           </a:p>
@@ -26856,7 +28238,7 @@
                 <a:latin typeface="Source Han Sans CN"/>
                 <a:ea typeface="Source Han Sans CN"/>
               </a:rPr>
-              <a:t>单标量适应度保持</a:t>
+              <a:t>固定表述：搜索用 f 不含 −m·F1，F1 只作事后指标——「能装必交付」由覆盖门禁承担、非加权近似；W_hard/W_skip 由指标上下界推导，λ/w_late/w_time 层内标定；big-M 旧式（−m·F1_eff）留作消融对照。</a:t>
             </a:r>
             <a:r>
               <a:rPr lang="en-US" sz="1050">
@@ -26866,7 +28248,7 @@
                 <a:latin typeface="Source Han Sans CN"/>
                 <a:ea typeface="Source Han Sans CN"/>
               </a:rPr>
-              <a:t> DMDE </a:t>
+              <a:t/>
             </a:r>
             <a:r>
               <a:rPr lang="zh-CN" sz="1050">
@@ -26876,7 +28258,7 @@
                 <a:latin typeface="Source Han Sans CN"/>
                 <a:ea typeface="Source Han Sans CN"/>
               </a:rPr>
-              <a:t>选择机制不变（与</a:t>
+              <a:t/>
             </a:r>
             <a:r>
               <a:rPr lang="en-US" sz="1050">
@@ -26886,7 +28268,7 @@
                 <a:latin typeface="Source Han Sans CN"/>
                 <a:ea typeface="Source Han Sans CN"/>
               </a:rPr>
-              <a:t> Zhao Ming 2017 </a:t>
+              <a:t/>
             </a:r>
             <a:r>
               <a:rPr lang="zh-CN" sz="1050">
@@ -26896,7 +28278,7 @@
                 <a:latin typeface="Source Han Sans CN"/>
                 <a:ea typeface="Source Han Sans CN"/>
               </a:rPr>
-              <a:t>同构）；</a:t>
+              <a:t/>
             </a:r>
             <a:r>
               <a:rPr lang="en-US" sz="1050">
@@ -26906,7 +28288,7 @@
                 <a:latin typeface="Source Han Sans CN"/>
                 <a:ea typeface="Source Han Sans CN"/>
               </a:rPr>
-              <a:t>T0 </a:t>
+              <a:t/>
             </a:r>
             <a:r>
               <a:rPr lang="zh-CN" sz="1050">
@@ -26916,7 +28298,7 @@
                 <a:latin typeface="Source Han Sans CN"/>
                 <a:ea typeface="Source Han Sans CN"/>
               </a:rPr>
-              <a:t>是</a:t>
+              <a:t/>
             </a:r>
             <a:r>
               <a:rPr lang="zh-CN" sz="1050" b="1">
@@ -26926,7 +28308,7 @@
                 <a:latin typeface="Source Han Sans CN"/>
                 <a:ea typeface="Source Han Sans CN"/>
               </a:rPr>
-              <a:t>护栏</a:t>
+              <a:t/>
             </a:r>
             <a:r>
               <a:rPr lang="zh-CN" sz="1050">
@@ -26936,7 +28318,7 @@
                 <a:latin typeface="Source Han Sans CN"/>
                 <a:ea typeface="Source Han Sans CN"/>
               </a:rPr>
-              <a:t>——探针显示</a:t>
+              <a:t/>
             </a:r>
             <a:r>
               <a:rPr lang="en-US" sz="1050">
@@ -26946,7 +28328,7 @@
                 <a:latin typeface="Source Han Sans CN"/>
                 <a:ea typeface="Source Han Sans CN"/>
               </a:rPr>
-              <a:t> 22423 </a:t>
+              <a:t/>
             </a:r>
             <a:r>
               <a:rPr lang="zh-CN" sz="1050">
@@ -26956,7 +28338,7 @@
                 <a:latin typeface="Source Han Sans CN"/>
                 <a:ea typeface="Source Han Sans CN"/>
               </a:rPr>
-              <a:t>次评估物理违约</a:t>
+              <a:t/>
             </a:r>
             <a:r>
               <a:rPr lang="en-US" sz="1050">
@@ -26966,7 +28348,7 @@
                 <a:latin typeface="Source Han Sans CN"/>
                 <a:ea typeface="Source Han Sans CN"/>
               </a:rPr>
-              <a:t> 0 </a:t>
+              <a:t/>
             </a:r>
             <a:r>
               <a:rPr lang="zh-CN" sz="1050">
@@ -26976,7 +28358,7 @@
                 <a:latin typeface="Source Han Sans CN"/>
                 <a:ea typeface="Source Han Sans CN"/>
               </a:rPr>
-              <a:t>次，「可行域窄」窄在零迟到而非物理不可行；</a:t>
+              <a:t/>
             </a:r>
             <a:r>
               <a:rPr lang="en-US" sz="1050">
@@ -26986,7 +28368,7 @@
                 <a:latin typeface="Source Han Sans CN"/>
                 <a:ea typeface="Source Han Sans CN"/>
               </a:rPr>
-              <a:t>T1 </a:t>
+              <a:t/>
             </a:r>
             <a:r>
               <a:rPr lang="zh-CN" sz="1050">
@@ -26996,7 +28378,7 @@
                 <a:latin typeface="Source Han Sans CN"/>
                 <a:ea typeface="Source Han Sans CN"/>
               </a:rPr>
-              <a:t>折减回答「迟到算不算完成」的语义问题。</a:t>
+              <a:t/>
             </a:r>
             <a:endParaRPr/>
           </a:p>

--- a/UAV协同任务分配方法-进展汇报/UAV协同任务分配方法-进展汇报.pptx
+++ b/UAV协同任务分配方法-进展汇报/UAV协同任务分配方法-进展汇报.pptx
@@ -914,6 +914,373 @@
               <a:t>  代价是放弃全局组合最优（P14 已声明为受控折中、折中幅度由实验量化）。</a:t>
             </a:r>
           </a:p>
+          <a:p>
+            <a:r>
+              <a:rPr lang="zh-CN" smtClean="0"/>
+              <a:t/>
+            </a:r>
+          </a:p>
+          <a:p>
+            <a:r>
+              <a:rPr lang="zh-CN" smtClean="0"/>
+              <a:t>【为什么用巡检数据举证，却不把问题定义域限定在巡检】</a:t>
+            </a:r>
+          </a:p>
+          <a:p>
+            <a:r>
+              <a:rPr lang="zh-CN" smtClean="0"/>
+              <a:t>本页三段量化缺口取自巡检，理由只有一个：这是目前公开实测数据最完整的场景</a:t>
+            </a:r>
+          </a:p>
+          <a:p>
+            <a:r>
+              <a:rPr lang="zh-CN" smtClean="0"/>
+              <a:t>（大疆机场 4 架次记录、机巢覆盖测算、单机日巡检口径都有出处）。应急派送与</a:t>
+            </a:r>
+          </a:p>
+          <a:p>
+            <a:r>
+              <a:rPr lang="zh-CN" smtClean="0"/>
+              <a:t>态势感知目前拿不到同等质量的公开数据，不代表缺口不存在——恰恰相反，应急场景</a:t>
+            </a:r>
+          </a:p>
+          <a:p>
+            <a:r>
+              <a:rPr lang="zh-CN" smtClean="0"/>
+              <a:t>「需求随上报产生、运力必然不足」在 P5 线 6（Yucesoy 2025 / van Steenbergen 2024）</a:t>
+            </a:r>
+          </a:p>
+          <a:p>
+            <a:r>
+              <a:rPr lang="zh-CN" smtClean="0"/>
+              <a:t>里已被反复确认，只是没有架次级实测。</a:t>
+            </a:r>
+          </a:p>
+          <a:p>
+            <a:r>
+              <a:rPr lang="zh-CN" smtClean="0"/>
+              <a:t>因此本页的正确讲法是：「以数据最完整的场景为例，说明这类缺口的量级」，</a:t>
+            </a:r>
+          </a:p>
+          <a:p>
+            <a:r>
+              <a:rPr lang="zh-CN" smtClean="0"/>
+              <a:t>而不是「只有巡检才做不完」。若被问「应急场景的数字呢」，答：定性一致、</a:t>
+            </a:r>
+          </a:p>
+          <a:p>
+            <a:r>
+              <a:rPr lang="zh-CN" smtClean="0"/>
+              <a:t>量级待实例化后补测，这正是 P8 下一步工作的第三步。</a:t>
+            </a:r>
+          </a:p>
+        </p:txBody>
+      </p:sp>
+    </p:spTree>
+  </p:cSld>
+  <p:clrMapOvr>
+    <a:masterClrMapping/>
+  </p:clrMapOvr>
+</p:notes>
+</file>
+
+<file path=ppt/notesSlides/notesSlide4.xml><?xml version="1.0" encoding="utf-8"?>
+<p:notes xmlns:a="http://schemas.openxmlformats.org/drawingml/2006/main" xmlns:p="http://schemas.openxmlformats.org/presentationml/2006/main" xmlns:r="http://schemas.openxmlformats.org/officeDocument/2006/relationships">
+  <p:cSld>
+    <p:spTree>
+      <p:nvGrpSpPr>
+        <p:cNvPr id="1" name=""/>
+        <p:cNvGrpSpPr/>
+        <p:nvPr/>
+      </p:nvGrpSpPr>
+      <p:grpSpPr>
+        <a:xfrm>
+          <a:off x="0" y="0"/>
+          <a:ext cx="0" cy="0"/>
+          <a:chOff x="0" y="0"/>
+          <a:chExt cx="0" cy="0"/>
+        </a:xfrm>
+      </p:grpSpPr>
+      <p:sp>
+        <p:nvSpPr>
+          <p:cNvPr id="2" name="Notes Placeholder 1"/>
+          <p:cNvSpPr>
+            <a:spLocks noGrp="1"/>
+          </p:cNvSpPr>
+          <p:nvPr>
+            <p:ph type="body" sz="quarter" idx="1"/>
+          </p:nvPr>
+        </p:nvSpPr>
+        <p:spPr>
+          <a:xfrm>
+            <a:off x="457200" y="914400"/>
+            <a:ext cx="5943600" cy="7315200"/>
+          </a:xfrm>
+          <a:prstGeom prst="rect">
+            <a:avLst/>
+          </a:prstGeom>
+        </p:spPr>
+        <p:txBody>
+          <a:bodyPr rtlCol="0" anchor="t"/>
+          <a:lstStyle/>
+          <a:p>
+            <a:r>
+              <a:rPr lang="zh-CN" smtClean="0"/>
+              <a:t>五大挑战（P10）· 口径说明与文献旁证</a:t>
+            </a:r>
+          </a:p>
+          <a:p>
+            <a:r>
+              <a:rPr lang="zh-CN" smtClean="0"/>
+              <a:t/>
+            </a:r>
+          </a:p>
+          <a:p>
+            <a:r>
+              <a:rPr lang="zh-CN" smtClean="0"/>
+              <a:t>【为什么标题去掉「广域巡检场景下」】</a:t>
+            </a:r>
+          </a:p>
+          <a:p>
+            <a:r>
+              <a:rPr lang="zh-CN" smtClean="0"/>
+              <a:t>五条挑战没有一条是巡检特有的：持续任务流、供过于求、多起降点、三维地形、</a:t>
+            </a:r>
+          </a:p>
+          <a:p>
+            <a:r>
+              <a:rPr lang="zh-CN" smtClean="0"/>
+              <a:t>机队能力受限，是「广域 + 持续任务流 + 资源受限」这一类问题的结构属性。</a:t>
+            </a:r>
+          </a:p>
+          <a:p>
+            <a:r>
+              <a:rPr lang="zh-CN" smtClean="0"/>
+              <a:t>广域巡检只是当前唯一实例化并验证的场景（P7 已作诚实声明），不是问题的定义域。</a:t>
+            </a:r>
+          </a:p>
+          <a:p>
+            <a:r>
+              <a:rPr lang="zh-CN" smtClean="0"/>
+              <a:t>标题退回巡检，会让 P3–P8 六页建立的框架定位前功尽弃——被问「你这方法只能巡检用吗」</a:t>
+            </a:r>
+          </a:p>
+          <a:p>
+            <a:r>
+              <a:rPr lang="zh-CN" smtClean="0"/>
+              <a:t>时，这一页就是最刺眼的反例。</a:t>
+            </a:r>
+          </a:p>
+          <a:p>
+            <a:r>
+              <a:rPr lang="zh-CN" smtClean="0"/>
+              <a:t/>
+            </a:r>
+          </a:p>
+          <a:p>
+            <a:r>
+              <a:rPr lang="zh-CN" smtClean="0"/>
+              <a:t>【五条挑战 × 文献旁证（被问「这些挑战是不是你自己编的」时用）】</a:t>
+            </a:r>
+          </a:p>
+          <a:p>
+            <a:r>
+              <a:rPr lang="zh-CN" smtClean="0"/>
+              <a:t>1 任务动态到达与持续滞留</a:t>
+            </a:r>
+          </a:p>
+          <a:p>
+            <a:r>
+              <a:rPr lang="zh-CN" smtClean="0"/>
+              <a:t>  → Alqefari &amp; Menai. Multi-UAV Task Assignment in Dynamic Environments:</a:t>
+            </a:r>
+          </a:p>
+          <a:p>
+            <a:r>
+              <a:rPr lang="zh-CN" smtClean="0"/>
+              <a:t>    Current Trends and Future Directions. Drones 9(1):75, 2025.</a:t>
+            </a:r>
+          </a:p>
+          <a:p>
+            <a:r>
+              <a:rPr lang="zh-CN" smtClean="0"/>
+              <a:t>    列为首要动态源 "sudden task appearances"，并要求方法</a:t>
+            </a:r>
+          </a:p>
+          <a:p>
+            <a:r>
+              <a:rPr lang="zh-CN" smtClean="0"/>
+              <a:t>    "reactive and adaptive, rather than one-shot static plans"。</a:t>
+            </a:r>
+          </a:p>
+          <a:p>
+            <a:r>
+              <a:rPr lang="zh-CN" smtClean="0"/>
+              <a:t>2 无人机可用状态动态变化</a:t>
+            </a:r>
+          </a:p>
+          <a:p>
+            <a:r>
+              <a:rPr lang="zh-CN" smtClean="0"/>
+              <a:t>  → 同上："UAV failures, and varying mission requirements"；</a:t>
+            </a:r>
+          </a:p>
+          <a:p>
+            <a:r>
+              <a:rPr lang="zh-CN" smtClean="0"/>
+              <a:t>    Drones 9(8):530 亦将 UAV failures 列为动态环境核心扰动。</a:t>
+            </a:r>
+          </a:p>
+          <a:p>
+            <a:r>
+              <a:rPr lang="zh-CN" smtClean="0"/>
+              <a:t>3 多机巢起降与终点选择</a:t>
+            </a:r>
+          </a:p>
+          <a:p>
+            <a:r>
+              <a:rPr lang="zh-CN" smtClean="0"/>
+              <a:t>  → 文献覆盖最薄的一条，恰是本工作的增量所在。最近的羊钊等 2025</a:t>
+            </a:r>
+          </a:p>
+          <a:p>
+            <a:r>
+              <a:rPr lang="zh-CN" smtClean="0"/>
+              <a:t>    做异巢起降两阶段，但仍要求遍历全部航路点、无弃单。</a:t>
+            </a:r>
+          </a:p>
+          <a:p>
+            <a:r>
+              <a:rPr lang="zh-CN" smtClean="0"/>
+              <a:t>4 任务数量与执行能力不匹配</a:t>
+            </a:r>
+          </a:p>
+          <a:p>
+            <a:r>
+              <a:rPr lang="zh-CN" smtClean="0"/>
+              <a:t>  → Wu et al. A Survey of UAV Swarm Task Allocation Based on the</a:t>
+            </a:r>
+          </a:p>
+          <a:p>
+            <a:r>
+              <a:rPr lang="zh-CN" smtClean="0"/>
+              <a:t>    Perspective of Coalition Formation. IJSIR 13(1), 2023. 明确指出缺口：</a:t>
+            </a:r>
+          </a:p>
+          <a:p>
+            <a:r>
+              <a:rPr lang="zh-CN" smtClean="0"/>
+              <a:t>    "Less consideration is given to task allocation with inadequate</a:t>
+            </a:r>
+          </a:p>
+          <a:p>
+            <a:r>
+              <a:rPr lang="zh-CN" smtClean="0"/>
+              <a:t>    resources … mostly assuming that UAV swarms possess sufficient</a:t>
+            </a:r>
+          </a:p>
+          <a:p>
+            <a:r>
+              <a:rPr lang="zh-CN" smtClean="0"/>
+              <a:t>    capacity to complete all tasks."——「默认全部完成」正是被假设掉的前提。</a:t>
+            </a:r>
+          </a:p>
+          <a:p>
+            <a:r>
+              <a:rPr lang="zh-CN" smtClean="0"/>
+              <a:t>5 三维地形抬升真实执行代价</a:t>
+            </a:r>
+          </a:p>
+          <a:p>
+            <a:r>
+              <a:rPr lang="zh-CN" smtClean="0"/>
+              <a:t>  → Review of Dynamic Task Allocation Methods for UAV Swarms Oriented to</a:t>
+            </a:r>
+          </a:p>
+          <a:p>
+            <a:r>
+              <a:rPr lang="zh-CN" smtClean="0"/>
+              <a:t>    Ground Targets. CSMS, 2021: "the existing UAV swarm task allocation</a:t>
+            </a:r>
+          </a:p>
+          <a:p>
+            <a:r>
+              <a:rPr lang="zh-CN" smtClean="0"/>
+              <a:t>    model assumes that the space is two-dimensional and that the target</a:t>
+            </a:r>
+          </a:p>
+          <a:p>
+            <a:r>
+              <a:rPr lang="zh-CN" smtClean="0"/>
+              <a:t>    is static"；量化支撑见伍景琼等 2025（DEM 修正率 2.85%~18.94%）。</a:t>
+            </a:r>
+          </a:p>
+          <a:p>
+            <a:r>
+              <a:rPr lang="zh-CN" smtClean="0"/>
+              <a:t/>
+            </a:r>
+          </a:p>
+          <a:p>
+            <a:r>
+              <a:rPr lang="zh-CN" smtClean="0"/>
+              <a:t>【规模与分层（对应 P6 第③块）】</a:t>
+            </a:r>
+          </a:p>
+          <a:p>
+            <a:r>
+              <a:rPr lang="zh-CN" smtClean="0"/>
+              <a:t>  → Drones 9(8):530："The number of possible task-to-UAV allocations grows</a:t>
+            </a:r>
+          </a:p>
+          <a:p>
+            <a:r>
+              <a:rPr lang="zh-CN" smtClean="0"/>
+              <a:t>    exponentially with the team size and task count … exacerbated in dynamic</a:t>
+            </a:r>
+          </a:p>
+          <a:p>
+            <a:r>
+              <a:rPr lang="zh-CN" smtClean="0"/>
+              <a:t>    scenarios, where the assignment may need to be recomputed frequently"；</a:t>
+            </a:r>
+          </a:p>
+          <a:p>
+            <a:r>
+              <a:rPr lang="zh-CN" smtClean="0"/>
+              <a:t>    并提出 "Optimality vs. Real-Time Responsiveness" 权衡。</a:t>
+            </a:r>
+          </a:p>
+          <a:p>
+            <a:r>
+              <a:rPr lang="zh-CN" smtClean="0"/>
+              <a:t>    即：全要素联合精确求解在滚动周期内不可达，因此必须分层缩空间。</a:t>
+            </a:r>
+          </a:p>
+          <a:p>
+            <a:r>
+              <a:rPr lang="zh-CN" smtClean="0"/>
+              <a:t/>
+            </a:r>
+          </a:p>
+          <a:p>
+            <a:r>
+              <a:rPr lang="zh-CN" smtClean="0"/>
+              <a:t>【讲法】</a:t>
+            </a:r>
+          </a:p>
+          <a:p>
+            <a:r>
+              <a:rPr lang="zh-CN" smtClean="0"/>
+              <a:t>不要逐条念挑战。先说「这五条同时成立 → 一次性静态解必然失效」，再进 P11 的</a:t>
+            </a:r>
+          </a:p>
+          <a:p>
+            <a:r>
+              <a:rPr lang="zh-CN" smtClean="0"/>
+              <a:t>两阶段分层框架。文献旁证只在被质疑时抛出，不要主动铺开。</a:t>
+            </a:r>
+          </a:p>
         </p:txBody>
       </p:sp>
     </p:spTree>
@@ -2276,7 +2643,7 @@
         <p:spPr>
           <a:xfrm>
             <a:off x="571500" y="285750"/>
-            <a:ext cx="3657600" cy="371475"/>
+            <a:ext cx="5715000" cy="371475"/>
           </a:xfrm>
           <a:prstGeom prst="rect">
             <a:avLst/>
@@ -2299,7 +2666,7 @@
                 <a:latin typeface="Source Han Sans CN"/>
                 <a:ea typeface="Source Han Sans CN"/>
               </a:rPr>
-              <a:t>广域巡检场景下的五大挑战</a:t>
+              <a:t>五大挑战：为什么不能一次解完</a:t>
             </a:r>
             <a:endParaRPr/>
           </a:p>
@@ -2314,7 +2681,7 @@
         <p:spPr>
           <a:xfrm>
             <a:off x="571500" y="742950"/>
-            <a:ext cx="5715000" cy="171450"/>
+            <a:ext cx="5905500" cy="171450"/>
           </a:xfrm>
           <a:prstGeom prst="rect">
             <a:avLst/>
@@ -2337,7 +2704,7 @@
                 <a:latin typeface="Source Han Sans CN"/>
                 <a:ea typeface="Source Han Sans CN"/>
               </a:rPr>
-              <a:t>五条挑战缺一不可——任一被拿掉，静态一次性规划就足以胜任</a:t>
+              <a:t>五条挑战是问题域的结构属性——任一被拿掉，静态规划就足够</a:t>
             </a:r>
             <a:endParaRPr/>
           </a:p>
@@ -3706,7 +4073,7 @@
                 <a:latin typeface="Source Han Sans CN"/>
                 <a:ea typeface="Source Han Sans CN"/>
               </a:rPr>
-              <a:t>DEM 修正率 2.85%~18.94%：山地航段代价显著高于平面距离，且高价值任务常伴随高航程代价——收益与代价必须联合权衡</a:t>
+              <a:t>DEM 修正率 2.85%~18.94%：真实三维航段代价显著高于平面直线距离，且高价值任务常伴随高航程代价——收益与代价必须联合权衡</a:t>
             </a:r>
             <a:endParaRPr/>
           </a:p>
@@ -37845,7 +38212,7 @@
                 <a:latin typeface="Source Han Sans CN"/>
                 <a:ea typeface="Source Han Sans CN"/>
               </a:rPr>
-              <a:t>广域巡检场景中，静态一次性规划无法应对持续到达的任务流。本章先刻画问题特征，再给出「快速任务选择缩空间</a:t>
+              <a:t>持续到达的任务流叠加机队能力上限，使静态一次性规划无法胜任。本章先刻画问题的五条结构性特征，再给出「快速任务选择缩空间 + 精细 MUAS 组合优化」的两阶段总体求解框架。</a:t>
             </a:r>
             <a:r>
               <a:rPr lang="en-US" sz="1200">
@@ -37855,7 +38222,7 @@
                 <a:latin typeface="Source Han Sans CN"/>
                 <a:ea typeface="Source Han Sans CN"/>
               </a:rPr>
-              <a:t> + </a:t>
+              <a:t/>
             </a:r>
             <a:r>
               <a:rPr lang="zh-CN" sz="1200">
@@ -37865,7 +38232,7 @@
                 <a:latin typeface="Source Han Sans CN"/>
                 <a:ea typeface="Source Han Sans CN"/>
               </a:rPr>
-              <a:t>精细</a:t>
+              <a:t/>
             </a:r>
             <a:r>
               <a:rPr lang="en-US" sz="1200">
@@ -37875,7 +38242,7 @@
                 <a:latin typeface="Source Han Sans CN"/>
                 <a:ea typeface="Source Han Sans CN"/>
               </a:rPr>
-              <a:t> MUAS </a:t>
+              <a:t/>
             </a:r>
             <a:r>
               <a:rPr lang="zh-CN" sz="1200">
@@ -37885,7 +38252,7 @@
                 <a:latin typeface="Source Han Sans CN"/>
                 <a:ea typeface="Source Han Sans CN"/>
               </a:rPr>
-              <a:t>组合优化」的两阶段总体求解框架。</a:t>
+              <a:t/>
             </a:r>
             <a:endParaRPr/>
           </a:p>

--- a/UAV协同任务分配方法-进展汇报/UAV协同任务分配方法-进展汇报.pptx
+++ b/UAV协同任务分配方法-进展汇报/UAV协同任务分配方法-进展汇报.pptx
@@ -17191,7 +17191,7 @@
                 <a:latin typeface="Source Han Sans CN"/>
                 <a:ea typeface="Source Han Sans CN"/>
               </a:rPr>
-              <a:t/>
+              <a:t>；</a:t>
             </a:r>
             <a:r>
               <a:rPr lang="zh-CN" sz="1050">

--- a/UAV协同任务分配方法-进展汇报/UAV协同任务分配方法-进展汇报.pptx
+++ b/UAV协同任务分配方法-进展汇报/UAV协同任务分配方法-进展汇报.pptx
@@ -1291,6 +1291,1163 @@
 </p:notes>
 </file>
 
+<file path=ppt/notesSlides/notesSlide5.xml><?xml version="1.0" encoding="utf-8"?>
+<p:notes xmlns:a="http://schemas.openxmlformats.org/drawingml/2006/main" xmlns:p="http://schemas.openxmlformats.org/presentationml/2006/main" xmlns:r="http://schemas.openxmlformats.org/officeDocument/2006/relationships">
+  <p:cSld>
+    <p:spTree>
+      <p:nvGrpSpPr>
+        <p:cNvPr id="1" name=""/>
+        <p:cNvGrpSpPr/>
+        <p:nvPr/>
+      </p:nvGrpSpPr>
+      <p:grpSpPr>
+        <a:xfrm>
+          <a:off x="0" y="0"/>
+          <a:ext cx="0" cy="0"/>
+          <a:chOff x="0" y="0"/>
+          <a:chExt cx="0" cy="0"/>
+        </a:xfrm>
+      </p:grpSpPr>
+      <p:sp>
+        <p:nvSpPr>
+          <p:cNvPr id="2" name="Notes Placeholder 1"/>
+          <p:cNvSpPr>
+            <a:spLocks noGrp="1"/>
+          </p:cNvSpPr>
+          <p:nvPr>
+            <p:ph type="body" sz="quarter" idx="1"/>
+          </p:nvPr>
+        </p:nvSpPr>
+        <p:spPr>
+          <a:xfrm>
+            <a:off x="457200" y="914400"/>
+            <a:ext cx="5943600" cy="7315200"/>
+          </a:xfrm>
+          <a:prstGeom prst="rect">
+            <a:avLst/>
+          </a:prstGeom>
+        </p:spPr>
+        <p:txBody>
+          <a:bodyPr rtlCol="0" anchor="t"/>
+          <a:lstStyle/>
+          <a:p>
+            <a:r>
+              <a:rPr lang="zh-CN" smtClean="0"/>
+              <a:t>研究进展（P8）· exp01 冒烟档结案记录（2026-10-24）</a:t>
+            </a:r>
+          </a:p>
+          <a:p>
+            <a:r>
+              <a:rPr lang="zh-CN" smtClean="0"/>
+              <a:t/>
+            </a:r>
+          </a:p>
+          <a:p>
+            <a:r>
+              <a:rPr lang="zh-CN" smtClean="0"/>
+              <a:t>【结案范围】exp01_smoke：λ=1e-1、门禁关、seeds [42,43,44]、pop 50 / gen 100；</a:t>
+            </a:r>
+          </a:p>
+          <a:p>
+            <a:r>
+              <a:rPr lang="zh-CN" smtClean="0"/>
+              <a:t>方法组件全部定型：post_cost_polish（跨机改派 + 组内 2-opt/Or-opt 联合局部搜索）</a:t>
+            </a:r>
+          </a:p>
+          <a:p>
+            <a:r>
+              <a:rPr lang="zh-CN" smtClean="0"/>
+              <a:t>成为求解器标准后处理。测试 324 passed（成本 polish 专项 15 个）。</a:t>
+            </a:r>
+          </a:p>
+          <a:p>
+            <a:r>
+              <a:rPr lang="zh-CN" smtClean="0"/>
+              <a:t/>
+            </a:r>
+          </a:p>
+          <a:p>
+            <a:r>
+              <a:rPr lang="zh-CN" smtClean="0"/>
+              <a:t>【成本 polish 三轮 A/B（3 seed，全部覆盖不侵蚀：完成 60/60、淘汰 0）】</a:t>
+            </a:r>
+          </a:p>
+          <a:p>
+            <a:r>
+              <a:rPr lang="zh-CN" smtClean="0"/>
+              <a:t>① 纯组内 2-opt/Or-opt：63 个周期解仅 3 个有接受，总量 −0.047%</a:t>
+            </a:r>
+          </a:p>
+          <a:p>
+            <a:r>
+              <a:rPr lang="zh-CN" smtClean="0"/>
+              <a:t>   （−2262 m / 4853.475 km）——顺序维度在 exp01 口径无余量</a:t>
+            </a:r>
+          </a:p>
+          <a:p>
+            <a:r>
+              <a:rPr lang="zh-CN" smtClean="0"/>
+              <a:t>   （每机 1.6~2 个任务，段反转邻域近乎空集；机内 position 亦零接受，</a:t>
+            </a:r>
+          </a:p>
+          <a:p>
+            <a:r>
+              <a:rPr lang="zh-CN" smtClean="0"/>
+              <a:t>   两个独立证据同指「顺序已局部最优」）。</a:t>
+            </a:r>
+          </a:p>
+          <a:p>
+            <a:r>
+              <a:rPr lang="zh-CN" smtClean="0"/>
+              <a:t>② 跨机单任务改派（归属维度）：17 次改派 + 6 次组内 = 23 次接受，</a:t>
+            </a:r>
+          </a:p>
+          <a:p>
+            <a:r>
+              <a:rPr lang="zh-CN" smtClean="0"/>
+              <a:t>   总航程 1617.197 → 1551.033 km（−4.09%），path/完成 26950 → 25850 m；</a:t>
+            </a:r>
+          </a:p>
+          <a:p>
+            <a:r>
+              <a:rPr lang="zh-CN" smtClean="0"/>
+              <a:t>   on_time 0.9333 → 0.9389（+0.60pp），迟到 −8.3%，墙钟 +2.1%，拒绝数 0。</a:t>
+            </a:r>
+          </a:p>
+          <a:p>
+            <a:r>
+              <a:rPr lang="zh-CN" smtClean="0"/>
+              <a:t>③ 诊断 blocked_range=161 / blocked_late=39（几何更优但被航程门/迟到门</a:t>
+            </a:r>
+          </a:p>
+          <a:p>
+            <a:r>
+              <a:rPr lang="zh-CN" smtClean="0"/>
+              <a:t>   拦死，12:1）⇒ 下一步收益在多任务联合改派，不在单任务。</a:t>
+            </a:r>
+          </a:p>
+          <a:p>
+            <a:r>
+              <a:rPr lang="zh-CN" smtClean="0"/>
+              <a:t/>
+            </a:r>
+          </a:p>
+          <a:p>
+            <a:r>
+              <a:rPr lang="zh-CN" smtClean="0"/>
+              <a:t>【两个负面结果（同样要汇报）】</a:t>
+            </a:r>
+          </a:p>
+          <a:p>
+            <a:r>
+              <a:rPr lang="zh-CN" smtClean="0"/>
+              <a:t>· 解码期最近邻重排（reorder_range_optimize）已证伪并默认关闭：</a:t>
+            </a:r>
+          </a:p>
+          <a:p>
+            <a:r>
+              <a:rPr lang="zh-CN" smtClean="0"/>
+              <a:t>  访问顺序是 DE 编码的一部分，解码期重排=用贪心覆盖搜索结果；</a:t>
+            </a:r>
+          </a:p>
+          <a:p>
+            <a:r>
+              <a:rPr lang="zh-CN" smtClean="0"/>
+              <a:t>  正式档总航程 +4.0%、按时率 −2.4pp。冒烟档（gen 20）的 −16.7% 是</a:t>
+            </a:r>
+          </a:p>
+          <a:p>
+            <a:r>
+              <a:rPr lang="zh-CN" smtClean="0"/>
+              <a:t>  搜索不充分造成的假象。</a:t>
+            </a:r>
+          </a:p>
+          <a:p>
+            <a:r>
+              <a:rPr lang="zh-CN" smtClean="0"/>
+              <a:t>· 旧「单调成本 polish」的增益 100% 来自救回超期任务（F1），航程贡献≈0</a:t>
+            </a:r>
+          </a:p>
+          <a:p>
+            <a:r>
+              <a:rPr lang="zh-CN" smtClean="0"/>
+              <a:t>  （早退代码：原序零迟到即返回，航程从不进入比较）——见诊断文档反证。</a:t>
+            </a:r>
+          </a:p>
+          <a:p>
+            <a:r>
+              <a:rPr lang="zh-CN" smtClean="0"/>
+              <a:t/>
+            </a:r>
+          </a:p>
+          <a:p>
+            <a:r>
+              <a:rPr lang="zh-CN" smtClean="0"/>
+              <a:t>【口径修正（幻影腿）】空航次恒 0 后，历史上报航程偏高 0.024~0.065%</a:t>
+            </a:r>
+          </a:p>
+          <a:p>
+            <a:r>
+              <a:rPr lang="zh-CN" smtClean="0"/>
+              <a:t>（三 seed 虚报 403/1091/388 m）；绝对航程以修复后运行为准，A/B 差值不受</a:t>
+            </a:r>
+          </a:p>
+          <a:p>
+            <a:r>
+              <a:rPr lang="zh-CN" smtClean="0"/>
+              <a:t>影响（两臂闲置结构相同，幻影腿相消）。</a:t>
+            </a:r>
+          </a:p>
+          <a:p>
+            <a:r>
+              <a:rPr lang="zh-CN" smtClean="0"/>
+              <a:t/>
+            </a:r>
+          </a:p>
+          <a:p>
+            <a:r>
+              <a:rPr lang="zh-CN" smtClean="0"/>
+              <a:t>【滚动级联】总收益 −198492 m = 直接增益 194001 m + 级联 4492 m（2.3%</a:t>
+            </a:r>
+          </a:p>
+          <a:p>
+            <a:r>
+              <a:rPr lang="zh-CN" smtClean="0"/>
+              <a:t>来自下游周期从扰动状态出发搜得更优）——论文引用总收益时宜拆开两项。</a:t>
+            </a:r>
+          </a:p>
+          <a:p>
+            <a:r>
+              <a:rPr lang="zh-CN" smtClean="0"/>
+              <a:t/>
+            </a:r>
+          </a:p>
+          <a:p>
+            <a:r>
+              <a:rPr lang="zh-CN" smtClean="0"/>
+              <a:t>【仍待办】exp02–exp06 五组实验按新口径重跑；覆盖门禁开关未默认开启；</a:t>
+            </a:r>
+          </a:p>
+          <a:p>
+            <a:r>
+              <a:rPr lang="zh-CN" smtClean="0"/>
+              <a:t>选择层标定（机数名额 vs 能力驱动）待 exp02 结论。</a:t>
+            </a:r>
+          </a:p>
+        </p:txBody>
+      </p:sp>
+    </p:spTree>
+  </p:cSld>
+  <p:clrMapOvr>
+    <a:masterClrMapping/>
+  </p:clrMapOvr>
+</p:notes>
+</file>
+
+<file path=ppt/notesSlides/notesSlide6.xml><?xml version="1.0" encoding="utf-8"?>
+<p:notes xmlns:a="http://schemas.openxmlformats.org/drawingml/2006/main" xmlns:p="http://schemas.openxmlformats.org/presentationml/2006/main" xmlns:r="http://schemas.openxmlformats.org/officeDocument/2006/relationships">
+  <p:cSld>
+    <p:spTree>
+      <p:nvGrpSpPr>
+        <p:cNvPr id="1" name=""/>
+        <p:cNvGrpSpPr/>
+        <p:nvPr/>
+      </p:nvGrpSpPr>
+      <p:grpSpPr>
+        <a:xfrm>
+          <a:off x="0" y="0"/>
+          <a:ext cx="0" cy="0"/>
+          <a:chOff x="0" y="0"/>
+          <a:chExt cx="0" cy="0"/>
+        </a:xfrm>
+      </p:grpSpPr>
+      <p:sp>
+        <p:nvSpPr>
+          <p:cNvPr id="2" name="Notes Placeholder 1"/>
+          <p:cNvSpPr>
+            <a:spLocks noGrp="1"/>
+          </p:cNvSpPr>
+          <p:nvPr>
+            <p:ph type="body" sz="quarter" idx="1"/>
+          </p:nvPr>
+        </p:nvSpPr>
+        <p:spPr>
+          <a:xfrm>
+            <a:off x="457200" y="914400"/>
+            <a:ext cx="5943600" cy="7315200"/>
+          </a:xfrm>
+          <a:prstGeom prst="rect">
+            <a:avLst/>
+          </a:prstGeom>
+        </p:spPr>
+        <p:txBody>
+          <a:bodyPr rtlCol="0" anchor="t"/>
+          <a:lstStyle/>
+          <a:p>
+            <a:r>
+              <a:rPr lang="zh-CN" smtClean="0"/>
+              <a:t>总体框架（P11）· 交付后成本 polish 机制说明</a:t>
+            </a:r>
+          </a:p>
+          <a:p>
+            <a:r>
+              <a:rPr lang="zh-CN" smtClean="0"/>
+              <a:t/>
+            </a:r>
+          </a:p>
+          <a:p>
+            <a:r>
+              <a:rPr lang="zh-CN" smtClean="0"/>
+              <a:t>【定位】不是第四个阶段，是第二阶段（选择性 MUAS）的标准终态后处理：</a:t>
+            </a:r>
+          </a:p>
+          <a:p>
+            <a:r>
+              <a:rPr lang="zh-CN" smtClean="0"/>
+              <a:t>DMDE 交付解（或 memetic 档案 / coverage_first 后处理，择优化胜）之后、</a:t>
+            </a:r>
+          </a:p>
+          <a:p>
+            <a:r>
+              <a:rPr lang="zh-CN" smtClean="0"/>
+              <a:t>诊断组装之前；预构建解通道（基线）不适用。</a:t>
+            </a:r>
+          </a:p>
+          <a:p>
+            <a:r>
+              <a:rPr lang="zh-CN" smtClean="0"/>
+              <a:t/>
+            </a:r>
+          </a:p>
+          <a:p>
+            <a:r>
+              <a:rPr lang="zh-CN" smtClean="0"/>
+              <a:t>【联合局部搜索】两个维度交替，各收敛后一个完整轮次零接受即停（上限 3 轮）：</a:t>
+            </a:r>
+          </a:p>
+          <a:p>
+            <a:r>
+              <a:rPr lang="zh-CN" smtClean="0"/>
+              <a:t>· 归属维度——跨机单任务改派 _cost_polish_relocate：把单任务从供体机迁到</a:t>
+            </a:r>
+          </a:p>
+          <a:p>
+            <a:r>
+              <a:rPr lang="zh-CN" smtClean="0"/>
+              <a:t>  受体机（含可用但空闲的机），计算机械最优插入位的净变化</a:t>
+            </a:r>
+          </a:p>
+          <a:p>
+            <a:r>
+              <a:rPr lang="zh-CN" smtClean="0"/>
+              <a:t>  Δ = tour(src\{tid}) + tour(dst∪tid) − tour(src) − tour(dst)；</a:t>
+            </a:r>
+          </a:p>
+          <a:p>
+            <a:r>
+              <a:rPr lang="zh-CN" smtClean="0"/>
+              <a:t>· 顺序维度——组内 2-opt（段反转）+ Or-opt（段长 1~3 迁移）_cost_polish_routes。</a:t>
+            </a:r>
+          </a:p>
+          <a:p>
+            <a:r>
+              <a:rPr lang="zh-CN" smtClean="0"/>
+              <a:t>两维度有二阶交互（改派改末任务 → 末任务改返航腿与巢容量竞争），故设轮次上限。</a:t>
+            </a:r>
+          </a:p>
+          <a:p>
+            <a:r>
+              <a:rPr lang="zh-CN" smtClean="0"/>
+              <a:t/>
+            </a:r>
+          </a:p>
+          <a:p>
+            <a:r>
+              <a:rPr lang="zh-CN" smtClean="0"/>
+              <a:t>【四道门（逐机判定，缺一不可）】① 两侧航程门：候选全程 ≤ 两机剩余航程；</a:t>
+            </a:r>
+          </a:p>
+          <a:p>
+            <a:r>
+              <a:rPr lang="zh-CN" smtClean="0"/>
+              <a:t>② 两侧迟到门：迟到键 (数, 总量) 逐分量不劣化；③ 执行集门：任务只换机不丢失；</a:t>
+            </a:r>
+          </a:p>
+          <a:p>
+            <a:r>
+              <a:rPr lang="zh-CN" smtClean="0"/>
+              <a:t>④ 成本门：净航程严格下降 &gt; eps（1 m）。只接受严格改进 ⇒ 结构上不可能更差。</a:t>
+            </a:r>
+          </a:p>
+          <a:p>
+            <a:r>
+              <a:rPr lang="zh-CN" smtClean="0"/>
+              <a:t/>
+            </a:r>
+          </a:p>
+          <a:p>
+            <a:r>
+              <a:rPr lang="zh-CN" smtClean="0"/>
+              <a:t>【搜索纪律】first-improvement + 接受即重启邻域扫描；按 id 升序、无随机、</a:t>
+            </a:r>
+          </a:p>
+          <a:p>
+            <a:r>
+              <a:rPr lang="zh-CN" smtClean="0"/>
+              <a:t>逐位可复现；零接受则原样返回（exp01 上 60/63 个周期解走这条路，开销在噪声内）。</a:t>
+            </a:r>
+          </a:p>
+          <a:p>
+            <a:r>
+              <a:rPr lang="zh-CN" smtClean="0"/>
+              <a:t/>
+            </a:r>
+          </a:p>
+          <a:p>
+            <a:r>
+              <a:rPr lang="zh-CN" smtClean="0"/>
+              <a:t>【下游联合重解】有改进时按 build_solution 终态同序：重排（时间窗）→ 航程闸</a:t>
+            </a:r>
+          </a:p>
+          <a:p>
+            <a:r>
+              <a:rPr lang="zh-CN" smtClean="0"/>
+              <a:t>→ 终点机巢最小费用流精确重解 → 航程闸 → 重装配——改序/改派会改末任务，</a:t>
+            </a:r>
+          </a:p>
+          <a:p>
+            <a:r>
+              <a:rPr lang="zh-CN" smtClean="0"/>
+              <a:t>返航腿与巢容量竞争都变，必须重解否则交付解口径与 polish 估价脱节。</a:t>
+            </a:r>
+          </a:p>
+          <a:p>
+            <a:r>
+              <a:rPr lang="zh-CN" smtClean="0"/>
+              <a:t/>
+            </a:r>
+          </a:p>
+          <a:p>
+            <a:r>
+              <a:rPr lang="zh-CN" smtClean="0"/>
+              <a:t>【采纳判据（run_selective_muas 内，与 coverage_first 同构）】执行集 ⊇ 旧解</a:t>
+            </a:r>
+          </a:p>
+          <a:p>
+            <a:r>
+              <a:rPr lang="zh-CN" smtClean="0"/>
+              <a:t>且硬违约不增且交付航程严格下降；被拒则交付解逐位不变。</a:t>
+            </a:r>
+          </a:p>
+          <a:p>
+            <a:r>
+              <a:rPr lang="zh-CN" smtClean="0"/>
+              <a:t/>
+            </a:r>
+          </a:p>
+          <a:p>
+            <a:r>
+              <a:rPr lang="zh-CN" smtClean="0"/>
+              <a:t>【为什么绕开 DE 适应度】诊断显示 λ=1e-1 下 |m·F1| : |λ·path| ≈ 804:1</a:t>
+            </a:r>
+          </a:p>
+          <a:p>
+            <a:r>
+              <a:rPr lang="zh-CN" smtClean="0"/>
+              <a:t>（单任务台阶 m·R̄ ≈ 1.6e6 vs λ·path 全项 4.06e3，402:1），搜索期成本项</a:t>
+            </a:r>
+          </a:p>
+          <a:p>
+            <a:r>
+              <a:rPr lang="zh-CN" smtClean="0"/>
+              <a:t>只能在收益完全相等的解之间做 tie-break。成本优化因此放到交付后、只以</a:t>
+            </a:r>
+          </a:p>
+          <a:p>
+            <a:r>
+              <a:rPr lang="zh-CN" smtClean="0"/>
+              <a:t>航程为目标、以执行集守恒为纪律——「搜索管覆盖，交付后 polish 管成本」，</a:t>
+            </a:r>
+          </a:p>
+          <a:p>
+            <a:r>
+              <a:rPr lang="zh-CN" smtClean="0"/>
+              <a:t>二者互补而非重复（DE 环内的 relocate 为 F1 愿牺牲航程；交付后只问</a:t>
+            </a:r>
+          </a:p>
+          <a:p>
+            <a:r>
+              <a:rPr lang="zh-CN" smtClean="0"/>
+              <a:t>「这单换台机器能否更便宜」）。</a:t>
+            </a:r>
+          </a:p>
+          <a:p>
+            <a:r>
+              <a:rPr lang="zh-CN" smtClean="0"/>
+              <a:t/>
+            </a:r>
+          </a:p>
+          <a:p>
+            <a:r>
+              <a:rPr lang="zh-CN" smtClean="0"/>
+              <a:t>【被问「这不算缝合吗」】与 DE 环内 polish_assignment（relocate/swap/position，</a:t>
+            </a:r>
+          </a:p>
+          <a:p>
+            <a:r>
+              <a:rPr lang="zh-CN" smtClean="0"/>
+              <a:t>走完整修复链、覆盖优先可增任务）目标不同、门禁口径不同、作用时点不同；</a:t>
+            </a:r>
+          </a:p>
+          <a:p>
+            <a:r>
+              <a:rPr lang="zh-CN" smtClean="0"/>
+              <a:t>三者是「搜索期修复—交付后覆盖—交付后成本」的递进，A/B 各自独立量化</a:t>
+            </a:r>
+          </a:p>
+          <a:p>
+            <a:r>
+              <a:rPr lang="zh-CN" smtClean="0"/>
+              <a:t>（−4.09% 的臂是全 polish 关 → 全开）。</a:t>
+            </a:r>
+          </a:p>
+        </p:txBody>
+      </p:sp>
+    </p:spTree>
+  </p:cSld>
+  <p:clrMapOvr>
+    <a:masterClrMapping/>
+  </p:clrMapOvr>
+</p:notes>
+</file>
+
+<file path=ppt/notesSlides/notesSlide7.xml><?xml version="1.0" encoding="utf-8"?>
+<p:notes xmlns:a="http://schemas.openxmlformats.org/drawingml/2006/main" xmlns:p="http://schemas.openxmlformats.org/presentationml/2006/main" xmlns:r="http://schemas.openxmlformats.org/officeDocument/2006/relationships">
+  <p:cSld>
+    <p:spTree>
+      <p:nvGrpSpPr>
+        <p:cNvPr id="1" name=""/>
+        <p:cNvGrpSpPr/>
+        <p:nvPr/>
+      </p:nvGrpSpPr>
+      <p:grpSpPr>
+        <a:xfrm>
+          <a:off x="0" y="0"/>
+          <a:ext cx="0" cy="0"/>
+          <a:chOff x="0" y="0"/>
+          <a:chExt cx="0" cy="0"/>
+        </a:xfrm>
+      </p:grpSpPr>
+      <p:sp>
+        <p:nvSpPr>
+          <p:cNvPr id="2" name="Notes Placeholder 1"/>
+          <p:cNvSpPr>
+            <a:spLocks noGrp="1"/>
+          </p:cNvSpPr>
+          <p:nvPr>
+            <p:ph type="body" sz="quarter" idx="1"/>
+          </p:nvPr>
+        </p:nvSpPr>
+        <p:spPr>
+          <a:xfrm>
+            <a:off x="457200" y="914400"/>
+            <a:ext cx="5943600" cy="7315200"/>
+          </a:xfrm>
+          <a:prstGeom prst="rect">
+            <a:avLst/>
+          </a:prstGeom>
+        </p:spPr>
+        <p:txBody>
+          <a:bodyPr rtlCol="0" anchor="t"/>
+          <a:lstStyle/>
+          <a:p>
+            <a:r>
+              <a:rPr lang="zh-CN" smtClean="0"/>
+              <a:t>优化模型与适应度（P16）· 适应度量纲诊断（2026-10-24，exp01 落盘数据反解）</a:t>
+            </a:r>
+          </a:p>
+          <a:p>
+            <a:r>
+              <a:rPr lang="zh-CN" smtClean="0"/>
+              <a:t/>
+            </a:r>
+          </a:p>
+          <a:p>
+            <a:r>
+              <a:rPr lang="zh-CN" smtClean="0"/>
+              <a:t>【为什么要诊断】P16 的字典序口径把完成与成本分层，但 big-M 兼容口径</a:t>
+            </a:r>
+          </a:p>
+          <a:p>
+            <a:r>
+              <a:rPr lang="zh-CN" smtClean="0"/>
+              <a:t>（−m·F1_eff + λ·path）仍在消融对比中使用，其量纲失衡程度需要量化。</a:t>
+            </a:r>
+          </a:p>
+          <a:p>
+            <a:r>
+              <a:rPr lang="zh-CN" smtClean="0"/>
+              <a:t/>
+            </a:r>
+          </a:p>
+          <a:p>
+            <a:r>
+              <a:rPr lang="zh-CN" smtClean="0"/>
+              <a:t>【实测（周期 1 快照反解，λ=1e-1，标量公式复算误差 0.0000）】</a:t>
+            </a:r>
+          </a:p>
+          <a:p>
+            <a:r>
+              <a:rPr lang="zh-CN" smtClean="0"/>
+              <a:t>m = 276143.71（收益池标定）、λ = 0.1：</a:t>
+            </a:r>
+          </a:p>
+          <a:p>
+            <a:r>
+              <a:rPr lang="zh-CN" smtClean="0"/>
+              <a:t>· |m·F1| : |λ·path| = 8040:1（λ=1e-2）→ 约 804:1（λ=1e-1）</a:t>
+            </a:r>
+          </a:p>
+          <a:p>
+            <a:r>
+              <a:rPr lang="zh-CN" smtClean="0"/>
+              <a:t>· 单任务尺度：m·R̄ = 1.632e6 vs λ·path 全项 4.06e3 ⇒ 402:1</a:t>
+            </a:r>
+          </a:p>
+          <a:p>
+            <a:r>
+              <a:rPr lang="zh-CN" smtClean="0"/>
+              <a:t>即「多完成一个任务」的适应度台阶 ≈ 整条航程价值的 402 倍。</a:t>
+            </a:r>
+          </a:p>
+          <a:p>
+            <a:r>
+              <a:rPr lang="zh-CN" smtClean="0"/>
+              <a:t>⇒ 搜索期任何改动归属/顺序的变异，其适应度变化几乎全部由 F1 决定；</a:t>
+            </a:r>
+          </a:p>
+          <a:p>
+            <a:r>
+              <a:rPr lang="zh-CN" smtClean="0"/>
+              <a:t>成本项只在 F1 完全相等的解之间 tie-break，而离散编码下这类变异稀少。</a:t>
+            </a:r>
+          </a:p>
+          <a:p>
+            <a:r>
+              <a:rPr lang="zh-CN" smtClean="0"/>
+              <a:t/>
+            </a:r>
+          </a:p>
+          <a:p>
+            <a:r>
+              <a:rPr lang="zh-CN" smtClean="0"/>
+              <a:t>【收敛曲线印证】周期 1 首次达终值在第 22/100 代，其后 78 代零改进；</a:t>
+            </a:r>
+          </a:p>
+          <a:p>
+            <a:r>
+              <a:rPr lang="zh-CN" smtClean="0"/>
+              <a:t>周期 2 为 45 代。搜索期总下降 361322 中路径贡献上限仅 1.12%。</a:t>
+            </a:r>
+          </a:p>
+          <a:p>
+            <a:r>
+              <a:rPr lang="zh-CN" smtClean="0"/>
+              <a:t/>
+            </a:r>
+          </a:p>
+          <a:p>
+            <a:r>
+              <a:rPr lang="zh-CN" smtClean="0"/>
+              <a:t>【旧 polish 增益反证】名义「成本打磨」的 polish_gain 周期 1 达 231486，</a:t>
+            </a:r>
+          </a:p>
+          <a:p>
+            <a:r>
+              <a:rPr lang="zh-CN" smtClean="0"/>
+              <a:t>反证全部来自 F1（把超期任务救回）：若来自航程需 23,149 km 差，</a:t>
+            </a:r>
+          </a:p>
+          <a:p>
+            <a:r>
+              <a:rPr lang="zh-CN" smtClean="0"/>
+              <a:t>而实测总航程仅 406 km。⇒ 早退代码（原序零迟到即返回）下航程从未被优化。</a:t>
+            </a:r>
+          </a:p>
+          <a:p>
+            <a:r>
+              <a:rPr lang="zh-CN" smtClean="0"/>
+              <a:t/>
+            </a:r>
+          </a:p>
+          <a:p>
+            <a:r>
+              <a:rPr lang="zh-CN" smtClean="0"/>
+              <a:t>【结论口径】「路径优化不足」的准确表述是「路径在归属维度可优化、</a:t>
+            </a:r>
+          </a:p>
+          <a:p>
+            <a:r>
+              <a:rPr lang="zh-CN" smtClean="0"/>
+              <a:t>在顺序维度已无余量」：交付顺序经贪心插入 + 5 候选挑选已局部最优</a:t>
+            </a:r>
+          </a:p>
+          <a:p>
+            <a:r>
+              <a:rPr lang="zh-CN" smtClean="0"/>
+              <a:t>（position 邻域零接受、2-opt/Or-opt 3/63 接受），成本余量集中在归属</a:t>
+            </a:r>
+          </a:p>
+          <a:p>
+            <a:r>
+              <a:rPr lang="zh-CN" smtClean="0"/>
+              <a:t>维度（relocate 每周期 4~10 次接受，交付后改派 −4.09%）。</a:t>
+            </a:r>
+          </a:p>
+          <a:p>
+            <a:r>
+              <a:rPr lang="zh-CN" smtClean="0"/>
+              <a:t/>
+            </a:r>
+          </a:p>
+          <a:p>
+            <a:r>
+              <a:rPr lang="zh-CN" smtClean="0"/>
+              <a:t>【对 P16 表述的保护】不要写「λ 调大即可优化成本」——m 随 λ 联动</a:t>
+            </a:r>
+          </a:p>
+          <a:p>
+            <a:r>
+              <a:rPr lang="zh-CN" smtClean="0"/>
+              <a:t>（λ 的杠杆被自适应追平），且主要阻塞在后处理层早退，与 λ 无关。</a:t>
+            </a:r>
+          </a:p>
+        </p:txBody>
+      </p:sp>
+    </p:spTree>
+  </p:cSld>
+  <p:clrMapOvr>
+    <a:masterClrMapping/>
+  </p:clrMapOvr>
+</p:notes>
+</file>
+
+<file path=ppt/notesSlides/notesSlide8.xml><?xml version="1.0" encoding="utf-8"?>
+<p:notes xmlns:a="http://schemas.openxmlformats.org/drawingml/2006/main" xmlns:p="http://schemas.openxmlformats.org/presentationml/2006/main" xmlns:r="http://schemas.openxmlformats.org/officeDocument/2006/relationships">
+  <p:cSld>
+    <p:spTree>
+      <p:nvGrpSpPr>
+        <p:cNvPr id="1" name=""/>
+        <p:cNvGrpSpPr/>
+        <p:nvPr/>
+      </p:nvGrpSpPr>
+      <p:grpSpPr>
+        <a:xfrm>
+          <a:off x="0" y="0"/>
+          <a:ext cx="0" cy="0"/>
+          <a:chOff x="0" y="0"/>
+          <a:chExt cx="0" cy="0"/>
+        </a:xfrm>
+      </p:grpSpPr>
+      <p:sp>
+        <p:nvSpPr>
+          <p:cNvPr id="2" name="Notes Placeholder 1"/>
+          <p:cNvSpPr>
+            <a:spLocks noGrp="1"/>
+          </p:cNvSpPr>
+          <p:nvPr>
+            <p:ph type="body" sz="quarter" idx="1"/>
+          </p:nvPr>
+        </p:nvSpPr>
+        <p:spPr>
+          <a:xfrm>
+            <a:off x="457200" y="914400"/>
+            <a:ext cx="5943600" cy="7315200"/>
+          </a:xfrm>
+          <a:prstGeom prst="rect">
+            <a:avLst/>
+          </a:prstGeom>
+        </p:spPr>
+        <p:txBody>
+          <a:bodyPr rtlCol="0" anchor="t"/>
+          <a:lstStyle/>
+          <a:p>
+            <a:r>
+              <a:rPr lang="zh-CN" smtClean="0"/>
+              <a:t>改进 DMDE（P17）· 消融计划、证伪记录与待声明项</a:t>
+            </a:r>
+          </a:p>
+          <a:p>
+            <a:r>
+              <a:rPr lang="zh-CN" smtClean="0"/>
+              <a:t/>
+            </a:r>
+          </a:p>
+          <a:p>
+            <a:r>
+              <a:rPr lang="zh-CN" smtClean="0"/>
+              <a:t>【已证伪：解码期顺序重排（reorder_range_optimize，默认 False）】</a:t>
+            </a:r>
+          </a:p>
+          <a:p>
+            <a:r>
+              <a:rPr lang="zh-CN" smtClean="0"/>
+              <a:t>· 假设：把「最近邻重排」加进解码期（每代每体），零迟到时也评估候选。</a:t>
+            </a:r>
+          </a:p>
+          <a:p>
+            <a:r>
+              <a:rPr lang="zh-CN" smtClean="0"/>
+              <a:t>· 冒烟档（pop20/gen20）：F2 航程 −16.7%，看似大胜——但那是搜索不充分</a:t>
+            </a:r>
+          </a:p>
+          <a:p>
+            <a:r>
+              <a:rPr lang="zh-CN" smtClean="0"/>
+              <a:t>  （gen 20）造成的假象。</a:t>
+            </a:r>
+          </a:p>
+          <a:p>
+            <a:r>
+              <a:rPr lang="zh-CN" smtClean="0"/>
+              <a:t>· 正式档（pop50/gen100、λ=1e-1、3 seed）：完成 60/60 不变，总航程</a:t>
+            </a:r>
+          </a:p>
+          <a:p>
+            <a:r>
+              <a:rPr lang="zh-CN" smtClean="0"/>
+              <a:t>  +4.0%、按时率 −2.4pp、正确执行率 −5.3pp；主周期航程 27.04 → 27.03</a:t>
+            </a:r>
+          </a:p>
+          <a:p>
+            <a:r>
+              <a:rPr lang="zh-CN" smtClean="0"/>
+              <a:t>  （持平），总航程恶化全部来自 3 个新增尾巴周期（重排改 ETA 把少量</a:t>
+            </a:r>
+          </a:p>
+          <a:p>
+            <a:r>
+              <a:rPr lang="zh-CN" smtClean="0"/>
+              <a:t>  任务挤出当期）。</a:t>
+            </a:r>
+          </a:p>
+          <a:p>
+            <a:r>
+              <a:rPr lang="zh-CN" smtClean="0"/>
+              <a:t>· 根因：访问顺序本来就是 DE 编码的一部分（cost_vector[K,N) 巡游段被</a:t>
+            </a:r>
+          </a:p>
+          <a:p>
+            <a:r>
+              <a:rPr lang="zh-CN" smtClean="0"/>
+              <a:t>  反映射真实消费，test_tour_order_编码测试锁死）——解码期重排等于用</a:t>
+            </a:r>
+          </a:p>
+          <a:p>
+            <a:r>
+              <a:rPr lang="zh-CN" smtClean="0"/>
+              <a:t>  贪心覆盖搜索结果。与 P17「巡游边匹配：访问顺序真正进入进化搜索</a:t>
+            </a:r>
+          </a:p>
+          <a:p>
+            <a:r>
+              <a:rPr lang="zh-CN" smtClean="0"/>
+              <a:t>  空间」互为印证：顺序交给 DE，解码端不插手。</a:t>
+            </a:r>
+          </a:p>
+          <a:p>
+            <a:r>
+              <a:rPr lang="zh-CN" smtClean="0"/>
+              <a:t>· 保留价值：开关 + 测试保留作消融对照，论文可作负面结果报告。</a:t>
+            </a:r>
+          </a:p>
+          <a:p>
+            <a:r>
+              <a:rPr lang="zh-CN" smtClean="0"/>
+              <a:t/>
+            </a:r>
+          </a:p>
+          <a:p>
+            <a:r>
+              <a:rPr lang="zh-CN" smtClean="0"/>
+              <a:t>【待隔离消融（方法审查 P1 项）】Rule 1 的「确定性最近邻 → 温度退火</a:t>
+            </a:r>
+          </a:p>
+          <a:p>
+            <a:r>
+              <a:rPr lang="zh-CN" smtClean="0"/>
+              <a:t>softmax top-k（1→8）」与「匹配后扰动（swap/insert/reverse，概率 ∝ 温度）」</a:t>
+            </a:r>
+          </a:p>
+          <a:p>
+            <a:r>
+              <a:rPr lang="zh-CN" smtClean="0"/>
+              <a:t>两条改进挂在同一温度上，且与 CR 退火叠加——探索性无法单独归因。</a:t>
+            </a:r>
+          </a:p>
+          <a:p>
+            <a:r>
+              <a:rPr lang="zh-CN" smtClean="0"/>
+              <a:t>计划 exp04 跑 {贪心, 退火} × {无扰动, 有扰动} 2×2 矩阵，加</a:t>
+            </a:r>
+          </a:p>
+          <a:p>
+            <a:r>
+              <a:rPr lang="zh-CN" smtClean="0"/>
+              <a:t>inverse_match 与 perturb 双开关（默认不改）。被问「你的探索性到底来自</a:t>
+            </a:r>
+          </a:p>
+          <a:p>
+            <a:r>
+              <a:rPr lang="zh-CN" smtClean="0"/>
+              <a:t>CR、softmax 还是扰动」时，目前的口径是：三者叠加、未隔离，正在补消融。</a:t>
+            </a:r>
+          </a:p>
+          <a:p>
+            <a:r>
+              <a:rPr lang="zh-CN" smtClean="0"/>
+              <a:t/>
+            </a:r>
+          </a:p>
+          <a:p>
+            <a:r>
+              <a:rPr lang="zh-CN" smtClean="0"/>
+              <a:t>【GMR 存活规则为自定（须在论文声明）】[M17] 只给 GMR = 1 − CR 的触发</a:t>
+            </a:r>
+          </a:p>
+          <a:p>
+            <a:r>
+              <a:rPr lang="zh-CN" smtClean="0"/>
+              <a:t>口径，未规定存活判据；本实现用 GMR 作伯努利触发概率 + 随机「环境压力」</a:t>
+            </a:r>
+          </a:p>
+          <a:p>
+            <a:r>
+              <a:rPr lang="zh-CN" smtClean="0"/>
+              <a:t>阈值 ≤0.3 决定存活 + 最优个体强制保留——这句必须写进论文。</a:t>
+            </a:r>
+          </a:p>
+          <a:p>
+            <a:r>
+              <a:rPr lang="zh-CN" smtClean="0"/>
+              <a:t/>
+            </a:r>
+          </a:p>
+          <a:p>
+            <a:r>
+              <a:rPr lang="zh-CN" smtClean="0"/>
+              <a:t>【算子保真度有测试锁死】CR（ζ=3，首代 1 末代 0）、F = CR 或 (1−CR)/2、</a:t>
+            </a:r>
+          </a:p>
+          <a:p>
+            <a:r>
+              <a:rPr lang="zh-CN" smtClean="0"/>
+              <a:t>rand/1 ⊕ best/2 混合差分、GMR = 1 − CR，四个算子与 [M17] 逐位一致，</a:t>
+            </a:r>
+          </a:p>
+          <a:p>
+            <a:r>
+              <a:rPr lang="zh-CN" smtClean="0"/>
+              <a:t>tests/test_operators_fidelity.py 以抛异常方式锁死（曾出现「只打印不抛」</a:t>
+            </a:r>
+          </a:p>
+          <a:p>
+            <a:r>
+              <a:rPr lang="zh-CN" smtClean="0"/>
+              <a:t>导致 4 个测试空转，已修）。</a:t>
+            </a:r>
+          </a:p>
+          <a:p>
+            <a:r>
+              <a:rPr lang="zh-CN" smtClean="0"/>
+              <a:t/>
+            </a:r>
+          </a:p>
+          <a:p>
+            <a:r>
+              <a:rPr lang="zh-CN" smtClean="0"/>
+              <a:t>【alpha/beta 死参数】DMDEConfig.alpha=2.5 / beta=1.5 在 solve() 内从未</a:t>
+            </a:r>
+          </a:p>
+          <a:p>
+            <a:r>
+              <a:rPr lang="zh-CN" smtClean="0"/>
+              <a:t>被读取，且取值对应 [M17] 的 N≥M 分支（我们恒为 K&lt;N）——论文不得写</a:t>
+            </a:r>
+          </a:p>
+          <a:p>
+            <a:r>
+              <a:rPr lang="zh-CN" smtClean="0"/>
+              <a:t>「沿用其目标函数缩放因子」。</a:t>
+            </a:r>
+          </a:p>
+        </p:txBody>
+      </p:sp>
+    </p:spTree>
+  </p:cSld>
+  <p:clrMapOvr>
+    <a:masterClrMapping/>
+  </p:clrMapOvr>
+</p:notes>
+</file>
+
+<file path=ppt/notesSlides/notesSlide9.xml><?xml version="1.0" encoding="utf-8"?>
+<p:notes xmlns:a="http://schemas.openxmlformats.org/drawingml/2006/main" xmlns:p="http://schemas.openxmlformats.org/presentationml/2006/main" xmlns:r="http://schemas.openxmlformats.org/officeDocument/2006/relationships">
+  <p:cSld>
+    <p:spTree>
+      <p:nvGrpSpPr>
+        <p:cNvPr id="1" name=""/>
+        <p:cNvGrpSpPr/>
+        <p:nvPr/>
+      </p:nvGrpSpPr>
+      <p:grpSpPr>
+        <a:xfrm>
+          <a:off x="0" y="0"/>
+          <a:ext cx="0" cy="0"/>
+          <a:chOff x="0" y="0"/>
+          <a:chExt cx="0" cy="0"/>
+        </a:xfrm>
+      </p:grpSpPr>
+      <p:sp>
+        <p:nvSpPr>
+          <p:cNvPr id="2" name="Notes Placeholder 1"/>
+          <p:cNvSpPr>
+            <a:spLocks noGrp="1"/>
+          </p:cNvSpPr>
+          <p:nvPr>
+            <p:ph type="body" sz="quarter" idx="1"/>
+          </p:nvPr>
+        </p:nvSpPr>
+        <p:spPr>
+          <a:xfrm>
+            <a:off x="457200" y="914400"/>
+            <a:ext cx="5943600" cy="7315200"/>
+          </a:xfrm>
+          <a:prstGeom prst="rect">
+            <a:avLst/>
+          </a:prstGeom>
+        </p:spPr>
+        <p:txBody>
+          <a:bodyPr rtlCol="0" anchor="t"/>
+          <a:lstStyle/>
+          <a:p>
+            <a:r>
+              <a:rPr lang="zh-CN" smtClean="0"/>
+              <a:t>小结（P18）· 汇报收尾口径</a:t>
+            </a:r>
+          </a:p>
+          <a:p>
+            <a:r>
+              <a:rPr lang="zh-CN" smtClean="0"/>
+              <a:t/>
+            </a:r>
+          </a:p>
+          <a:p>
+            <a:r>
+              <a:rPr lang="zh-CN" smtClean="0"/>
+              <a:t>【一句话版本】分层求解：能力标定筛规模、组合优化保质量、滚动闭环不丢任务；</a:t>
+            </a:r>
+          </a:p>
+          <a:p>
+            <a:r>
+              <a:rPr lang="zh-CN" smtClean="0"/>
+              <a:t>交付后成本 polish 把归属维度的成本余量再压一遍（3 seed −4.09%，覆盖不侵蚀）。</a:t>
+            </a:r>
+          </a:p>
+          <a:p>
+            <a:r>
+              <a:rPr lang="zh-CN" smtClean="0"/>
+              <a:t/>
+            </a:r>
+          </a:p>
+          <a:p>
+            <a:r>
+              <a:rPr lang="zh-CN" smtClean="0"/>
+              <a:t>【数字口径（全部为 exp01 冒烟档，λ=1e-1、门禁关、3 seed 42/43/44）】</a:t>
+            </a:r>
+          </a:p>
+          <a:p>
+            <a:r>
+              <a:rPr lang="zh-CN" smtClean="0"/>
+              <a:t>· 基线（全 polish 关，幻影腿修复后）：总航程 1617.197 km、完成 60/60、</a:t>
+            </a:r>
+          </a:p>
+          <a:p>
+            <a:r>
+              <a:rPr lang="zh-CN" smtClean="0"/>
+              <a:t>  on_time 0.9333、path/完成 26950 m。</a:t>
+            </a:r>
+          </a:p>
+          <a:p>
+            <a:r>
+              <a:rPr lang="zh-CN" smtClean="0"/>
+              <a:t>· 生产口径（成本 polish 开）：1551.033 km（−4.09%）、完成 60/60、淘汰 0、</a:t>
+            </a:r>
+          </a:p>
+          <a:p>
+            <a:r>
+              <a:rPr lang="zh-CN" smtClean="0"/>
+              <a:t>  on_time 0.9389、path/完成 25850 m；拒绝数 0。</a:t>
+            </a:r>
+          </a:p>
+          <a:p>
+            <a:r>
+              <a:rPr lang="zh-CN" smtClean="0"/>
+              <a:t>· 均为「有任务航次的航程」口径（闲置机不飞行、不计费）。</a:t>
+            </a:r>
+          </a:p>
+          <a:p>
+            <a:r>
+              <a:rPr lang="zh-CN" smtClean="0"/>
+              <a:t/>
+            </a:r>
+          </a:p>
+          <a:p>
+            <a:r>
+              <a:rPr lang="zh-CN" smtClean="0"/>
+              <a:t>【不说的话】不称「复现 [M17]」（实验协议不同：100 代 vs 1000 代、3 seed</a:t>
+            </a:r>
+          </a:p>
+          <a:p>
+            <a:r>
+              <a:rPr lang="zh-CN" smtClean="0"/>
+              <a:t>vs 10~20 次、无 PMXDE/SortDE/GA 对照）；不与 [L26] 比数字（问题设定不可比）；</a:t>
+            </a:r>
+          </a:p>
+          <a:p>
+            <a:r>
+              <a:rPr lang="zh-CN" smtClean="0"/>
+              <a:t>不主张「优于某方法」（无同协议对照）。</a:t>
+            </a:r>
+          </a:p>
+          <a:p>
+            <a:r>
+              <a:rPr lang="zh-CN" smtClean="0"/>
+              <a:t/>
+            </a:r>
+          </a:p>
+          <a:p>
+            <a:r>
+              <a:rPr lang="zh-CN" smtClean="0"/>
+              <a:t>【待办可见】exp02–exp06 重跑、覆盖门禁默认开启、选择层标定、Rule 1 退火</a:t>
+            </a:r>
+          </a:p>
+          <a:p>
+            <a:r>
+              <a:rPr lang="zh-CN" smtClean="0"/>
+              <a:t>与扰动的 2×2 消融——这些都在 P8「进行中/下一步」里，不藏。</a:t>
+            </a:r>
+          </a:p>
+        </p:txBody>
+      </p:sp>
+    </p:spTree>
+  </p:cSld>
+  <p:clrMapOvr>
+    <a:masterClrMapping/>
+  </p:clrMapOvr>
+</p:notes>
+</file>
+
 <file path=ppt/slideLayouts/slideLayout1.xml><?xml version="1.0" encoding="utf-8"?>
 <p:sldLayout xmlns:a="http://schemas.openxmlformats.org/drawingml/2006/main" xmlns:r="http://schemas.openxmlformats.org/officeDocument/2006/relationships" xmlns:p="http://schemas.openxmlformats.org/presentationml/2006/main">
   <p:cSld name="DEFAULT">
@@ -9668,7 +10825,7 @@
                 <a:latin typeface="Source Han Sans CN"/>
                 <a:ea typeface="Source Han Sans CN"/>
               </a:rPr>
-              <a:t>任务是否执行</a:t>
+              <a:t>任务是否执行 y × 归属 x × 访问顺序 π × 终点机巢 z 联合确定；起点固定、终点可选——多机巢动态滚动 MTSP 变体；交付后再做成本 polish（跨机改派 + 组内重排，只接受严格改进）</a:t>
             </a:r>
             <a:r>
               <a:rPr lang="en-US" sz="1050">
@@ -9678,7 +10835,7 @@
                 <a:latin typeface="Source Han Sans CN"/>
                 <a:ea typeface="Source Han Sans CN"/>
               </a:rPr>
-              <a:t> y × </a:t>
+              <a:t/>
             </a:r>
             <a:r>
               <a:rPr lang="zh-CN" sz="1050">
@@ -9688,7 +10845,7 @@
                 <a:latin typeface="Source Han Sans CN"/>
                 <a:ea typeface="Source Han Sans CN"/>
               </a:rPr>
-              <a:t>归属</a:t>
+              <a:t/>
             </a:r>
             <a:r>
               <a:rPr lang="en-US" sz="1050">
@@ -9698,7 +10855,7 @@
                 <a:latin typeface="Source Han Sans CN"/>
                 <a:ea typeface="Source Han Sans CN"/>
               </a:rPr>
-              <a:t> x × </a:t>
+              <a:t/>
             </a:r>
             <a:r>
               <a:rPr lang="zh-CN" sz="1050">
@@ -9708,7 +10865,7 @@
                 <a:latin typeface="Source Han Sans CN"/>
                 <a:ea typeface="Source Han Sans CN"/>
               </a:rPr>
-              <a:t>访问顺序</a:t>
+              <a:t/>
             </a:r>
             <a:r>
               <a:rPr lang="en-US" sz="1050">
@@ -9718,7 +10875,7 @@
                 <a:latin typeface="Source Han Sans CN"/>
                 <a:ea typeface="Source Han Sans CN"/>
               </a:rPr>
-              <a:t> π × </a:t>
+              <a:t/>
             </a:r>
             <a:r>
               <a:rPr lang="zh-CN" sz="1050">
@@ -9728,7 +10885,7 @@
                 <a:latin typeface="Source Han Sans CN"/>
                 <a:ea typeface="Source Han Sans CN"/>
               </a:rPr>
-              <a:t>终点机巢</a:t>
+              <a:t/>
             </a:r>
             <a:r>
               <a:rPr lang="en-US" sz="1050">
@@ -9738,7 +10895,7 @@
                 <a:latin typeface="Source Han Sans CN"/>
                 <a:ea typeface="Source Han Sans CN"/>
               </a:rPr>
-              <a:t> z </a:t>
+              <a:t/>
             </a:r>
             <a:r>
               <a:rPr lang="zh-CN" sz="1050">
@@ -9748,7 +10905,7 @@
                 <a:latin typeface="Source Han Sans CN"/>
                 <a:ea typeface="Source Han Sans CN"/>
               </a:rPr>
-              <a:t>联合确定；起点固定、终点可选、允许部分空闲——这是多机巢动态滚动的</a:t>
+              <a:t/>
             </a:r>
             <a:r>
               <a:rPr lang="en-US" sz="1050">
@@ -9758,7 +10915,7 @@
                 <a:latin typeface="Source Han Sans CN"/>
                 <a:ea typeface="Source Han Sans CN"/>
               </a:rPr>
-              <a:t> MTSP </a:t>
+              <a:t/>
             </a:r>
             <a:r>
               <a:rPr lang="zh-CN" sz="1050">
@@ -9768,7 +10925,7 @@
                 <a:latin typeface="Source Han Sans CN"/>
                 <a:ea typeface="Source Han Sans CN"/>
               </a:rPr>
-              <a:t>变体。</a:t>
+              <a:t/>
             </a:r>
             <a:endParaRPr/>
           </a:p>
@@ -17191,7 +18348,7 @@
                 <a:latin typeface="Source Han Sans CN"/>
                 <a:ea typeface="Source Han Sans CN"/>
               </a:rPr>
-              <a:t>；</a:t>
+              <a:t/>
             </a:r>
             <a:r>
               <a:rPr lang="zh-CN" sz="1050">
@@ -17882,7 +19039,7 @@
                 <a:latin typeface="Source Han Sans CN"/>
                 <a:ea typeface="Source Han Sans CN"/>
               </a:rPr>
-              <a:t>以离散映射差分进化（DMDE）为基础做结构扩展，支持部分分配、顺序搜索与异巢终止</a:t>
+              <a:t>以离散映射差分进化（DMDE）为基础做结构扩展，支持部分分配、顺序搜索与异巢终止；交付后再做成本 polish，只接受严格改进</a:t>
             </a:r>
             <a:r>
               <a:rPr lang="zh-CN" sz="1425" b="1">
@@ -21237,7 +22394,7 @@
                 <a:latin typeface="Source Han Sans CN"/>
                 <a:ea typeface="Source Han Sans CN"/>
               </a:rPr>
-              <a:t>固定表述：搜索用 f 不含 −m·F1，F1 只作事后指标——「能装必交付」由覆盖门禁承担、非加权近似；W_hard/W_skip 由指标上下界推导，λ/w_late/w_time 为层内偏好参数；big-M 旧式（−m·F1_eff）保留为兼容口径。</a:t>
+              <a:t>固定表述：搜索用 f 不含 −m·F1，F1 只作事后指标；「能装必交付」由覆盖门禁承担；λ/w_late/w_time 为层内偏好参数；big-M 旧式保留为兼容口径。实测 λ=1e-1 下完成项 : 成本项 ≈ 800:1，成本项只在收益等价时裁决——成本余量主要由交付后 polish 获取（3 seed −4.09%）</a:t>
             </a:r>
             <a:r>
               <a:rPr lang="en-US" sz="1050">
@@ -23757,7 +24914,7 @@
                 <a:latin typeface="Source Han Sans CN"/>
                 <a:ea typeface="Source Han Sans CN"/>
               </a:rPr>
-              <a:t>覆盖门禁守完成语义 · 四层准字典序保可行 · DMDE 搜归属与顺序</a:t>
+              <a:t>覆盖门禁守完成语义 · 四层准字典序保可行 · DMDE 搜归属顺序 · polish 压航程</a:t>
             </a:r>
             <a:r>
               <a:rPr lang="en-US" sz="1350">
@@ -36806,7 +37963,7 @@
                 <a:latin typeface="微软雅黑"/>
                 <a:ea typeface="微软雅黑"/>
               </a:rPr>
-              <a:t>问题模型：y / x / π / z 四类决策 + 时间窗 · 航程 · 机巢容量 · 三维地理等约束集</a:t>
+              <a:t>问题模型：y / x / π / z 四类决策 + 时间窗 · 航程 · 机巢容量等约束集</a:t>
             </a:r>
           </a:p>
           <a:p>
@@ -36823,7 +37980,7 @@
                 <a:latin typeface="微软雅黑"/>
                 <a:ea typeface="微软雅黑"/>
               </a:rPr>
-              <a:t>两阶段：动态任务选择缩空间 → 选择性 MUAS 精优化；外层滚动闭环 + 防饥饿</a:t>
+              <a:t>两阶段：任务选择缩空间 → 选择性 MUAS 精优化；外层滚动闭环 + 防饥饿</a:t>
             </a:r>
           </a:p>
           <a:p>
@@ -36840,7 +37997,7 @@
                 <a:latin typeface="微软雅黑"/>
                 <a:ea typeface="微软雅黑"/>
               </a:rPr>
-              <a:t>DMDE 结构扩展：哨兵基因统一编码、逆映射四步、Lamarckian 回写</a:t>
+              <a:t>DMDE 扩展：哨兵基因统一编码、逆映射四步、Lamarckian 回写</a:t>
             </a:r>
           </a:p>
           <a:p>
@@ -36857,7 +38014,24 @@
                 <a:latin typeface="微软雅黑"/>
                 <a:ea typeface="微软雅黑"/>
               </a:rPr>
-              <a:t>场景与代价：ASTER GDEM 三维代价场 + 8 机巢（广域巡检实例化）；基线族已实现</a:t>
+              <a:t>交付后成本 polish：跨机改派 + 组内 2-opt/Or-opt 联合局部搜索，只接受严格改进</a:t>
+            </a:r>
+          </a:p>
+          <a:p>
+            <a:pPr>
+              <a:spcAft>
+                <a:spcPts val="600"/>
+              </a:spcAft>
+            </a:pPr>
+            <a:r>
+              <a:rPr sz="975" b="0">
+                <a:solidFill>
+                  <a:srgbClr val="4A5568"/>
+                </a:solidFill>
+                <a:latin typeface="微软雅黑"/>
+                <a:ea typeface="微软雅黑"/>
+              </a:rPr>
+              <a:t>场景与代价：ASTER GDEM 三维代价场 + 8 机巢（巡检实例化）；基线族已实现</a:t>
             </a:r>
           </a:p>
         </p:txBody>
@@ -37067,7 +38241,7 @@
                 <a:latin typeface="微软雅黑"/>
                 <a:ea typeface="微软雅黑"/>
               </a:rPr>
-              <a:t>六组实验按当前口径重跑</a:t>
+              <a:t>exp01 结案，余下五组重跑</a:t>
             </a:r>
           </a:p>
         </p:txBody>
@@ -37108,7 +38282,24 @@
                 <a:latin typeface="微软雅黑"/>
                 <a:ea typeface="微软雅黑"/>
               </a:rPr>
-              <a:t>六组实验：冒烟 / 规模标定 / 事件滚动 / 消融 / 基线对照 / 联合域</a:t>
+              <a:t>exp01 冒烟档已结案：λ=1e-1 三 seed A/B，成本 polish 全组件定型</a:t>
+            </a:r>
+          </a:p>
+          <a:p>
+            <a:pPr>
+              <a:spcAft>
+                <a:spcPts val="600"/>
+              </a:spcAft>
+            </a:pPr>
+            <a:r>
+              <a:rPr sz="975" b="0">
+                <a:solidFill>
+                  <a:srgbClr val="4A5568"/>
+                </a:solidFill>
+                <a:latin typeface="微软雅黑"/>
+                <a:ea typeface="微软雅黑"/>
+              </a:rPr>
+              <a:t>exp02–exp06：规模标定 / 事件滚动 / 消融 / 基线对照 / 联合域待重跑</a:t>
             </a:r>
           </a:p>
           <a:p>
@@ -37410,7 +38601,7 @@
                 <a:latin typeface="微软雅黑"/>
                 <a:ea typeface="微软雅黑"/>
               </a:rPr>
-              <a:t>第一步：六组实验出数，完成基线对照与机制消融</a:t>
+              <a:t>第一步：exp01 已出数（三 seed 均值口径），余下五组重跑出对照与消融</a:t>
             </a:r>
           </a:p>
           <a:p>

--- a/UAV协同任务分配方法-进展汇报/UAV协同任务分配方法-进展汇报.pptx
+++ b/UAV协同任务分配方法-进展汇报/UAV协同任务分配方法-进展汇报.pptx
@@ -11952,7 +11952,7 @@
                 <a:latin typeface="Source Han Sans CN"/>
                 <a:ea typeface="Source Han Sans CN"/>
               </a:rPr>
-              <a:t>完成出池、未选留池、故障释放、新任务到达；滞留任务带等待补偿 W = 1−e−t/τ 参与下周期排序，不会被静默丢失——池水位全程守恒：arrived = done + unreach + elim + remain（终局核验口径）。</a:t>
+              <a:t>完成出池、未选留池、故障释放、新任务到达；滞留任务带等待补偿 W = 1−e−t/τ 参与下周期排序，不会被静默丢失——池水位全程守恒：arrived = done + unreach_geo + unreach_service + elim + remain（终局核验口径）。</a:t>
             </a:r>
             <a:r>
               <a:rPr lang="en-US" sz="1050">
@@ -13445,7 +13445,7 @@
                 <a:latin typeface="Source Han Sans CN"/>
                 <a:ea typeface="Source Han Sans CN"/>
               </a:rPr>
-              <a:t>③ 完成反馈闸门（完成只认物理约束）</a:t>
+              <a:t>③ 完成反馈闸门（完成只认物理/机队约束）</a:t>
             </a:r>
             <a:r>
               <a:rPr lang="zh-CN" sz="1425" b="1">
@@ -13520,69 +13520,8 @@
                   <a:srgbClr val="0E3F8C"/>
                 </a:solidFill>
                 <a:latin typeface="Source Han Sans CN"/>
-                <a:ea typeface="Source Han Sans CN"/>
-              </a:rPr>
-              <a:t>迟到照常完成 · 物理不可行回池</a:t>
-            </a:r>
-            <a:r>
-              <a:rPr lang="en-US" sz="975" b="1">
-                <a:solidFill>
-                  <a:srgbClr val="0E3F8C"/>
-                </a:solidFill>
-                <a:latin typeface="Source Han Sans CN"/>
-                <a:ea typeface="Source Han Sans CN"/>
-              </a:rPr>
-              <a:t/>
-            </a:r>
-            <a:r>
-              <a:rPr lang="en-US" sz="1500" b="1">
-                <a:solidFill>
-                  <a:srgbClr val="0E3F8C"/>
-                </a:solidFill>
-                <a:latin typeface="Source Han Sans CN"/>
-                <a:ea typeface="Source Han Sans CN"/>
-              </a:rPr>
-              <a:t/>
-            </a:r>
-            <a:r>
-              <a:rPr lang="en-US" sz="975" b="1">
-                <a:solidFill>
-                  <a:srgbClr val="0E3F8C"/>
-                </a:solidFill>
-                <a:latin typeface="Source Han Sans CN"/>
-                <a:ea typeface="Source Han Sans CN"/>
-              </a:rPr>
-              <a:t/>
-            </a:r>
-            <a:r>
-              <a:rPr lang="en-US" sz="1500" b="1">
-                <a:solidFill>
-                  <a:srgbClr val="0E3F8C"/>
-                </a:solidFill>
-                <a:latin typeface="Source Han Sans CN"/>
-                <a:ea typeface="Source Han Sans CN"/>
-              </a:rPr>
-              <a:t/>
-            </a:r>
-            <a:r>
-              <a:rPr lang="en-US" sz="975" b="1">
-                <a:solidFill>
-                  <a:srgbClr val="0E3F8C"/>
-                </a:solidFill>
-                <a:latin typeface="Source Han Sans CN"/>
-                <a:ea typeface="Source Han Sans CN"/>
-              </a:rPr>
-              <a:t/>
-            </a:r>
-            <a:r>
-              <a:rPr lang="en-US" sz="1500" b="1">
-                <a:solidFill>
-                  <a:srgbClr val="0E3F8C"/>
-                </a:solidFill>
-                <a:latin typeface="Source Han Sans CN"/>
-                <a:ea typeface="Source Han Sans CN"/>
-              </a:rPr>
-              <a:t/>
+              </a:rPr>
+              <a:t>迟到照常完成 · 不可达才出池</a:t>
             </a:r>
             <a:endParaRPr/>
           </a:p>
@@ -13622,7 +13561,7 @@
                 <a:latin typeface="Source Han Sans CN"/>
                 <a:ea typeface="Source Han Sans CN"/>
               </a:rPr>
-              <a:t>迟到交付按 L 折价计收益、不计废飞；物理不可行才回池重选，是唯一合法的未完成原因</a:t>
+              <a:t>迟到交付按 L 折价计收益、不计废飞；几何不可行或机队服务不可达才出池，是唯一合法的未完成原因</a:t>
             </a:r>
             <a:r>
               <a:rPr lang="en-US" sz="825">
@@ -13782,7 +13721,7 @@
                 <a:latin typeface="Source Han Sans CN"/>
                 <a:ea typeface="Source Han Sans CN"/>
               </a:rPr>
-              <a:t>执行反馈只按物理可行性裁决——「任务不被完成只有物理约束被违反」；迟到由适应度按 w_late 计价，与航程代价同台竞争。</a:t>
+              <a:t>执行反馈只按可行性裁决——「任务不被完成只因几何不可行或机队服务不可达」；迟到由适应度按 w_late 计价，与航程代价同台竞争。</a:t>
             </a:r>
             <a:r>
               <a:rPr lang="en-US" sz="1050">
@@ -18291,94 +18230,13 @@
               </a:lnSpc>
             </a:pPr>
             <a:r>
-              <a:rPr lang="zh-CN" sz="1050">
+              <a:rPr sz="1050">
                 <a:solidFill>
                   <a:srgbClr val="4A5568"/>
                 </a:solidFill>
                 <a:latin typeface="Source Han Sans CN"/>
-                <a:ea typeface="Source Han Sans CN"/>
-              </a:rPr>
-              <a:t>闸门①</a:t>
-            </a:r>
-            <a:r>
-              <a:rPr lang="en-US" sz="1050">
-                <a:solidFill>
-                  <a:srgbClr val="4A5568"/>
-                </a:solidFill>
-                <a:latin typeface="Source Han Sans CN"/>
-                <a:ea typeface="Source Han Sans CN"/>
-              </a:rPr>
-              <a:t> prefilter</a:t>
-            </a:r>
-            <a:r>
-              <a:rPr lang="zh-CN" sz="1050">
-                <a:solidFill>
-                  <a:srgbClr val="4A5568"/>
-                </a:solidFill>
-                <a:latin typeface="Source Han Sans CN"/>
-                <a:ea typeface="Source Han Sans CN"/>
-              </a:rPr>
-              <a:t>：是否有可用机</a:t>
-            </a:r>
-            <a:r>
-              <a:rPr lang="en-US" sz="1050">
-                <a:solidFill>
-                  <a:srgbClr val="4A5568"/>
-                </a:solidFill>
-                <a:latin typeface="Source Han Sans CN"/>
-                <a:ea typeface="Source Han Sans CN"/>
-              </a:rPr>
-              <a:t> · </a:t>
-            </a:r>
-            <a:r>
-              <a:rPr lang="zh-CN" sz="1050">
-                <a:solidFill>
-                  <a:srgbClr val="4A5568"/>
-                </a:solidFill>
-                <a:latin typeface="Source Han Sans CN"/>
-                <a:ea typeface="Source Han Sans CN"/>
-              </a:rPr>
-              <a:t>往返航程可达（DEM 口径）</a:t>
-            </a:r>
-            <a:r>
-              <a:rPr lang="en-US" sz="1050">
-                <a:solidFill>
-                  <a:srgbClr val="4A5568"/>
-                </a:solidFill>
-                <a:latin typeface="Source Han Sans CN"/>
-                <a:ea typeface="Source Han Sans CN"/>
-              </a:rPr>
-              <a:t/>
-            </a:r>
-            <a:r>
-              <a:rPr lang="zh-CN" sz="1050">
-                <a:solidFill>
-                  <a:srgbClr val="4A5568"/>
-                </a:solidFill>
-                <a:latin typeface="Source Han Sans CN"/>
-                <a:ea typeface="Source Han Sans CN"/>
-              </a:rPr>
-              <a:t>闸门②</a:t>
-            </a:r>
-            <a:r>
-              <a:rPr lang="en-US" sz="1050">
-                <a:solidFill>
-                  <a:srgbClr val="4A5568"/>
-                </a:solidFill>
-                <a:latin typeface="Source Han Sans CN"/>
-                <a:ea typeface="Source Han Sans CN"/>
-              </a:rPr>
-              <a:t> postcheck</a:t>
-            </a:r>
-            <a:r>
-              <a:rPr lang="zh-CN" sz="1050">
-                <a:solidFill>
-                  <a:srgbClr val="4A5568"/>
-                </a:solidFill>
-                <a:latin typeface="Source Han Sans CN"/>
-                <a:ea typeface="Source Han Sans CN"/>
-              </a:rPr>
-              <a:t>：机群剩余航程预算——仅物理不可行才不进候选，否则留池下周期再评；时间窗迟到由适应度折减、非参选资格</a:t>
+              </a:rPr>
+              <a:t>闸门① prefilter：几何可达性——按机巢判定往返航程≤满电航程（DEM 口径），几何可达但连续多周期无可用机判为机队服务不可达；闸门② postcheck：机群剩余航程预算——仅几何/机队不可行才不进候选，否则留池下周期再评；时间窗迟到由适应度折减、非参选资格</a:t>
             </a:r>
             <a:endParaRPr/>
           </a:p>
@@ -37588,9 +37446,8 @@
                   <a:srgbClr val="8B97A8"/>
                 </a:solidFill>
                 <a:latin typeface="微软雅黑"/>
-                <a:ea typeface="微软雅黑"/>
-              </a:rPr>
-              <a:t>方法链已闭环，实验证据正在补齐——按当前事实口径汇报，不做未经验证的宣称</a:t>
+              </a:rPr>
+              <a:t>方法链已闭环，exp01/05/06 已全量重跑定稿——按当前事实口径汇报</a:t>
             </a:r>
           </a:p>
         </p:txBody>
@@ -38031,7 +37888,7 @@
                 <a:latin typeface="微软雅黑"/>
                 <a:ea typeface="微软雅黑"/>
               </a:rPr>
-              <a:t>场景与代价：ASTER GDEM 三维代价场 + 8 机巢（巡检实例化）；基线族已实现</a:t>
+              <a:t>场景与代价：ASTER GDEM 三维代价场 + 8 机巢；实验 exp01/05/06 已全量定稿（λ=1e-1、不可达归因分离、跨实验报告已出）</a:t>
             </a:r>
           </a:p>
         </p:txBody>
@@ -38241,7 +38098,7 @@
                 <a:latin typeface="微软雅黑"/>
                 <a:ea typeface="微软雅黑"/>
               </a:rPr>
-              <a:t>exp01 结案，余下五组重跑</a:t>
+              <a:t>exp02–04 标定/消融待做</a:t>
             </a:r>
           </a:p>
         </p:txBody>
@@ -38280,310 +38137,10 @@
                   <a:srgbClr val="4A5568"/>
                 </a:solidFill>
                 <a:latin typeface="微软雅黑"/>
-                <a:ea typeface="微软雅黑"/>
-              </a:rPr>
-              <a:t>exp01 冒烟档已结案：λ=1e-1 三 seed A/B，成本 polish 全组件定型</a:t>
-            </a:r>
-          </a:p>
-          <a:p>
-            <a:pPr>
-              <a:spcAft>
-                <a:spcPts val="600"/>
-              </a:spcAft>
-            </a:pPr>
-            <a:r>
-              <a:rPr sz="975" b="0">
-                <a:solidFill>
-                  <a:srgbClr val="4A5568"/>
-                </a:solidFill>
-                <a:latin typeface="微软雅黑"/>
-                <a:ea typeface="微软雅黑"/>
-              </a:rPr>
-              <a:t>exp02–exp06：规模标定 / 事件滚动 / 消融 / 基线对照 / 联合域待重跑</a:t>
-            </a:r>
-          </a:p>
-          <a:p>
-            <a:pPr>
-              <a:spcAft>
-                <a:spcPts val="600"/>
-              </a:spcAft>
-            </a:pPr>
-            <a:r>
-              <a:rPr sz="975" b="0">
-                <a:solidFill>
-                  <a:srgbClr val="4A5568"/>
-                </a:solidFill>
-                <a:latin typeface="微软雅黑"/>
-                <a:ea typeface="微软雅黑"/>
-              </a:rPr>
-              <a:t>选择层标定口径（机数名额 ∩ 能力 vs 能力驱动）待按实验结论切换</a:t>
-            </a:r>
-          </a:p>
-          <a:p>
-            <a:pPr>
-              <a:spcAft>
-                <a:spcPts val="600"/>
-              </a:spcAft>
-            </a:pPr>
-            <a:r>
-              <a:rPr sz="975" b="0">
-                <a:solidFill>
-                  <a:srgbClr val="4A5568"/>
-                </a:solidFill>
-                <a:latin typeface="微软雅黑"/>
-                <a:ea typeface="微软雅黑"/>
-              </a:rPr>
-              <a:t>覆盖门禁口径的开关尚未在生产配置中默认开启</a:t>
-            </a:r>
-          </a:p>
-          <a:p>
-            <a:pPr>
-              <a:spcAft>
-                <a:spcPts val="600"/>
-              </a:spcAft>
-            </a:pPr>
-            <a:r>
-              <a:rPr sz="975" b="0">
-                <a:solidFill>
-                  <a:srgbClr val="4A5568"/>
-                </a:solidFill>
-                <a:latin typeface="微软雅黑"/>
-                <a:ea typeface="微软雅黑"/>
-              </a:rPr>
-              <a:t>规模—吞吐—质量的权衡曲线待回填</a:t>
-            </a:r>
-          </a:p>
-        </p:txBody>
-      </p:sp>
-      <p:sp>
-        <p:nvSpPr>
-          <p:cNvPr id="21" name="Rectangle 20"/>
-          <p:cNvSpPr/>
-          <p:nvPr/>
-        </p:nvSpPr>
-        <p:spPr>
-          <a:xfrm>
-            <a:off x="8067675" y="1200150"/>
-            <a:ext cx="3552825" cy="3200400"/>
-          </a:xfrm>
-          <a:prstGeom prst="rect">
-            <a:avLst/>
-          </a:prstGeom>
-          <a:solidFill>
-            <a:srgbClr val="FFFFFF"/>
-          </a:solidFill>
-          <a:ln w="12700">
-            <a:solidFill>
-              <a:srgbClr val="D6DCE5"/>
-            </a:solidFill>
-          </a:ln>
-          <a:effectLst/>
-        </p:spPr>
-        <p:style>
-          <a:lnRef idx="1">
-            <a:schemeClr val="accent1"/>
-          </a:lnRef>
-          <a:fillRef idx="3">
-            <a:schemeClr val="accent1"/>
-          </a:fillRef>
-          <a:effectRef idx="2">
-            <a:schemeClr val="accent1"/>
-          </a:effectRef>
-          <a:fontRef idx="minor">
-            <a:schemeClr val="lt1"/>
-          </a:fontRef>
-        </p:style>
-        <p:txBody>
-          <a:bodyPr rtlCol="0" anchor="ctr"/>
-          <a:lstStyle/>
-          <a:p>
-            <a:pPr algn="ctr"/>
-          </a:p>
-        </p:txBody>
-      </p:sp>
-      <p:sp>
-        <p:nvSpPr>
-          <p:cNvPr id="22" name="Rectangle 21"/>
-          <p:cNvSpPr/>
-          <p:nvPr/>
-        </p:nvSpPr>
-        <p:spPr>
-          <a:xfrm>
-            <a:off x="8067675" y="1200150"/>
-            <a:ext cx="3552825" cy="47625"/>
-          </a:xfrm>
-          <a:prstGeom prst="rect">
-            <a:avLst/>
-          </a:prstGeom>
-          <a:solidFill>
-            <a:srgbClr val="8B97A8"/>
-          </a:solidFill>
-          <a:ln>
-            <a:noFill/>
-          </a:ln>
-          <a:effectLst/>
-        </p:spPr>
-        <p:style>
-          <a:lnRef idx="1">
-            <a:schemeClr val="accent1"/>
-          </a:lnRef>
-          <a:fillRef idx="3">
-            <a:schemeClr val="accent1"/>
-          </a:fillRef>
-          <a:effectRef idx="2">
-            <a:schemeClr val="accent1"/>
-          </a:effectRef>
-          <a:fontRef idx="minor">
-            <a:schemeClr val="lt1"/>
-          </a:fontRef>
-        </p:style>
-        <p:txBody>
-          <a:bodyPr rtlCol="0" anchor="ctr"/>
-          <a:lstStyle/>
-          <a:p>
-            <a:pPr algn="ctr"/>
-          </a:p>
-        </p:txBody>
-      </p:sp>
-      <p:sp>
-        <p:nvSpPr>
-          <p:cNvPr id="23" name="Rectangle 22"/>
-          <p:cNvSpPr/>
-          <p:nvPr/>
-        </p:nvSpPr>
-        <p:spPr>
-          <a:xfrm>
-            <a:off x="8239125" y="1371600"/>
-            <a:ext cx="914400" cy="247650"/>
-          </a:xfrm>
-          <a:prstGeom prst="rect">
-            <a:avLst/>
-          </a:prstGeom>
-          <a:solidFill>
-            <a:srgbClr val="E8EFF8"/>
-          </a:solidFill>
-          <a:ln>
-            <a:noFill/>
-          </a:ln>
-          <a:effectLst/>
-        </p:spPr>
-        <p:style>
-          <a:lnRef idx="1">
-            <a:schemeClr val="accent1"/>
-          </a:lnRef>
-          <a:fillRef idx="3">
-            <a:schemeClr val="accent1"/>
-          </a:fillRef>
-          <a:effectRef idx="2">
-            <a:schemeClr val="accent1"/>
-          </a:effectRef>
-          <a:fontRef idx="minor">
-            <a:schemeClr val="lt1"/>
-          </a:fontRef>
-        </p:style>
-        <p:txBody>
-          <a:bodyPr rtlCol="0" anchor="ctr"/>
-          <a:lstStyle/>
-          <a:p>
-            <a:pPr algn="ctr"/>
-          </a:p>
-        </p:txBody>
-      </p:sp>
-      <p:sp>
-        <p:nvSpPr>
-          <p:cNvPr id="24" name="TextBox 23"/>
-          <p:cNvSpPr txBox="1"/>
-          <p:nvPr/>
-        </p:nvSpPr>
-        <p:spPr>
-          <a:xfrm>
-            <a:off x="8239125" y="1409700"/>
-            <a:ext cx="914400" cy="209550"/>
-          </a:xfrm>
-          <a:prstGeom prst="rect">
-            <a:avLst/>
-          </a:prstGeom>
-          <a:noFill/>
-        </p:spPr>
-        <p:txBody>
-          <a:bodyPr wrap="square" lIns="0" rIns="0" tIns="0" bIns="0"/>
-          <a:lstStyle/>
-          <a:p>
-            <a:pPr algn="ctr">
-              <a:lnSpc>
-                <a:spcPct val="100000"/>
-              </a:lnSpc>
-            </a:pPr>
-            <a:r>
-              <a:rPr sz="900" b="1">
-                <a:solidFill>
-                  <a:srgbClr val="1E4FA8"/>
-                </a:solidFill>
-                <a:latin typeface="微软雅黑"/>
-                <a:ea typeface="微软雅黑"/>
-              </a:rPr>
-              <a:t>下一步</a:t>
-            </a:r>
-          </a:p>
-        </p:txBody>
-      </p:sp>
-      <p:sp>
-        <p:nvSpPr>
-          <p:cNvPr id="25" name="TextBox 24"/>
-          <p:cNvSpPr txBox="1"/>
-          <p:nvPr/>
-        </p:nvSpPr>
-        <p:spPr>
-          <a:xfrm>
-            <a:off x="8239125" y="1733550"/>
-            <a:ext cx="3209925" cy="285750"/>
-          </a:xfrm>
-          <a:prstGeom prst="rect">
-            <a:avLst/>
-          </a:prstGeom>
-          <a:noFill/>
-        </p:spPr>
-        <p:txBody>
-          <a:bodyPr wrap="square" lIns="0" rIns="0" tIns="0" bIns="0"/>
-          <a:lstStyle/>
-          <a:p>
-            <a:pPr>
-              <a:lnSpc>
-                <a:spcPct val="100000"/>
-              </a:lnSpc>
-            </a:pPr>
-            <a:r>
-              <a:rPr sz="1350" b="1">
-                <a:solidFill>
-                  <a:srgbClr val="0E3F8C"/>
-                </a:solidFill>
-                <a:latin typeface="微软雅黑"/>
-                <a:ea typeface="微软雅黑"/>
-              </a:rPr>
-              <a:t>出数 → 固化 → 外扩 → 成文</a:t>
-            </a:r>
-          </a:p>
-        </p:txBody>
-      </p:sp>
-      <p:sp>
-        <p:nvSpPr>
-          <p:cNvPr id="26" name="TextBox 25"/>
-          <p:cNvSpPr txBox="1"/>
-          <p:nvPr/>
-        </p:nvSpPr>
-        <p:spPr>
-          <a:xfrm>
-            <a:off x="8239125" y="2114550"/>
-            <a:ext cx="3209925" cy="2076450"/>
-          </a:xfrm>
-          <a:prstGeom prst="rect">
-            <a:avLst/>
-          </a:prstGeom>
-          <a:noFill/>
-        </p:spPr>
-        <p:txBody>
-          <a:bodyPr wrap="square" lIns="0" rIns="0" tIns="0" bIns="0"/>
-          <a:lstStyle/>
+              </a:rPr>
+              <a:t>exp01/05/06 已定稿：λ=1e-1、不可达归因分离（几何 vs 机队服务）、6 臂基线对照 + 联合域 5 格</a:t>
+            </a:r>
+          </a:p>
           <a:p>
             <a:pPr>
               <a:lnSpc>
@@ -38599,13 +38156,15 @@
                   <a:srgbClr val="4A5568"/>
                 </a:solidFill>
                 <a:latin typeface="微软雅黑"/>
-                <a:ea typeface="微软雅黑"/>
-              </a:rPr>
-              <a:t>第一步：exp01 已出数（三 seed 均值口径），余下五组重跑出对照与消融</a:t>
+              </a:rPr>
+              <a:t>exp02 规模标定 / exp03 事件滚动 / exp04 消融：待重跑出规模—吞吐—质量权衡曲线</a:t>
             </a:r>
           </a:p>
           <a:p>
             <a:pPr>
+              <a:lnSpc>
+                <a:spcPct val="150000"/>
+              </a:lnSpc>
               <a:spcAft>
                 <a:spcPts val="600"/>
               </a:spcAft>
@@ -38616,13 +38175,15 @@
                   <a:srgbClr val="4A5568"/>
                 </a:solidFill>
                 <a:latin typeface="微软雅黑"/>
-                <a:ea typeface="微软雅黑"/>
-              </a:rPr>
-              <a:t>第二步：固化生产口径（门禁开启 + 选择层标定）</a:t>
+              </a:rPr>
+              <a:t>选择层标定口径（机数名额 ∩ 能力 vs 能力驱动）待 exp03/04 结论切换</a:t>
             </a:r>
           </a:p>
           <a:p>
             <a:pPr>
+              <a:lnSpc>
+                <a:spcPct val="150000"/>
+              </a:lnSpc>
               <a:spcAft>
                 <a:spcPts val="600"/>
               </a:spcAft>
@@ -38633,13 +38194,15 @@
                   <a:srgbClr val="4A5568"/>
                 </a:solidFill>
                 <a:latin typeface="微软雅黑"/>
-                <a:ea typeface="微软雅黑"/>
-              </a:rPr>
-              <a:t>第三步：把实例化迁到应急派送 / 态势感知，检验口径可迁移性</a:t>
+              </a:rPr>
+              <a:t>覆盖门禁开关尚未在生产配置默认开启（实验 config 显式启用）</a:t>
             </a:r>
           </a:p>
           <a:p>
             <a:pPr>
+              <a:lnSpc>
+                <a:spcPct val="150000"/>
+              </a:lnSpc>
               <a:spcAft>
                 <a:spcPts val="600"/>
               </a:spcAft>
@@ -38650,32 +38213,33 @@
                   <a:srgbClr val="4A5568"/>
                 </a:solidFill>
                 <a:latin typeface="微软雅黑"/>
-                <a:ea typeface="微软雅黑"/>
-              </a:rPr>
-              <a:t>在此之前，不主张「优于某方法」的结论</a:t>
-            </a:r>
-          </a:p>
-        </p:txBody>
-      </p:sp>
-      <p:sp>
-        <p:nvSpPr>
-          <p:cNvPr id="27" name="Rectangle 26"/>
+              </a:rPr>
+              <a:t>规模—吞吐—质量权衡曲线随 exp02 标定回填</a:t>
+            </a:r>
+          </a:p>
+        </p:txBody>
+      </p:sp>
+      <p:sp>
+        <p:nvSpPr>
+          <p:cNvPr id="21" name="Rectangle 20"/>
           <p:cNvSpPr/>
           <p:nvPr/>
         </p:nvSpPr>
         <p:spPr>
           <a:xfrm>
-            <a:off x="571500" y="4705350"/>
-            <a:ext cx="11049000" cy="1447800"/>
-          </a:xfrm>
-          <a:prstGeom prst="rect">
-            <a:avLst/>
-          </a:prstGeom>
-          <a:solidFill>
-            <a:srgbClr val="0E3F8C"/>
-          </a:solidFill>
-          <a:ln>
-            <a:noFill/>
+            <a:off x="8067675" y="1200150"/>
+            <a:ext cx="3552825" cy="3200400"/>
+          </a:xfrm>
+          <a:prstGeom prst="rect">
+            <a:avLst/>
+          </a:prstGeom>
+          <a:solidFill>
+            <a:srgbClr val="FFFFFF"/>
+          </a:solidFill>
+          <a:ln w="12700">
+            <a:solidFill>
+              <a:srgbClr val="D6DCE5"/>
+            </a:solidFill>
           </a:ln>
           <a:effectLst/>
         </p:spPr>
@@ -38703,14 +38267,140 @@
       </p:sp>
       <p:sp>
         <p:nvSpPr>
-          <p:cNvPr id="28" name="TextBox 27"/>
+          <p:cNvPr id="22" name="Rectangle 21"/>
+          <p:cNvSpPr/>
+          <p:nvPr/>
+        </p:nvSpPr>
+        <p:spPr>
+          <a:xfrm>
+            <a:off x="8067675" y="1200150"/>
+            <a:ext cx="3552825" cy="47625"/>
+          </a:xfrm>
+          <a:prstGeom prst="rect">
+            <a:avLst/>
+          </a:prstGeom>
+          <a:solidFill>
+            <a:srgbClr val="8B97A8"/>
+          </a:solidFill>
+          <a:ln>
+            <a:noFill/>
+          </a:ln>
+          <a:effectLst/>
+        </p:spPr>
+        <p:style>
+          <a:lnRef idx="1">
+            <a:schemeClr val="accent1"/>
+          </a:lnRef>
+          <a:fillRef idx="3">
+            <a:schemeClr val="accent1"/>
+          </a:fillRef>
+          <a:effectRef idx="2">
+            <a:schemeClr val="accent1"/>
+          </a:effectRef>
+          <a:fontRef idx="minor">
+            <a:schemeClr val="lt1"/>
+          </a:fontRef>
+        </p:style>
+        <p:txBody>
+          <a:bodyPr rtlCol="0" anchor="ctr"/>
+          <a:lstStyle/>
+          <a:p>
+            <a:pPr algn="ctr"/>
+          </a:p>
+        </p:txBody>
+      </p:sp>
+      <p:sp>
+        <p:nvSpPr>
+          <p:cNvPr id="23" name="Rectangle 22"/>
+          <p:cNvSpPr/>
+          <p:nvPr/>
+        </p:nvSpPr>
+        <p:spPr>
+          <a:xfrm>
+            <a:off x="8239125" y="1371600"/>
+            <a:ext cx="914400" cy="247650"/>
+          </a:xfrm>
+          <a:prstGeom prst="rect">
+            <a:avLst/>
+          </a:prstGeom>
+          <a:solidFill>
+            <a:srgbClr val="E8EFF8"/>
+          </a:solidFill>
+          <a:ln>
+            <a:noFill/>
+          </a:ln>
+          <a:effectLst/>
+        </p:spPr>
+        <p:style>
+          <a:lnRef idx="1">
+            <a:schemeClr val="accent1"/>
+          </a:lnRef>
+          <a:fillRef idx="3">
+            <a:schemeClr val="accent1"/>
+          </a:fillRef>
+          <a:effectRef idx="2">
+            <a:schemeClr val="accent1"/>
+          </a:effectRef>
+          <a:fontRef idx="minor">
+            <a:schemeClr val="lt1"/>
+          </a:fontRef>
+        </p:style>
+        <p:txBody>
+          <a:bodyPr rtlCol="0" anchor="ctr"/>
+          <a:lstStyle/>
+          <a:p>
+            <a:pPr algn="ctr"/>
+          </a:p>
+        </p:txBody>
+      </p:sp>
+      <p:sp>
+        <p:nvSpPr>
+          <p:cNvPr id="24" name="TextBox 23"/>
           <p:cNvSpPr txBox="1"/>
           <p:nvPr/>
         </p:nvSpPr>
         <p:spPr>
           <a:xfrm>
-            <a:off x="838200" y="4914900"/>
-            <a:ext cx="10515600" cy="1028700"/>
+            <a:off x="8239125" y="1409700"/>
+            <a:ext cx="914400" cy="209550"/>
+          </a:xfrm>
+          <a:prstGeom prst="rect">
+            <a:avLst/>
+          </a:prstGeom>
+          <a:noFill/>
+        </p:spPr>
+        <p:txBody>
+          <a:bodyPr wrap="square" lIns="0" rIns="0" tIns="0" bIns="0"/>
+          <a:lstStyle/>
+          <a:p>
+            <a:pPr algn="ctr">
+              <a:lnSpc>
+                <a:spcPct val="100000"/>
+              </a:lnSpc>
+            </a:pPr>
+            <a:r>
+              <a:rPr sz="900" b="1">
+                <a:solidFill>
+                  <a:srgbClr val="1E4FA8"/>
+                </a:solidFill>
+                <a:latin typeface="微软雅黑"/>
+                <a:ea typeface="微软雅黑"/>
+              </a:rPr>
+              <a:t>下一步</a:t>
+            </a:r>
+          </a:p>
+        </p:txBody>
+      </p:sp>
+      <p:sp>
+        <p:nvSpPr>
+          <p:cNvPr id="25" name="TextBox 24"/>
+          <p:cNvSpPr txBox="1"/>
+          <p:nvPr/>
+        </p:nvSpPr>
+        <p:spPr>
+          <a:xfrm>
+            <a:off x="8239125" y="1733550"/>
+            <a:ext cx="3209925" cy="285750"/>
           </a:xfrm>
           <a:prstGeom prst="rect">
             <a:avLst/>
@@ -38727,14 +38417,171 @@
               </a:lnSpc>
             </a:pPr>
             <a:r>
-              <a:rPr sz="1200" b="0">
-                <a:solidFill>
-                  <a:srgbClr val="FFFFFF"/>
+              <a:rPr sz="1350" b="1">
+                <a:solidFill>
+                  <a:srgbClr val="0E3F8C"/>
                 </a:solidFill>
                 <a:latin typeface="微软雅黑"/>
                 <a:ea typeface="微软雅黑"/>
               </a:rPr>
-              <a:t>诚实口径：方法可以讲、公式可以讲、机制可以讲；「跑得多快、比谁更好」目前没有数据支撑，本轮汇报不给出任何对比结论，且全部结论限于广域巡检实例化场景。</a:t>
+              <a:t>出数 → 固化 → 外扩 → 成文</a:t>
+            </a:r>
+          </a:p>
+        </p:txBody>
+      </p:sp>
+      <p:sp>
+        <p:nvSpPr>
+          <p:cNvPr id="26" name="TextBox 25"/>
+          <p:cNvSpPr txBox="1"/>
+          <p:nvPr/>
+        </p:nvSpPr>
+        <p:spPr>
+          <a:xfrm>
+            <a:off x="8239125" y="2114550"/>
+            <a:ext cx="3209925" cy="2076450"/>
+          </a:xfrm>
+          <a:prstGeom prst="rect">
+            <a:avLst/>
+          </a:prstGeom>
+          <a:noFill/>
+        </p:spPr>
+        <p:txBody>
+          <a:bodyPr wrap="square" lIns="0" rIns="0" tIns="0" bIns="0"/>
+          <a:lstStyle/>
+          <a:p>
+            <a:pPr>
+              <a:lnSpc>
+                <a:spcPct val="150000"/>
+              </a:lnSpc>
+              <a:spcAft>
+                <a:spcPts val="600"/>
+              </a:spcAft>
+            </a:pPr>
+            <a:r>
+              <a:rPr sz="975" b="0">
+                <a:solidFill>
+                  <a:srgbClr val="4A5568"/>
+                </a:solidFill>
+                <a:latin typeface="微软雅黑"/>
+              </a:rPr>
+              <a:t>第一步：exp02–04 出数后固化生产口径（门禁默认开启 + 选择层标定）</a:t>
+            </a:r>
+          </a:p>
+          <a:p>
+            <a:pPr>
+              <a:lnSpc>
+                <a:spcPct val="150000"/>
+              </a:lnSpc>
+              <a:spcAft>
+                <a:spcPts val="600"/>
+              </a:spcAft>
+            </a:pPr>
+            <a:r>
+              <a:rPr sz="975" b="0">
+                <a:solidFill>
+                  <a:srgbClr val="4A5568"/>
+                </a:solidFill>
+                <a:latin typeface="微软雅黑"/>
+              </a:rPr>
+              <a:t>第二步：把实例化迁到应急派送 / 态势感知，检验口径可迁移性</a:t>
+            </a:r>
+          </a:p>
+          <a:p>
+            <a:pPr>
+              <a:lnSpc>
+                <a:spcPct val="150000"/>
+              </a:lnSpc>
+            </a:pPr>
+            <a:r>
+              <a:rPr sz="975" b="0">
+                <a:solidFill>
+                  <a:srgbClr val="4A5568"/>
+                </a:solidFill>
+                <a:latin typeface="微软雅黑"/>
+              </a:rPr>
+              <a:t>对比结论按统一口径可比：完成率对软窗臂恒为不变量（1.000），区分度由按时率 / 航程 / 奖励产出承担，不依赖单一完成率指标做优劣宣称</a:t>
+            </a:r>
+          </a:p>
+        </p:txBody>
+      </p:sp>
+      <p:sp>
+        <p:nvSpPr>
+          <p:cNvPr id="27" name="Rectangle 26"/>
+          <p:cNvSpPr/>
+          <p:nvPr/>
+        </p:nvSpPr>
+        <p:spPr>
+          <a:xfrm>
+            <a:off x="571500" y="4705350"/>
+            <a:ext cx="11049000" cy="1447800"/>
+          </a:xfrm>
+          <a:prstGeom prst="rect">
+            <a:avLst/>
+          </a:prstGeom>
+          <a:solidFill>
+            <a:srgbClr val="0E3F8C"/>
+          </a:solidFill>
+          <a:ln>
+            <a:noFill/>
+          </a:ln>
+          <a:effectLst/>
+        </p:spPr>
+        <p:style>
+          <a:lnRef idx="1">
+            <a:schemeClr val="accent1"/>
+          </a:lnRef>
+          <a:fillRef idx="3">
+            <a:schemeClr val="accent1"/>
+          </a:fillRef>
+          <a:effectRef idx="2">
+            <a:schemeClr val="accent1"/>
+          </a:effectRef>
+          <a:fontRef idx="minor">
+            <a:schemeClr val="lt1"/>
+          </a:fontRef>
+        </p:style>
+        <p:txBody>
+          <a:bodyPr rtlCol="0" anchor="ctr"/>
+          <a:lstStyle/>
+          <a:p>
+            <a:pPr algn="ctr"/>
+          </a:p>
+        </p:txBody>
+      </p:sp>
+      <p:sp>
+        <p:nvSpPr>
+          <p:cNvPr id="28" name="TextBox 27"/>
+          <p:cNvSpPr txBox="1"/>
+          <p:nvPr/>
+        </p:nvSpPr>
+        <p:spPr>
+          <a:xfrm>
+            <a:off x="838200" y="4914900"/>
+            <a:ext cx="10515600" cy="1028700"/>
+          </a:xfrm>
+          <a:prstGeom prst="rect">
+            <a:avLst/>
+          </a:prstGeom>
+          <a:noFill/>
+        </p:spPr>
+        <p:txBody>
+          <a:bodyPr wrap="square" lIns="0" rIns="0" tIns="0" bIns="0"/>
+          <a:lstStyle/>
+          <a:p>
+            <a:pPr>
+              <a:lnSpc>
+                <a:spcPct val="100000"/>
+              </a:lnSpc>
+            </a:pPr>
+            <a:r>
+              <a:rPr sz="1200" b="0">
+                <a:solidFill>
+                  <a:srgbClr val="FFFFFF"/>
+                </a:solidFill>
+                <a:latin typeface="微软雅黑"/>
+                <a:ea typeface="微软雅黑"/>
+              </a:rPr>
+              <a:t>诚实口径：方法可以讲、公式可以讲、机制可以讲；已建立可复算对照实验（6 臂基线 + 联合域 5 格），按统一口径（完成率 + 按时率 + 航程 + 奖励产出）可比；全部结论限于广域巡检实例化场景。</a:t>
             </a:r>
           </a:p>
         </p:txBody>
